--- a/docs/submission/RASTA_AI_SIH26002_TEAM17_FINAL.pptx
+++ b/docs/submission/RASTA_AI_SIH26002_TEAM17_FINAL.pptx
@@ -4768,7 +4768,7 @@
         <p:spPr>
           <a:xfrm>
             <a:off x="331286" y="-526757"/>
-            <a:ext cx="10363200" cy="2076450"/>
+            <a:ext cx="9281160" cy="2076450"/>
           </a:xfrm>
         </p:spPr>
         <p:txBody>
@@ -4776,7 +4776,7 @@
           <a:lstStyle/>
           <a:p>
             <a:r>
-              <a:rPr lang="en-US" sz="4000" b="1" dirty="0">
+              <a:rPr lang="en-US" sz="3400" b="1" dirty="0">
                 <a:solidFill>
                   <a:schemeClr val="tx2"/>
                 </a:solidFill>
@@ -4785,7 +4785,7 @@
               <a:t>SMART INDIA HACKATHON </a:t>
             </a:r>
             <a:r>
-              <a:rPr lang="en-US" sz="4000" b="1" dirty="0" smtClean="0">
+              <a:rPr lang="en-US" sz="3400" b="1" dirty="0" smtClean="0">
                 <a:solidFill>
                   <a:schemeClr val="tx2"/>
                 </a:solidFill>
@@ -4793,7 +4793,7 @@
               </a:rPr>
               <a:t>2026</a:t>
             </a:r>
-            <a:endParaRPr lang="en-IN" sz="4000" b="1" dirty="0">
+            <a:endParaRPr lang="en-IN" sz="3400" b="1" dirty="0">
               <a:solidFill>
                 <a:schemeClr val="tx2"/>
               </a:solidFill>
@@ -5064,8 +5064,8 @@
         </p:nvSpPr>
         <p:spPr>
           <a:xfrm>
-            <a:off x="502920" y="3364992"/>
-            <a:ext cx="2011680" cy="301752"/>
+            <a:off x="502920" y="3200400"/>
+            <a:ext cx="2011680" cy="274320"/>
           </a:xfrm>
           <a:prstGeom prst="rect">
             <a:avLst/>
@@ -5106,8 +5106,8 @@
         </p:nvSpPr>
         <p:spPr>
           <a:xfrm>
-            <a:off x="2514600" y="3337560"/>
-            <a:ext cx="4023360" cy="301752"/>
+            <a:off x="2514600" y="3172968"/>
+            <a:ext cx="4023360" cy="274320"/>
           </a:xfrm>
           <a:prstGeom prst="rect">
             <a:avLst/>
@@ -5148,7 +5148,7 @@
         </p:nvCxnSpPr>
         <p:spPr>
           <a:xfrm>
-            <a:off x="502920" y="3685031"/>
+            <a:off x="502920" y="3493008"/>
             <a:ext cx="6035039" cy="0"/>
           </a:xfrm>
           <a:prstGeom prst="line">
@@ -5183,8 +5183,8 @@
         </p:nvSpPr>
         <p:spPr>
           <a:xfrm>
-            <a:off x="502920" y="3739896"/>
-            <a:ext cx="2011680" cy="530352"/>
+            <a:off x="502920" y="3538728"/>
+            <a:ext cx="2011680" cy="493776"/>
           </a:xfrm>
           <a:prstGeom prst="rect">
             <a:avLst/>
@@ -5225,8 +5225,8 @@
         </p:nvSpPr>
         <p:spPr>
           <a:xfrm>
-            <a:off x="2514600" y="3712463"/>
-            <a:ext cx="4023360" cy="530352"/>
+            <a:off x="2514600" y="3511296"/>
+            <a:ext cx="4023360" cy="493776"/>
           </a:xfrm>
           <a:prstGeom prst="rect">
             <a:avLst/>
@@ -5267,7 +5267,7 @@
         </p:nvCxnSpPr>
         <p:spPr>
           <a:xfrm>
-            <a:off x="502920" y="4288536"/>
+            <a:off x="502920" y="4050791"/>
             <a:ext cx="6035039" cy="0"/>
           </a:xfrm>
           <a:prstGeom prst="line">
@@ -5302,8 +5302,8 @@
         </p:nvSpPr>
         <p:spPr>
           <a:xfrm>
-            <a:off x="502920" y="4343400"/>
-            <a:ext cx="2011680" cy="301752"/>
+            <a:off x="502920" y="4096512"/>
+            <a:ext cx="2011680" cy="274320"/>
           </a:xfrm>
           <a:prstGeom prst="rect">
             <a:avLst/>
@@ -5344,8 +5344,8 @@
         </p:nvSpPr>
         <p:spPr>
           <a:xfrm>
-            <a:off x="2514600" y="4315968"/>
-            <a:ext cx="4023360" cy="301752"/>
+            <a:off x="2514600" y="4069080"/>
+            <a:ext cx="4023360" cy="274320"/>
           </a:xfrm>
           <a:prstGeom prst="rect">
             <a:avLst/>
@@ -5386,7 +5386,7 @@
         </p:nvCxnSpPr>
         <p:spPr>
           <a:xfrm>
-            <a:off x="502920" y="4663440"/>
+            <a:off x="502920" y="4389120"/>
             <a:ext cx="6035039" cy="0"/>
           </a:xfrm>
           <a:prstGeom prst="line">
@@ -5421,8 +5421,8 @@
         </p:nvSpPr>
         <p:spPr>
           <a:xfrm>
-            <a:off x="502920" y="4718304"/>
-            <a:ext cx="2011680" cy="301752"/>
+            <a:off x="502920" y="4434840"/>
+            <a:ext cx="2011680" cy="274320"/>
           </a:xfrm>
           <a:prstGeom prst="rect">
             <a:avLst/>
@@ -5463,8 +5463,8 @@
         </p:nvSpPr>
         <p:spPr>
           <a:xfrm>
-            <a:off x="2514600" y="4690872"/>
-            <a:ext cx="4023360" cy="301752"/>
+            <a:off x="2514600" y="4407408"/>
+            <a:ext cx="4023360" cy="274320"/>
           </a:xfrm>
           <a:prstGeom prst="rect">
             <a:avLst/>
@@ -5505,7 +5505,7 @@
         </p:nvCxnSpPr>
         <p:spPr>
           <a:xfrm>
-            <a:off x="502920" y="5038344"/>
+            <a:off x="502920" y="4727448"/>
             <a:ext cx="6035039" cy="0"/>
           </a:xfrm>
           <a:prstGeom prst="line">
@@ -5540,8 +5540,8 @@
         </p:nvSpPr>
         <p:spPr>
           <a:xfrm>
-            <a:off x="502920" y="5093208"/>
-            <a:ext cx="2011680" cy="301752"/>
+            <a:off x="502920" y="4773168"/>
+            <a:ext cx="2011680" cy="274320"/>
           </a:xfrm>
           <a:prstGeom prst="rect">
             <a:avLst/>
@@ -5582,8 +5582,8 @@
         </p:nvSpPr>
         <p:spPr>
           <a:xfrm>
-            <a:off x="2514600" y="5065776"/>
-            <a:ext cx="4023360" cy="301752"/>
+            <a:off x="2514600" y="4745736"/>
+            <a:ext cx="4023360" cy="274320"/>
           </a:xfrm>
           <a:prstGeom prst="rect">
             <a:avLst/>
@@ -5624,7 +5624,7 @@
         </p:nvCxnSpPr>
         <p:spPr>
           <a:xfrm>
-            <a:off x="502920" y="5413248"/>
+            <a:off x="502920" y="5065776"/>
             <a:ext cx="6035039" cy="0"/>
           </a:xfrm>
           <a:prstGeom prst="line">
@@ -5659,8 +5659,8 @@
         </p:nvSpPr>
         <p:spPr>
           <a:xfrm>
-            <a:off x="502920" y="5468112"/>
-            <a:ext cx="2011680" cy="301752"/>
+            <a:off x="502920" y="5111496"/>
+            <a:ext cx="2011680" cy="274320"/>
           </a:xfrm>
           <a:prstGeom prst="rect">
             <a:avLst/>
@@ -5701,8 +5701,8 @@
         </p:nvSpPr>
         <p:spPr>
           <a:xfrm>
-            <a:off x="2514600" y="5440680"/>
-            <a:ext cx="4023360" cy="301752"/>
+            <a:off x="2514600" y="5084064"/>
+            <a:ext cx="4023360" cy="274320"/>
           </a:xfrm>
           <a:prstGeom prst="rect">
             <a:avLst/>
@@ -5743,7 +5743,7 @@
         </p:nvCxnSpPr>
         <p:spPr>
           <a:xfrm>
-            <a:off x="502920" y="5788152"/>
+            <a:off x="502920" y="5404104"/>
             <a:ext cx="6035039" cy="0"/>
           </a:xfrm>
           <a:prstGeom prst="line">
@@ -5772,13 +5772,139 @@
       </p:cxnSp>
       <p:sp>
         <p:nvSpPr>
-          <p:cNvPr id="60" name="TextBox 59"/>
+          <p:cNvPr id="60" name="Rectangle 59"/>
+          <p:cNvSpPr/>
+          <p:nvPr/>
+        </p:nvSpPr>
+        <p:spPr>
+          <a:xfrm>
+            <a:off x="502920" y="5440680"/>
+            <a:ext cx="822960" cy="50292"/>
+          </a:xfrm>
+          <a:prstGeom prst="rect">
+            <a:avLst/>
+          </a:prstGeom>
+          <a:solidFill>
+            <a:srgbClr val="2563EB"/>
+          </a:solidFill>
+          <a:ln>
+            <a:noFill/>
+          </a:ln>
+          <a:effectLst/>
+        </p:spPr>
+        <p:style>
+          <a:lnRef idx="1">
+            <a:schemeClr val="accent1"/>
+          </a:lnRef>
+          <a:fillRef idx="3">
+            <a:schemeClr val="accent1"/>
+          </a:fillRef>
+          <a:effectRef idx="2">
+            <a:schemeClr val="accent1"/>
+          </a:effectRef>
+          <a:fontRef idx="minor">
+            <a:schemeClr val="lt1"/>
+          </a:fontRef>
+        </p:style>
+        <p:txBody>
+          <a:bodyPr rtlCol="0" anchor="ctr"/>
+          <a:lstStyle/>
+          <a:p/>
+        </p:txBody>
+      </p:sp>
+      <p:sp>
+        <p:nvSpPr>
+          <p:cNvPr id="61" name="TextBox 60"/>
           <p:cNvSpPr txBox="1"/>
           <p:nvPr/>
         </p:nvSpPr>
         <p:spPr>
           <a:xfrm>
-            <a:off x="502920" y="5943600"/>
+            <a:off x="502920" y="5541264"/>
+            <a:ext cx="6126480" cy="411480"/>
+          </a:xfrm>
+          <a:prstGeom prst="rect">
+            <a:avLst/>
+          </a:prstGeom>
+          <a:noFill/>
+        </p:spPr>
+        <p:txBody>
+          <a:bodyPr wrap="square" anchor="t" lIns="18288" rIns="18288" tIns="18288" bIns="18288">
+            <a:spAutoFit/>
+          </a:bodyPr>
+          <a:lstStyle/>
+          <a:p>
+            <a:pPr algn="l">
+              <a:lnSpc>
+                <a:spcPct val="100000"/>
+              </a:lnSpc>
+              <a:spcAft>
+                <a:spcPts val="0"/>
+              </a:spcAft>
+            </a:pPr>
+            <a:r>
+              <a:rPr sz="2100" b="1">
+                <a:solidFill>
+                  <a:srgbClr val="101820"/>
+                </a:solidFill>
+                <a:latin typeface="Calibri"/>
+              </a:rPr>
+              <a:t>SHORTEST IS NOT ALWAYS USABLE.</a:t>
+            </a:r>
+          </a:p>
+        </p:txBody>
+      </p:sp>
+      <p:sp>
+        <p:nvSpPr>
+          <p:cNvPr id="62" name="TextBox 61"/>
+          <p:cNvSpPr txBox="1"/>
+          <p:nvPr/>
+        </p:nvSpPr>
+        <p:spPr>
+          <a:xfrm>
+            <a:off x="502920" y="5971032"/>
+            <a:ext cx="6126480" cy="365760"/>
+          </a:xfrm>
+          <a:prstGeom prst="rect">
+            <a:avLst/>
+          </a:prstGeom>
+          <a:noFill/>
+        </p:spPr>
+        <p:txBody>
+          <a:bodyPr wrap="square" anchor="t" lIns="18288" rIns="18288" tIns="18288" bIns="18288">
+            <a:spAutoFit/>
+          </a:bodyPr>
+          <a:lstStyle/>
+          <a:p>
+            <a:pPr algn="l">
+              <a:lnSpc>
+                <a:spcPct val="100000"/>
+              </a:lnSpc>
+              <a:spcAft>
+                <a:spcPts val="0"/>
+              </a:spcAft>
+            </a:pPr>
+            <a:r>
+              <a:rPr sz="1300" b="0">
+                <a:solidFill>
+                  <a:srgbClr val="2563EB"/>
+                </a:solidFill>
+                <a:latin typeface="Calibri"/>
+              </a:rPr>
+              <a:t>“Can this essential-supply truck reliably use this corridor now?”</a:t>
+            </a:r>
+          </a:p>
+        </p:txBody>
+      </p:sp>
+      <p:sp>
+        <p:nvSpPr>
+          <p:cNvPr id="63" name="TextBox 62"/>
+          <p:cNvSpPr txBox="1"/>
+          <p:nvPr/>
+        </p:nvSpPr>
+        <p:spPr>
+          <a:xfrm>
+            <a:off x="502920" y="6355080"/>
             <a:ext cx="6126480" cy="320040"/>
           </a:xfrm>
           <a:prstGeom prst="rect">
@@ -5801,7 +5927,7 @@
               </a:spcAft>
             </a:pPr>
             <a:r>
-              <a:rPr sz="1150" b="1">
+              <a:rPr sz="1100" b="1">
                 <a:solidFill>
                   <a:srgbClr val="059669"/>
                 </a:solidFill>
@@ -5814,14 +5940,14 @@
       </p:sp>
       <p:sp>
         <p:nvSpPr>
-          <p:cNvPr id="61" name="Rounded Rectangle 60"/>
+          <p:cNvPr id="64" name="Rounded Rectangle 63"/>
           <p:cNvSpPr/>
           <p:nvPr/>
         </p:nvSpPr>
         <p:spPr>
           <a:xfrm>
-            <a:off x="6693407" y="2487168"/>
-            <a:ext cx="2380869" cy="3438144"/>
+            <a:off x="6693407" y="2350008"/>
+            <a:ext cx="2318004" cy="3346704"/>
           </a:xfrm>
           <a:prstGeom prst="roundRect">
             <a:avLst>
@@ -5860,7 +5986,7 @@
       </p:sp>
       <p:pic>
         <p:nvPicPr>
-          <p:cNvPr id="62" name="Picture 61" descr="mgr-route.png"/>
+          <p:cNvPr id="65" name="Picture 64" descr="mgr-route.png"/>
           <p:cNvPicPr>
             <a:picLocks noChangeAspect="1"/>
           </p:cNvPicPr>
@@ -5874,8 +6000,8 @@
         </p:blipFill>
         <p:spPr>
           <a:xfrm>
-            <a:off x="6720840" y="2514600"/>
-            <a:ext cx="2326005" cy="3383280"/>
+            <a:off x="6720840" y="2377440"/>
+            <a:ext cx="2263140" cy="3291840"/>
           </a:xfrm>
           <a:prstGeom prst="rect">
             <a:avLst/>
@@ -5884,14 +6010,14 @@
       </p:pic>
       <p:sp>
         <p:nvSpPr>
-          <p:cNvPr id="63" name="Rounded Rectangle 62"/>
+          <p:cNvPr id="66" name="Rounded Rectangle 65"/>
           <p:cNvSpPr/>
           <p:nvPr/>
         </p:nvSpPr>
         <p:spPr>
           <a:xfrm>
-            <a:off x="9299448" y="1161288"/>
-            <a:ext cx="2319378" cy="5084064"/>
+            <a:off x="9208008" y="1161288"/>
+            <a:ext cx="2072340" cy="4535424"/>
           </a:xfrm>
           <a:prstGeom prst="roundRect">
             <a:avLst>
@@ -5930,7 +6056,7 @@
       </p:sp>
       <p:pic>
         <p:nvPicPr>
-          <p:cNvPr id="64" name="Picture 63" descr="07-navigation.png"/>
+          <p:cNvPr id="67" name="Picture 66" descr="07-navigation.png"/>
           <p:cNvPicPr>
             <a:picLocks noChangeAspect="1"/>
           </p:cNvPicPr>
@@ -5944,8 +6070,8 @@
         </p:blipFill>
         <p:spPr>
           <a:xfrm>
-            <a:off x="9326880" y="1188720"/>
-            <a:ext cx="2264514" cy="5029200"/>
+            <a:off x="9235440" y="1188720"/>
+            <a:ext cx="2017476" cy="4480560"/>
           </a:xfrm>
           <a:prstGeom prst="rect">
             <a:avLst/>
@@ -5954,13 +6080,13 @@
       </p:pic>
       <p:sp>
         <p:nvSpPr>
-          <p:cNvPr id="65" name="Rounded Rectangle 64"/>
+          <p:cNvPr id="68" name="Rounded Rectangle 67"/>
           <p:cNvSpPr/>
           <p:nvPr/>
         </p:nvSpPr>
         <p:spPr>
           <a:xfrm>
-            <a:off x="6720840" y="6108192"/>
+            <a:off x="6720840" y="5797296"/>
             <a:ext cx="4937760" cy="256032"/>
           </a:xfrm>
           <a:prstGeom prst="roundRect">
@@ -11559,7 +11685,7 @@
         </p:nvSpPr>
         <p:spPr>
           <a:xfrm>
-            <a:off x="457200" y="1024128"/>
+            <a:off x="457200" y="969264"/>
             <a:ext cx="8229600" cy="457200"/>
           </a:xfrm>
           <a:prstGeom prst="rect">
@@ -11588,7 +11714,7 @@
                 </a:solidFill>
                 <a:latin typeface="Calibri"/>
               </a:rPr>
-              <a:t>NOT A CONCEPT — A PHYSICAL, END-TO-END WORKING PROTOTYPE</a:t>
+              <a:t>NOT A CONCEPT. A WORKING END-TO-END PROTOTYPE.</a:t>
             </a:r>
           </a:p>
         </p:txBody>
@@ -11601,8 +11727,8 @@
         </p:nvSpPr>
         <p:spPr>
           <a:xfrm>
-            <a:off x="457200" y="1572768"/>
-            <a:ext cx="1600200" cy="310896"/>
+            <a:off x="457200" y="1481328"/>
+            <a:ext cx="731520" cy="310896"/>
           </a:xfrm>
           <a:prstGeom prst="roundRect">
             <a:avLst>
@@ -11643,7 +11769,7 @@
                 </a:solidFill>
                 <a:latin typeface="Calibri"/>
               </a:rPr>
-              <a:t>MANAGER ROUTE REVIEW</a:t>
+              <a:t>PLAN</a:t>
             </a:r>
           </a:p>
         </p:txBody>
@@ -11656,8 +11782,8 @@
         </p:nvCxnSpPr>
         <p:spPr>
           <a:xfrm>
-            <a:off x="2075688" y="1728216"/>
-            <a:ext cx="73152" cy="0"/>
+            <a:off x="1207008" y="1636776"/>
+            <a:ext cx="64008" cy="0"/>
           </a:xfrm>
           <a:prstGeom prst="line">
             <a:avLst/>
@@ -11692,8 +11818,99 @@
         </p:nvSpPr>
         <p:spPr>
           <a:xfrm>
-            <a:off x="2167128" y="1572768"/>
-            <a:ext cx="914400" cy="310896"/>
+            <a:off x="1289304" y="1481328"/>
+            <a:ext cx="868680" cy="310896"/>
+          </a:xfrm>
+          <a:prstGeom prst="roundRect">
+            <a:avLst>
+              <a:gd name="adj" fmla="val 50000"/>
+            </a:avLst>
+          </a:prstGeom>
+          <a:solidFill>
+            <a:srgbClr val="2563EB"/>
+          </a:solidFill>
+          <a:ln>
+            <a:noFill/>
+          </a:ln>
+          <a:effectLst/>
+        </p:spPr>
+        <p:style>
+          <a:lnRef idx="1">
+            <a:schemeClr val="accent1"/>
+          </a:lnRef>
+          <a:fillRef idx="3">
+            <a:schemeClr val="accent1"/>
+          </a:fillRef>
+          <a:effectRef idx="2">
+            <a:schemeClr val="accent1"/>
+          </a:effectRef>
+          <a:fontRef idx="minor">
+            <a:schemeClr val="lt1"/>
+          </a:fontRef>
+        </p:style>
+        <p:txBody>
+          <a:bodyPr rtlCol="0" anchor="ctr" lIns="54864" rIns="54864" tIns="0" bIns="0" wrap="square"/>
+          <a:lstStyle/>
+          <a:p>
+            <a:pPr algn="ctr"/>
+            <a:r>
+              <a:rPr sz="900" b="1">
+                <a:solidFill>
+                  <a:srgbClr val="FFFFFF"/>
+                </a:solidFill>
+                <a:latin typeface="Calibri"/>
+              </a:rPr>
+              <a:t>REVIEW</a:t>
+            </a:r>
+          </a:p>
+        </p:txBody>
+      </p:sp>
+      <p:cxnSp>
+        <p:nvCxnSpPr>
+          <p:cNvPr id="17414" name="Connector 17413"/>
+          <p:cNvCxnSpPr/>
+          <p:nvPr/>
+        </p:nvCxnSpPr>
+        <p:spPr>
+          <a:xfrm>
+            <a:off x="2176272" y="1636776"/>
+            <a:ext cx="64008" cy="0"/>
+          </a:xfrm>
+          <a:prstGeom prst="line">
+            <a:avLst/>
+          </a:prstGeom>
+          <a:ln w="15875">
+            <a:solidFill>
+              <a:srgbClr val="101820"/>
+            </a:solidFill>
+            <a:tailEnd type="triangle" w="med" len="med"/>
+          </a:ln>
+        </p:spPr>
+        <p:style>
+          <a:lnRef idx="2">
+            <a:schemeClr val="accent1"/>
+          </a:lnRef>
+          <a:fillRef idx="0">
+            <a:schemeClr val="accent1"/>
+          </a:fillRef>
+          <a:effectRef idx="1">
+            <a:schemeClr val="accent1"/>
+          </a:effectRef>
+          <a:fontRef idx="minor">
+            <a:schemeClr val="tx1"/>
+          </a:fontRef>
+        </p:style>
+      </p:cxnSp>
+      <p:sp>
+        <p:nvSpPr>
+          <p:cNvPr id="17415" name="Rounded Rectangle 17414"/>
+          <p:cNvSpPr/>
+          <p:nvPr/>
+        </p:nvSpPr>
+        <p:spPr>
+          <a:xfrm>
+            <a:off x="2258568" y="1481328"/>
+            <a:ext cx="1005840" cy="310896"/>
           </a:xfrm>
           <a:prstGeom prst="roundRect">
             <a:avLst>
@@ -11743,14 +11960,14 @@
       </p:sp>
       <p:cxnSp>
         <p:nvCxnSpPr>
-          <p:cNvPr id="17414" name="Connector 17413"/>
+          <p:cNvPr id="17416" name="Connector 17415"/>
           <p:cNvCxnSpPr/>
           <p:nvPr/>
         </p:nvCxnSpPr>
         <p:spPr>
           <a:xfrm>
-            <a:off x="3099816" y="1728216"/>
-            <a:ext cx="73152" cy="0"/>
+            <a:off x="3282696" y="1636776"/>
+            <a:ext cx="64008" cy="0"/>
           </a:xfrm>
           <a:prstGeom prst="line">
             <a:avLst/>
@@ -11779,14 +11996,14 @@
       </p:cxnSp>
       <p:sp>
         <p:nvSpPr>
-          <p:cNvPr id="17415" name="Rounded Rectangle 17414"/>
+          <p:cNvPr id="17417" name="Rounded Rectangle 17416"/>
           <p:cNvSpPr/>
           <p:nvPr/>
         </p:nvSpPr>
         <p:spPr>
           <a:xfrm>
-            <a:off x="3191256" y="1572768"/>
-            <a:ext cx="1920240" cy="310896"/>
+            <a:off x="3364992" y="1481328"/>
+            <a:ext cx="914400" cy="310896"/>
           </a:xfrm>
           <a:prstGeom prst="roundRect">
             <a:avLst>
@@ -11829,21 +12046,21 @@
                 </a:solidFill>
                 <a:latin typeface="Calibri"/>
               </a:rPr>
-              <a:t>DRIVER ACCEPT + TRUCK CHECK</a:t>
+              <a:t>ACCEPT</a:t>
             </a:r>
           </a:p>
         </p:txBody>
       </p:sp>
       <p:cxnSp>
         <p:nvCxnSpPr>
-          <p:cNvPr id="17416" name="Connector 17415"/>
+          <p:cNvPr id="17418" name="Connector 17417"/>
           <p:cNvCxnSpPr/>
           <p:nvPr/>
         </p:nvCxnSpPr>
         <p:spPr>
           <a:xfrm>
-            <a:off x="5129783" y="1728216"/>
-            <a:ext cx="73153" cy="0"/>
+            <a:off x="4297680" y="1636776"/>
+            <a:ext cx="64008" cy="0"/>
           </a:xfrm>
           <a:prstGeom prst="line">
             <a:avLst/>
@@ -11872,14 +12089,14 @@
       </p:cxnSp>
       <p:sp>
         <p:nvSpPr>
-          <p:cNvPr id="17417" name="Rounded Rectangle 17416"/>
+          <p:cNvPr id="17419" name="Rounded Rectangle 17418"/>
           <p:cNvSpPr/>
           <p:nvPr/>
         </p:nvSpPr>
         <p:spPr>
           <a:xfrm>
-            <a:off x="5221224" y="1572768"/>
-            <a:ext cx="1097280" cy="310896"/>
+            <a:off x="4379976" y="1481328"/>
+            <a:ext cx="1234440" cy="310896"/>
           </a:xfrm>
           <a:prstGeom prst="roundRect">
             <a:avLst>
@@ -11922,21 +12139,21 @@
                 </a:solidFill>
                 <a:latin typeface="Calibri"/>
               </a:rPr>
-              <a:t>NAVIGATION</a:t>
+              <a:t>TRUCK VERIFY</a:t>
             </a:r>
           </a:p>
         </p:txBody>
       </p:sp>
       <p:cxnSp>
         <p:nvCxnSpPr>
-          <p:cNvPr id="17418" name="Connector 17417"/>
+          <p:cNvPr id="17420" name="Connector 17419"/>
           <p:cNvCxnSpPr/>
           <p:nvPr/>
         </p:nvCxnSpPr>
         <p:spPr>
           <a:xfrm>
-            <a:off x="6336792" y="1728216"/>
-            <a:ext cx="73152" cy="0"/>
+            <a:off x="5632704" y="1636776"/>
+            <a:ext cx="64008" cy="0"/>
           </a:xfrm>
           <a:prstGeom prst="line">
             <a:avLst/>
@@ -11965,14 +12182,14 @@
       </p:cxnSp>
       <p:sp>
         <p:nvSpPr>
-          <p:cNvPr id="17419" name="Rounded Rectangle 17418"/>
+          <p:cNvPr id="17421" name="Rounded Rectangle 17420"/>
           <p:cNvSpPr/>
           <p:nvPr/>
         </p:nvSpPr>
         <p:spPr>
           <a:xfrm>
-            <a:off x="6428232" y="1572768"/>
-            <a:ext cx="960120" cy="310896"/>
+            <a:off x="5715000" y="1481328"/>
+            <a:ext cx="1051560" cy="310896"/>
           </a:xfrm>
           <a:prstGeom prst="roundRect">
             <a:avLst>
@@ -12015,21 +12232,21 @@
                 </a:solidFill>
                 <a:latin typeface="Calibri"/>
               </a:rPr>
-              <a:t>OFF-ROUTE</a:t>
+              <a:t>NAVIGATE</a:t>
             </a:r>
           </a:p>
         </p:txBody>
       </p:sp>
       <p:cxnSp>
         <p:nvCxnSpPr>
-          <p:cNvPr id="17420" name="Connector 17419"/>
+          <p:cNvPr id="17422" name="Connector 17421"/>
           <p:cNvCxnSpPr/>
           <p:nvPr/>
         </p:nvCxnSpPr>
         <p:spPr>
           <a:xfrm>
-            <a:off x="7406640" y="1728216"/>
-            <a:ext cx="73152" cy="0"/>
+            <a:off x="6784848" y="1636776"/>
+            <a:ext cx="64008" cy="0"/>
           </a:xfrm>
           <a:prstGeom prst="line">
             <a:avLst/>
@@ -12058,14 +12275,14 @@
       </p:cxnSp>
       <p:sp>
         <p:nvSpPr>
-          <p:cNvPr id="17421" name="Rounded Rectangle 17420"/>
+          <p:cNvPr id="17423" name="Rounded Rectangle 17422"/>
           <p:cNvSpPr/>
           <p:nvPr/>
         </p:nvSpPr>
         <p:spPr>
           <a:xfrm>
-            <a:off x="7498080" y="1572768"/>
-            <a:ext cx="914400" cy="310896"/>
+            <a:off x="6867144" y="1481328"/>
+            <a:ext cx="1051560" cy="310896"/>
           </a:xfrm>
           <a:prstGeom prst="roundRect">
             <a:avLst>
@@ -12108,21 +12325,21 @@
                 </a:solidFill>
                 <a:latin typeface="Calibri"/>
               </a:rPr>
-              <a:t>REROUTE</a:t>
+              <a:t>OFF-ROUTE</a:t>
             </a:r>
           </a:p>
         </p:txBody>
       </p:sp>
       <p:cxnSp>
         <p:nvCxnSpPr>
-          <p:cNvPr id="17422" name="Connector 17421"/>
+          <p:cNvPr id="17424" name="Connector 17423"/>
           <p:cNvCxnSpPr/>
           <p:nvPr/>
         </p:nvCxnSpPr>
         <p:spPr>
           <a:xfrm>
-            <a:off x="8430768" y="1728216"/>
-            <a:ext cx="73152" cy="0"/>
+            <a:off x="7936992" y="1636776"/>
+            <a:ext cx="64008" cy="0"/>
           </a:xfrm>
           <a:prstGeom prst="line">
             <a:avLst/>
@@ -12151,14 +12368,14 @@
       </p:cxnSp>
       <p:sp>
         <p:nvSpPr>
-          <p:cNvPr id="17423" name="Rounded Rectangle 17422"/>
+          <p:cNvPr id="17425" name="Rounded Rectangle 17424"/>
           <p:cNvSpPr/>
           <p:nvPr/>
         </p:nvSpPr>
         <p:spPr>
           <a:xfrm>
-            <a:off x="8522208" y="1572768"/>
-            <a:ext cx="1463040" cy="310896"/>
+            <a:off x="8019288" y="1481328"/>
+            <a:ext cx="2057400" cy="310896"/>
           </a:xfrm>
           <a:prstGeom prst="roundRect">
             <a:avLst>
@@ -12199,21 +12416,21 @@
                 </a:solidFill>
                 <a:latin typeface="Calibri"/>
               </a:rPr>
-              <a:t>MANAGER APPROVAL</a:t>
+              <a:t>MANAGER REROUTE APPROVAL</a:t>
             </a:r>
           </a:p>
         </p:txBody>
       </p:sp>
       <p:cxnSp>
         <p:nvCxnSpPr>
-          <p:cNvPr id="17424" name="Connector 17423"/>
+          <p:cNvPr id="17426" name="Connector 17425"/>
           <p:cNvCxnSpPr/>
           <p:nvPr/>
         </p:nvCxnSpPr>
         <p:spPr>
           <a:xfrm>
-            <a:off x="10003536" y="1728216"/>
-            <a:ext cx="73152" cy="0"/>
+            <a:off x="10094976" y="1636776"/>
+            <a:ext cx="64008" cy="0"/>
           </a:xfrm>
           <a:prstGeom prst="line">
             <a:avLst/>
@@ -12242,14 +12459,14 @@
       </p:cxnSp>
       <p:sp>
         <p:nvSpPr>
-          <p:cNvPr id="17425" name="Rounded Rectangle 17424"/>
+          <p:cNvPr id="17427" name="Rounded Rectangle 17426"/>
           <p:cNvSpPr/>
           <p:nvPr/>
         </p:nvSpPr>
         <p:spPr>
           <a:xfrm>
-            <a:off x="10094976" y="1572768"/>
-            <a:ext cx="914400" cy="310896"/>
+            <a:off x="10177272" y="1481328"/>
+            <a:ext cx="1005840" cy="310896"/>
           </a:xfrm>
           <a:prstGeom prst="roundRect">
             <a:avLst>
@@ -12297,14 +12514,14 @@
       </p:sp>
       <p:sp>
         <p:nvSpPr>
-          <p:cNvPr id="17426" name="Rounded Rectangle 17425"/>
+          <p:cNvPr id="17428" name="Rounded Rectangle 17427"/>
           <p:cNvSpPr/>
           <p:nvPr/>
         </p:nvSpPr>
         <p:spPr>
           <a:xfrm>
-            <a:off x="429768" y="2093976"/>
-            <a:ext cx="2286571" cy="3300984"/>
+            <a:off x="429768" y="1984248"/>
+            <a:ext cx="2393442" cy="3456432"/>
           </a:xfrm>
           <a:prstGeom prst="roundRect">
             <a:avLst>
@@ -12343,7 +12560,7 @@
       </p:sp>
       <p:pic>
         <p:nvPicPr>
-          <p:cNvPr id="17427" name="Picture 17426" descr="mgr-route.png"/>
+          <p:cNvPr id="17429" name="Picture 17428" descr="mgr-route.png"/>
           <p:cNvPicPr>
             <a:picLocks noChangeAspect="1"/>
           </p:cNvPicPr>
@@ -12357,8 +12574,8 @@
         </p:blipFill>
         <p:spPr>
           <a:xfrm>
-            <a:off x="457200" y="2121408"/>
-            <a:ext cx="2231707" cy="3246120"/>
+            <a:off x="457200" y="2011680"/>
+            <a:ext cx="2338578" cy="3401568"/>
           </a:xfrm>
           <a:prstGeom prst="rect">
             <a:avLst/>
@@ -12367,14 +12584,14 @@
       </p:pic>
       <p:sp>
         <p:nvSpPr>
-          <p:cNvPr id="17428" name="Rounded Rectangle 17427"/>
+          <p:cNvPr id="17430" name="Rounded Rectangle 17429"/>
           <p:cNvSpPr/>
           <p:nvPr/>
         </p:nvSpPr>
         <p:spPr>
           <a:xfrm>
-            <a:off x="2862643" y="2093976"/>
-            <a:ext cx="1516504" cy="3300984"/>
+            <a:off x="2969514" y="1984248"/>
+            <a:ext cx="1586498" cy="3456432"/>
           </a:xfrm>
           <a:prstGeom prst="roundRect">
             <a:avLst>
@@ -12413,7 +12630,7 @@
       </p:sp>
       <p:pic>
         <p:nvPicPr>
-          <p:cNvPr id="17429" name="Picture 17428" descr="truck-check.png"/>
+          <p:cNvPr id="17431" name="Picture 17430" descr="truck-check.png"/>
           <p:cNvPicPr>
             <a:picLocks noChangeAspect="1"/>
           </p:cNvPicPr>
@@ -12427,8 +12644,8 @@
         </p:blipFill>
         <p:spPr>
           <a:xfrm>
-            <a:off x="2890075" y="2121408"/>
-            <a:ext cx="1461640" cy="3246120"/>
+            <a:off x="2996946" y="2011680"/>
+            <a:ext cx="1531634" cy="3401568"/>
           </a:xfrm>
           <a:prstGeom prst="rect">
             <a:avLst/>
@@ -12437,14 +12654,14 @@
       </p:pic>
       <p:sp>
         <p:nvSpPr>
-          <p:cNvPr id="17430" name="Rounded Rectangle 17429"/>
+          <p:cNvPr id="17432" name="Rounded Rectangle 17431"/>
           <p:cNvSpPr/>
           <p:nvPr/>
         </p:nvSpPr>
         <p:spPr>
           <a:xfrm>
-            <a:off x="4525452" y="2093976"/>
-            <a:ext cx="1516504" cy="3300984"/>
+            <a:off x="4702316" y="1984248"/>
+            <a:ext cx="1586498" cy="3456432"/>
           </a:xfrm>
           <a:prstGeom prst="roundRect">
             <a:avLst>
@@ -12483,7 +12700,7 @@
       </p:sp>
       <p:pic>
         <p:nvPicPr>
-          <p:cNvPr id="17431" name="Picture 17430" descr="07-navigation.png"/>
+          <p:cNvPr id="17433" name="Picture 17432" descr="07-navigation.png"/>
           <p:cNvPicPr>
             <a:picLocks noChangeAspect="1"/>
           </p:cNvPicPr>
@@ -12497,8 +12714,8 @@
         </p:blipFill>
         <p:spPr>
           <a:xfrm>
-            <a:off x="4552884" y="2121408"/>
-            <a:ext cx="1461640" cy="3246120"/>
+            <a:off x="4729748" y="2011680"/>
+            <a:ext cx="1531634" cy="3401568"/>
           </a:xfrm>
           <a:prstGeom prst="rect">
             <a:avLst/>
@@ -12507,14 +12724,14 @@
       </p:pic>
       <p:sp>
         <p:nvSpPr>
-          <p:cNvPr id="17432" name="Rounded Rectangle 17431"/>
+          <p:cNvPr id="17434" name="Rounded Rectangle 17433"/>
           <p:cNvSpPr/>
           <p:nvPr/>
         </p:nvSpPr>
         <p:spPr>
           <a:xfrm>
-            <a:off x="457200" y="5458967"/>
-            <a:ext cx="2231707" cy="256032"/>
+            <a:off x="457200" y="5504688"/>
+            <a:ext cx="2338578" cy="256032"/>
           </a:xfrm>
           <a:prstGeom prst="roundRect">
             <a:avLst>
@@ -12562,14 +12779,14 @@
       </p:sp>
       <p:sp>
         <p:nvSpPr>
-          <p:cNvPr id="17433" name="Rounded Rectangle 17432"/>
+          <p:cNvPr id="17435" name="Rounded Rectangle 17434"/>
           <p:cNvSpPr/>
           <p:nvPr/>
         </p:nvSpPr>
         <p:spPr>
           <a:xfrm>
-            <a:off x="2890075" y="5458967"/>
-            <a:ext cx="1461640" cy="256032"/>
+            <a:off x="2996946" y="5504688"/>
+            <a:ext cx="1531634" cy="256032"/>
           </a:xfrm>
           <a:prstGeom prst="roundRect">
             <a:avLst>
@@ -12617,14 +12834,14 @@
       </p:sp>
       <p:sp>
         <p:nvSpPr>
-          <p:cNvPr id="17434" name="Rounded Rectangle 17433"/>
+          <p:cNvPr id="17436" name="Rounded Rectangle 17435"/>
           <p:cNvSpPr/>
           <p:nvPr/>
         </p:nvSpPr>
         <p:spPr>
           <a:xfrm>
-            <a:off x="4552884" y="5458967"/>
-            <a:ext cx="1461640" cy="256032"/>
+            <a:off x="4729748" y="5504688"/>
+            <a:ext cx="1531634" cy="256032"/>
           </a:xfrm>
           <a:prstGeom prst="roundRect">
             <a:avLst>
@@ -12672,14 +12889,14 @@
       </p:sp>
       <p:sp>
         <p:nvSpPr>
-          <p:cNvPr id="17435" name="TextBox 17434"/>
+          <p:cNvPr id="17437" name="TextBox 17436"/>
           <p:cNvSpPr txBox="1"/>
           <p:nvPr/>
         </p:nvSpPr>
         <p:spPr>
           <a:xfrm>
-            <a:off x="6297989" y="2057400"/>
-            <a:ext cx="5452050" cy="329184"/>
+            <a:off x="6499127" y="1956816"/>
+            <a:ext cx="5250912" cy="329184"/>
           </a:xfrm>
           <a:prstGeom prst="rect">
             <a:avLst/>
@@ -12714,14 +12931,366 @@
       </p:sp>
       <p:sp>
         <p:nvSpPr>
-          <p:cNvPr id="17436" name="TextBox 17435"/>
+          <p:cNvPr id="17438" name="TextBox 17437"/>
           <p:cNvSpPr txBox="1"/>
           <p:nvPr/>
         </p:nvSpPr>
         <p:spPr>
           <a:xfrm>
-            <a:off x="6297989" y="2331720"/>
-            <a:ext cx="5452050" cy="365760"/>
+            <a:off x="6499127" y="2212848"/>
+            <a:ext cx="5250912" cy="548640"/>
+          </a:xfrm>
+          <a:prstGeom prst="rect">
+            <a:avLst/>
+          </a:prstGeom>
+          <a:noFill/>
+        </p:spPr>
+        <p:txBody>
+          <a:bodyPr wrap="square" anchor="t" lIns="18288" rIns="18288" tIns="18288" bIns="18288">
+            <a:spAutoFit/>
+          </a:bodyPr>
+          <a:lstStyle/>
+          <a:p>
+            <a:pPr algn="l">
+              <a:lnSpc>
+                <a:spcPct val="105000"/>
+              </a:lnSpc>
+              <a:spcAft>
+                <a:spcPts val="0"/>
+              </a:spcAft>
+            </a:pPr>
+            <a:r>
+              <a:rPr sz="1150" b="0">
+                <a:solidFill>
+                  <a:srgbClr val="101820"/>
+                </a:solidFill>
+                <a:latin typeface="Calibri"/>
+              </a:rPr>
+              <a:t>The whole lifecycle above was run on a physical Android phone against the hosted backend, on the real road.</a:t>
+            </a:r>
+          </a:p>
+        </p:txBody>
+      </p:sp>
+      <p:sp>
+        <p:nvSpPr>
+          <p:cNvPr id="17439" name="TextBox 17438"/>
+          <p:cNvSpPr txBox="1"/>
+          <p:nvPr/>
+        </p:nvSpPr>
+        <p:spPr>
+          <a:xfrm>
+            <a:off x="6499127" y="2798064"/>
+            <a:ext cx="868680" cy="310896"/>
+          </a:xfrm>
+          <a:prstGeom prst="rect">
+            <a:avLst/>
+          </a:prstGeom>
+          <a:noFill/>
+        </p:spPr>
+        <p:txBody>
+          <a:bodyPr wrap="square" anchor="ctr" lIns="18288" rIns="18288" tIns="18288" bIns="18288">
+            <a:spAutoFit/>
+          </a:bodyPr>
+          <a:lstStyle/>
+          <a:p>
+            <a:pPr algn="l">
+              <a:lnSpc>
+                <a:spcPct val="105000"/>
+              </a:lnSpc>
+              <a:spcAft>
+                <a:spcPts val="0"/>
+              </a:spcAft>
+            </a:pPr>
+            <a:r>
+              <a:rPr sz="1500" b="1">
+                <a:solidFill>
+                  <a:srgbClr val="2563EB"/>
+                </a:solidFill>
+                <a:latin typeface="Calibri"/>
+              </a:rPr>
+              <a:t>12/12</a:t>
+            </a:r>
+          </a:p>
+        </p:txBody>
+      </p:sp>
+      <p:sp>
+        <p:nvSpPr>
+          <p:cNvPr id="17440" name="TextBox 17439"/>
+          <p:cNvSpPr txBox="1"/>
+          <p:nvPr/>
+        </p:nvSpPr>
+        <p:spPr>
+          <a:xfrm>
+            <a:off x="7413527" y="2798064"/>
+            <a:ext cx="4336512" cy="310896"/>
+          </a:xfrm>
+          <a:prstGeom prst="rect">
+            <a:avLst/>
+          </a:prstGeom>
+          <a:noFill/>
+        </p:spPr>
+        <p:txBody>
+          <a:bodyPr wrap="square" anchor="ctr" lIns="18288" rIns="18288" tIns="18288" bIns="18288">
+            <a:spAutoFit/>
+          </a:bodyPr>
+          <a:lstStyle/>
+          <a:p>
+            <a:pPr algn="l">
+              <a:lnSpc>
+                <a:spcPct val="105000"/>
+              </a:lnSpc>
+              <a:spcAft>
+                <a:spcPts val="0"/>
+              </a:spcAft>
+            </a:pPr>
+            <a:r>
+              <a:rPr sz="1100" b="0">
+                <a:solidFill>
+                  <a:srgbClr val="101820"/>
+                </a:solidFill>
+                <a:latin typeface="Calibri"/>
+              </a:rPr>
+              <a:t>physical judge-flow steps</a:t>
+            </a:r>
+          </a:p>
+        </p:txBody>
+      </p:sp>
+      <p:sp>
+        <p:nvSpPr>
+          <p:cNvPr id="17441" name="TextBox 17440"/>
+          <p:cNvSpPr txBox="1"/>
+          <p:nvPr/>
+        </p:nvSpPr>
+        <p:spPr>
+          <a:xfrm>
+            <a:off x="6499127" y="3163824"/>
+            <a:ext cx="868680" cy="310896"/>
+          </a:xfrm>
+          <a:prstGeom prst="rect">
+            <a:avLst/>
+          </a:prstGeom>
+          <a:noFill/>
+        </p:spPr>
+        <p:txBody>
+          <a:bodyPr wrap="square" anchor="ctr" lIns="18288" rIns="18288" tIns="18288" bIns="18288">
+            <a:spAutoFit/>
+          </a:bodyPr>
+          <a:lstStyle/>
+          <a:p>
+            <a:pPr algn="l">
+              <a:lnSpc>
+                <a:spcPct val="105000"/>
+              </a:lnSpc>
+              <a:spcAft>
+                <a:spcPts val="0"/>
+              </a:spcAft>
+            </a:pPr>
+            <a:r>
+              <a:rPr sz="1500" b="1">
+                <a:solidFill>
+                  <a:srgbClr val="2563EB"/>
+                </a:solidFill>
+                <a:latin typeface="Calibri"/>
+              </a:rPr>
+              <a:t>9/9</a:t>
+            </a:r>
+          </a:p>
+        </p:txBody>
+      </p:sp>
+      <p:sp>
+        <p:nvSpPr>
+          <p:cNvPr id="17442" name="TextBox 17441"/>
+          <p:cNvSpPr txBox="1"/>
+          <p:nvPr/>
+        </p:nvSpPr>
+        <p:spPr>
+          <a:xfrm>
+            <a:off x="7413527" y="3163824"/>
+            <a:ext cx="4336512" cy="310896"/>
+          </a:xfrm>
+          <a:prstGeom prst="rect">
+            <a:avLst/>
+          </a:prstGeom>
+          <a:noFill/>
+        </p:spPr>
+        <p:txBody>
+          <a:bodyPr wrap="square" anchor="ctr" lIns="18288" rIns="18288" tIns="18288" bIns="18288">
+            <a:spAutoFit/>
+          </a:bodyPr>
+          <a:lstStyle/>
+          <a:p>
+            <a:pPr algn="l">
+              <a:lnSpc>
+                <a:spcPct val="105000"/>
+              </a:lnSpc>
+              <a:spcAft>
+                <a:spcPts val="0"/>
+              </a:spcAft>
+            </a:pPr>
+            <a:r>
+              <a:rPr sz="1100" b="0">
+                <a:solidFill>
+                  <a:srgbClr val="101820"/>
+                </a:solidFill>
+                <a:latin typeface="Calibri"/>
+              </a:rPr>
+              <a:t>physical role-flow steps</a:t>
+            </a:r>
+          </a:p>
+        </p:txBody>
+      </p:sp>
+      <p:sp>
+        <p:nvSpPr>
+          <p:cNvPr id="17443" name="TextBox 17442"/>
+          <p:cNvSpPr txBox="1"/>
+          <p:nvPr/>
+        </p:nvSpPr>
+        <p:spPr>
+          <a:xfrm>
+            <a:off x="6499127" y="3547872"/>
+            <a:ext cx="5250912" cy="310896"/>
+          </a:xfrm>
+          <a:prstGeom prst="rect">
+            <a:avLst/>
+          </a:prstGeom>
+          <a:noFill/>
+        </p:spPr>
+        <p:txBody>
+          <a:bodyPr wrap="square" anchor="ctr" lIns="18288" rIns="18288" tIns="18288" bIns="18288">
+            <a:spAutoFit/>
+          </a:bodyPr>
+          <a:lstStyle/>
+          <a:p>
+            <a:pPr algn="l">
+              <a:lnSpc>
+                <a:spcPct val="105000"/>
+              </a:lnSpc>
+              <a:spcAft>
+                <a:spcPts val="0"/>
+              </a:spcAft>
+            </a:pPr>
+            <a:r>
+              <a:rPr sz="1300" b="1">
+                <a:solidFill>
+                  <a:srgbClr val="2563EB"/>
+                </a:solidFill>
+                <a:latin typeface="Calibri"/>
+              </a:rPr>
+              <a:t>1138+ </a:t>
+            </a:r>
+            <a:r>
+              <a:rPr sz="1050" b="0">
+                <a:solidFill>
+                  <a:srgbClr val="101820"/>
+                </a:solidFill>
+                <a:latin typeface="Calibri"/>
+              </a:rPr>
+              <a:t>backend  ·  </a:t>
+            </a:r>
+            <a:r>
+              <a:rPr sz="1300" b="1">
+                <a:solidFill>
+                  <a:srgbClr val="2563EB"/>
+                </a:solidFill>
+                <a:latin typeface="Calibri"/>
+              </a:rPr>
+              <a:t>621+ </a:t>
+            </a:r>
+            <a:r>
+              <a:rPr sz="1050" b="0">
+                <a:solidFill>
+                  <a:srgbClr val="101820"/>
+                </a:solidFill>
+                <a:latin typeface="Calibri"/>
+              </a:rPr>
+              <a:t>driver  ·  </a:t>
+            </a:r>
+            <a:r>
+              <a:rPr sz="1300" b="1">
+                <a:solidFill>
+                  <a:srgbClr val="2563EB"/>
+                </a:solidFill>
+                <a:latin typeface="Calibri"/>
+              </a:rPr>
+              <a:t>170+ </a:t>
+            </a:r>
+            <a:r>
+              <a:rPr sz="1050" b="0">
+                <a:solidFill>
+                  <a:srgbClr val="101820"/>
+                </a:solidFill>
+                <a:latin typeface="Calibri"/>
+              </a:rPr>
+              <a:t>manager tests</a:t>
+            </a:r>
+          </a:p>
+        </p:txBody>
+      </p:sp>
+      <p:sp>
+        <p:nvSpPr>
+          <p:cNvPr id="17444" name="Rounded Rectangle 17443"/>
+          <p:cNvSpPr/>
+          <p:nvPr/>
+        </p:nvSpPr>
+        <p:spPr>
+          <a:xfrm>
+            <a:off x="6499127" y="3986783"/>
+            <a:ext cx="5250912" cy="329184"/>
+          </a:xfrm>
+          <a:prstGeom prst="roundRect">
+            <a:avLst>
+              <a:gd name="adj" fmla="val 50000"/>
+            </a:avLst>
+          </a:prstGeom>
+          <a:solidFill>
+            <a:srgbClr val="059669"/>
+          </a:solidFill>
+          <a:ln>
+            <a:noFill/>
+          </a:ln>
+          <a:effectLst/>
+        </p:spPr>
+        <p:style>
+          <a:lnRef idx="1">
+            <a:schemeClr val="accent1"/>
+          </a:lnRef>
+          <a:fillRef idx="3">
+            <a:schemeClr val="accent1"/>
+          </a:fillRef>
+          <a:effectRef idx="2">
+            <a:schemeClr val="accent1"/>
+          </a:effectRef>
+          <a:fontRef idx="minor">
+            <a:schemeClr val="lt1"/>
+          </a:fontRef>
+        </p:style>
+        <p:txBody>
+          <a:bodyPr rtlCol="0" anchor="ctr" lIns="54864" rIns="54864" tIns="0" bIns="0" wrap="square"/>
+          <a:lstStyle/>
+          <a:p>
+            <a:pPr algn="ctr"/>
+            <a:r>
+              <a:rPr sz="1100" b="1">
+                <a:solidFill>
+                  <a:srgbClr val="FFFFFF"/>
+                </a:solidFill>
+                <a:latin typeface="Calibri"/>
+              </a:rPr>
+              <a:t>PHYSICAL ANDROID · CERTIFIED</a:t>
+            </a:r>
+          </a:p>
+        </p:txBody>
+      </p:sp>
+      <p:sp>
+        <p:nvSpPr>
+          <p:cNvPr id="17445" name="TextBox 17444"/>
+          <p:cNvSpPr txBox="1"/>
+          <p:nvPr/>
+        </p:nvSpPr>
+        <p:spPr>
+          <a:xfrm>
+            <a:off x="6499127" y="4389120"/>
+            <a:ext cx="5250912" cy="365760"/>
           </a:xfrm>
           <a:prstGeom prst="rect">
             <a:avLst/>
@@ -12743,27 +13312,36 @@
               </a:spcAft>
             </a:pPr>
             <a:r>
-              <a:rPr sz="1100" b="0">
+              <a:rPr sz="1050" b="1">
+                <a:solidFill>
+                  <a:srgbClr val="6B7280"/>
+                </a:solidFill>
+                <a:latin typeface="Calibri"/>
+              </a:rPr>
+              <a:t>Canonical demo  </a:t>
+            </a:r>
+            <a:r>
+              <a:rPr sz="1100" b="1">
                 <a:solidFill>
                   <a:srgbClr val="101820"/>
                 </a:solidFill>
                 <a:latin typeface="Calibri"/>
               </a:rPr>
-              <a:t>Physical Android phone · hosted backend · real roads</a:t>
-            </a:r>
-          </a:p>
-        </p:txBody>
-      </p:sp>
-      <p:sp>
-        <p:nvSpPr>
-          <p:cNvPr id="17437" name="TextBox 17436"/>
+              <a:t>Guwahati → Shillong · ≈ 98.8 km real route</a:t>
+            </a:r>
+          </a:p>
+        </p:txBody>
+      </p:sp>
+      <p:sp>
+        <p:nvSpPr>
+          <p:cNvPr id="17446" name="TextBox 17445"/>
           <p:cNvSpPr txBox="1"/>
           <p:nvPr/>
         </p:nvSpPr>
         <p:spPr>
           <a:xfrm>
-            <a:off x="6297989" y="2697480"/>
-            <a:ext cx="1051560" cy="457200"/>
+            <a:off x="6499127" y="4754879"/>
+            <a:ext cx="5250912" cy="365760"/>
           </a:xfrm>
           <a:prstGeom prst="rect">
             <a:avLst/>
@@ -12771,7 +13349,7 @@
           <a:noFill/>
         </p:spPr>
         <p:txBody>
-          <a:bodyPr wrap="square" anchor="ctr" lIns="18288" rIns="18288" tIns="18288" bIns="18288">
+          <a:bodyPr wrap="square" anchor="t" lIns="18288" rIns="18288" tIns="18288" bIns="18288">
             <a:spAutoFit/>
           </a:bodyPr>
           <a:lstStyle/>
@@ -12785,342 +13363,26 @@
               </a:spcAft>
             </a:pPr>
             <a:r>
-              <a:rPr sz="2000" b="1">
-                <a:solidFill>
-                  <a:srgbClr val="2563EB"/>
-                </a:solidFill>
-                <a:latin typeface="Calibri"/>
-              </a:rPr>
-              <a:t>12/12</a:t>
-            </a:r>
-          </a:p>
-        </p:txBody>
-      </p:sp>
-      <p:sp>
-        <p:nvSpPr>
-          <p:cNvPr id="17438" name="TextBox 17437"/>
-          <p:cNvSpPr txBox="1"/>
-          <p:nvPr/>
-        </p:nvSpPr>
-        <p:spPr>
-          <a:xfrm>
-            <a:off x="7349549" y="2606040"/>
-            <a:ext cx="4400490" cy="658368"/>
-          </a:xfrm>
-          <a:prstGeom prst="rect">
-            <a:avLst/>
-          </a:prstGeom>
-          <a:noFill/>
-        </p:spPr>
-        <p:txBody>
-          <a:bodyPr wrap="square" anchor="ctr" lIns="18288" rIns="18288" tIns="18288" bIns="18288">
-            <a:spAutoFit/>
-          </a:bodyPr>
-          <a:lstStyle/>
-          <a:p>
-            <a:pPr algn="l">
-              <a:lnSpc>
-                <a:spcPct val="100000"/>
-              </a:lnSpc>
-              <a:spcAft>
-                <a:spcPts val="0"/>
-              </a:spcAft>
-            </a:pPr>
-            <a:r>
-              <a:rPr sz="1050" b="0">
-                <a:solidFill>
-                  <a:srgbClr val="101820"/>
-                </a:solidFill>
-                <a:latin typeface="Calibri"/>
-              </a:rPr>
-              <a:t>judge-flow steps on the phone: dispatch → accept → truck check → GPS navigation → real off-route → reroute → manager approval → stops → delivery</a:t>
-            </a:r>
-          </a:p>
-        </p:txBody>
-      </p:sp>
-      <p:sp>
-        <p:nvSpPr>
-          <p:cNvPr id="17439" name="TextBox 17438"/>
-          <p:cNvSpPr txBox="1"/>
-          <p:nvPr/>
-        </p:nvSpPr>
-        <p:spPr>
-          <a:xfrm>
-            <a:off x="6297989" y="3410712"/>
-            <a:ext cx="1051560" cy="457200"/>
-          </a:xfrm>
-          <a:prstGeom prst="rect">
-            <a:avLst/>
-          </a:prstGeom>
-          <a:noFill/>
-        </p:spPr>
-        <p:txBody>
-          <a:bodyPr wrap="square" anchor="ctr" lIns="18288" rIns="18288" tIns="18288" bIns="18288">
-            <a:spAutoFit/>
-          </a:bodyPr>
-          <a:lstStyle/>
-          <a:p>
-            <a:pPr algn="l">
-              <a:lnSpc>
-                <a:spcPct val="105000"/>
-              </a:lnSpc>
-              <a:spcAft>
-                <a:spcPts val="0"/>
-              </a:spcAft>
-            </a:pPr>
-            <a:r>
-              <a:rPr sz="2000" b="1">
-                <a:solidFill>
-                  <a:srgbClr val="2563EB"/>
-                </a:solidFill>
-                <a:latin typeface="Calibri"/>
-              </a:rPr>
-              <a:t>9/9</a:t>
-            </a:r>
-          </a:p>
-        </p:txBody>
-      </p:sp>
-      <p:sp>
-        <p:nvSpPr>
-          <p:cNvPr id="17440" name="TextBox 17439"/>
-          <p:cNvSpPr txBox="1"/>
-          <p:nvPr/>
-        </p:nvSpPr>
-        <p:spPr>
-          <a:xfrm>
-            <a:off x="7349549" y="3319272"/>
-            <a:ext cx="4400490" cy="658368"/>
-          </a:xfrm>
-          <a:prstGeom prst="rect">
-            <a:avLst/>
-          </a:prstGeom>
-          <a:noFill/>
-        </p:spPr>
-        <p:txBody>
-          <a:bodyPr wrap="square" anchor="ctr" lIns="18288" rIns="18288" tIns="18288" bIns="18288">
-            <a:spAutoFit/>
-          </a:bodyPr>
-          <a:lstStyle/>
-          <a:p>
-            <a:pPr algn="l">
-              <a:lnSpc>
-                <a:spcPct val="100000"/>
-              </a:lnSpc>
-              <a:spcAft>
-                <a:spcPts val="0"/>
-              </a:spcAft>
-            </a:pPr>
-            <a:r>
-              <a:rPr sz="1050" b="0">
-                <a:solidFill>
-                  <a:srgbClr val="101820"/>
-                </a:solidFill>
-                <a:latin typeface="Calibri"/>
-              </a:rPr>
-              <a:t>role steps: driver ↔ manager sign-in on one APK, no data leak</a:t>
-            </a:r>
-          </a:p>
-        </p:txBody>
-      </p:sp>
-      <p:sp>
-        <p:nvSpPr>
-          <p:cNvPr id="17441" name="TextBox 17440"/>
-          <p:cNvSpPr txBox="1"/>
-          <p:nvPr/>
-        </p:nvSpPr>
-        <p:spPr>
-          <a:xfrm>
-            <a:off x="6297989" y="4123944"/>
-            <a:ext cx="1051560" cy="457200"/>
-          </a:xfrm>
-          <a:prstGeom prst="rect">
-            <a:avLst/>
-          </a:prstGeom>
-          <a:noFill/>
-        </p:spPr>
-        <p:txBody>
-          <a:bodyPr wrap="square" anchor="ctr" lIns="18288" rIns="18288" tIns="18288" bIns="18288">
-            <a:spAutoFit/>
-          </a:bodyPr>
-          <a:lstStyle/>
-          <a:p>
-            <a:pPr algn="l">
-              <a:lnSpc>
-                <a:spcPct val="105000"/>
-              </a:lnSpc>
-              <a:spcAft>
-                <a:spcPts val="0"/>
-              </a:spcAft>
-            </a:pPr>
-            <a:r>
-              <a:rPr sz="2000" b="1">
-                <a:solidFill>
-                  <a:srgbClr val="2563EB"/>
-                </a:solidFill>
-                <a:latin typeface="Calibri"/>
-              </a:rPr>
-              <a:t>1138+</a:t>
-            </a:r>
-          </a:p>
-        </p:txBody>
-      </p:sp>
-      <p:sp>
-        <p:nvSpPr>
-          <p:cNvPr id="17442" name="TextBox 17441"/>
-          <p:cNvSpPr txBox="1"/>
-          <p:nvPr/>
-        </p:nvSpPr>
-        <p:spPr>
-          <a:xfrm>
-            <a:off x="7349549" y="4032504"/>
-            <a:ext cx="4400490" cy="658368"/>
-          </a:xfrm>
-          <a:prstGeom prst="rect">
-            <a:avLst/>
-          </a:prstGeom>
-          <a:noFill/>
-        </p:spPr>
-        <p:txBody>
-          <a:bodyPr wrap="square" anchor="ctr" lIns="18288" rIns="18288" tIns="18288" bIns="18288">
-            <a:spAutoFit/>
-          </a:bodyPr>
-          <a:lstStyle/>
-          <a:p>
-            <a:pPr algn="l">
-              <a:lnSpc>
-                <a:spcPct val="100000"/>
-              </a:lnSpc>
-              <a:spcAft>
-                <a:spcPts val="0"/>
-              </a:spcAft>
-            </a:pPr>
-            <a:r>
-              <a:rPr sz="1050" b="0">
-                <a:solidFill>
-                  <a:srgbClr val="101820"/>
-                </a:solidFill>
-                <a:latin typeface="Calibri"/>
-              </a:rPr>
-              <a:t>backend tests  ·  621+ driver tests  ·  170+ manager tests</a:t>
-            </a:r>
-          </a:p>
-        </p:txBody>
-      </p:sp>
-      <p:sp>
-        <p:nvSpPr>
-          <p:cNvPr id="17443" name="Rounded Rectangle 17442"/>
-          <p:cNvSpPr/>
-          <p:nvPr/>
-        </p:nvSpPr>
-        <p:spPr>
-          <a:xfrm>
-            <a:off x="6297989" y="4818888"/>
-            <a:ext cx="5452050" cy="329184"/>
-          </a:xfrm>
-          <a:prstGeom prst="roundRect">
-            <a:avLst>
-              <a:gd name="adj" fmla="val 50000"/>
-            </a:avLst>
-          </a:prstGeom>
-          <a:solidFill>
-            <a:srgbClr val="059669"/>
-          </a:solidFill>
-          <a:ln>
-            <a:noFill/>
-          </a:ln>
-          <a:effectLst/>
-        </p:spPr>
-        <p:style>
-          <a:lnRef idx="1">
-            <a:schemeClr val="accent1"/>
-          </a:lnRef>
-          <a:fillRef idx="3">
-            <a:schemeClr val="accent1"/>
-          </a:fillRef>
-          <a:effectRef idx="2">
-            <a:schemeClr val="accent1"/>
-          </a:effectRef>
-          <a:fontRef idx="minor">
-            <a:schemeClr val="lt1"/>
-          </a:fontRef>
-        </p:style>
-        <p:txBody>
-          <a:bodyPr rtlCol="0" anchor="ctr" lIns="54864" rIns="54864" tIns="0" bIns="0" wrap="square"/>
-          <a:lstStyle/>
-          <a:p>
-            <a:pPr algn="ctr"/>
-            <a:r>
-              <a:rPr sz="1100" b="1">
-                <a:solidFill>
-                  <a:srgbClr val="FFFFFF"/>
-                </a:solidFill>
-                <a:latin typeface="Calibri"/>
-              </a:rPr>
-              <a:t>PHYSICAL ANDROID · CERTIFIED</a:t>
-            </a:r>
-          </a:p>
-        </p:txBody>
-      </p:sp>
-      <p:sp>
-        <p:nvSpPr>
-          <p:cNvPr id="17444" name="TextBox 17443"/>
-          <p:cNvSpPr txBox="1"/>
-          <p:nvPr/>
-        </p:nvSpPr>
-        <p:spPr>
-          <a:xfrm>
-            <a:off x="6297989" y="5221224"/>
-            <a:ext cx="5452050" cy="365760"/>
-          </a:xfrm>
-          <a:prstGeom prst="rect">
-            <a:avLst/>
-          </a:prstGeom>
-          <a:noFill/>
-        </p:spPr>
-        <p:txBody>
-          <a:bodyPr wrap="square" anchor="t" lIns="18288" rIns="18288" tIns="18288" bIns="18288">
-            <a:spAutoFit/>
-          </a:bodyPr>
-          <a:lstStyle/>
-          <a:p>
-            <a:pPr algn="l">
-              <a:lnSpc>
-                <a:spcPct val="100000"/>
-              </a:lnSpc>
-              <a:spcAft>
-                <a:spcPts val="0"/>
-              </a:spcAft>
-            </a:pPr>
-            <a:r>
-              <a:rPr sz="1050" b="1">
+              <a:rPr sz="1000" b="0">
                 <a:solidFill>
                   <a:srgbClr val="6B7280"/>
                 </a:solidFill>
                 <a:latin typeface="Calibri"/>
               </a:rPr>
-              <a:t>Canonical demo  </a:t>
-            </a:r>
-            <a:r>
-              <a:rPr sz="1100" b="1">
-                <a:solidFill>
-                  <a:srgbClr val="101820"/>
-                </a:solidFill>
-                <a:latin typeface="Calibri"/>
-              </a:rPr>
-              <a:t>Guwahati → Shillong · ≈ 98.8 km real route</a:t>
+              <a:t>Every reroute on that run was approved by a manager before the phone followed it.</a:t>
             </a:r>
           </a:p>
         </p:txBody>
       </p:sp>
       <p:cxnSp>
         <p:nvCxnSpPr>
-          <p:cNvPr id="17445" name="Connector 17444"/>
+          <p:cNvPr id="17447" name="Connector 17446"/>
           <p:cNvCxnSpPr/>
           <p:nvPr/>
         </p:nvCxnSpPr>
         <p:spPr>
           <a:xfrm>
-            <a:off x="457200" y="5769864"/>
+            <a:off x="457200" y="5824728"/>
             <a:ext cx="11292840" cy="0"/>
           </a:xfrm>
           <a:prstGeom prst="line">
@@ -13149,13 +13411,13 @@
       </p:cxnSp>
       <p:sp>
         <p:nvSpPr>
-          <p:cNvPr id="17446" name="TextBox 17445"/>
+          <p:cNvPr id="17448" name="TextBox 17447"/>
           <p:cNvSpPr txBox="1"/>
           <p:nvPr/>
         </p:nvSpPr>
         <p:spPr>
           <a:xfrm>
-            <a:off x="457200" y="5815584"/>
+            <a:off x="457200" y="5870448"/>
             <a:ext cx="11292840" cy="502920"/>
           </a:xfrm>
           <a:prstGeom prst="rect">
@@ -15763,7 +16025,7 @@
         <p:spPr>
           <a:xfrm>
             <a:off x="457200" y="1078992"/>
-            <a:ext cx="4572000" cy="329184"/>
+            <a:ext cx="6858000" cy="329184"/>
           </a:xfrm>
           <a:prstGeom prst="rect">
             <a:avLst/>
@@ -15796,450 +16058,23 @@
           </a:p>
         </p:txBody>
       </p:sp>
-      <p:sp>
-        <p:nvSpPr>
-          <p:cNvPr id="17411" name="TextBox 17410"/>
-          <p:cNvSpPr txBox="1"/>
-          <p:nvPr/>
-        </p:nvSpPr>
-        <p:spPr>
-          <a:xfrm>
-            <a:off x="457200" y="1371600"/>
-            <a:ext cx="5486400" cy="502920"/>
-          </a:xfrm>
-          <a:prstGeom prst="rect">
-            <a:avLst/>
-          </a:prstGeom>
-          <a:noFill/>
-        </p:spPr>
-        <p:txBody>
-          <a:bodyPr wrap="square" anchor="t" lIns="18288" rIns="18288" tIns="18288" bIns="18288">
-            <a:spAutoFit/>
-          </a:bodyPr>
-          <a:lstStyle/>
-          <a:p>
-            <a:pPr algn="l">
-              <a:lnSpc>
-                <a:spcPct val="100000"/>
-              </a:lnSpc>
-              <a:spcAft>
-                <a:spcPts val="0"/>
-              </a:spcAft>
-            </a:pPr>
-            <a:r>
-              <a:rPr sz="1200" b="1">
-                <a:solidFill>
-                  <a:srgbClr val="101820"/>
-                </a:solidFill>
-                <a:latin typeface="Calibri"/>
-              </a:rPr>
-              <a:t>NASA Global Landslide Catalog</a:t>
-            </a:r>
-          </a:p>
-          <a:p>
-            <a:pPr algn="l">
-              <a:lnSpc>
-                <a:spcPct val="100000"/>
-              </a:lnSpc>
-              <a:spcAft>
-                <a:spcPts val="0"/>
-              </a:spcAft>
-            </a:pPr>
-            <a:r>
-              <a:rPr sz="1050" b="0">
-                <a:solidFill>
-                  <a:srgbClr val="6B7280"/>
-                </a:solidFill>
-                <a:latin typeface="Calibri"/>
-              </a:rPr>
-              <a:t>historical landslide exposure; inventory 2007–2017, ≤5 km accuracy filter</a:t>
-            </a:r>
-          </a:p>
-        </p:txBody>
-      </p:sp>
-      <p:sp>
-        <p:nvSpPr>
-          <p:cNvPr id="17412" name="TextBox 17411"/>
-          <p:cNvSpPr txBox="1"/>
-          <p:nvPr/>
-        </p:nvSpPr>
-        <p:spPr>
-          <a:xfrm>
-            <a:off x="457200" y="1920240"/>
-            <a:ext cx="5486400" cy="502920"/>
-          </a:xfrm>
-          <a:prstGeom prst="rect">
-            <a:avLst/>
-          </a:prstGeom>
-          <a:noFill/>
-        </p:spPr>
-        <p:txBody>
-          <a:bodyPr wrap="square" anchor="t" lIns="18288" rIns="18288" tIns="18288" bIns="18288">
-            <a:spAutoFit/>
-          </a:bodyPr>
-          <a:lstStyle/>
-          <a:p>
-            <a:pPr algn="l">
-              <a:lnSpc>
-                <a:spcPct val="100000"/>
-              </a:lnSpc>
-              <a:spcAft>
-                <a:spcPts val="0"/>
-              </a:spcAft>
-            </a:pPr>
-            <a:r>
-              <a:rPr sz="1200" b="1">
-                <a:solidFill>
-                  <a:srgbClr val="101820"/>
-                </a:solidFill>
-                <a:latin typeface="Calibri"/>
-              </a:rPr>
-              <a:t>NDMA SACHET (CAP feed)</a:t>
-            </a:r>
-          </a:p>
-          <a:p>
-            <a:pPr algn="l">
-              <a:lnSpc>
-                <a:spcPct val="100000"/>
-              </a:lnSpc>
-              <a:spcAft>
-                <a:spcPts val="0"/>
-              </a:spcAft>
-            </a:pPr>
-            <a:r>
-              <a:rPr sz="1050" b="0">
-                <a:solidFill>
-                  <a:srgbClr val="6B7280"/>
-                </a:solidFill>
-                <a:latin typeface="Calibri"/>
-              </a:rPr>
-              <a:t>official warnings, polled with freshness</a:t>
-            </a:r>
-          </a:p>
-        </p:txBody>
-      </p:sp>
-      <p:sp>
-        <p:nvSpPr>
-          <p:cNvPr id="17413" name="TextBox 17412"/>
-          <p:cNvSpPr txBox="1"/>
-          <p:nvPr/>
-        </p:nvSpPr>
-        <p:spPr>
-          <a:xfrm>
-            <a:off x="457200" y="2468880"/>
-            <a:ext cx="5486400" cy="502920"/>
-          </a:xfrm>
-          <a:prstGeom prst="rect">
-            <a:avLst/>
-          </a:prstGeom>
-          <a:noFill/>
-        </p:spPr>
-        <p:txBody>
-          <a:bodyPr wrap="square" anchor="t" lIns="18288" rIns="18288" tIns="18288" bIns="18288">
-            <a:spAutoFit/>
-          </a:bodyPr>
-          <a:lstStyle/>
-          <a:p>
-            <a:pPr algn="l">
-              <a:lnSpc>
-                <a:spcPct val="100000"/>
-              </a:lnSpc>
-              <a:spcAft>
-                <a:spcPts val="0"/>
-              </a:spcAft>
-            </a:pPr>
-            <a:r>
-              <a:rPr sz="1200" b="1">
-                <a:solidFill>
-                  <a:srgbClr val="101820"/>
-                </a:solidFill>
-                <a:latin typeface="Calibri"/>
-              </a:rPr>
-              <a:t>GloFAS — Copernicus Emergency Management</a:t>
-            </a:r>
-          </a:p>
-          <a:p>
-            <a:pPr algn="l">
-              <a:lnSpc>
-                <a:spcPct val="100000"/>
-              </a:lnSpc>
-              <a:spcAft>
-                <a:spcPts val="0"/>
-              </a:spcAft>
-            </a:pPr>
-            <a:r>
-              <a:rPr sz="1050" b="0">
-                <a:solidFill>
-                  <a:srgbClr val="6B7280"/>
-                </a:solidFill>
-                <a:latin typeface="Calibri"/>
-              </a:rPr>
-              <a:t>flood context: river discharge vs 30-day mean</a:t>
-            </a:r>
-          </a:p>
-        </p:txBody>
-      </p:sp>
-      <p:sp>
-        <p:nvSpPr>
-          <p:cNvPr id="17414" name="TextBox 17413"/>
-          <p:cNvSpPr txBox="1"/>
-          <p:nvPr/>
-        </p:nvSpPr>
-        <p:spPr>
-          <a:xfrm>
-            <a:off x="457200" y="3017520"/>
-            <a:ext cx="5486400" cy="502920"/>
-          </a:xfrm>
-          <a:prstGeom prst="rect">
-            <a:avLst/>
-          </a:prstGeom>
-          <a:noFill/>
-        </p:spPr>
-        <p:txBody>
-          <a:bodyPr wrap="square" anchor="t" lIns="18288" rIns="18288" tIns="18288" bIns="18288">
-            <a:spAutoFit/>
-          </a:bodyPr>
-          <a:lstStyle/>
-          <a:p>
-            <a:pPr algn="l">
-              <a:lnSpc>
-                <a:spcPct val="100000"/>
-              </a:lnSpc>
-              <a:spcAft>
-                <a:spcPts val="0"/>
-              </a:spcAft>
-            </a:pPr>
-            <a:r>
-              <a:rPr sz="1200" b="1">
-                <a:solidFill>
-                  <a:srgbClr val="101820"/>
-                </a:solidFill>
-                <a:latin typeface="Calibri"/>
-              </a:rPr>
-              <a:t>Open-Meteo · MET Norway</a:t>
-            </a:r>
-          </a:p>
-          <a:p>
-            <a:pPr algn="l">
-              <a:lnSpc>
-                <a:spcPct val="100000"/>
-              </a:lnSpc>
-              <a:spcAft>
-                <a:spcPts val="0"/>
-              </a:spcAft>
-            </a:pPr>
-            <a:r>
-              <a:rPr sz="1050" b="0">
-                <a:solidFill>
-                  <a:srgbClr val="6B7280"/>
-                </a:solidFill>
-                <a:latin typeface="Calibri"/>
-              </a:rPr>
-              <a:t>weather forecast along the corridor; ERA5-Land archive for research</a:t>
-            </a:r>
-          </a:p>
-        </p:txBody>
-      </p:sp>
-      <p:sp>
-        <p:nvSpPr>
-          <p:cNvPr id="17415" name="TextBox 17414"/>
-          <p:cNvSpPr txBox="1"/>
-          <p:nvPr/>
-        </p:nvSpPr>
-        <p:spPr>
-          <a:xfrm>
-            <a:off x="457200" y="3566160"/>
-            <a:ext cx="5486400" cy="502920"/>
-          </a:xfrm>
-          <a:prstGeom prst="rect">
-            <a:avLst/>
-          </a:prstGeom>
-          <a:noFill/>
-        </p:spPr>
-        <p:txBody>
-          <a:bodyPr wrap="square" anchor="t" lIns="18288" rIns="18288" tIns="18288" bIns="18288">
-            <a:spAutoFit/>
-          </a:bodyPr>
-          <a:lstStyle/>
-          <a:p>
-            <a:pPr algn="l">
-              <a:lnSpc>
-                <a:spcPct val="100000"/>
-              </a:lnSpc>
-              <a:spcAft>
-                <a:spcPts val="0"/>
-              </a:spcAft>
-            </a:pPr>
-            <a:r>
-              <a:rPr sz="1200" b="1">
-                <a:solidFill>
-                  <a:srgbClr val="101820"/>
-                </a:solidFill>
-                <a:latin typeface="Calibri"/>
-              </a:rPr>
-              <a:t>Copernicus DEM GLO-90 · OpenTopoData</a:t>
-            </a:r>
-          </a:p>
-          <a:p>
-            <a:pPr algn="l">
-              <a:lnSpc>
-                <a:spcPct val="100000"/>
-              </a:lnSpc>
-              <a:spcAft>
-                <a:spcPts val="0"/>
-              </a:spcAft>
-            </a:pPr>
-            <a:r>
-              <a:rPr sz="1050" b="0">
-                <a:solidFill>
-                  <a:srgbClr val="6B7280"/>
-                </a:solidFill>
-                <a:latin typeface="Calibri"/>
-              </a:rPr>
-              <a:t>terrain profile, climb, steep segments</a:t>
-            </a:r>
-          </a:p>
-        </p:txBody>
-      </p:sp>
-      <p:sp>
-        <p:nvSpPr>
-          <p:cNvPr id="17416" name="TextBox 17415"/>
-          <p:cNvSpPr txBox="1"/>
-          <p:nvPr/>
-        </p:nvSpPr>
-        <p:spPr>
-          <a:xfrm>
-            <a:off x="457200" y="4114800"/>
-            <a:ext cx="5486400" cy="502920"/>
-          </a:xfrm>
-          <a:prstGeom prst="rect">
-            <a:avLst/>
-          </a:prstGeom>
-          <a:noFill/>
-        </p:spPr>
-        <p:txBody>
-          <a:bodyPr wrap="square" anchor="t" lIns="18288" rIns="18288" tIns="18288" bIns="18288">
-            <a:spAutoFit/>
-          </a:bodyPr>
-          <a:lstStyle/>
-          <a:p>
-            <a:pPr algn="l">
-              <a:lnSpc>
-                <a:spcPct val="100000"/>
-              </a:lnSpc>
-              <a:spcAft>
-                <a:spcPts val="0"/>
-              </a:spcAft>
-            </a:pPr>
-            <a:r>
-              <a:rPr sz="1200" b="1">
-                <a:solidFill>
-                  <a:srgbClr val="101820"/>
-                </a:solidFill>
-                <a:latin typeface="Calibri"/>
-              </a:rPr>
-              <a:t>OpenStreetMap · OSRM</a:t>
-            </a:r>
-          </a:p>
-          <a:p>
-            <a:pPr algn="l">
-              <a:lnSpc>
-                <a:spcPct val="100000"/>
-              </a:lnSpc>
-              <a:spcAft>
-                <a:spcPts val="0"/>
-              </a:spcAft>
-            </a:pPr>
-            <a:r>
-              <a:rPr sz="1050" b="0">
-                <a:solidFill>
-                  <a:srgbClr val="6B7280"/>
-                </a:solidFill>
-                <a:latin typeface="Calibri"/>
-              </a:rPr>
-              <a:t>roads, route alternatives, turn steps</a:t>
-            </a:r>
-          </a:p>
-        </p:txBody>
-      </p:sp>
-      <p:sp>
-        <p:nvSpPr>
-          <p:cNvPr id="17417" name="TextBox 17416"/>
-          <p:cNvSpPr txBox="1"/>
-          <p:nvPr/>
-        </p:nvSpPr>
-        <p:spPr>
-          <a:xfrm>
-            <a:off x="457200" y="4663440"/>
-            <a:ext cx="5486400" cy="502920"/>
-          </a:xfrm>
-          <a:prstGeom prst="rect">
-            <a:avLst/>
-          </a:prstGeom>
-          <a:noFill/>
-        </p:spPr>
-        <p:txBody>
-          <a:bodyPr wrap="square" anchor="t" lIns="18288" rIns="18288" tIns="18288" bIns="18288">
-            <a:spAutoFit/>
-          </a:bodyPr>
-          <a:lstStyle/>
-          <a:p>
-            <a:pPr algn="l">
-              <a:lnSpc>
-                <a:spcPct val="100000"/>
-              </a:lnSpc>
-              <a:spcAft>
-                <a:spcPts val="0"/>
-              </a:spcAft>
-            </a:pPr>
-            <a:r>
-              <a:rPr sz="1200" b="1">
-                <a:solidFill>
-                  <a:srgbClr val="101820"/>
-                </a:solidFill>
-                <a:latin typeface="Calibri"/>
-              </a:rPr>
-              <a:t>MDoNER problem statement SIH26002</a:t>
-            </a:r>
-          </a:p>
-          <a:p>
-            <a:pPr algn="l">
-              <a:lnSpc>
-                <a:spcPct val="100000"/>
-              </a:lnSpc>
-              <a:spcAft>
-                <a:spcPts val="0"/>
-              </a:spcAft>
-            </a:pPr>
-            <a:r>
-              <a:rPr sz="1050" b="0">
-                <a:solidFill>
-                  <a:srgbClr val="6B7280"/>
-                </a:solidFill>
-                <a:latin typeface="Calibri"/>
-              </a:rPr>
-              <a:t>AI-based smart logistics and accessibility intelligence for the NER</a:t>
-            </a:r>
-          </a:p>
-        </p:txBody>
-      </p:sp>
       <p:cxnSp>
         <p:nvCxnSpPr>
-          <p:cNvPr id="17418" name="Connector 17417"/>
+          <p:cNvPr id="17411" name="Connector 17410"/>
           <p:cNvCxnSpPr/>
           <p:nvPr/>
         </p:nvCxnSpPr>
         <p:spPr>
           <a:xfrm>
-            <a:off x="6400800" y="1143000"/>
-            <a:ext cx="5349240" cy="0"/>
+            <a:off x="457200" y="1426464"/>
+            <a:ext cx="3291839" cy="0"/>
           </a:xfrm>
           <a:prstGeom prst="line">
             <a:avLst/>
           </a:prstGeom>
-          <a:ln w="12700">
+          <a:ln w="19050">
             <a:solidFill>
-              <a:srgbClr val="101820"/>
+              <a:srgbClr val="2563EB"/>
             </a:solidFill>
           </a:ln>
         </p:spPr>
@@ -16260,14 +16095,713 @@
       </p:cxnSp>
       <p:sp>
         <p:nvSpPr>
-          <p:cNvPr id="17419" name="TextBox 17418"/>
+          <p:cNvPr id="17412" name="TextBox 17411"/>
           <p:cNvSpPr txBox="1"/>
           <p:nvPr/>
         </p:nvSpPr>
         <p:spPr>
           <a:xfrm>
-            <a:off x="6400800" y="1207008"/>
-            <a:ext cx="5349240" cy="329184"/>
+            <a:off x="457200" y="1481328"/>
+            <a:ext cx="3291840" cy="1097280"/>
+          </a:xfrm>
+          <a:prstGeom prst="rect">
+            <a:avLst/>
+          </a:prstGeom>
+          <a:noFill/>
+        </p:spPr>
+        <p:txBody>
+          <a:bodyPr wrap="square" anchor="t" lIns="18288" rIns="18288" tIns="18288" bIns="18288">
+            <a:spAutoFit/>
+          </a:bodyPr>
+          <a:lstStyle/>
+          <a:p>
+            <a:pPr algn="l">
+              <a:lnSpc>
+                <a:spcPct val="105000"/>
+              </a:lnSpc>
+              <a:spcAft>
+                <a:spcPts val="300"/>
+              </a:spcAft>
+            </a:pPr>
+            <a:r>
+              <a:rPr sz="1000" b="1">
+                <a:solidFill>
+                  <a:srgbClr val="2563EB"/>
+                </a:solidFill>
+                <a:latin typeface="Calibri"/>
+              </a:rPr>
+              <a:t>ROUTING / PLACES</a:t>
+            </a:r>
+          </a:p>
+          <a:p>
+            <a:pPr algn="l">
+              <a:lnSpc>
+                <a:spcPct val="105000"/>
+              </a:lnSpc>
+              <a:spcAft>
+                <a:spcPts val="300"/>
+              </a:spcAft>
+            </a:pPr>
+            <a:r>
+              <a:rPr sz="1150" b="1">
+                <a:solidFill>
+                  <a:srgbClr val="101820"/>
+                </a:solidFill>
+                <a:latin typeface="Calibri"/>
+              </a:rPr>
+              <a:t>OSRM · OpenStreetMap · Nominatim</a:t>
+            </a:r>
+          </a:p>
+          <a:p>
+            <a:pPr algn="l">
+              <a:lnSpc>
+                <a:spcPct val="105000"/>
+              </a:lnSpc>
+              <a:spcAft>
+                <a:spcPts val="300"/>
+              </a:spcAft>
+            </a:pPr>
+            <a:r>
+              <a:rPr sz="1050" b="0">
+                <a:solidFill>
+                  <a:srgbClr val="6B7280"/>
+                </a:solidFill>
+                <a:latin typeface="Calibri"/>
+              </a:rPr>
+              <a:t>real road geometry, alternatives and turn steps; place search on the corridor</a:t>
+            </a:r>
+          </a:p>
+        </p:txBody>
+      </p:sp>
+      <p:cxnSp>
+        <p:nvCxnSpPr>
+          <p:cNvPr id="17413" name="Connector 17412"/>
+          <p:cNvCxnSpPr/>
+          <p:nvPr/>
+        </p:nvCxnSpPr>
+        <p:spPr>
+          <a:xfrm>
+            <a:off x="4023360" y="1426464"/>
+            <a:ext cx="3291840" cy="0"/>
+          </a:xfrm>
+          <a:prstGeom prst="line">
+            <a:avLst/>
+          </a:prstGeom>
+          <a:ln w="19050">
+            <a:solidFill>
+              <a:srgbClr val="2563EB"/>
+            </a:solidFill>
+          </a:ln>
+        </p:spPr>
+        <p:style>
+          <a:lnRef idx="2">
+            <a:schemeClr val="accent1"/>
+          </a:lnRef>
+          <a:fillRef idx="0">
+            <a:schemeClr val="accent1"/>
+          </a:fillRef>
+          <a:effectRef idx="1">
+            <a:schemeClr val="accent1"/>
+          </a:effectRef>
+          <a:fontRef idx="minor">
+            <a:schemeClr val="tx1"/>
+          </a:fontRef>
+        </p:style>
+      </p:cxnSp>
+      <p:sp>
+        <p:nvSpPr>
+          <p:cNvPr id="17414" name="TextBox 17413"/>
+          <p:cNvSpPr txBox="1"/>
+          <p:nvPr/>
+        </p:nvSpPr>
+        <p:spPr>
+          <a:xfrm>
+            <a:off x="4023360" y="1481328"/>
+            <a:ext cx="3291840" cy="1097280"/>
+          </a:xfrm>
+          <a:prstGeom prst="rect">
+            <a:avLst/>
+          </a:prstGeom>
+          <a:noFill/>
+        </p:spPr>
+        <p:txBody>
+          <a:bodyPr wrap="square" anchor="t" lIns="18288" rIns="18288" tIns="18288" bIns="18288">
+            <a:spAutoFit/>
+          </a:bodyPr>
+          <a:lstStyle/>
+          <a:p>
+            <a:pPr algn="l">
+              <a:lnSpc>
+                <a:spcPct val="105000"/>
+              </a:lnSpc>
+              <a:spcAft>
+                <a:spcPts val="300"/>
+              </a:spcAft>
+            </a:pPr>
+            <a:r>
+              <a:rPr sz="1000" b="1">
+                <a:solidFill>
+                  <a:srgbClr val="2563EB"/>
+                </a:solidFill>
+                <a:latin typeface="Calibri"/>
+              </a:rPr>
+              <a:t>WEATHER / TERRAIN</a:t>
+            </a:r>
+          </a:p>
+          <a:p>
+            <a:pPr algn="l">
+              <a:lnSpc>
+                <a:spcPct val="105000"/>
+              </a:lnSpc>
+              <a:spcAft>
+                <a:spcPts val="300"/>
+              </a:spcAft>
+            </a:pPr>
+            <a:r>
+              <a:rPr sz="1150" b="1">
+                <a:solidFill>
+                  <a:srgbClr val="101820"/>
+                </a:solidFill>
+                <a:latin typeface="Calibri"/>
+              </a:rPr>
+              <a:t>Open-Meteo · MET Norway · Copernicus DEM · OpenTopoData</a:t>
+            </a:r>
+          </a:p>
+          <a:p>
+            <a:pPr algn="l">
+              <a:lnSpc>
+                <a:spcPct val="105000"/>
+              </a:lnSpc>
+              <a:spcAft>
+                <a:spcPts val="300"/>
+              </a:spcAft>
+            </a:pPr>
+            <a:r>
+              <a:rPr sz="1050" b="0">
+                <a:solidFill>
+                  <a:srgbClr val="6B7280"/>
+                </a:solidFill>
+                <a:latin typeface="Calibri"/>
+              </a:rPr>
+              <a:t>forecast sampled along the road; climb, gradient and steep segments (GLO-90)</a:t>
+            </a:r>
+          </a:p>
+        </p:txBody>
+      </p:sp>
+      <p:cxnSp>
+        <p:nvCxnSpPr>
+          <p:cNvPr id="17415" name="Connector 17414"/>
+          <p:cNvCxnSpPr/>
+          <p:nvPr/>
+        </p:nvCxnSpPr>
+        <p:spPr>
+          <a:xfrm>
+            <a:off x="457200" y="2761488"/>
+            <a:ext cx="3291839" cy="0"/>
+          </a:xfrm>
+          <a:prstGeom prst="line">
+            <a:avLst/>
+          </a:prstGeom>
+          <a:ln w="19050">
+            <a:solidFill>
+              <a:srgbClr val="2563EB"/>
+            </a:solidFill>
+          </a:ln>
+        </p:spPr>
+        <p:style>
+          <a:lnRef idx="2">
+            <a:schemeClr val="accent1"/>
+          </a:lnRef>
+          <a:fillRef idx="0">
+            <a:schemeClr val="accent1"/>
+          </a:fillRef>
+          <a:effectRef idx="1">
+            <a:schemeClr val="accent1"/>
+          </a:effectRef>
+          <a:fontRef idx="minor">
+            <a:schemeClr val="tx1"/>
+          </a:fontRef>
+        </p:style>
+      </p:cxnSp>
+      <p:sp>
+        <p:nvSpPr>
+          <p:cNvPr id="17416" name="TextBox 17415"/>
+          <p:cNvSpPr txBox="1"/>
+          <p:nvPr/>
+        </p:nvSpPr>
+        <p:spPr>
+          <a:xfrm>
+            <a:off x="457200" y="2816352"/>
+            <a:ext cx="3291840" cy="1097280"/>
+          </a:xfrm>
+          <a:prstGeom prst="rect">
+            <a:avLst/>
+          </a:prstGeom>
+          <a:noFill/>
+        </p:spPr>
+        <p:txBody>
+          <a:bodyPr wrap="square" anchor="t" lIns="18288" rIns="18288" tIns="18288" bIns="18288">
+            <a:spAutoFit/>
+          </a:bodyPr>
+          <a:lstStyle/>
+          <a:p>
+            <a:pPr algn="l">
+              <a:lnSpc>
+                <a:spcPct val="105000"/>
+              </a:lnSpc>
+              <a:spcAft>
+                <a:spcPts val="300"/>
+              </a:spcAft>
+            </a:pPr>
+            <a:r>
+              <a:rPr sz="1000" b="1">
+                <a:solidFill>
+                  <a:srgbClr val="2563EB"/>
+                </a:solidFill>
+                <a:latin typeface="Calibri"/>
+              </a:rPr>
+              <a:t>OFFICIAL / FLOOD</a:t>
+            </a:r>
+          </a:p>
+          <a:p>
+            <a:pPr algn="l">
+              <a:lnSpc>
+                <a:spcPct val="105000"/>
+              </a:lnSpc>
+              <a:spcAft>
+                <a:spcPts val="300"/>
+              </a:spcAft>
+            </a:pPr>
+            <a:r>
+              <a:rPr sz="1150" b="1">
+                <a:solidFill>
+                  <a:srgbClr val="101820"/>
+                </a:solidFill>
+                <a:latin typeface="Calibri"/>
+              </a:rPr>
+              <a:t>NDMA SACHET (CAP) · Copernicus GloFAS</a:t>
+            </a:r>
+          </a:p>
+          <a:p>
+            <a:pPr algn="l">
+              <a:lnSpc>
+                <a:spcPct val="105000"/>
+              </a:lnSpc>
+              <a:spcAft>
+                <a:spcPts val="300"/>
+              </a:spcAft>
+            </a:pPr>
+            <a:r>
+              <a:rPr sz="1050" b="0">
+                <a:solidFill>
+                  <a:srgbClr val="6B7280"/>
+                </a:solidFill>
+                <a:latin typeface="Calibri"/>
+              </a:rPr>
+              <a:t>official warnings polled with freshness; river discharge against its 30-day mean</a:t>
+            </a:r>
+          </a:p>
+        </p:txBody>
+      </p:sp>
+      <p:cxnSp>
+        <p:nvCxnSpPr>
+          <p:cNvPr id="17417" name="Connector 17416"/>
+          <p:cNvCxnSpPr/>
+          <p:nvPr/>
+        </p:nvCxnSpPr>
+        <p:spPr>
+          <a:xfrm>
+            <a:off x="4023360" y="2761488"/>
+            <a:ext cx="3291840" cy="0"/>
+          </a:xfrm>
+          <a:prstGeom prst="line">
+            <a:avLst/>
+          </a:prstGeom>
+          <a:ln w="19050">
+            <a:solidFill>
+              <a:srgbClr val="2563EB"/>
+            </a:solidFill>
+          </a:ln>
+        </p:spPr>
+        <p:style>
+          <a:lnRef idx="2">
+            <a:schemeClr val="accent1"/>
+          </a:lnRef>
+          <a:fillRef idx="0">
+            <a:schemeClr val="accent1"/>
+          </a:fillRef>
+          <a:effectRef idx="1">
+            <a:schemeClr val="accent1"/>
+          </a:effectRef>
+          <a:fontRef idx="minor">
+            <a:schemeClr val="tx1"/>
+          </a:fontRef>
+        </p:style>
+      </p:cxnSp>
+      <p:sp>
+        <p:nvSpPr>
+          <p:cNvPr id="17418" name="TextBox 17417"/>
+          <p:cNvSpPr txBox="1"/>
+          <p:nvPr/>
+        </p:nvSpPr>
+        <p:spPr>
+          <a:xfrm>
+            <a:off x="4023360" y="2816352"/>
+            <a:ext cx="3291840" cy="1097280"/>
+          </a:xfrm>
+          <a:prstGeom prst="rect">
+            <a:avLst/>
+          </a:prstGeom>
+          <a:noFill/>
+        </p:spPr>
+        <p:txBody>
+          <a:bodyPr wrap="square" anchor="t" lIns="18288" rIns="18288" tIns="18288" bIns="18288">
+            <a:spAutoFit/>
+          </a:bodyPr>
+          <a:lstStyle/>
+          <a:p>
+            <a:pPr algn="l">
+              <a:lnSpc>
+                <a:spcPct val="105000"/>
+              </a:lnSpc>
+              <a:spcAft>
+                <a:spcPts val="300"/>
+              </a:spcAft>
+            </a:pPr>
+            <a:r>
+              <a:rPr sz="1000" b="1">
+                <a:solidFill>
+                  <a:srgbClr val="2563EB"/>
+                </a:solidFill>
+                <a:latin typeface="Calibri"/>
+              </a:rPr>
+              <a:t>LANDSLIDE HISTORY</a:t>
+            </a:r>
+          </a:p>
+          <a:p>
+            <a:pPr algn="l">
+              <a:lnSpc>
+                <a:spcPct val="105000"/>
+              </a:lnSpc>
+              <a:spcAft>
+                <a:spcPts val="300"/>
+              </a:spcAft>
+            </a:pPr>
+            <a:r>
+              <a:rPr sz="1150" b="1">
+                <a:solidFill>
+                  <a:srgbClr val="101820"/>
+                </a:solidFill>
+                <a:latin typeface="Calibri"/>
+              </a:rPr>
+              <a:t>NASA Global Landslide Catalog</a:t>
+            </a:r>
+          </a:p>
+          <a:p>
+            <a:pPr algn="l">
+              <a:lnSpc>
+                <a:spcPct val="105000"/>
+              </a:lnSpc>
+              <a:spcAft>
+                <a:spcPts val="300"/>
+              </a:spcAft>
+            </a:pPr>
+            <a:r>
+              <a:rPr sz="1050" b="0">
+                <a:solidFill>
+                  <a:srgbClr val="6B7280"/>
+                </a:solidFill>
+                <a:latin typeface="Calibri"/>
+              </a:rPr>
+              <a:t>historical exposure; inventory 2007–2017, ≤5 km location-accuracy filter</a:t>
+            </a:r>
+          </a:p>
+        </p:txBody>
+      </p:sp>
+      <p:cxnSp>
+        <p:nvCxnSpPr>
+          <p:cNvPr id="17419" name="Connector 17418"/>
+          <p:cNvCxnSpPr/>
+          <p:nvPr/>
+        </p:nvCxnSpPr>
+        <p:spPr>
+          <a:xfrm>
+            <a:off x="457200" y="4096512"/>
+            <a:ext cx="3291839" cy="0"/>
+          </a:xfrm>
+          <a:prstGeom prst="line">
+            <a:avLst/>
+          </a:prstGeom>
+          <a:ln w="19050">
+            <a:solidFill>
+              <a:srgbClr val="2563EB"/>
+            </a:solidFill>
+          </a:ln>
+        </p:spPr>
+        <p:style>
+          <a:lnRef idx="2">
+            <a:schemeClr val="accent1"/>
+          </a:lnRef>
+          <a:fillRef idx="0">
+            <a:schemeClr val="accent1"/>
+          </a:fillRef>
+          <a:effectRef idx="1">
+            <a:schemeClr val="accent1"/>
+          </a:effectRef>
+          <a:fontRef idx="minor">
+            <a:schemeClr val="tx1"/>
+          </a:fontRef>
+        </p:style>
+      </p:cxnSp>
+      <p:sp>
+        <p:nvSpPr>
+          <p:cNvPr id="17420" name="TextBox 17419"/>
+          <p:cNvSpPr txBox="1"/>
+          <p:nvPr/>
+        </p:nvSpPr>
+        <p:spPr>
+          <a:xfrm>
+            <a:off x="457200" y="4151376"/>
+            <a:ext cx="3291840" cy="1097280"/>
+          </a:xfrm>
+          <a:prstGeom prst="rect">
+            <a:avLst/>
+          </a:prstGeom>
+          <a:noFill/>
+        </p:spPr>
+        <p:txBody>
+          <a:bodyPr wrap="square" anchor="t" lIns="18288" rIns="18288" tIns="18288" bIns="18288">
+            <a:spAutoFit/>
+          </a:bodyPr>
+          <a:lstStyle/>
+          <a:p>
+            <a:pPr algn="l">
+              <a:lnSpc>
+                <a:spcPct val="105000"/>
+              </a:lnSpc>
+              <a:spcAft>
+                <a:spcPts val="300"/>
+              </a:spcAft>
+            </a:pPr>
+            <a:r>
+              <a:rPr sz="1000" b="1">
+                <a:solidFill>
+                  <a:srgbClr val="2563EB"/>
+                </a:solidFill>
+                <a:latin typeface="Calibri"/>
+              </a:rPr>
+              <a:t>AI ASSISTANCE</a:t>
+            </a:r>
+          </a:p>
+          <a:p>
+            <a:pPr algn="l">
+              <a:lnSpc>
+                <a:spcPct val="105000"/>
+              </a:lnSpc>
+              <a:spcAft>
+                <a:spcPts val="300"/>
+              </a:spcAft>
+            </a:pPr>
+            <a:r>
+              <a:rPr sz="1150" b="1">
+                <a:solidFill>
+                  <a:srgbClr val="101820"/>
+                </a:solidFill>
+                <a:latin typeface="Calibri"/>
+              </a:rPr>
+              <a:t>Google Gemini</a:t>
+            </a:r>
+          </a:p>
+          <a:p>
+            <a:pPr algn="l">
+              <a:lnSpc>
+                <a:spcPct val="105000"/>
+              </a:lnSpc>
+              <a:spcAft>
+                <a:spcPts val="300"/>
+              </a:spcAft>
+            </a:pPr>
+            <a:r>
+              <a:rPr sz="1050" b="0">
+                <a:solidFill>
+                  <a:srgbClr val="6B7280"/>
+                </a:solidFill>
+                <a:latin typeface="Calibri"/>
+              </a:rPr>
+              <a:t>explains the decision in the driver's language — never safety authority</a:t>
+            </a:r>
+          </a:p>
+        </p:txBody>
+      </p:sp>
+      <p:cxnSp>
+        <p:nvCxnSpPr>
+          <p:cNvPr id="17421" name="Connector 17420"/>
+          <p:cNvCxnSpPr/>
+          <p:nvPr/>
+        </p:nvCxnSpPr>
+        <p:spPr>
+          <a:xfrm>
+            <a:off x="4023360" y="4096512"/>
+            <a:ext cx="3291840" cy="0"/>
+          </a:xfrm>
+          <a:prstGeom prst="line">
+            <a:avLst/>
+          </a:prstGeom>
+          <a:ln w="19050">
+            <a:solidFill>
+              <a:srgbClr val="2563EB"/>
+            </a:solidFill>
+          </a:ln>
+        </p:spPr>
+        <p:style>
+          <a:lnRef idx="2">
+            <a:schemeClr val="accent1"/>
+          </a:lnRef>
+          <a:fillRef idx="0">
+            <a:schemeClr val="accent1"/>
+          </a:fillRef>
+          <a:effectRef idx="1">
+            <a:schemeClr val="accent1"/>
+          </a:effectRef>
+          <a:fontRef idx="minor">
+            <a:schemeClr val="tx1"/>
+          </a:fontRef>
+        </p:style>
+      </p:cxnSp>
+      <p:sp>
+        <p:nvSpPr>
+          <p:cNvPr id="17422" name="TextBox 17421"/>
+          <p:cNvSpPr txBox="1"/>
+          <p:nvPr/>
+        </p:nvSpPr>
+        <p:spPr>
+          <a:xfrm>
+            <a:off x="4023360" y="4151376"/>
+            <a:ext cx="3291840" cy="1097280"/>
+          </a:xfrm>
+          <a:prstGeom prst="rect">
+            <a:avLst/>
+          </a:prstGeom>
+          <a:noFill/>
+        </p:spPr>
+        <p:txBody>
+          <a:bodyPr wrap="square" anchor="t" lIns="18288" rIns="18288" tIns="18288" bIns="18288">
+            <a:spAutoFit/>
+          </a:bodyPr>
+          <a:lstStyle/>
+          <a:p>
+            <a:pPr algn="l">
+              <a:lnSpc>
+                <a:spcPct val="105000"/>
+              </a:lnSpc>
+              <a:spcAft>
+                <a:spcPts val="300"/>
+              </a:spcAft>
+            </a:pPr>
+            <a:r>
+              <a:rPr sz="1000" b="1">
+                <a:solidFill>
+                  <a:srgbClr val="2563EB"/>
+                </a:solidFill>
+                <a:latin typeface="Calibri"/>
+              </a:rPr>
+              <a:t>PROBLEM STATEMENT</a:t>
+            </a:r>
+          </a:p>
+          <a:p>
+            <a:pPr algn="l">
+              <a:lnSpc>
+                <a:spcPct val="105000"/>
+              </a:lnSpc>
+              <a:spcAft>
+                <a:spcPts val="300"/>
+              </a:spcAft>
+            </a:pPr>
+            <a:r>
+              <a:rPr sz="1150" b="1">
+                <a:solidFill>
+                  <a:srgbClr val="101820"/>
+                </a:solidFill>
+                <a:latin typeface="Calibri"/>
+              </a:rPr>
+              <a:t>MDoNER · SIH26002</a:t>
+            </a:r>
+          </a:p>
+          <a:p>
+            <a:pPr algn="l">
+              <a:lnSpc>
+                <a:spcPct val="105000"/>
+              </a:lnSpc>
+              <a:spcAft>
+                <a:spcPts val="300"/>
+              </a:spcAft>
+            </a:pPr>
+            <a:r>
+              <a:rPr sz="1050" b="0">
+                <a:solidFill>
+                  <a:srgbClr val="6B7280"/>
+                </a:solidFill>
+                <a:latin typeface="Calibri"/>
+              </a:rPr>
+              <a:t>AI-based smart logistics and accessibility intelligence for the NER</a:t>
+            </a:r>
+          </a:p>
+        </p:txBody>
+      </p:sp>
+      <p:sp>
+        <p:nvSpPr>
+          <p:cNvPr id="17423" name="Rounded Rectangle 17422"/>
+          <p:cNvSpPr/>
+          <p:nvPr/>
+        </p:nvSpPr>
+        <p:spPr>
+          <a:xfrm>
+            <a:off x="7379208" y="1042415"/>
+            <a:ext cx="4535424" cy="4425696"/>
+          </a:xfrm>
+          <a:prstGeom prst="roundRect">
+            <a:avLst>
+              <a:gd name="adj" fmla="val 12000"/>
+            </a:avLst>
+          </a:prstGeom>
+          <a:solidFill>
+            <a:srgbClr val="F7F8FA"/>
+          </a:solidFill>
+          <a:ln>
+            <a:noFill/>
+          </a:ln>
+          <a:effectLst/>
+        </p:spPr>
+        <p:style>
+          <a:lnRef idx="1">
+            <a:schemeClr val="accent1"/>
+          </a:lnRef>
+          <a:fillRef idx="3">
+            <a:schemeClr val="accent1"/>
+          </a:fillRef>
+          <a:effectRef idx="2">
+            <a:schemeClr val="accent1"/>
+          </a:effectRef>
+          <a:fontRef idx="minor">
+            <a:schemeClr val="lt1"/>
+          </a:fontRef>
+        </p:style>
+        <p:txBody>
+          <a:bodyPr rtlCol="0" anchor="ctr"/>
+          <a:lstStyle/>
+          <a:p/>
+        </p:txBody>
+      </p:sp>
+      <p:sp>
+        <p:nvSpPr>
+          <p:cNvPr id="17424" name="TextBox 17423"/>
+          <p:cNvSpPr txBox="1"/>
+          <p:nvPr/>
+        </p:nvSpPr>
+        <p:spPr>
+          <a:xfrm>
+            <a:off x="7543800" y="1152144"/>
+            <a:ext cx="4206240" cy="329184"/>
           </a:xfrm>
           <a:prstGeom prst="rect">
             <a:avLst/>
@@ -16295,21 +16829,21 @@
                 </a:solidFill>
                 <a:latin typeface="Calibri"/>
               </a:rPr>
-              <a:t>EXPERIMENTAL LANDSLIDE RESEARCH  ·  ML-ready architecture, model not in production</a:t>
-            </a:r>
-          </a:p>
-        </p:txBody>
-      </p:sp>
-      <p:sp>
-        <p:nvSpPr>
-          <p:cNvPr id="17420" name="TextBox 17419"/>
+              <a:t>EXPERIMENTAL LANDSLIDE RESEARCH</a:t>
+            </a:r>
+          </a:p>
+        </p:txBody>
+      </p:sp>
+      <p:sp>
+        <p:nvSpPr>
+          <p:cNvPr id="17425" name="TextBox 17424"/>
           <p:cNvSpPr txBox="1"/>
           <p:nvPr/>
         </p:nvSpPr>
         <p:spPr>
           <a:xfrm>
-            <a:off x="6400800" y="1572768"/>
-            <a:ext cx="1143000" cy="640080"/>
+            <a:off x="7543800" y="1389888"/>
+            <a:ext cx="1691640" cy="868680"/>
           </a:xfrm>
           <a:prstGeom prst="rect">
             <a:avLst/>
@@ -16331,7 +16865,7 @@
               </a:spcAft>
             </a:pPr>
             <a:r>
-              <a:rPr sz="3000" b="1">
+              <a:rPr sz="4400" b="1">
                 <a:solidFill>
                   <a:srgbClr val="101820"/>
                 </a:solidFill>
@@ -16344,75 +16878,14 @@
       </p:sp>
       <p:sp>
         <p:nvSpPr>
-          <p:cNvPr id="17421" name="TextBox 17420"/>
+          <p:cNvPr id="17426" name="TextBox 17425"/>
           <p:cNvSpPr txBox="1"/>
           <p:nvPr/>
         </p:nvSpPr>
         <p:spPr>
           <a:xfrm>
-            <a:off x="7589520" y="1572768"/>
-            <a:ext cx="1783080" cy="640080"/>
-          </a:xfrm>
-          <a:prstGeom prst="rect">
-            <a:avLst/>
-          </a:prstGeom>
-          <a:noFill/>
-        </p:spPr>
-        <p:txBody>
-          <a:bodyPr wrap="square" anchor="ctr" lIns="18288" rIns="18288" tIns="18288" bIns="18288">
-            <a:spAutoFit/>
-          </a:bodyPr>
-          <a:lstStyle/>
-          <a:p>
-            <a:pPr algn="l">
-              <a:lnSpc>
-                <a:spcPct val="100000"/>
-              </a:lnSpc>
-              <a:spcAft>
-                <a:spcPts val="0"/>
-              </a:spcAft>
-            </a:pPr>
-            <a:r>
-              <a:rPr sz="1050" b="1">
-                <a:solidFill>
-                  <a:srgbClr val="6B7280"/>
-                </a:solidFill>
-                <a:latin typeface="Calibri"/>
-              </a:rPr>
-              <a:t>RECALL</a:t>
-            </a:r>
-          </a:p>
-          <a:p>
-            <a:pPr algn="l">
-              <a:lnSpc>
-                <a:spcPct val="100000"/>
-              </a:lnSpc>
-              <a:spcAft>
-                <a:spcPts val="0"/>
-              </a:spcAft>
-            </a:pPr>
-            <a:r>
-              <a:rPr sz="950" b="0">
-                <a:solidFill>
-                  <a:srgbClr val="6B7280"/>
-                </a:solidFill>
-                <a:latin typeface="Calibri"/>
-              </a:rPr>
-              <a:t>NER geographic holdout (154 events)</a:t>
-            </a:r>
-          </a:p>
-        </p:txBody>
-      </p:sp>
-      <p:sp>
-        <p:nvSpPr>
-          <p:cNvPr id="17422" name="TextBox 17421"/>
-          <p:cNvSpPr txBox="1"/>
-          <p:nvPr/>
-        </p:nvSpPr>
-        <p:spPr>
-          <a:xfrm>
-            <a:off x="9509760" y="1572768"/>
-            <a:ext cx="1051560" cy="640080"/>
+            <a:off x="9235440" y="1426464"/>
+            <a:ext cx="2514599" cy="804672"/>
           </a:xfrm>
           <a:prstGeom prst="rect">
             <a:avLst/>
@@ -16434,154 +16907,15 @@
               </a:spcAft>
             </a:pPr>
             <a:r>
-              <a:rPr sz="3000" b="1">
-                <a:solidFill>
-                  <a:srgbClr val="DC2626"/>
-                </a:solidFill>
-                <a:latin typeface="Calibri"/>
-              </a:rPr>
-              <a:t>50 %</a:t>
-            </a:r>
-          </a:p>
-        </p:txBody>
-      </p:sp>
-      <p:sp>
-        <p:nvSpPr>
-          <p:cNvPr id="17423" name="TextBox 17422"/>
-          <p:cNvSpPr txBox="1"/>
-          <p:nvPr/>
-        </p:nvSpPr>
-        <p:spPr>
-          <a:xfrm>
-            <a:off x="10607040" y="1572768"/>
-            <a:ext cx="1143000" cy="640080"/>
-          </a:xfrm>
-          <a:prstGeom prst="rect">
-            <a:avLst/>
-          </a:prstGeom>
-          <a:noFill/>
-        </p:spPr>
-        <p:txBody>
-          <a:bodyPr wrap="square" anchor="ctr" lIns="18288" rIns="18288" tIns="18288" bIns="18288">
-            <a:spAutoFit/>
-          </a:bodyPr>
-          <a:lstStyle/>
-          <a:p>
-            <a:pPr algn="l">
-              <a:lnSpc>
-                <a:spcPct val="100000"/>
-              </a:lnSpc>
-              <a:spcAft>
-                <a:spcPts val="0"/>
-              </a:spcAft>
-            </a:pPr>
-            <a:r>
-              <a:rPr sz="950" b="1">
-                <a:solidFill>
-                  <a:srgbClr val="6B7280"/>
-                </a:solidFill>
-                <a:latin typeface="Calibri"/>
-              </a:rPr>
-              <a:t>FALSE-POSITIVE RATE</a:t>
-            </a:r>
-          </a:p>
-          <a:p>
-            <a:pPr algn="l">
-              <a:lnSpc>
-                <a:spcPct val="100000"/>
-              </a:lnSpc>
-              <a:spcAft>
-                <a:spcPts val="0"/>
-              </a:spcAft>
-            </a:pPr>
-            <a:r>
-              <a:rPr sz="950" b="0">
-                <a:solidFill>
-                  <a:srgbClr val="6B7280"/>
-                </a:solidFill>
-                <a:latin typeface="Calibri"/>
-              </a:rPr>
-              <a:t>too high for production</a:t>
-            </a:r>
-          </a:p>
-        </p:txBody>
-      </p:sp>
-      <p:sp>
-        <p:nvSpPr>
-          <p:cNvPr id="17424" name="Rounded Rectangle 17423"/>
-          <p:cNvSpPr/>
-          <p:nvPr/>
-        </p:nvSpPr>
-        <p:spPr>
-          <a:xfrm>
-            <a:off x="6400800" y="2331720"/>
-            <a:ext cx="2514600" cy="329184"/>
-          </a:xfrm>
-          <a:prstGeom prst="roundRect">
-            <a:avLst>
-              <a:gd name="adj" fmla="val 50000"/>
-            </a:avLst>
-          </a:prstGeom>
-          <a:solidFill>
-            <a:srgbClr val="101820"/>
-          </a:solidFill>
-          <a:ln>
-            <a:noFill/>
-          </a:ln>
-          <a:effectLst/>
-        </p:spPr>
-        <p:style>
-          <a:lnRef idx="1">
-            <a:schemeClr val="accent1"/>
-          </a:lnRef>
-          <a:fillRef idx="3">
-            <a:schemeClr val="accent1"/>
-          </a:fillRef>
-          <a:effectRef idx="2">
-            <a:schemeClr val="accent1"/>
-          </a:effectRef>
-          <a:fontRef idx="minor">
-            <a:schemeClr val="lt1"/>
-          </a:fontRef>
-        </p:style>
-        <p:txBody>
-          <a:bodyPr rtlCol="0" anchor="ctr" lIns="54864" rIns="54864" tIns="0" bIns="0" wrap="square"/>
-          <a:lstStyle/>
-          <a:p>
-            <a:pPr algn="ctr"/>
-            <a:r>
-              <a:rPr sz="1050" b="1">
-                <a:solidFill>
-                  <a:srgbClr val="FFFFFF"/>
-                </a:solidFill>
-                <a:latin typeface="Calibri"/>
-              </a:rPr>
-              <a:t>SAFETY GATE  ·  NOT DEPLOYED</a:t>
-            </a:r>
-          </a:p>
-        </p:txBody>
-      </p:sp>
-      <p:sp>
-        <p:nvSpPr>
-          <p:cNvPr id="17425" name="TextBox 17424"/>
-          <p:cNvSpPr txBox="1"/>
-          <p:nvPr/>
-        </p:nvSpPr>
-        <p:spPr>
-          <a:xfrm>
-            <a:off x="9052560" y="2331720"/>
-            <a:ext cx="2697479" cy="329184"/>
-          </a:xfrm>
-          <a:prstGeom prst="rect">
-            <a:avLst/>
-          </a:prstGeom>
-          <a:noFill/>
-        </p:spPr>
-        <p:txBody>
-          <a:bodyPr wrap="square" anchor="ctr" lIns="18288" rIns="18288" tIns="18288" bIns="18288">
-            <a:spAutoFit/>
-          </a:bodyPr>
-          <a:lstStyle/>
+              <a:rPr sz="1200" b="1">
+                <a:solidFill>
+                  <a:srgbClr val="101820"/>
+                </a:solidFill>
+                <a:latin typeface="Calibri"/>
+              </a:rPr>
+              <a:t>RECALL</a:t>
+            </a:r>
+          </a:p>
           <a:p>
             <a:pPr algn="l">
               <a:lnSpc>
@@ -16592,27 +16926,183 @@
               </a:spcAft>
             </a:pPr>
             <a:r>
+              <a:rPr sz="950" b="0">
+                <a:solidFill>
+                  <a:srgbClr val="6B7280"/>
+                </a:solidFill>
+                <a:latin typeface="Calibri"/>
+              </a:rPr>
+              <a:t>on the NER geographic holdout — 154 catalogued events, no NER row used in training</a:t>
+            </a:r>
+          </a:p>
+        </p:txBody>
+      </p:sp>
+      <p:sp>
+        <p:nvSpPr>
+          <p:cNvPr id="17427" name="Rounded Rectangle 17426"/>
+          <p:cNvSpPr/>
+          <p:nvPr/>
+        </p:nvSpPr>
+        <p:spPr>
+          <a:xfrm>
+            <a:off x="7543800" y="2395728"/>
+            <a:ext cx="4206240" cy="749808"/>
+          </a:xfrm>
+          <a:prstGeom prst="roundRect">
+            <a:avLst>
+              <a:gd name="adj" fmla="val 12000"/>
+            </a:avLst>
+          </a:prstGeom>
+          <a:solidFill>
+            <a:srgbClr val="101820"/>
+          </a:solidFill>
+          <a:ln>
+            <a:noFill/>
+          </a:ln>
+          <a:effectLst/>
+        </p:spPr>
+        <p:style>
+          <a:lnRef idx="1">
+            <a:schemeClr val="accent1"/>
+          </a:lnRef>
+          <a:fillRef idx="3">
+            <a:schemeClr val="accent1"/>
+          </a:fillRef>
+          <a:effectRef idx="2">
+            <a:schemeClr val="accent1"/>
+          </a:effectRef>
+          <a:fontRef idx="minor">
+            <a:schemeClr val="lt1"/>
+          </a:fontRef>
+        </p:style>
+        <p:txBody>
+          <a:bodyPr rtlCol="0" anchor="ctr"/>
+          <a:lstStyle/>
+          <a:p/>
+        </p:txBody>
+      </p:sp>
+      <p:sp>
+        <p:nvSpPr>
+          <p:cNvPr id="17428" name="TextBox 17427"/>
+          <p:cNvSpPr txBox="1"/>
+          <p:nvPr/>
+        </p:nvSpPr>
+        <p:spPr>
+          <a:xfrm>
+            <a:off x="7543800" y="2450592"/>
+            <a:ext cx="4206240" cy="658368"/>
+          </a:xfrm>
+          <a:prstGeom prst="rect">
+            <a:avLst/>
+          </a:prstGeom>
+          <a:noFill/>
+        </p:spPr>
+        <p:txBody>
+          <a:bodyPr wrap="square" anchor="ctr" lIns="18288" rIns="18288" tIns="18288" bIns="18288">
+            <a:spAutoFit/>
+          </a:bodyPr>
+          <a:lstStyle/>
+          <a:p>
+            <a:pPr algn="ctr">
+              <a:lnSpc>
+                <a:spcPct val="100000"/>
+              </a:lnSpc>
+              <a:spcAft>
+                <a:spcPts val="0"/>
+              </a:spcAft>
+            </a:pPr>
+            <a:r>
+              <a:rPr sz="1100" b="1">
+                <a:solidFill>
+                  <a:srgbClr val="9CA3AF"/>
+                </a:solidFill>
+                <a:latin typeface="Calibri"/>
+              </a:rPr>
+              <a:t>SAFETY GATE</a:t>
+            </a:r>
+          </a:p>
+          <a:p>
+            <a:pPr algn="ctr">
+              <a:lnSpc>
+                <a:spcPct val="100000"/>
+              </a:lnSpc>
+              <a:spcAft>
+                <a:spcPts val="0"/>
+              </a:spcAft>
+            </a:pPr>
+            <a:r>
+              <a:rPr sz="2100" b="1">
+                <a:solidFill>
+                  <a:srgbClr val="FFFFFF"/>
+                </a:solidFill>
+                <a:latin typeface="Calibri"/>
+              </a:rPr>
+              <a:t>NOT DEPLOYED</a:t>
+            </a:r>
+          </a:p>
+        </p:txBody>
+      </p:sp>
+      <p:sp>
+        <p:nvSpPr>
+          <p:cNvPr id="17429" name="TextBox 17428"/>
+          <p:cNvSpPr txBox="1"/>
+          <p:nvPr/>
+        </p:nvSpPr>
+        <p:spPr>
+          <a:xfrm>
+            <a:off x="7543800" y="3218688"/>
+            <a:ext cx="4206240" cy="329184"/>
+          </a:xfrm>
+          <a:prstGeom prst="rect">
+            <a:avLst/>
+          </a:prstGeom>
+          <a:noFill/>
+        </p:spPr>
+        <p:txBody>
+          <a:bodyPr wrap="square" anchor="ctr" lIns="18288" rIns="18288" tIns="18288" bIns="18288">
+            <a:spAutoFit/>
+          </a:bodyPr>
+          <a:lstStyle/>
+          <a:p>
+            <a:pPr algn="l">
+              <a:lnSpc>
+                <a:spcPct val="105000"/>
+              </a:lnSpc>
+              <a:spcAft>
+                <a:spcPts val="0"/>
+              </a:spcAft>
+            </a:pPr>
+            <a:r>
+              <a:rPr sz="1300" b="1">
+                <a:solidFill>
+                  <a:srgbClr val="DC2626"/>
+                </a:solidFill>
+                <a:latin typeface="Calibri"/>
+              </a:rPr>
+              <a:t>FPR 50 %</a:t>
+            </a:r>
+            <a:r>
               <a:rPr sz="1000" b="0">
                 <a:solidFill>
                   <a:srgbClr val="6B7280"/>
                 </a:solidFill>
                 <a:latin typeface="Calibri"/>
               </a:rPr>
-              <a:t>trained India-wide, validated on the untouched NER holdout</a:t>
-            </a:r>
-          </a:p>
-        </p:txBody>
-      </p:sp>
-      <p:sp>
-        <p:nvSpPr>
-          <p:cNvPr id="17426" name="Rounded Rectangle 17425"/>
+              <a:t>   too high for production deployment</a:t>
+            </a:r>
+          </a:p>
+        </p:txBody>
+      </p:sp>
+      <p:sp>
+        <p:nvSpPr>
+          <p:cNvPr id="17430" name="Rounded Rectangle 17429"/>
           <p:cNvSpPr/>
           <p:nvPr/>
         </p:nvSpPr>
         <p:spPr>
           <a:xfrm>
-            <a:off x="6400800" y="2834640"/>
-            <a:ext cx="640080" cy="292608"/>
+            <a:off x="7543800" y="3602736"/>
+            <a:ext cx="713232" cy="256032"/>
           </a:xfrm>
           <a:prstGeom prst="roundRect">
             <a:avLst>
@@ -16649,7 +17139,7 @@
           <a:p>
             <a:pPr algn="ctr"/>
             <a:r>
-              <a:rPr sz="850" b="1">
+              <a:rPr sz="800" b="1">
                 <a:solidFill>
                   <a:srgbClr val="101820"/>
                 </a:solidFill>
@@ -16662,14 +17152,14 @@
       </p:sp>
       <p:cxnSp>
         <p:nvCxnSpPr>
-          <p:cNvPr id="17427" name="Connector 17426"/>
+          <p:cNvPr id="17431" name="Connector 17430"/>
           <p:cNvCxnSpPr/>
           <p:nvPr/>
         </p:nvCxnSpPr>
         <p:spPr>
           <a:xfrm>
-            <a:off x="7050024" y="2980944"/>
-            <a:ext cx="50292" cy="0"/>
+            <a:off x="8266175" y="3730752"/>
+            <a:ext cx="59436" cy="0"/>
           </a:xfrm>
           <a:prstGeom prst="line">
             <a:avLst/>
@@ -16698,14 +17188,14 @@
       </p:cxnSp>
       <p:sp>
         <p:nvSpPr>
-          <p:cNvPr id="17428" name="Rounded Rectangle 17427"/>
+          <p:cNvPr id="17432" name="Rounded Rectangle 17431"/>
           <p:cNvSpPr/>
           <p:nvPr/>
         </p:nvSpPr>
         <p:spPr>
           <a:xfrm>
-            <a:off x="7109460" y="2834640"/>
-            <a:ext cx="1051560" cy="292608"/>
+            <a:off x="8334756" y="3602736"/>
+            <a:ext cx="1481328" cy="256032"/>
           </a:xfrm>
           <a:prstGeom prst="roundRect">
             <a:avLst>
@@ -16742,27 +17232,27 @@
           <a:p>
             <a:pPr algn="ctr"/>
             <a:r>
-              <a:rPr sz="850" b="1">
+              <a:rPr sz="800" b="1">
                 <a:solidFill>
                   <a:srgbClr val="101820"/>
                 </a:solidFill>
                 <a:latin typeface="Calibri"/>
               </a:rPr>
-              <a:t>HELD-OUT TEST</a:t>
+              <a:t>HELD-OUT NER TEST</a:t>
             </a:r>
           </a:p>
         </p:txBody>
       </p:sp>
       <p:cxnSp>
         <p:nvCxnSpPr>
-          <p:cNvPr id="17429" name="Connector 17428"/>
+          <p:cNvPr id="17433" name="Connector 17432"/>
           <p:cNvCxnSpPr/>
           <p:nvPr/>
         </p:nvCxnSpPr>
         <p:spPr>
           <a:xfrm>
-            <a:off x="8170164" y="2980944"/>
-            <a:ext cx="50292" cy="0"/>
+            <a:off x="9825228" y="3730752"/>
+            <a:ext cx="59435" cy="0"/>
           </a:xfrm>
           <a:prstGeom prst="line">
             <a:avLst/>
@@ -16791,14 +17281,14 @@
       </p:cxnSp>
       <p:sp>
         <p:nvSpPr>
-          <p:cNvPr id="17430" name="Rounded Rectangle 17429"/>
+          <p:cNvPr id="17434" name="Rounded Rectangle 17433"/>
           <p:cNvSpPr/>
           <p:nvPr/>
         </p:nvSpPr>
         <p:spPr>
           <a:xfrm>
-            <a:off x="8229600" y="2834640"/>
-            <a:ext cx="1554480" cy="292608"/>
+            <a:off x="9893808" y="3602736"/>
+            <a:ext cx="1627632" cy="256032"/>
           </a:xfrm>
           <a:prstGeom prst="roundRect">
             <a:avLst>
@@ -16835,27 +17325,27 @@
           <a:p>
             <a:pPr algn="ctr"/>
             <a:r>
-              <a:rPr sz="850" b="1">
+              <a:rPr sz="800" b="1">
                 <a:solidFill>
                   <a:srgbClr val="101820"/>
                 </a:solidFill>
                 <a:latin typeface="Calibri"/>
               </a:rPr>
-              <a:t>FALSE POSITIVES TOO HIGH</a:t>
+              <a:t>USEFUL SIGNAL FOUND</a:t>
             </a:r>
           </a:p>
         </p:txBody>
       </p:sp>
       <p:cxnSp>
         <p:nvCxnSpPr>
-          <p:cNvPr id="17431" name="Connector 17430"/>
+          <p:cNvPr id="17435" name="Connector 17434"/>
           <p:cNvCxnSpPr/>
           <p:nvPr/>
         </p:nvCxnSpPr>
         <p:spPr>
           <a:xfrm>
-            <a:off x="9793224" y="2980944"/>
-            <a:ext cx="50291" cy="0"/>
+            <a:off x="11530584" y="3730752"/>
+            <a:ext cx="59435" cy="0"/>
           </a:xfrm>
           <a:prstGeom prst="line">
             <a:avLst/>
@@ -16884,14 +17374,14 @@
       </p:cxnSp>
       <p:sp>
         <p:nvSpPr>
-          <p:cNvPr id="17432" name="Rounded Rectangle 17431"/>
+          <p:cNvPr id="17436" name="Rounded Rectangle 17435"/>
           <p:cNvSpPr/>
           <p:nvPr/>
         </p:nvSpPr>
         <p:spPr>
           <a:xfrm>
-            <a:off x="9852660" y="2834640"/>
-            <a:ext cx="868680" cy="292608"/>
+            <a:off x="7543800" y="3968496"/>
+            <a:ext cx="1810512" cy="256032"/>
           </a:xfrm>
           <a:prstGeom prst="roundRect">
             <a:avLst>
@@ -16928,27 +17418,27 @@
           <a:p>
             <a:pPr algn="ctr"/>
             <a:r>
-              <a:rPr sz="850" b="1">
+              <a:rPr sz="800" b="1">
                 <a:solidFill>
                   <a:srgbClr val="101820"/>
                 </a:solidFill>
                 <a:latin typeface="Calibri"/>
               </a:rPr>
-              <a:t>SAFETY GATE</a:t>
+              <a:t>FALSE POSITIVES TOO HIGH</a:t>
             </a:r>
           </a:p>
         </p:txBody>
       </p:sp>
       <p:cxnSp>
         <p:nvCxnSpPr>
-          <p:cNvPr id="17433" name="Connector 17432"/>
+          <p:cNvPr id="17437" name="Connector 17436"/>
           <p:cNvCxnSpPr/>
           <p:nvPr/>
         </p:nvCxnSpPr>
         <p:spPr>
           <a:xfrm>
-            <a:off x="10730484" y="2980944"/>
-            <a:ext cx="50292" cy="0"/>
+            <a:off x="9363456" y="4096511"/>
+            <a:ext cx="59436" cy="0"/>
           </a:xfrm>
           <a:prstGeom prst="line">
             <a:avLst/>
@@ -16977,14 +17467,107 @@
       </p:cxnSp>
       <p:sp>
         <p:nvSpPr>
-          <p:cNvPr id="17434" name="Rounded Rectangle 17433"/>
+          <p:cNvPr id="17438" name="Rounded Rectangle 17437"/>
           <p:cNvSpPr/>
           <p:nvPr/>
         </p:nvSpPr>
         <p:spPr>
           <a:xfrm>
-            <a:off x="10789920" y="2834640"/>
-            <a:ext cx="960120" cy="292608"/>
+            <a:off x="9432036" y="3968496"/>
+            <a:ext cx="987552" cy="256032"/>
+          </a:xfrm>
+          <a:prstGeom prst="roundRect">
+            <a:avLst>
+              <a:gd name="adj" fmla="val 50000"/>
+            </a:avLst>
+          </a:prstGeom>
+          <a:solidFill>
+            <a:srgbClr val="FFFFFF"/>
+          </a:solidFill>
+          <a:ln w="9525">
+            <a:solidFill>
+              <a:srgbClr val="101820"/>
+            </a:solidFill>
+          </a:ln>
+          <a:effectLst/>
+        </p:spPr>
+        <p:style>
+          <a:lnRef idx="1">
+            <a:schemeClr val="accent1"/>
+          </a:lnRef>
+          <a:fillRef idx="3">
+            <a:schemeClr val="accent1"/>
+          </a:fillRef>
+          <a:effectRef idx="2">
+            <a:schemeClr val="accent1"/>
+          </a:effectRef>
+          <a:fontRef idx="minor">
+            <a:schemeClr val="lt1"/>
+          </a:fontRef>
+        </p:style>
+        <p:txBody>
+          <a:bodyPr rtlCol="0" anchor="ctr" lIns="54864" rIns="54864" tIns="0" bIns="0" wrap="square"/>
+          <a:lstStyle/>
+          <a:p>
+            <a:pPr algn="ctr"/>
+            <a:r>
+              <a:rPr sz="800" b="1">
+                <a:solidFill>
+                  <a:srgbClr val="101820"/>
+                </a:solidFill>
+                <a:latin typeface="Calibri"/>
+              </a:rPr>
+              <a:t>SAFETY GATE</a:t>
+            </a:r>
+          </a:p>
+        </p:txBody>
+      </p:sp>
+      <p:cxnSp>
+        <p:nvCxnSpPr>
+          <p:cNvPr id="17439" name="Connector 17438"/>
+          <p:cNvCxnSpPr/>
+          <p:nvPr/>
+        </p:nvCxnSpPr>
+        <p:spPr>
+          <a:xfrm>
+            <a:off x="10428732" y="4096511"/>
+            <a:ext cx="59435" cy="0"/>
+          </a:xfrm>
+          <a:prstGeom prst="line">
+            <a:avLst/>
+          </a:prstGeom>
+          <a:ln w="15875">
+            <a:solidFill>
+              <a:srgbClr val="101820"/>
+            </a:solidFill>
+            <a:tailEnd type="triangle" w="med" len="med"/>
+          </a:ln>
+        </p:spPr>
+        <p:style>
+          <a:lnRef idx="2">
+            <a:schemeClr val="accent1"/>
+          </a:lnRef>
+          <a:fillRef idx="0">
+            <a:schemeClr val="accent1"/>
+          </a:fillRef>
+          <a:effectRef idx="1">
+            <a:schemeClr val="accent1"/>
+          </a:effectRef>
+          <a:fontRef idx="minor">
+            <a:schemeClr val="tx1"/>
+          </a:fontRef>
+        </p:style>
+      </p:cxnSp>
+      <p:sp>
+        <p:nvSpPr>
+          <p:cNvPr id="17440" name="Rounded Rectangle 17439"/>
+          <p:cNvSpPr/>
+          <p:nvPr/>
+        </p:nvSpPr>
+        <p:spPr>
+          <a:xfrm>
+            <a:off x="10497312" y="3968496"/>
+            <a:ext cx="1152144" cy="256032"/>
           </a:xfrm>
           <a:prstGeom prst="roundRect">
             <a:avLst>
@@ -17021,7 +17604,7 @@
           <a:p>
             <a:pPr algn="ctr"/>
             <a:r>
-              <a:rPr sz="850" b="1">
+              <a:rPr sz="800" b="1">
                 <a:solidFill>
                   <a:srgbClr val="FFFFFF"/>
                 </a:solidFill>
@@ -17034,14 +17617,14 @@
       </p:sp>
       <p:sp>
         <p:nvSpPr>
-          <p:cNvPr id="17435" name="TextBox 17434"/>
+          <p:cNvPr id="17441" name="TextBox 17440"/>
           <p:cNvSpPr txBox="1"/>
           <p:nvPr/>
         </p:nvSpPr>
         <p:spPr>
           <a:xfrm>
-            <a:off x="6400800" y="3246120"/>
-            <a:ext cx="5349240" cy="822960"/>
+            <a:off x="7543800" y="4352544"/>
+            <a:ext cx="4206240" cy="640080"/>
           </a:xfrm>
           <a:prstGeom prst="rect">
             <a:avLst/>
@@ -17063,7 +17646,7 @@
               </a:spcAft>
             </a:pPr>
             <a:r>
-              <a:rPr sz="1250" b="1">
+              <a:rPr sz="1150" b="1">
                 <a:solidFill>
                   <a:srgbClr val="2563EB"/>
                 </a:solidFill>
@@ -17072,27 +17655,27 @@
               <a:t>VALIDATION BEFORE AUTOMATION. </a:t>
             </a:r>
             <a:r>
-              <a:rPr sz="1100" b="0">
+              <a:rPr sz="1050" b="0">
                 <a:solidFill>
                   <a:srgbClr val="101820"/>
                 </a:solidFill>
                 <a:latin typeface="Calibri"/>
               </a:rPr>
-              <a:t>The model is trained and geographically validated, but the safety-validation gate keeps it outside production until it meets the required geographic reliability and false-positive thresholds. Route decisions today use verified evidence and deterministic policy only.</a:t>
-            </a:r>
-          </a:p>
-        </p:txBody>
-      </p:sp>
-      <p:sp>
-        <p:nvSpPr>
-          <p:cNvPr id="17436" name="TextBox 17435"/>
+              <a:t>Strong recall was not enough. Held-out testing exposed the false-positive rate, so the gate keeps the model out of routing.</a:t>
+            </a:r>
+          </a:p>
+        </p:txBody>
+      </p:sp>
+      <p:sp>
+        <p:nvSpPr>
+          <p:cNvPr id="17442" name="TextBox 17441"/>
           <p:cNvSpPr txBox="1"/>
           <p:nvPr/>
         </p:nvSpPr>
         <p:spPr>
           <a:xfrm>
-            <a:off x="6400800" y="4114800"/>
-            <a:ext cx="5349240" cy="457200"/>
+            <a:off x="7543800" y="4992624"/>
+            <a:ext cx="4206240" cy="457200"/>
           </a:xfrm>
           <a:prstGeom prst="rect">
             <a:avLst/>
@@ -17114,26 +17697,26 @@
               </a:spcAft>
             </a:pPr>
             <a:r>
-              <a:rPr sz="900" b="0">
+              <a:rPr sz="800" b="0">
                 <a:solidFill>
                   <a:srgbClr val="6B7280"/>
                 </a:solidFill>
                 <a:latin typeface="Calibri"/>
               </a:rPr>
-              <a:t>Technical: precision 0.32 · PR-AUC 0.55 · ROC-AUC 0.83 · Brier 0.12 · rule baseline recall 0.25 @ FPR 0.03 · logistic regression on NASA GLC events + ERA5-Land rain + DEM slope · full error analysis in docs/HAZARD_ERROR_ANALYSIS.md</a:t>
+              <a:t>Precision 0.32 · F1 0.48 · PR-AUC 0.55 · ROC-AUC 0.83 · Brier 0.12 · calibrated logistic regression on NASA GLC + ERA5-Land rain + DEM slope · docs/HAZARD_ERROR_ANALYSIS.md</a:t>
             </a:r>
           </a:p>
         </p:txBody>
       </p:sp>
       <p:cxnSp>
         <p:nvCxnSpPr>
-          <p:cNvPr id="17437" name="Connector 17436"/>
+          <p:cNvPr id="17443" name="Connector 17442"/>
           <p:cNvCxnSpPr/>
           <p:nvPr/>
         </p:nvCxnSpPr>
         <p:spPr>
           <a:xfrm>
-            <a:off x="457200" y="5413248"/>
+            <a:off x="457200" y="5596128"/>
             <a:ext cx="11292840" cy="0"/>
           </a:xfrm>
           <a:prstGeom prst="line">
@@ -17162,13 +17745,13 @@
       </p:cxnSp>
       <p:sp>
         <p:nvSpPr>
-          <p:cNvPr id="17438" name="TextBox 17437"/>
+          <p:cNvPr id="17444" name="TextBox 17443"/>
           <p:cNvSpPr txBox="1"/>
           <p:nvPr/>
         </p:nvSpPr>
         <p:spPr>
           <a:xfrm>
-            <a:off x="457200" y="5468112"/>
+            <a:off x="457200" y="5650992"/>
             <a:ext cx="2743200" cy="329184"/>
           </a:xfrm>
           <a:prstGeom prst="rect">
@@ -17204,13 +17787,13 @@
       </p:sp>
       <p:sp>
         <p:nvSpPr>
-          <p:cNvPr id="17439" name="TextBox 17438"/>
+          <p:cNvPr id="17445" name="TextBox 17444"/>
           <p:cNvSpPr txBox="1"/>
           <p:nvPr/>
         </p:nvSpPr>
         <p:spPr>
           <a:xfrm>
-            <a:off x="457200" y="5715000"/>
+            <a:off x="457200" y="5897880"/>
             <a:ext cx="11292840" cy="548640"/>
           </a:xfrm>
           <a:prstGeom prst="rect">

--- a/docs/submission/RASTA_AI_SIH26002_TEAM17_FINAL.pptx
+++ b/docs/submission/RASTA_AI_SIH26002_TEAM17_FINAL.pptx
@@ -4832,9 +4832,55 @@
           </a:prstGeom>
         </p:spPr>
       </p:pic>
+      <p:sp>
+        <p:nvSpPr>
+          <p:cNvPr id="37" name="Rounded Rectangle 36"/>
+          <p:cNvSpPr/>
+          <p:nvPr/>
+        </p:nvSpPr>
+        <p:spPr>
+          <a:xfrm>
+            <a:off x="411480" y="1097280"/>
+            <a:ext cx="6263640" cy="5321808"/>
+          </a:xfrm>
+          <a:prstGeom prst="roundRect">
+            <a:avLst>
+              <a:gd name="adj" fmla="val 1718"/>
+            </a:avLst>
+          </a:prstGeom>
+          <a:solidFill>
+            <a:srgbClr val="FFFFFF"/>
+          </a:solidFill>
+          <a:ln w="15875">
+            <a:solidFill>
+              <a:srgbClr val="2563EB"/>
+            </a:solidFill>
+          </a:ln>
+          <a:effectLst/>
+        </p:spPr>
+        <p:style>
+          <a:lnRef idx="1">
+            <a:schemeClr val="accent1"/>
+          </a:lnRef>
+          <a:fillRef idx="3">
+            <a:schemeClr val="accent1"/>
+          </a:fillRef>
+          <a:effectRef idx="2">
+            <a:schemeClr val="accent1"/>
+          </a:effectRef>
+          <a:fontRef idx="minor">
+            <a:schemeClr val="lt1"/>
+          </a:fontRef>
+        </p:style>
+        <p:txBody>
+          <a:bodyPr rtlCol="0" anchor="ctr"/>
+          <a:lstStyle/>
+          <a:p/>
+        </p:txBody>
+      </p:sp>
       <p:pic>
         <p:nvPicPr>
-          <p:cNvPr id="37" name="Picture 36" descr="brand-mark.png"/>
+          <p:cNvPr id="38" name="Picture 37" descr="brand-mark.png"/>
           <p:cNvPicPr>
             <a:picLocks noChangeAspect="1"/>
           </p:cNvPicPr>
@@ -4848,8 +4894,8 @@
         </p:blipFill>
         <p:spPr>
           <a:xfrm>
-            <a:off x="502920" y="1207008"/>
-            <a:ext cx="868680" cy="868680"/>
+            <a:off x="621792" y="1280160"/>
+            <a:ext cx="749808" cy="749808"/>
           </a:xfrm>
           <a:prstGeom prst="rect">
             <a:avLst/>
@@ -4858,14 +4904,14 @@
       </p:pic>
       <p:sp>
         <p:nvSpPr>
-          <p:cNvPr id="38" name="TextBox 37"/>
+          <p:cNvPr id="39" name="TextBox 38"/>
           <p:cNvSpPr txBox="1"/>
           <p:nvPr/>
         </p:nvSpPr>
         <p:spPr>
           <a:xfrm>
-            <a:off x="1463040" y="1170432"/>
-            <a:ext cx="5486400" cy="640080"/>
+            <a:off x="1481328" y="1243584"/>
+            <a:ext cx="4937760" cy="566928"/>
           </a:xfrm>
           <a:prstGeom prst="rect">
             <a:avLst/>
@@ -4887,7 +4933,7 @@
               </a:spcAft>
             </a:pPr>
             <a:r>
-              <a:rPr sz="4000" b="1">
+              <a:rPr sz="3300" b="1">
                 <a:solidFill>
                   <a:srgbClr val="101820"/>
                 </a:solidFill>
@@ -4900,14 +4946,14 @@
       </p:sp>
       <p:sp>
         <p:nvSpPr>
-          <p:cNvPr id="39" name="TextBox 38"/>
+          <p:cNvPr id="40" name="TextBox 39"/>
           <p:cNvSpPr txBox="1"/>
           <p:nvPr/>
         </p:nvSpPr>
         <p:spPr>
           <a:xfrm>
-            <a:off x="1481328" y="1755648"/>
-            <a:ext cx="5852160" cy="457200"/>
+            <a:off x="1499616" y="1737360"/>
+            <a:ext cx="5029200" cy="365760"/>
           </a:xfrm>
           <a:prstGeom prst="rect">
             <a:avLst/>
@@ -4929,7 +4975,7 @@
               </a:spcAft>
             </a:pPr>
             <a:r>
-              <a:rPr sz="1500" b="0">
+              <a:rPr sz="1250" b="0">
                 <a:solidFill>
                   <a:srgbClr val="6B7280"/>
                 </a:solidFill>
@@ -4942,14 +4988,14 @@
       </p:sp>
       <p:sp>
         <p:nvSpPr>
-          <p:cNvPr id="40" name="Rounded Rectangle 39"/>
+          <p:cNvPr id="41" name="Rounded Rectangle 40"/>
           <p:cNvSpPr/>
           <p:nvPr/>
         </p:nvSpPr>
         <p:spPr>
           <a:xfrm>
-            <a:off x="502920" y="2468880"/>
-            <a:ext cx="2148840" cy="640080"/>
+            <a:off x="621792" y="2212848"/>
+            <a:ext cx="1874519" cy="548640"/>
           </a:xfrm>
           <a:prstGeom prst="roundRect">
             <a:avLst>
@@ -4984,7 +5030,7 @@
           <a:p>
             <a:pPr algn="ctr"/>
             <a:r>
-              <a:rPr sz="2600" b="1">
+              <a:rPr sz="2300" b="1">
                 <a:solidFill>
                   <a:srgbClr val="FFFFFF"/>
                 </a:solidFill>
@@ -4997,14 +5043,14 @@
       </p:sp>
       <p:sp>
         <p:nvSpPr>
-          <p:cNvPr id="41" name="TextBox 40"/>
+          <p:cNvPr id="42" name="TextBox 41"/>
           <p:cNvSpPr txBox="1"/>
           <p:nvPr/>
         </p:nvSpPr>
         <p:spPr>
           <a:xfrm>
-            <a:off x="2788920" y="2487168"/>
-            <a:ext cx="3657600" cy="603504"/>
+            <a:off x="2670048" y="2231136"/>
+            <a:ext cx="3840480" cy="512064"/>
           </a:xfrm>
           <a:prstGeom prst="rect">
             <a:avLst/>
@@ -5026,7 +5072,7 @@
               </a:spcAft>
             </a:pPr>
             <a:r>
-              <a:rPr sz="1100" b="1">
+              <a:rPr sz="1050" b="1">
                 <a:solidFill>
                   <a:srgbClr val="6B7280"/>
                 </a:solidFill>
@@ -5045,7 +5091,7 @@
               </a:spcAft>
             </a:pPr>
             <a:r>
-              <a:rPr sz="1200" b="0">
+              <a:rPr sz="1150" b="0">
                 <a:solidFill>
                   <a:srgbClr val="101820"/>
                 </a:solidFill>
@@ -5058,14 +5104,14 @@
       </p:sp>
       <p:sp>
         <p:nvSpPr>
-          <p:cNvPr id="42" name="TextBox 41"/>
+          <p:cNvPr id="43" name="TextBox 42"/>
           <p:cNvSpPr txBox="1"/>
           <p:nvPr/>
         </p:nvSpPr>
         <p:spPr>
           <a:xfrm>
-            <a:off x="502920" y="3200400"/>
-            <a:ext cx="2011680" cy="274320"/>
+            <a:off x="621792" y="2907792"/>
+            <a:ext cx="1965960" cy="256032"/>
           </a:xfrm>
           <a:prstGeom prst="rect">
             <a:avLst/>
@@ -5087,7 +5133,7 @@
               </a:spcAft>
             </a:pPr>
             <a:r>
-              <a:rPr sz="1000" b="1">
+              <a:rPr sz="950" b="1">
                 <a:solidFill>
                   <a:srgbClr val="6B7280"/>
                 </a:solidFill>
@@ -5100,14 +5146,14 @@
       </p:sp>
       <p:sp>
         <p:nvSpPr>
-          <p:cNvPr id="43" name="TextBox 42"/>
+          <p:cNvPr id="44" name="TextBox 43"/>
           <p:cNvSpPr txBox="1"/>
           <p:nvPr/>
         </p:nvSpPr>
         <p:spPr>
           <a:xfrm>
-            <a:off x="2514600" y="3172968"/>
-            <a:ext cx="4023360" cy="274320"/>
+            <a:off x="2587752" y="2880360"/>
+            <a:ext cx="3913632" cy="256032"/>
           </a:xfrm>
           <a:prstGeom prst="rect">
             <a:avLst/>
@@ -5129,7 +5175,7 @@
               </a:spcAft>
             </a:pPr>
             <a:r>
-              <a:rPr sz="1400" b="1">
+              <a:rPr sz="1300" b="1">
                 <a:solidFill>
                   <a:srgbClr val="101820"/>
                 </a:solidFill>
@@ -5142,14 +5188,14 @@
       </p:sp>
       <p:cxnSp>
         <p:nvCxnSpPr>
-          <p:cNvPr id="44" name="Connector 43"/>
+          <p:cNvPr id="45" name="Connector 44"/>
           <p:cNvCxnSpPr/>
           <p:nvPr/>
         </p:nvCxnSpPr>
         <p:spPr>
           <a:xfrm>
-            <a:off x="502920" y="3493008"/>
-            <a:ext cx="6035039" cy="0"/>
+            <a:off x="621792" y="3182112"/>
+            <a:ext cx="5852160" cy="0"/>
           </a:xfrm>
           <a:prstGeom prst="line">
             <a:avLst/>
@@ -5177,14 +5223,14 @@
       </p:cxnSp>
       <p:sp>
         <p:nvSpPr>
-          <p:cNvPr id="45" name="TextBox 44"/>
+          <p:cNvPr id="46" name="TextBox 45"/>
           <p:cNvSpPr txBox="1"/>
           <p:nvPr/>
         </p:nvSpPr>
         <p:spPr>
           <a:xfrm>
-            <a:off x="502920" y="3538728"/>
-            <a:ext cx="2011680" cy="493776"/>
+            <a:off x="621792" y="3218688"/>
+            <a:ext cx="1965960" cy="438912"/>
           </a:xfrm>
           <a:prstGeom prst="rect">
             <a:avLst/>
@@ -5206,7 +5252,7 @@
               </a:spcAft>
             </a:pPr>
             <a:r>
-              <a:rPr sz="1000" b="1">
+              <a:rPr sz="950" b="1">
                 <a:solidFill>
                   <a:srgbClr val="6B7280"/>
                 </a:solidFill>
@@ -5219,14 +5265,14 @@
       </p:sp>
       <p:sp>
         <p:nvSpPr>
-          <p:cNvPr id="46" name="TextBox 45"/>
+          <p:cNvPr id="47" name="TextBox 46"/>
           <p:cNvSpPr txBox="1"/>
           <p:nvPr/>
         </p:nvSpPr>
         <p:spPr>
           <a:xfrm>
-            <a:off x="2514600" y="3511296"/>
-            <a:ext cx="4023360" cy="493776"/>
+            <a:off x="2587752" y="3191256"/>
+            <a:ext cx="3913632" cy="438912"/>
           </a:xfrm>
           <a:prstGeom prst="rect">
             <a:avLst/>
@@ -5248,7 +5294,7 @@
               </a:spcAft>
             </a:pPr>
             <a:r>
-              <a:rPr sz="1400" b="0">
+              <a:rPr sz="1300" b="0">
                 <a:solidFill>
                   <a:srgbClr val="101820"/>
                 </a:solidFill>
@@ -5261,14 +5307,14 @@
       </p:sp>
       <p:cxnSp>
         <p:nvCxnSpPr>
-          <p:cNvPr id="47" name="Connector 46"/>
+          <p:cNvPr id="48" name="Connector 47"/>
           <p:cNvCxnSpPr/>
           <p:nvPr/>
         </p:nvCxnSpPr>
         <p:spPr>
           <a:xfrm>
-            <a:off x="502920" y="4050791"/>
-            <a:ext cx="6035039" cy="0"/>
+            <a:off x="621792" y="3675887"/>
+            <a:ext cx="5852160" cy="0"/>
           </a:xfrm>
           <a:prstGeom prst="line">
             <a:avLst/>
@@ -5296,14 +5342,14 @@
       </p:cxnSp>
       <p:sp>
         <p:nvSpPr>
-          <p:cNvPr id="48" name="TextBox 47"/>
+          <p:cNvPr id="49" name="TextBox 48"/>
           <p:cNvSpPr txBox="1"/>
           <p:nvPr/>
         </p:nvSpPr>
         <p:spPr>
           <a:xfrm>
-            <a:off x="502920" y="4096512"/>
-            <a:ext cx="2011680" cy="274320"/>
+            <a:off x="621792" y="3712464"/>
+            <a:ext cx="1965960" cy="256032"/>
           </a:xfrm>
           <a:prstGeom prst="rect">
             <a:avLst/>
@@ -5325,7 +5371,7 @@
               </a:spcAft>
             </a:pPr>
             <a:r>
-              <a:rPr sz="1000" b="1">
+              <a:rPr sz="950" b="1">
                 <a:solidFill>
                   <a:srgbClr val="6B7280"/>
                 </a:solidFill>
@@ -5338,14 +5384,14 @@
       </p:sp>
       <p:sp>
         <p:nvSpPr>
-          <p:cNvPr id="49" name="TextBox 48"/>
+          <p:cNvPr id="50" name="TextBox 49"/>
           <p:cNvSpPr txBox="1"/>
           <p:nvPr/>
         </p:nvSpPr>
         <p:spPr>
           <a:xfrm>
-            <a:off x="2514600" y="4069080"/>
-            <a:ext cx="4023360" cy="274320"/>
+            <a:off x="2587752" y="3685032"/>
+            <a:ext cx="3913632" cy="256032"/>
           </a:xfrm>
           <a:prstGeom prst="rect">
             <a:avLst/>
@@ -5367,7 +5413,7 @@
               </a:spcAft>
             </a:pPr>
             <a:r>
-              <a:rPr sz="1400" b="0">
+              <a:rPr sz="1300" b="0">
                 <a:solidFill>
                   <a:srgbClr val="101820"/>
                 </a:solidFill>
@@ -5380,14 +5426,14 @@
       </p:sp>
       <p:cxnSp>
         <p:nvCxnSpPr>
-          <p:cNvPr id="50" name="Connector 49"/>
+          <p:cNvPr id="51" name="Connector 50"/>
           <p:cNvCxnSpPr/>
           <p:nvPr/>
         </p:nvCxnSpPr>
         <p:spPr>
           <a:xfrm>
-            <a:off x="502920" y="4389120"/>
-            <a:ext cx="6035039" cy="0"/>
+            <a:off x="621792" y="3986784"/>
+            <a:ext cx="5852160" cy="0"/>
           </a:xfrm>
           <a:prstGeom prst="line">
             <a:avLst/>
@@ -5415,14 +5461,14 @@
       </p:cxnSp>
       <p:sp>
         <p:nvSpPr>
-          <p:cNvPr id="51" name="TextBox 50"/>
+          <p:cNvPr id="52" name="TextBox 51"/>
           <p:cNvSpPr txBox="1"/>
           <p:nvPr/>
         </p:nvSpPr>
         <p:spPr>
           <a:xfrm>
-            <a:off x="502920" y="4434840"/>
-            <a:ext cx="2011680" cy="274320"/>
+            <a:off x="621792" y="4023360"/>
+            <a:ext cx="1965960" cy="256032"/>
           </a:xfrm>
           <a:prstGeom prst="rect">
             <a:avLst/>
@@ -5444,7 +5490,7 @@
               </a:spcAft>
             </a:pPr>
             <a:r>
-              <a:rPr sz="1000" b="1">
+              <a:rPr sz="950" b="1">
                 <a:solidFill>
                   <a:srgbClr val="6B7280"/>
                 </a:solidFill>
@@ -5457,14 +5503,14 @@
       </p:sp>
       <p:sp>
         <p:nvSpPr>
-          <p:cNvPr id="52" name="TextBox 51"/>
+          <p:cNvPr id="53" name="TextBox 52"/>
           <p:cNvSpPr txBox="1"/>
           <p:nvPr/>
         </p:nvSpPr>
         <p:spPr>
           <a:xfrm>
-            <a:off x="2514600" y="4407408"/>
-            <a:ext cx="4023360" cy="274320"/>
+            <a:off x="2587752" y="3995928"/>
+            <a:ext cx="3913632" cy="256032"/>
           </a:xfrm>
           <a:prstGeom prst="rect">
             <a:avLst/>
@@ -5486,7 +5532,7 @@
               </a:spcAft>
             </a:pPr>
             <a:r>
-              <a:rPr sz="1400" b="0">
+              <a:rPr sz="1300" b="0">
                 <a:solidFill>
                   <a:srgbClr val="101820"/>
                 </a:solidFill>
@@ -5499,14 +5545,14 @@
       </p:sp>
       <p:cxnSp>
         <p:nvCxnSpPr>
-          <p:cNvPr id="53" name="Connector 52"/>
+          <p:cNvPr id="54" name="Connector 53"/>
           <p:cNvCxnSpPr/>
           <p:nvPr/>
         </p:nvCxnSpPr>
         <p:spPr>
           <a:xfrm>
-            <a:off x="502920" y="4727448"/>
-            <a:ext cx="6035039" cy="0"/>
+            <a:off x="621792" y="4297680"/>
+            <a:ext cx="5852160" cy="0"/>
           </a:xfrm>
           <a:prstGeom prst="line">
             <a:avLst/>
@@ -5534,14 +5580,14 @@
       </p:cxnSp>
       <p:sp>
         <p:nvSpPr>
-          <p:cNvPr id="54" name="TextBox 53"/>
+          <p:cNvPr id="55" name="TextBox 54"/>
           <p:cNvSpPr txBox="1"/>
           <p:nvPr/>
         </p:nvSpPr>
         <p:spPr>
           <a:xfrm>
-            <a:off x="502920" y="4773168"/>
-            <a:ext cx="2011680" cy="274320"/>
+            <a:off x="621792" y="4334256"/>
+            <a:ext cx="1965960" cy="256032"/>
           </a:xfrm>
           <a:prstGeom prst="rect">
             <a:avLst/>
@@ -5563,7 +5609,7 @@
               </a:spcAft>
             </a:pPr>
             <a:r>
-              <a:rPr sz="1000" b="1">
+              <a:rPr sz="950" b="1">
                 <a:solidFill>
                   <a:srgbClr val="6B7280"/>
                 </a:solidFill>
@@ -5576,14 +5622,14 @@
       </p:sp>
       <p:sp>
         <p:nvSpPr>
-          <p:cNvPr id="55" name="TextBox 54"/>
+          <p:cNvPr id="56" name="TextBox 55"/>
           <p:cNvSpPr txBox="1"/>
           <p:nvPr/>
         </p:nvSpPr>
         <p:spPr>
           <a:xfrm>
-            <a:off x="2514600" y="4745736"/>
-            <a:ext cx="4023360" cy="274320"/>
+            <a:off x="2587752" y="4306824"/>
+            <a:ext cx="3913632" cy="256032"/>
           </a:xfrm>
           <a:prstGeom prst="rect">
             <a:avLst/>
@@ -5605,7 +5651,7 @@
               </a:spcAft>
             </a:pPr>
             <a:r>
-              <a:rPr sz="1400" b="1">
+              <a:rPr sz="1300" b="1">
                 <a:solidFill>
                   <a:srgbClr val="101820"/>
                 </a:solidFill>
@@ -5618,14 +5664,14 @@
       </p:sp>
       <p:cxnSp>
         <p:nvCxnSpPr>
-          <p:cNvPr id="56" name="Connector 55"/>
+          <p:cNvPr id="57" name="Connector 56"/>
           <p:cNvCxnSpPr/>
           <p:nvPr/>
         </p:nvCxnSpPr>
         <p:spPr>
           <a:xfrm>
-            <a:off x="502920" y="5065776"/>
-            <a:ext cx="6035039" cy="0"/>
+            <a:off x="621792" y="4608576"/>
+            <a:ext cx="5852160" cy="0"/>
           </a:xfrm>
           <a:prstGeom prst="line">
             <a:avLst/>
@@ -5653,14 +5699,14 @@
       </p:cxnSp>
       <p:sp>
         <p:nvSpPr>
-          <p:cNvPr id="57" name="TextBox 56"/>
+          <p:cNvPr id="58" name="TextBox 57"/>
           <p:cNvSpPr txBox="1"/>
           <p:nvPr/>
         </p:nvSpPr>
         <p:spPr>
           <a:xfrm>
-            <a:off x="502920" y="5111496"/>
-            <a:ext cx="2011680" cy="274320"/>
+            <a:off x="621792" y="4645152"/>
+            <a:ext cx="1965960" cy="256032"/>
           </a:xfrm>
           <a:prstGeom prst="rect">
             <a:avLst/>
@@ -5682,7 +5728,7 @@
               </a:spcAft>
             </a:pPr>
             <a:r>
-              <a:rPr sz="1000" b="1">
+              <a:rPr sz="950" b="1">
                 <a:solidFill>
                   <a:srgbClr val="6B7280"/>
                 </a:solidFill>
@@ -5695,14 +5741,14 @@
       </p:sp>
       <p:sp>
         <p:nvSpPr>
-          <p:cNvPr id="58" name="TextBox 57"/>
+          <p:cNvPr id="59" name="TextBox 58"/>
           <p:cNvSpPr txBox="1"/>
           <p:nvPr/>
         </p:nvSpPr>
         <p:spPr>
           <a:xfrm>
-            <a:off x="2514600" y="5084064"/>
-            <a:ext cx="4023360" cy="274320"/>
+            <a:off x="2587752" y="4617720"/>
+            <a:ext cx="3913632" cy="256032"/>
           </a:xfrm>
           <a:prstGeom prst="rect">
             <a:avLst/>
@@ -5724,7 +5770,7 @@
               </a:spcAft>
             </a:pPr>
             <a:r>
-              <a:rPr sz="1400" b="1">
+              <a:rPr sz="1300" b="1">
                 <a:solidFill>
                   <a:srgbClr val="101820"/>
                 </a:solidFill>
@@ -5737,14 +5783,14 @@
       </p:sp>
       <p:cxnSp>
         <p:nvCxnSpPr>
-          <p:cNvPr id="59" name="Connector 58"/>
+          <p:cNvPr id="60" name="Connector 59"/>
           <p:cNvCxnSpPr/>
           <p:nvPr/>
         </p:nvCxnSpPr>
         <p:spPr>
           <a:xfrm>
-            <a:off x="502920" y="5404104"/>
-            <a:ext cx="6035039" cy="0"/>
+            <a:off x="621792" y="4919472"/>
+            <a:ext cx="5852160" cy="0"/>
           </a:xfrm>
           <a:prstGeom prst="line">
             <a:avLst/>
@@ -5772,56 +5818,14 @@
       </p:cxnSp>
       <p:sp>
         <p:nvSpPr>
-          <p:cNvPr id="60" name="Rectangle 59"/>
-          <p:cNvSpPr/>
-          <p:nvPr/>
-        </p:nvSpPr>
-        <p:spPr>
-          <a:xfrm>
-            <a:off x="502920" y="5440680"/>
-            <a:ext cx="822960" cy="50292"/>
-          </a:xfrm>
-          <a:prstGeom prst="rect">
-            <a:avLst/>
-          </a:prstGeom>
-          <a:solidFill>
-            <a:srgbClr val="2563EB"/>
-          </a:solidFill>
-          <a:ln>
-            <a:noFill/>
-          </a:ln>
-          <a:effectLst/>
-        </p:spPr>
-        <p:style>
-          <a:lnRef idx="1">
-            <a:schemeClr val="accent1"/>
-          </a:lnRef>
-          <a:fillRef idx="3">
-            <a:schemeClr val="accent1"/>
-          </a:fillRef>
-          <a:effectRef idx="2">
-            <a:schemeClr val="accent1"/>
-          </a:effectRef>
-          <a:fontRef idx="minor">
-            <a:schemeClr val="lt1"/>
-          </a:fontRef>
-        </p:style>
-        <p:txBody>
-          <a:bodyPr rtlCol="0" anchor="ctr"/>
-          <a:lstStyle/>
-          <a:p/>
-        </p:txBody>
-      </p:sp>
-      <p:sp>
-        <p:nvSpPr>
           <p:cNvPr id="61" name="TextBox 60"/>
           <p:cNvSpPr txBox="1"/>
           <p:nvPr/>
         </p:nvSpPr>
         <p:spPr>
           <a:xfrm>
-            <a:off x="502920" y="5541264"/>
-            <a:ext cx="6126480" cy="411480"/>
+            <a:off x="621792" y="5047488"/>
+            <a:ext cx="5852160" cy="384048"/>
           </a:xfrm>
           <a:prstGeom prst="rect">
             <a:avLst/>
@@ -5843,7 +5847,7 @@
               </a:spcAft>
             </a:pPr>
             <a:r>
-              <a:rPr sz="2100" b="1">
+              <a:rPr sz="2000" b="1">
                 <a:solidFill>
                   <a:srgbClr val="101820"/>
                 </a:solidFill>
@@ -5862,8 +5866,8 @@
         </p:nvSpPr>
         <p:spPr>
           <a:xfrm>
-            <a:off x="502920" y="5971032"/>
-            <a:ext cx="6126480" cy="365760"/>
+            <a:off x="621792" y="5458968"/>
+            <a:ext cx="5852160" cy="347472"/>
           </a:xfrm>
           <a:prstGeom prst="rect">
             <a:avLst/>
@@ -5885,7 +5889,7 @@
               </a:spcAft>
             </a:pPr>
             <a:r>
-              <a:rPr sz="1300" b="0">
+              <a:rPr sz="1250" b="0">
                 <a:solidFill>
                   <a:srgbClr val="2563EB"/>
                 </a:solidFill>
@@ -5904,8 +5908,96 @@
         </p:nvSpPr>
         <p:spPr>
           <a:xfrm>
-            <a:off x="502920" y="6355080"/>
-            <a:ext cx="6126480" cy="320040"/>
+            <a:off x="621792" y="5833872"/>
+            <a:ext cx="5852160" cy="502920"/>
+          </a:xfrm>
+          <a:prstGeom prst="rect">
+            <a:avLst/>
+          </a:prstGeom>
+          <a:noFill/>
+        </p:spPr>
+        <p:txBody>
+          <a:bodyPr wrap="square" anchor="t" lIns="18288" rIns="18288" tIns="18288" bIns="18288">
+            <a:spAutoFit/>
+          </a:bodyPr>
+          <a:lstStyle/>
+          <a:p>
+            <a:pPr algn="l">
+              <a:lnSpc>
+                <a:spcPct val="110000"/>
+              </a:lnSpc>
+              <a:spcAft>
+                <a:spcPts val="0"/>
+              </a:spcAft>
+            </a:pPr>
+            <a:r>
+              <a:rPr sz="1050" b="1">
+                <a:solidFill>
+                  <a:srgbClr val="059669"/>
+                </a:solidFill>
+                <a:latin typeface="Calibri"/>
+              </a:rPr>
+              <a:t>End-to-end working prototype · physical-phone validated · live demo corridor Guwahati → Shillong</a:t>
+            </a:r>
+          </a:p>
+        </p:txBody>
+      </p:sp>
+      <p:sp>
+        <p:nvSpPr>
+          <p:cNvPr id="64" name="Rounded Rectangle 63"/>
+          <p:cNvSpPr/>
+          <p:nvPr/>
+        </p:nvSpPr>
+        <p:spPr>
+          <a:xfrm>
+            <a:off x="6858000" y="1097280"/>
+            <a:ext cx="4937760" cy="5321808"/>
+          </a:xfrm>
+          <a:prstGeom prst="roundRect">
+            <a:avLst>
+              <a:gd name="adj" fmla="val 1851"/>
+            </a:avLst>
+          </a:prstGeom>
+          <a:solidFill>
+            <a:srgbClr val="FFFFFF"/>
+          </a:solidFill>
+          <a:ln w="15875">
+            <a:solidFill>
+              <a:srgbClr val="2563EB"/>
+            </a:solidFill>
+          </a:ln>
+          <a:effectLst/>
+        </p:spPr>
+        <p:style>
+          <a:lnRef idx="1">
+            <a:schemeClr val="accent1"/>
+          </a:lnRef>
+          <a:fillRef idx="3">
+            <a:schemeClr val="accent1"/>
+          </a:fillRef>
+          <a:effectRef idx="2">
+            <a:schemeClr val="accent1"/>
+          </a:effectRef>
+          <a:fontRef idx="minor">
+            <a:schemeClr val="lt1"/>
+          </a:fontRef>
+        </p:style>
+        <p:txBody>
+          <a:bodyPr rtlCol="0" anchor="ctr"/>
+          <a:lstStyle/>
+          <a:p/>
+        </p:txBody>
+      </p:sp>
+      <p:sp>
+        <p:nvSpPr>
+          <p:cNvPr id="65" name="TextBox 64"/>
+          <p:cNvSpPr txBox="1"/>
+          <p:nvPr/>
+        </p:nvSpPr>
+        <p:spPr>
+          <a:xfrm>
+            <a:off x="7004304" y="1170432"/>
+            <a:ext cx="4645152" cy="274320"/>
           </a:xfrm>
           <a:prstGeom prst="rect">
             <a:avLst/>
@@ -5927,27 +6019,36 @@
               </a:spcAft>
             </a:pPr>
             <a:r>
-              <a:rPr sz="1100" b="1">
-                <a:solidFill>
-                  <a:srgbClr val="059669"/>
-                </a:solidFill>
-                <a:latin typeface="Calibri"/>
-              </a:rPr>
-              <a:t>End-to-end working prototype · physical-phone validated · live demo corridor Guwahati → Shillong</a:t>
-            </a:r>
-          </a:p>
-        </p:txBody>
-      </p:sp>
-      <p:sp>
-        <p:nvSpPr>
-          <p:cNvPr id="64" name="Rounded Rectangle 63"/>
+              <a:rPr sz="1150" b="1">
+                <a:solidFill>
+                  <a:srgbClr val="2563EB"/>
+                </a:solidFill>
+                <a:latin typeface="Calibri"/>
+              </a:rPr>
+              <a:t>LIVE WORKING SYSTEM</a:t>
+            </a:r>
+            <a:r>
+              <a:rPr sz="1000" b="0">
+                <a:solidFill>
+                  <a:srgbClr val="6B7280"/>
+                </a:solidFill>
+                <a:latin typeface="Calibri"/>
+              </a:rPr>
+              <a:t>   manager console + Android driver app</a:t>
+            </a:r>
+          </a:p>
+        </p:txBody>
+      </p:sp>
+      <p:sp>
+        <p:nvSpPr>
+          <p:cNvPr id="66" name="Rounded Rectangle 65"/>
           <p:cNvSpPr/>
           <p:nvPr/>
         </p:nvSpPr>
         <p:spPr>
           <a:xfrm>
-            <a:off x="6693407" y="2350008"/>
-            <a:ext cx="2318004" cy="3346704"/>
+            <a:off x="6995159" y="2221992"/>
+            <a:ext cx="2494026" cy="3602736"/>
           </a:xfrm>
           <a:prstGeom prst="roundRect">
             <a:avLst>
@@ -5986,7 +6087,7 @@
       </p:sp>
       <p:pic>
         <p:nvPicPr>
-          <p:cNvPr id="65" name="Picture 64" descr="mgr-route.png"/>
+          <p:cNvPr id="67" name="Picture 66" descr="mgr-route.png"/>
           <p:cNvPicPr>
             <a:picLocks noChangeAspect="1"/>
           </p:cNvPicPr>
@@ -6000,8 +6101,8 @@
         </p:blipFill>
         <p:spPr>
           <a:xfrm>
-            <a:off x="6720840" y="2377440"/>
-            <a:ext cx="2263140" cy="3291840"/>
+            <a:off x="7022592" y="2249424"/>
+            <a:ext cx="2439162" cy="3547872"/>
           </a:xfrm>
           <a:prstGeom prst="rect">
             <a:avLst/>
@@ -6010,14 +6111,14 @@
       </p:pic>
       <p:sp>
         <p:nvSpPr>
-          <p:cNvPr id="66" name="Rounded Rectangle 65"/>
+          <p:cNvPr id="68" name="Rounded Rectangle 67"/>
           <p:cNvSpPr/>
           <p:nvPr/>
         </p:nvSpPr>
         <p:spPr>
           <a:xfrm>
-            <a:off x="9208008" y="1161288"/>
-            <a:ext cx="2072340" cy="4535424"/>
+            <a:off x="9573768" y="1545336"/>
+            <a:ext cx="1957055" cy="4279392"/>
           </a:xfrm>
           <a:prstGeom prst="roundRect">
             <a:avLst>
@@ -6056,7 +6157,7 @@
       </p:sp>
       <p:pic>
         <p:nvPicPr>
-          <p:cNvPr id="67" name="Picture 66" descr="07-navigation.png"/>
+          <p:cNvPr id="69" name="Picture 68" descr="07-navigation.png"/>
           <p:cNvPicPr>
             <a:picLocks noChangeAspect="1"/>
           </p:cNvPicPr>
@@ -6070,8 +6171,8 @@
         </p:blipFill>
         <p:spPr>
           <a:xfrm>
-            <a:off x="9235440" y="1188720"/>
-            <a:ext cx="2017476" cy="4480560"/>
+            <a:off x="9601200" y="1572768"/>
+            <a:ext cx="1902191" cy="4224528"/>
           </a:xfrm>
           <a:prstGeom prst="rect">
             <a:avLst/>
@@ -6080,14 +6181,14 @@
       </p:pic>
       <p:sp>
         <p:nvSpPr>
-          <p:cNvPr id="68" name="Rounded Rectangle 67"/>
+          <p:cNvPr id="70" name="Rounded Rectangle 69"/>
           <p:cNvSpPr/>
           <p:nvPr/>
         </p:nvSpPr>
         <p:spPr>
           <a:xfrm>
-            <a:off x="6720840" y="5797296"/>
-            <a:ext cx="4937760" cy="256032"/>
+            <a:off x="7004304" y="5925312"/>
+            <a:ext cx="4645152" cy="256032"/>
           </a:xfrm>
           <a:prstGeom prst="roundRect">
             <a:avLst>
@@ -6128,7 +6229,7 @@
                 </a:solidFill>
                 <a:latin typeface="Calibri"/>
               </a:rPr>
-              <a:t>Manager route review · Driver navigation — real screens</a:t>
+              <a:t>Manager route review · Driver navigation — real screens, real road</a:t>
             </a:r>
           </a:p>
         </p:txBody>
@@ -6463,7 +6564,7 @@
         </p:nvSpPr>
         <p:spPr>
           <a:xfrm>
-            <a:off x="457200" y="1325880"/>
+            <a:off x="457200" y="1280160"/>
             <a:ext cx="7955279" cy="914400"/>
           </a:xfrm>
           <a:prstGeom prst="rect">
@@ -6514,8 +6615,8 @@
         </p:nvSpPr>
         <p:spPr>
           <a:xfrm>
-            <a:off x="457200" y="2157984"/>
-            <a:ext cx="7955279" cy="411480"/>
+            <a:off x="457200" y="2084831"/>
+            <a:ext cx="8065008" cy="502920"/>
           </a:xfrm>
           <a:prstGeom prst="rect">
             <a:avLst/>
@@ -6543,7 +6644,7 @@
                 </a:solidFill>
                 <a:latin typeface="Calibri"/>
               </a:rPr>
-              <a:t>NER corridors: mountain terrain · monsoon · landslides · floods · road disruption · weak connectivity · stale evidence. </a:t>
+              <a:t>NER corridors: mountain terrain · monsoon · landslides · floods · weak signal · stale evidence. </a:t>
             </a:r>
             <a:r>
               <a:rPr sz="1150" b="1">
@@ -6559,14 +6660,60 @@
       </p:sp>
       <p:sp>
         <p:nvSpPr>
-          <p:cNvPr id="15365" name="TextBox 15364"/>
+          <p:cNvPr id="15365" name="Rounded Rectangle 15364"/>
+          <p:cNvSpPr/>
+          <p:nvPr/>
+        </p:nvSpPr>
+        <p:spPr>
+          <a:xfrm>
+            <a:off x="411480" y="2633472"/>
+            <a:ext cx="2395728" cy="3108960"/>
+          </a:xfrm>
+          <a:prstGeom prst="roundRect">
+            <a:avLst>
+              <a:gd name="adj" fmla="val 3816"/>
+            </a:avLst>
+          </a:prstGeom>
+          <a:solidFill>
+            <a:srgbClr val="FFFFFF"/>
+          </a:solidFill>
+          <a:ln w="15875">
+            <a:solidFill>
+              <a:srgbClr val="9CA3AF"/>
+            </a:solidFill>
+          </a:ln>
+          <a:effectLst/>
+        </p:spPr>
+        <p:style>
+          <a:lnRef idx="1">
+            <a:schemeClr val="accent1"/>
+          </a:lnRef>
+          <a:fillRef idx="3">
+            <a:schemeClr val="accent1"/>
+          </a:fillRef>
+          <a:effectRef idx="2">
+            <a:schemeClr val="accent1"/>
+          </a:effectRef>
+          <a:fontRef idx="minor">
+            <a:schemeClr val="lt1"/>
+          </a:fontRef>
+        </p:style>
+        <p:txBody>
+          <a:bodyPr rtlCol="0" anchor="ctr"/>
+          <a:lstStyle/>
+          <a:p/>
+        </p:txBody>
+      </p:sp>
+      <p:sp>
+        <p:nvSpPr>
+          <p:cNvPr id="15366" name="TextBox 15365"/>
           <p:cNvSpPr txBox="1"/>
           <p:nvPr/>
         </p:nvSpPr>
         <p:spPr>
           <a:xfrm>
-            <a:off x="457200" y="2606040"/>
-            <a:ext cx="2377440" cy="329184"/>
+            <a:off x="557784" y="2706624"/>
+            <a:ext cx="2103120" cy="274320"/>
           </a:xfrm>
           <a:prstGeom prst="rect">
             <a:avLst/>
@@ -6588,7 +6735,7 @@
               </a:spcAft>
             </a:pPr>
             <a:r>
-              <a:rPr sz="1050" b="1">
+              <a:rPr sz="1150" b="1">
                 <a:solidFill>
                   <a:srgbClr val="6B7280"/>
                 </a:solidFill>
@@ -6601,14 +6748,14 @@
       </p:sp>
       <p:sp>
         <p:nvSpPr>
-          <p:cNvPr id="15366" name="Rounded Rectangle 15365"/>
+          <p:cNvPr id="15367" name="Rounded Rectangle 15366"/>
           <p:cNvSpPr/>
           <p:nvPr/>
         </p:nvSpPr>
         <p:spPr>
           <a:xfrm>
-            <a:off x="457200" y="2880360"/>
-            <a:ext cx="2194560" cy="292608"/>
+            <a:off x="548640" y="3072384"/>
+            <a:ext cx="2121408" cy="274320"/>
           </a:xfrm>
           <a:prstGeom prst="roundRect">
             <a:avLst>
@@ -6658,14 +6805,14 @@
       </p:sp>
       <p:cxnSp>
         <p:nvCxnSpPr>
-          <p:cNvPr id="15367" name="Connector 15366"/>
+          <p:cNvPr id="15368" name="Connector 15367"/>
           <p:cNvCxnSpPr/>
           <p:nvPr/>
         </p:nvCxnSpPr>
         <p:spPr>
           <a:xfrm>
-            <a:off x="1554480" y="3182111"/>
-            <a:ext cx="0" cy="256033"/>
+            <a:off x="1609343" y="3355847"/>
+            <a:ext cx="0" cy="219457"/>
           </a:xfrm>
           <a:prstGeom prst="line">
             <a:avLst/>
@@ -6694,14 +6841,14 @@
       </p:cxnSp>
       <p:sp>
         <p:nvSpPr>
-          <p:cNvPr id="15368" name="Rounded Rectangle 15367"/>
+          <p:cNvPr id="15369" name="Rounded Rectangle 15368"/>
           <p:cNvSpPr/>
           <p:nvPr/>
         </p:nvSpPr>
         <p:spPr>
           <a:xfrm>
-            <a:off x="457200" y="3447288"/>
-            <a:ext cx="2194560" cy="292608"/>
+            <a:off x="548640" y="3584448"/>
+            <a:ext cx="2121408" cy="274320"/>
           </a:xfrm>
           <a:prstGeom prst="roundRect">
             <a:avLst>
@@ -6751,14 +6898,14 @@
       </p:sp>
       <p:cxnSp>
         <p:nvCxnSpPr>
-          <p:cNvPr id="15369" name="Connector 15368"/>
+          <p:cNvPr id="15370" name="Connector 15369"/>
           <p:cNvCxnSpPr/>
           <p:nvPr/>
         </p:nvCxnSpPr>
         <p:spPr>
           <a:xfrm>
-            <a:off x="1554480" y="3749039"/>
-            <a:ext cx="0" cy="256033"/>
+            <a:off x="1609343" y="3867911"/>
+            <a:ext cx="0" cy="219457"/>
           </a:xfrm>
           <a:prstGeom prst="line">
             <a:avLst/>
@@ -6787,14 +6934,14 @@
       </p:cxnSp>
       <p:sp>
         <p:nvSpPr>
-          <p:cNvPr id="15370" name="Rounded Rectangle 15369"/>
+          <p:cNvPr id="15371" name="Rounded Rectangle 15370"/>
           <p:cNvSpPr/>
           <p:nvPr/>
         </p:nvSpPr>
         <p:spPr>
           <a:xfrm>
-            <a:off x="457200" y="4014215"/>
-            <a:ext cx="2194560" cy="292608"/>
+            <a:off x="548640" y="4096512"/>
+            <a:ext cx="2121408" cy="274320"/>
           </a:xfrm>
           <a:prstGeom prst="roundRect">
             <a:avLst>
@@ -6844,14 +6991,14 @@
       </p:sp>
       <p:sp>
         <p:nvSpPr>
-          <p:cNvPr id="15371" name="TextBox 15370"/>
+          <p:cNvPr id="15372" name="TextBox 15371"/>
           <p:cNvSpPr txBox="1"/>
           <p:nvPr/>
         </p:nvSpPr>
         <p:spPr>
           <a:xfrm>
-            <a:off x="457200" y="4626864"/>
-            <a:ext cx="2286000" cy="1097280"/>
+            <a:off x="548640" y="4663440"/>
+            <a:ext cx="2121408" cy="1188720"/>
           </a:xfrm>
           <a:prstGeom prst="rect">
             <a:avLst/>
@@ -6869,7 +7016,7 @@
                 <a:spcPct val="105000"/>
               </a:lnSpc>
               <a:spcAft>
-                <a:spcPts val="300"/>
+                <a:spcPts val="400"/>
               </a:spcAft>
             </a:pPr>
             <a:r>
@@ -6888,7 +7035,7 @@
                 <a:spcPct val="105000"/>
               </a:lnSpc>
               <a:spcAft>
-                <a:spcPts val="300"/>
+                <a:spcPts val="400"/>
               </a:spcAft>
             </a:pPr>
             <a:r>
@@ -6905,14 +7052,60 @@
       </p:sp>
       <p:sp>
         <p:nvSpPr>
-          <p:cNvPr id="15372" name="TextBox 15371"/>
+          <p:cNvPr id="15373" name="Rounded Rectangle 15372"/>
+          <p:cNvSpPr/>
+          <p:nvPr/>
+        </p:nvSpPr>
+        <p:spPr>
+          <a:xfrm>
+            <a:off x="2926080" y="2633472"/>
+            <a:ext cx="5596128" cy="3108960"/>
+          </a:xfrm>
+          <a:prstGeom prst="roundRect">
+            <a:avLst>
+              <a:gd name="adj" fmla="val 2941"/>
+            </a:avLst>
+          </a:prstGeom>
+          <a:solidFill>
+            <a:srgbClr val="FFFFFF"/>
+          </a:solidFill>
+          <a:ln w="15875">
+            <a:solidFill>
+              <a:srgbClr val="2563EB"/>
+            </a:solidFill>
+          </a:ln>
+          <a:effectLst/>
+        </p:spPr>
+        <p:style>
+          <a:lnRef idx="1">
+            <a:schemeClr val="accent1"/>
+          </a:lnRef>
+          <a:fillRef idx="3">
+            <a:schemeClr val="accent1"/>
+          </a:fillRef>
+          <a:effectRef idx="2">
+            <a:schemeClr val="accent1"/>
+          </a:effectRef>
+          <a:fontRef idx="minor">
+            <a:schemeClr val="lt1"/>
+          </a:fontRef>
+        </p:style>
+        <p:txBody>
+          <a:bodyPr rtlCol="0" anchor="ctr"/>
+          <a:lstStyle/>
+          <a:p/>
+        </p:txBody>
+      </p:sp>
+      <p:sp>
+        <p:nvSpPr>
+          <p:cNvPr id="15374" name="TextBox 15373"/>
           <p:cNvSpPr txBox="1"/>
           <p:nvPr/>
         </p:nvSpPr>
         <p:spPr>
           <a:xfrm>
-            <a:off x="3108960" y="2606040"/>
-            <a:ext cx="2743200" cy="329184"/>
+            <a:off x="3072384" y="2706624"/>
+            <a:ext cx="5303520" cy="274320"/>
           </a:xfrm>
           <a:prstGeom prst="rect">
             <a:avLst/>
@@ -6934,7 +7127,7 @@
               </a:spcAft>
             </a:pPr>
             <a:r>
-              <a:rPr sz="1050" b="1">
+              <a:rPr sz="1150" b="1">
                 <a:solidFill>
                   <a:srgbClr val="2563EB"/>
                 </a:solidFill>
@@ -6942,19 +7135,28 @@
               </a:rPr>
               <a:t>RASTA AI</a:t>
             </a:r>
-          </a:p>
-        </p:txBody>
-      </p:sp>
-      <p:sp>
-        <p:nvSpPr>
-          <p:cNvPr id="15373" name="Rounded Rectangle 15372"/>
+            <a:r>
+              <a:rPr sz="1000" b="0">
+                <a:solidFill>
+                  <a:srgbClr val="6B7280"/>
+                </a:solidFill>
+                <a:latin typeface="Calibri"/>
+              </a:rPr>
+              <a:t>   evidence before the road</a:t>
+            </a:r>
+          </a:p>
+        </p:txBody>
+      </p:sp>
+      <p:sp>
+        <p:nvSpPr>
+          <p:cNvPr id="15375" name="Rounded Rectangle 15374"/>
           <p:cNvSpPr/>
           <p:nvPr/>
         </p:nvSpPr>
         <p:spPr>
           <a:xfrm>
-            <a:off x="3108960" y="2880360"/>
-            <a:ext cx="5257800" cy="274320"/>
+            <a:off x="3063240" y="3017520"/>
+            <a:ext cx="5321808" cy="256032"/>
           </a:xfrm>
           <a:prstGeom prst="roundRect">
             <a:avLst>
@@ -7004,14 +7206,14 @@
       </p:sp>
       <p:cxnSp>
         <p:nvCxnSpPr>
-          <p:cNvPr id="15374" name="Connector 15373"/>
+          <p:cNvPr id="15376" name="Connector 15375"/>
           <p:cNvCxnSpPr/>
           <p:nvPr/>
         </p:nvCxnSpPr>
         <p:spPr>
           <a:xfrm>
-            <a:off x="5737860" y="3163823"/>
-            <a:ext cx="0" cy="100585"/>
+            <a:off x="5724144" y="3282696"/>
+            <a:ext cx="0" cy="73152"/>
           </a:xfrm>
           <a:prstGeom prst="line">
             <a:avLst/>
@@ -7040,14 +7242,14 @@
       </p:cxnSp>
       <p:sp>
         <p:nvSpPr>
-          <p:cNvPr id="15375" name="Rounded Rectangle 15374"/>
+          <p:cNvPr id="15377" name="Rounded Rectangle 15376"/>
           <p:cNvSpPr/>
           <p:nvPr/>
         </p:nvSpPr>
         <p:spPr>
           <a:xfrm>
-            <a:off x="3108960" y="3273552"/>
-            <a:ext cx="5257800" cy="274320"/>
+            <a:off x="3063240" y="3364991"/>
+            <a:ext cx="5321808" cy="256032"/>
           </a:xfrm>
           <a:prstGeom prst="roundRect">
             <a:avLst>
@@ -7097,14 +7299,14 @@
       </p:sp>
       <p:sp>
         <p:nvSpPr>
-          <p:cNvPr id="15376" name="Rounded Rectangle 15375"/>
+          <p:cNvPr id="15378" name="Rounded Rectangle 15377"/>
           <p:cNvSpPr/>
           <p:nvPr/>
         </p:nvSpPr>
         <p:spPr>
           <a:xfrm>
-            <a:off x="3108960" y="3666744"/>
-            <a:ext cx="5257800" cy="896112"/>
+            <a:off x="3063240" y="3712463"/>
+            <a:ext cx="5321808" cy="841248"/>
           </a:xfrm>
           <a:prstGeom prst="roundRect">
             <a:avLst>
@@ -7143,14 +7345,14 @@
       </p:sp>
       <p:sp>
         <p:nvSpPr>
-          <p:cNvPr id="15377" name="TextBox 15376"/>
+          <p:cNvPr id="15379" name="TextBox 15378"/>
           <p:cNvSpPr txBox="1"/>
           <p:nvPr/>
         </p:nvSpPr>
         <p:spPr>
           <a:xfrm>
-            <a:off x="3218688" y="3712463"/>
-            <a:ext cx="5074920" cy="256032"/>
+            <a:off x="3172968" y="3749039"/>
+            <a:ext cx="5138928" cy="237744"/>
           </a:xfrm>
           <a:prstGeom prst="rect">
             <a:avLst/>
@@ -7194,14 +7396,14 @@
       </p:sp>
       <p:sp>
         <p:nvSpPr>
-          <p:cNvPr id="15378" name="Rounded Rectangle 15377"/>
+          <p:cNvPr id="15380" name="Rounded Rectangle 15379"/>
           <p:cNvSpPr/>
           <p:nvPr/>
         </p:nvSpPr>
         <p:spPr>
           <a:xfrm>
-            <a:off x="3218688" y="3995928"/>
-            <a:ext cx="777240" cy="228600"/>
+            <a:off x="3172968" y="4005072"/>
+            <a:ext cx="777240" cy="219456"/>
           </a:xfrm>
           <a:prstGeom prst="roundRect">
             <a:avLst>
@@ -7251,14 +7453,14 @@
       </p:sp>
       <p:sp>
         <p:nvSpPr>
-          <p:cNvPr id="15379" name="Rounded Rectangle 15378"/>
+          <p:cNvPr id="15381" name="Rounded Rectangle 15380"/>
           <p:cNvSpPr/>
           <p:nvPr/>
         </p:nvSpPr>
         <p:spPr>
           <a:xfrm>
-            <a:off x="4069080" y="3995928"/>
-            <a:ext cx="777240" cy="228600"/>
+            <a:off x="4023360" y="4005072"/>
+            <a:ext cx="777240" cy="219456"/>
           </a:xfrm>
           <a:prstGeom prst="roundRect">
             <a:avLst>
@@ -7308,14 +7510,14 @@
       </p:sp>
       <p:sp>
         <p:nvSpPr>
-          <p:cNvPr id="15380" name="Rounded Rectangle 15379"/>
+          <p:cNvPr id="15382" name="Rounded Rectangle 15381"/>
           <p:cNvSpPr/>
           <p:nvPr/>
         </p:nvSpPr>
         <p:spPr>
           <a:xfrm>
-            <a:off x="4919472" y="3995928"/>
-            <a:ext cx="1234440" cy="228600"/>
+            <a:off x="4873752" y="4005072"/>
+            <a:ext cx="1234440" cy="219456"/>
           </a:xfrm>
           <a:prstGeom prst="roundRect">
             <a:avLst>
@@ -7365,14 +7567,14 @@
       </p:sp>
       <p:sp>
         <p:nvSpPr>
-          <p:cNvPr id="15381" name="Rounded Rectangle 15380"/>
+          <p:cNvPr id="15383" name="Rounded Rectangle 15382"/>
           <p:cNvSpPr/>
           <p:nvPr/>
         </p:nvSpPr>
         <p:spPr>
           <a:xfrm>
-            <a:off x="6227064" y="3995928"/>
-            <a:ext cx="1005840" cy="228600"/>
+            <a:off x="6181344" y="4005072"/>
+            <a:ext cx="1005840" cy="219456"/>
           </a:xfrm>
           <a:prstGeom prst="roundRect">
             <a:avLst>
@@ -7422,14 +7624,14 @@
       </p:sp>
       <p:sp>
         <p:nvSpPr>
-          <p:cNvPr id="15382" name="Rounded Rectangle 15381"/>
+          <p:cNvPr id="15384" name="Rounded Rectangle 15383"/>
           <p:cNvSpPr/>
           <p:nvPr/>
         </p:nvSpPr>
         <p:spPr>
           <a:xfrm>
-            <a:off x="3218688" y="4270248"/>
-            <a:ext cx="1143000" cy="228600"/>
+            <a:off x="3172968" y="4261104"/>
+            <a:ext cx="1143000" cy="219456"/>
           </a:xfrm>
           <a:prstGeom prst="roundRect">
             <a:avLst>
@@ -7479,14 +7681,14 @@
       </p:sp>
       <p:sp>
         <p:nvSpPr>
-          <p:cNvPr id="15383" name="Rounded Rectangle 15382"/>
+          <p:cNvPr id="15385" name="Rounded Rectangle 15384"/>
           <p:cNvSpPr/>
           <p:nvPr/>
         </p:nvSpPr>
         <p:spPr>
           <a:xfrm>
-            <a:off x="4434840" y="4270248"/>
-            <a:ext cx="914400" cy="228600"/>
+            <a:off x="4389120" y="4261104"/>
+            <a:ext cx="914400" cy="219456"/>
           </a:xfrm>
           <a:prstGeom prst="roundRect">
             <a:avLst>
@@ -7536,14 +7738,14 @@
       </p:sp>
       <p:sp>
         <p:nvSpPr>
-          <p:cNvPr id="15384" name="Rounded Rectangle 15383"/>
+          <p:cNvPr id="15386" name="Rounded Rectangle 15385"/>
           <p:cNvSpPr/>
           <p:nvPr/>
         </p:nvSpPr>
         <p:spPr>
           <a:xfrm>
-            <a:off x="5422392" y="4270248"/>
-            <a:ext cx="1234440" cy="228600"/>
+            <a:off x="5376672" y="4261104"/>
+            <a:ext cx="1234440" cy="219456"/>
           </a:xfrm>
           <a:prstGeom prst="roundRect">
             <a:avLst>
@@ -7593,14 +7795,14 @@
       </p:sp>
       <p:cxnSp>
         <p:nvCxnSpPr>
-          <p:cNvPr id="15385" name="Connector 15384"/>
+          <p:cNvPr id="15387" name="Connector 15386"/>
           <p:cNvCxnSpPr/>
           <p:nvPr/>
         </p:nvCxnSpPr>
         <p:spPr>
           <a:xfrm>
-            <a:off x="5737860" y="4572000"/>
-            <a:ext cx="0" cy="100584"/>
+            <a:off x="5724144" y="4562855"/>
+            <a:ext cx="0" cy="73152"/>
           </a:xfrm>
           <a:prstGeom prst="line">
             <a:avLst/>
@@ -7629,14 +7831,14 @@
       </p:cxnSp>
       <p:sp>
         <p:nvSpPr>
-          <p:cNvPr id="15386" name="Rounded Rectangle 15385"/>
+          <p:cNvPr id="15388" name="Rounded Rectangle 15387"/>
           <p:cNvSpPr/>
           <p:nvPr/>
         </p:nvSpPr>
         <p:spPr>
           <a:xfrm>
-            <a:off x="3108960" y="4681728"/>
-            <a:ext cx="5257800" cy="274320"/>
+            <a:off x="3063240" y="4645151"/>
+            <a:ext cx="5321808" cy="256032"/>
           </a:xfrm>
           <a:prstGeom prst="roundRect">
             <a:avLst>
@@ -7684,14 +7886,14 @@
       </p:sp>
       <p:cxnSp>
         <p:nvCxnSpPr>
-          <p:cNvPr id="15387" name="Connector 15386"/>
+          <p:cNvPr id="15389" name="Connector 15388"/>
           <p:cNvCxnSpPr/>
           <p:nvPr/>
         </p:nvCxnSpPr>
         <p:spPr>
           <a:xfrm>
-            <a:off x="5737860" y="4965192"/>
-            <a:ext cx="0" cy="100584"/>
+            <a:off x="5724144" y="4910327"/>
+            <a:ext cx="0" cy="73152"/>
           </a:xfrm>
           <a:prstGeom prst="line">
             <a:avLst/>
@@ -7720,14 +7922,14 @@
       </p:cxnSp>
       <p:sp>
         <p:nvSpPr>
-          <p:cNvPr id="15388" name="Rounded Rectangle 15387"/>
+          <p:cNvPr id="15390" name="Rounded Rectangle 15389"/>
           <p:cNvSpPr/>
           <p:nvPr/>
         </p:nvSpPr>
         <p:spPr>
           <a:xfrm>
-            <a:off x="3108960" y="5074920"/>
-            <a:ext cx="5257800" cy="274320"/>
+            <a:off x="3063240" y="4992623"/>
+            <a:ext cx="5321808" cy="256032"/>
           </a:xfrm>
           <a:prstGeom prst="roundRect">
             <a:avLst>
@@ -7777,14 +7979,14 @@
       </p:sp>
       <p:cxnSp>
         <p:nvCxnSpPr>
-          <p:cNvPr id="15389" name="Connector 15388"/>
+          <p:cNvPr id="15391" name="Connector 15390"/>
           <p:cNvCxnSpPr/>
           <p:nvPr/>
         </p:nvCxnSpPr>
         <p:spPr>
           <a:xfrm>
-            <a:off x="5737860" y="5358383"/>
-            <a:ext cx="0" cy="100585"/>
+            <a:off x="5724144" y="5257799"/>
+            <a:ext cx="0" cy="73152"/>
           </a:xfrm>
           <a:prstGeom prst="line">
             <a:avLst/>
@@ -7813,14 +8015,14 @@
       </p:cxnSp>
       <p:sp>
         <p:nvSpPr>
-          <p:cNvPr id="15390" name="Rounded Rectangle 15389"/>
+          <p:cNvPr id="15392" name="Rounded Rectangle 15391"/>
           <p:cNvSpPr/>
           <p:nvPr/>
         </p:nvSpPr>
         <p:spPr>
           <a:xfrm>
-            <a:off x="3108960" y="5468112"/>
-            <a:ext cx="5257800" cy="274320"/>
+            <a:off x="3063240" y="5340095"/>
+            <a:ext cx="5321808" cy="256032"/>
           </a:xfrm>
           <a:prstGeom prst="roundRect">
             <a:avLst>
@@ -7870,14 +8072,60 @@
       </p:sp>
       <p:sp>
         <p:nvSpPr>
-          <p:cNvPr id="15391" name="Rounded Rectangle 15390"/>
+          <p:cNvPr id="15393" name="Rounded Rectangle 15392"/>
           <p:cNvSpPr/>
           <p:nvPr/>
         </p:nvSpPr>
         <p:spPr>
           <a:xfrm>
-            <a:off x="457200" y="5797296"/>
-            <a:ext cx="2240280" cy="402336"/>
+            <a:off x="411480" y="5815584"/>
+            <a:ext cx="8110727" cy="548640"/>
+          </a:xfrm>
+          <a:prstGeom prst="roundRect">
+            <a:avLst>
+              <a:gd name="adj" fmla="val 16666"/>
+            </a:avLst>
+          </a:prstGeom>
+          <a:solidFill>
+            <a:srgbClr val="FFFFFF"/>
+          </a:solidFill>
+          <a:ln w="15875">
+            <a:solidFill>
+              <a:srgbClr val="DC2626"/>
+            </a:solidFill>
+          </a:ln>
+          <a:effectLst/>
+        </p:spPr>
+        <p:style>
+          <a:lnRef idx="1">
+            <a:schemeClr val="accent1"/>
+          </a:lnRef>
+          <a:fillRef idx="3">
+            <a:schemeClr val="accent1"/>
+          </a:fillRef>
+          <a:effectRef idx="2">
+            <a:schemeClr val="accent1"/>
+          </a:effectRef>
+          <a:fontRef idx="minor">
+            <a:schemeClr val="lt1"/>
+          </a:fontRef>
+        </p:style>
+        <p:txBody>
+          <a:bodyPr rtlCol="0" anchor="ctr"/>
+          <a:lstStyle/>
+          <a:p/>
+        </p:txBody>
+      </p:sp>
+      <p:sp>
+        <p:nvSpPr>
+          <p:cNvPr id="15394" name="Rounded Rectangle 15393"/>
+          <p:cNvSpPr/>
+          <p:nvPr/>
+        </p:nvSpPr>
+        <p:spPr>
+          <a:xfrm>
+            <a:off x="548640" y="5907024"/>
+            <a:ext cx="2103120" cy="365760"/>
           </a:xfrm>
           <a:prstGeom prst="roundRect">
             <a:avLst>
@@ -7912,7 +8160,7 @@
           <a:p>
             <a:pPr algn="ctr"/>
             <a:r>
-              <a:rPr sz="1300" b="1">
+              <a:rPr sz="1250" b="1">
                 <a:solidFill>
                   <a:srgbClr val="FFFFFF"/>
                 </a:solidFill>
@@ -7925,14 +8173,14 @@
       </p:sp>
       <p:sp>
         <p:nvSpPr>
-          <p:cNvPr id="15392" name="TextBox 15391"/>
+          <p:cNvPr id="15395" name="TextBox 15394"/>
           <p:cNvSpPr txBox="1"/>
           <p:nvPr/>
         </p:nvSpPr>
         <p:spPr>
           <a:xfrm>
-            <a:off x="2834640" y="5760720"/>
-            <a:ext cx="5577840" cy="502920"/>
+            <a:off x="2761488" y="5879592"/>
+            <a:ext cx="5650992" cy="438912"/>
           </a:xfrm>
           <a:prstGeom prst="rect">
             <a:avLst/>
@@ -7954,7 +8202,7 @@
               </a:spcAft>
             </a:pPr>
             <a:r>
-              <a:rPr sz="1100" b="1">
+              <a:rPr sz="1050" b="1">
                 <a:solidFill>
                   <a:srgbClr val="101820"/>
                 </a:solidFill>
@@ -7963,7 +8211,7 @@
               <a:t>The system refuses to fabricate certainty: </a:t>
             </a:r>
             <a:r>
-              <a:rPr sz="1100" b="0">
+              <a:rPr sz="1050" b="0">
                 <a:solidFill>
                   <a:srgbClr val="101820"/>
                 </a:solidFill>
@@ -7976,14 +8224,102 @@
       </p:sp>
       <p:sp>
         <p:nvSpPr>
-          <p:cNvPr id="15393" name="Rounded Rectangle 15392"/>
+          <p:cNvPr id="15396" name="Rounded Rectangle 15395"/>
           <p:cNvSpPr/>
           <p:nvPr/>
         </p:nvSpPr>
         <p:spPr>
           <a:xfrm>
-            <a:off x="8613648" y="1161288"/>
-            <a:ext cx="3256372" cy="5038344"/>
+            <a:off x="8613648" y="1097280"/>
+            <a:ext cx="3163824" cy="5248656"/>
+          </a:xfrm>
+          <a:prstGeom prst="roundRect">
+            <a:avLst>
+              <a:gd name="adj" fmla="val 2890"/>
+            </a:avLst>
+          </a:prstGeom>
+          <a:solidFill>
+            <a:srgbClr val="FFFFFF"/>
+          </a:solidFill>
+          <a:ln w="15875">
+            <a:solidFill>
+              <a:srgbClr val="2563EB"/>
+            </a:solidFill>
+          </a:ln>
+          <a:effectLst/>
+        </p:spPr>
+        <p:style>
+          <a:lnRef idx="1">
+            <a:schemeClr val="accent1"/>
+          </a:lnRef>
+          <a:fillRef idx="3">
+            <a:schemeClr val="accent1"/>
+          </a:fillRef>
+          <a:effectRef idx="2">
+            <a:schemeClr val="accent1"/>
+          </a:effectRef>
+          <a:fontRef idx="minor">
+            <a:schemeClr val="lt1"/>
+          </a:fontRef>
+        </p:style>
+        <p:txBody>
+          <a:bodyPr rtlCol="0" anchor="ctr"/>
+          <a:lstStyle/>
+          <a:p/>
+        </p:txBody>
+      </p:sp>
+      <p:sp>
+        <p:nvSpPr>
+          <p:cNvPr id="15397" name="TextBox 15396"/>
+          <p:cNvSpPr txBox="1"/>
+          <p:nvPr/>
+        </p:nvSpPr>
+        <p:spPr>
+          <a:xfrm>
+            <a:off x="8759952" y="1170432"/>
+            <a:ext cx="2871216" cy="274320"/>
+          </a:xfrm>
+          <a:prstGeom prst="rect">
+            <a:avLst/>
+          </a:prstGeom>
+          <a:noFill/>
+        </p:spPr>
+        <p:txBody>
+          <a:bodyPr wrap="square" anchor="t" lIns="18288" rIns="18288" tIns="18288" bIns="18288">
+            <a:spAutoFit/>
+          </a:bodyPr>
+          <a:lstStyle/>
+          <a:p>
+            <a:pPr algn="l">
+              <a:lnSpc>
+                <a:spcPct val="105000"/>
+              </a:lnSpc>
+              <a:spcAft>
+                <a:spcPts val="0"/>
+              </a:spcAft>
+            </a:pPr>
+            <a:r>
+              <a:rPr sz="1050" b="1">
+                <a:solidFill>
+                  <a:srgbClr val="2563EB"/>
+                </a:solidFill>
+                <a:latin typeface="Calibri"/>
+              </a:rPr>
+              <a:t>MANAGER · CHECK CONDITIONS</a:t>
+            </a:r>
+          </a:p>
+        </p:txBody>
+      </p:sp>
+      <p:sp>
+        <p:nvSpPr>
+          <p:cNvPr id="15398" name="Rounded Rectangle 15397"/>
+          <p:cNvSpPr/>
+          <p:nvPr/>
+        </p:nvSpPr>
+        <p:spPr>
+          <a:xfrm>
+            <a:off x="8787384" y="1490472"/>
+            <a:ext cx="2768803" cy="4279392"/>
           </a:xfrm>
           <a:prstGeom prst="roundRect">
             <a:avLst>
@@ -8022,7 +8358,7 @@
       </p:sp>
       <p:pic>
         <p:nvPicPr>
-          <p:cNvPr id="15394" name="Picture 15393" descr="mgr-evidence.png"/>
+          <p:cNvPr id="15399" name="Picture 15398" descr="mgr-evidence.png"/>
           <p:cNvPicPr>
             <a:picLocks noChangeAspect="1"/>
           </p:cNvPicPr>
@@ -8036,8 +8372,8 @@
         </p:blipFill>
         <p:spPr>
           <a:xfrm>
-            <a:off x="8641080" y="1188720"/>
-            <a:ext cx="3201508" cy="4983480"/>
+            <a:off x="8814816" y="1517904"/>
+            <a:ext cx="2713939" cy="4224528"/>
           </a:xfrm>
           <a:prstGeom prst="rect">
             <a:avLst/>
@@ -8046,14 +8382,14 @@
       </p:pic>
       <p:sp>
         <p:nvSpPr>
-          <p:cNvPr id="15395" name="Rounded Rectangle 15394"/>
+          <p:cNvPr id="15400" name="Rounded Rectangle 15399"/>
           <p:cNvSpPr/>
           <p:nvPr/>
         </p:nvSpPr>
         <p:spPr>
           <a:xfrm>
-            <a:off x="8641080" y="5943600"/>
-            <a:ext cx="3201508" cy="256032"/>
+            <a:off x="8750808" y="5925312"/>
+            <a:ext cx="2889504" cy="256032"/>
           </a:xfrm>
           <a:prstGeom prst="roundRect">
             <a:avLst>
@@ -8094,7 +8430,7 @@
                 </a:solidFill>
                 <a:latin typeface="Calibri"/>
               </a:rPr>
-              <a:t>Manager · Check conditions (real screen)</a:t>
+              <a:t>Real screen · evidence · freshness · UNKNOWN</a:t>
             </a:r>
           </a:p>
         </p:txBody>
@@ -8374,14 +8710,60 @@
       </p:pic>
       <p:sp>
         <p:nvSpPr>
-          <p:cNvPr id="17410" name="TextBox 17409"/>
+          <p:cNvPr id="17410" name="Rounded Rectangle 17409"/>
+          <p:cNvSpPr/>
+          <p:nvPr/>
+        </p:nvSpPr>
+        <p:spPr>
+          <a:xfrm>
+            <a:off x="347472" y="1024128"/>
+            <a:ext cx="8119872" cy="3602736"/>
+          </a:xfrm>
+          <a:prstGeom prst="roundRect">
+            <a:avLst>
+              <a:gd name="adj" fmla="val 2538"/>
+            </a:avLst>
+          </a:prstGeom>
+          <a:solidFill>
+            <a:srgbClr val="FFFFFF"/>
+          </a:solidFill>
+          <a:ln w="15875">
+            <a:solidFill>
+              <a:srgbClr val="2563EB"/>
+            </a:solidFill>
+          </a:ln>
+          <a:effectLst/>
+        </p:spPr>
+        <p:style>
+          <a:lnRef idx="1">
+            <a:schemeClr val="accent1"/>
+          </a:lnRef>
+          <a:fillRef idx="3">
+            <a:schemeClr val="accent1"/>
+          </a:fillRef>
+          <a:effectRef idx="2">
+            <a:schemeClr val="accent1"/>
+          </a:effectRef>
+          <a:fontRef idx="minor">
+            <a:schemeClr val="lt1"/>
+          </a:fontRef>
+        </p:style>
+        <p:txBody>
+          <a:bodyPr rtlCol="0" anchor="ctr"/>
+          <a:lstStyle/>
+          <a:p/>
+        </p:txBody>
+      </p:sp>
+      <p:sp>
+        <p:nvSpPr>
+          <p:cNvPr id="17411" name="TextBox 17410"/>
           <p:cNvSpPr txBox="1"/>
           <p:nvPr/>
         </p:nvSpPr>
         <p:spPr>
           <a:xfrm>
-            <a:off x="411480" y="1060704"/>
-            <a:ext cx="7772400" cy="329184"/>
+            <a:off x="493776" y="1097280"/>
+            <a:ext cx="7827264" cy="274320"/>
           </a:xfrm>
           <a:prstGeom prst="rect">
             <a:avLst/>
@@ -8403,26 +8785,35 @@
               </a:spcAft>
             </a:pPr>
             <a:r>
-              <a:rPr sz="1050" b="1">
+              <a:rPr sz="1150" b="1">
+                <a:solidFill>
+                  <a:srgbClr val="2563EB"/>
+                </a:solidFill>
+                <a:latin typeface="Calibri"/>
+              </a:rPr>
+              <a:t>VERIFIED DATA → DECISION → DRIVER</a:t>
+            </a:r>
+            <a:r>
+              <a:rPr sz="1000" b="0">
                 <a:solidFill>
                   <a:srgbClr val="6B7280"/>
                 </a:solidFill>
                 <a:latin typeface="Calibri"/>
               </a:rPr>
-              <a:t>VERIFIED DATA  ·  provider adapters with health + freshness</a:t>
-            </a:r>
-          </a:p>
-        </p:txBody>
-      </p:sp>
-      <p:sp>
-        <p:nvSpPr>
-          <p:cNvPr id="17411" name="Rounded Rectangle 17410"/>
+              <a:t>   provider adapters with health + freshness</a:t>
+            </a:r>
+          </a:p>
+        </p:txBody>
+      </p:sp>
+      <p:sp>
+        <p:nvSpPr>
+          <p:cNvPr id="17412" name="Rounded Rectangle 17411"/>
           <p:cNvSpPr/>
           <p:nvPr/>
         </p:nvSpPr>
         <p:spPr>
           <a:xfrm>
-            <a:off x="411480" y="1335024"/>
+            <a:off x="411480" y="1444752"/>
             <a:ext cx="1225296" cy="585216"/>
           </a:xfrm>
           <a:prstGeom prst="roundRect">
@@ -8462,13 +8853,13 @@
       </p:sp>
       <p:sp>
         <p:nvSpPr>
-          <p:cNvPr id="17412" name="TextBox 17411"/>
+          <p:cNvPr id="17413" name="TextBox 17412"/>
           <p:cNvSpPr txBox="1"/>
           <p:nvPr/>
         </p:nvSpPr>
         <p:spPr>
           <a:xfrm>
-            <a:off x="502920" y="1380744"/>
+            <a:off x="502920" y="1490472"/>
             <a:ext cx="1042416" cy="493776"/>
           </a:xfrm>
           <a:prstGeom prst="rect">
@@ -8523,14 +8914,14 @@
       </p:sp>
       <p:cxnSp>
         <p:nvCxnSpPr>
-          <p:cNvPr id="17413" name="Connector 17412"/>
+          <p:cNvPr id="17414" name="Connector 17413"/>
           <p:cNvCxnSpPr/>
           <p:nvPr/>
         </p:nvCxnSpPr>
         <p:spPr>
           <a:xfrm>
-            <a:off x="1024128" y="1938528"/>
-            <a:ext cx="0" cy="182880"/>
+            <a:off x="1024128" y="2048256"/>
+            <a:ext cx="0" cy="128016"/>
           </a:xfrm>
           <a:prstGeom prst="line">
             <a:avLst/>
@@ -8559,13 +8950,13 @@
       </p:cxnSp>
       <p:sp>
         <p:nvSpPr>
-          <p:cNvPr id="17414" name="Rounded Rectangle 17413"/>
+          <p:cNvPr id="17415" name="Rounded Rectangle 17414"/>
           <p:cNvSpPr/>
           <p:nvPr/>
         </p:nvSpPr>
         <p:spPr>
           <a:xfrm>
-            <a:off x="1728216" y="1335024"/>
+            <a:off x="1728216" y="1444752"/>
             <a:ext cx="1225296" cy="585216"/>
           </a:xfrm>
           <a:prstGeom prst="roundRect">
@@ -8605,13 +8996,13 @@
       </p:sp>
       <p:sp>
         <p:nvSpPr>
-          <p:cNvPr id="17415" name="TextBox 17414"/>
+          <p:cNvPr id="17416" name="TextBox 17415"/>
           <p:cNvSpPr txBox="1"/>
           <p:nvPr/>
         </p:nvSpPr>
         <p:spPr>
           <a:xfrm>
-            <a:off x="1819656" y="1380744"/>
+            <a:off x="1819656" y="1490472"/>
             <a:ext cx="1042416" cy="493776"/>
           </a:xfrm>
           <a:prstGeom prst="rect">
@@ -8666,14 +9057,14 @@
       </p:sp>
       <p:cxnSp>
         <p:nvCxnSpPr>
-          <p:cNvPr id="17416" name="Connector 17415"/>
+          <p:cNvPr id="17417" name="Connector 17416"/>
           <p:cNvCxnSpPr/>
           <p:nvPr/>
         </p:nvCxnSpPr>
         <p:spPr>
           <a:xfrm>
-            <a:off x="2340864" y="1938528"/>
-            <a:ext cx="0" cy="182880"/>
+            <a:off x="2340864" y="2048256"/>
+            <a:ext cx="0" cy="128016"/>
           </a:xfrm>
           <a:prstGeom prst="line">
             <a:avLst/>
@@ -8702,13 +9093,13 @@
       </p:cxnSp>
       <p:sp>
         <p:nvSpPr>
-          <p:cNvPr id="17417" name="Rounded Rectangle 17416"/>
+          <p:cNvPr id="17418" name="Rounded Rectangle 17417"/>
           <p:cNvSpPr/>
           <p:nvPr/>
         </p:nvSpPr>
         <p:spPr>
           <a:xfrm>
-            <a:off x="3044952" y="1335024"/>
+            <a:off x="3044952" y="1444752"/>
             <a:ext cx="1225296" cy="585216"/>
           </a:xfrm>
           <a:prstGeom prst="roundRect">
@@ -8748,13 +9139,13 @@
       </p:sp>
       <p:sp>
         <p:nvSpPr>
-          <p:cNvPr id="17418" name="TextBox 17417"/>
+          <p:cNvPr id="17419" name="TextBox 17418"/>
           <p:cNvSpPr txBox="1"/>
           <p:nvPr/>
         </p:nvSpPr>
         <p:spPr>
           <a:xfrm>
-            <a:off x="3136392" y="1380744"/>
+            <a:off x="3136392" y="1490472"/>
             <a:ext cx="1042416" cy="493776"/>
           </a:xfrm>
           <a:prstGeom prst="rect">
@@ -8809,14 +9200,14 @@
       </p:sp>
       <p:cxnSp>
         <p:nvCxnSpPr>
-          <p:cNvPr id="17419" name="Connector 17418"/>
+          <p:cNvPr id="17420" name="Connector 17419"/>
           <p:cNvCxnSpPr/>
           <p:nvPr/>
         </p:nvCxnSpPr>
         <p:spPr>
           <a:xfrm>
-            <a:off x="3657600" y="1938528"/>
-            <a:ext cx="0" cy="182880"/>
+            <a:off x="3657600" y="2048256"/>
+            <a:ext cx="0" cy="128016"/>
           </a:xfrm>
           <a:prstGeom prst="line">
             <a:avLst/>
@@ -8845,13 +9236,13 @@
       </p:cxnSp>
       <p:sp>
         <p:nvSpPr>
-          <p:cNvPr id="17420" name="Rounded Rectangle 17419"/>
+          <p:cNvPr id="17421" name="Rounded Rectangle 17420"/>
           <p:cNvSpPr/>
           <p:nvPr/>
         </p:nvSpPr>
         <p:spPr>
           <a:xfrm>
-            <a:off x="4361688" y="1335024"/>
+            <a:off x="4361688" y="1444752"/>
             <a:ext cx="1225296" cy="585216"/>
           </a:xfrm>
           <a:prstGeom prst="roundRect">
@@ -8891,13 +9282,13 @@
       </p:sp>
       <p:sp>
         <p:nvSpPr>
-          <p:cNvPr id="17421" name="TextBox 17420"/>
+          <p:cNvPr id="17422" name="TextBox 17421"/>
           <p:cNvSpPr txBox="1"/>
           <p:nvPr/>
         </p:nvSpPr>
         <p:spPr>
           <a:xfrm>
-            <a:off x="4453128" y="1380744"/>
+            <a:off x="4453128" y="1490472"/>
             <a:ext cx="1042416" cy="493776"/>
           </a:xfrm>
           <a:prstGeom prst="rect">
@@ -8952,14 +9343,14 @@
       </p:sp>
       <p:cxnSp>
         <p:nvCxnSpPr>
-          <p:cNvPr id="17422" name="Connector 17421"/>
+          <p:cNvPr id="17423" name="Connector 17422"/>
           <p:cNvCxnSpPr/>
           <p:nvPr/>
         </p:nvCxnSpPr>
         <p:spPr>
           <a:xfrm>
-            <a:off x="4974336" y="1938528"/>
-            <a:ext cx="0" cy="182880"/>
+            <a:off x="4974336" y="2048256"/>
+            <a:ext cx="0" cy="128016"/>
           </a:xfrm>
           <a:prstGeom prst="line">
             <a:avLst/>
@@ -8988,13 +9379,13 @@
       </p:cxnSp>
       <p:sp>
         <p:nvSpPr>
-          <p:cNvPr id="17423" name="Rounded Rectangle 17422"/>
+          <p:cNvPr id="17424" name="Rounded Rectangle 17423"/>
           <p:cNvSpPr/>
           <p:nvPr/>
         </p:nvSpPr>
         <p:spPr>
           <a:xfrm>
-            <a:off x="5678424" y="1335024"/>
+            <a:off x="5678424" y="1444752"/>
             <a:ext cx="1225296" cy="585216"/>
           </a:xfrm>
           <a:prstGeom prst="roundRect">
@@ -9034,13 +9425,13 @@
       </p:sp>
       <p:sp>
         <p:nvSpPr>
-          <p:cNvPr id="17424" name="TextBox 17423"/>
+          <p:cNvPr id="17425" name="TextBox 17424"/>
           <p:cNvSpPr txBox="1"/>
           <p:nvPr/>
         </p:nvSpPr>
         <p:spPr>
           <a:xfrm>
-            <a:off x="5769864" y="1380744"/>
+            <a:off x="5769864" y="1490472"/>
             <a:ext cx="1042416" cy="493776"/>
           </a:xfrm>
           <a:prstGeom prst="rect">
@@ -9095,14 +9486,14 @@
       </p:sp>
       <p:cxnSp>
         <p:nvCxnSpPr>
-          <p:cNvPr id="17425" name="Connector 17424"/>
+          <p:cNvPr id="17426" name="Connector 17425"/>
           <p:cNvCxnSpPr/>
           <p:nvPr/>
         </p:nvCxnSpPr>
         <p:spPr>
           <a:xfrm>
-            <a:off x="6291072" y="1938528"/>
-            <a:ext cx="0" cy="182880"/>
+            <a:off x="6291072" y="2048256"/>
+            <a:ext cx="0" cy="128016"/>
           </a:xfrm>
           <a:prstGeom prst="line">
             <a:avLst/>
@@ -9131,13 +9522,13 @@
       </p:cxnSp>
       <p:sp>
         <p:nvSpPr>
-          <p:cNvPr id="17426" name="Rounded Rectangle 17425"/>
+          <p:cNvPr id="17427" name="Rounded Rectangle 17426"/>
           <p:cNvSpPr/>
           <p:nvPr/>
         </p:nvSpPr>
         <p:spPr>
           <a:xfrm>
-            <a:off x="6995160" y="1335024"/>
+            <a:off x="6995160" y="1444752"/>
             <a:ext cx="1225296" cy="585216"/>
           </a:xfrm>
           <a:prstGeom prst="roundRect">
@@ -9177,13 +9568,13 @@
       </p:sp>
       <p:sp>
         <p:nvSpPr>
-          <p:cNvPr id="17427" name="TextBox 17426"/>
+          <p:cNvPr id="17428" name="TextBox 17427"/>
           <p:cNvSpPr txBox="1"/>
           <p:nvPr/>
         </p:nvSpPr>
         <p:spPr>
           <a:xfrm>
-            <a:off x="7086600" y="1380744"/>
+            <a:off x="7086600" y="1490472"/>
             <a:ext cx="1042416" cy="493776"/>
           </a:xfrm>
           <a:prstGeom prst="rect">
@@ -9238,14 +9629,14 @@
       </p:sp>
       <p:cxnSp>
         <p:nvCxnSpPr>
-          <p:cNvPr id="17428" name="Connector 17427"/>
+          <p:cNvPr id="17429" name="Connector 17428"/>
           <p:cNvCxnSpPr/>
           <p:nvPr/>
         </p:nvCxnSpPr>
         <p:spPr>
           <a:xfrm>
-            <a:off x="7607808" y="1938528"/>
-            <a:ext cx="0" cy="182880"/>
+            <a:off x="7607808" y="2048256"/>
+            <a:ext cx="0" cy="128016"/>
           </a:xfrm>
           <a:prstGeom prst="line">
             <a:avLst/>
@@ -9274,14 +9665,14 @@
       </p:cxnSp>
       <p:sp>
         <p:nvSpPr>
-          <p:cNvPr id="17429" name="Rounded Rectangle 17428"/>
+          <p:cNvPr id="17430" name="Rounded Rectangle 17429"/>
           <p:cNvSpPr/>
           <p:nvPr/>
         </p:nvSpPr>
         <p:spPr>
           <a:xfrm>
-            <a:off x="411480" y="2139696"/>
-            <a:ext cx="7808976" cy="530352"/>
+            <a:off x="411480" y="2194560"/>
+            <a:ext cx="7808976" cy="512064"/>
           </a:xfrm>
           <a:prstGeom prst="roundRect">
             <a:avLst>
@@ -9320,14 +9711,14 @@
       </p:sp>
       <p:sp>
         <p:nvSpPr>
-          <p:cNvPr id="17430" name="TextBox 17429"/>
+          <p:cNvPr id="17431" name="TextBox 17430"/>
           <p:cNvSpPr txBox="1"/>
           <p:nvPr/>
         </p:nvSpPr>
         <p:spPr>
           <a:xfrm>
-            <a:off x="502920" y="2185415"/>
-            <a:ext cx="7626096" cy="438912"/>
+            <a:off x="502920" y="2240279"/>
+            <a:ext cx="7626096" cy="420624"/>
           </a:xfrm>
           <a:prstGeom prst="rect">
             <a:avLst/>
@@ -9381,14 +9772,14 @@
       </p:sp>
       <p:cxnSp>
         <p:nvCxnSpPr>
-          <p:cNvPr id="17431" name="Connector 17430"/>
+          <p:cNvPr id="17432" name="Connector 17431"/>
           <p:cNvCxnSpPr/>
           <p:nvPr/>
         </p:nvCxnSpPr>
         <p:spPr>
           <a:xfrm>
-            <a:off x="4315968" y="2688336"/>
-            <a:ext cx="0" cy="182880"/>
+            <a:off x="4315968" y="2724912"/>
+            <a:ext cx="0" cy="109728"/>
           </a:xfrm>
           <a:prstGeom prst="line">
             <a:avLst/>
@@ -9417,14 +9808,14 @@
       </p:cxnSp>
       <p:sp>
         <p:nvSpPr>
-          <p:cNvPr id="17432" name="Rounded Rectangle 17431"/>
+          <p:cNvPr id="17433" name="Rounded Rectangle 17432"/>
           <p:cNvSpPr/>
           <p:nvPr/>
         </p:nvSpPr>
         <p:spPr>
           <a:xfrm>
-            <a:off x="411480" y="2889504"/>
-            <a:ext cx="7808976" cy="530352"/>
+            <a:off x="411480" y="2852928"/>
+            <a:ext cx="7808976" cy="512064"/>
           </a:xfrm>
           <a:prstGeom prst="roundRect">
             <a:avLst>
@@ -9463,14 +9854,14 @@
       </p:sp>
       <p:sp>
         <p:nvSpPr>
-          <p:cNvPr id="17433" name="TextBox 17432"/>
+          <p:cNvPr id="17434" name="TextBox 17433"/>
           <p:cNvSpPr txBox="1"/>
           <p:nvPr/>
         </p:nvSpPr>
         <p:spPr>
           <a:xfrm>
-            <a:off x="502920" y="2935224"/>
-            <a:ext cx="7626096" cy="438912"/>
+            <a:off x="502920" y="2898648"/>
+            <a:ext cx="7626096" cy="420624"/>
           </a:xfrm>
           <a:prstGeom prst="rect">
             <a:avLst/>
@@ -9524,14 +9915,14 @@
       </p:sp>
       <p:cxnSp>
         <p:nvCxnSpPr>
-          <p:cNvPr id="17434" name="Connector 17433"/>
+          <p:cNvPr id="17435" name="Connector 17434"/>
           <p:cNvCxnSpPr/>
           <p:nvPr/>
         </p:nvCxnSpPr>
         <p:spPr>
           <a:xfrm>
-            <a:off x="4315968" y="3438144"/>
-            <a:ext cx="0" cy="182880"/>
+            <a:off x="4315968" y="3383280"/>
+            <a:ext cx="0" cy="109728"/>
           </a:xfrm>
           <a:prstGeom prst="line">
             <a:avLst/>
@@ -9560,14 +9951,14 @@
       </p:cxnSp>
       <p:sp>
         <p:nvSpPr>
-          <p:cNvPr id="17435" name="Rounded Rectangle 17434"/>
+          <p:cNvPr id="17436" name="Rounded Rectangle 17435"/>
           <p:cNvSpPr/>
           <p:nvPr/>
         </p:nvSpPr>
         <p:spPr>
           <a:xfrm>
-            <a:off x="411480" y="3639312"/>
-            <a:ext cx="1849374" cy="347472"/>
+            <a:off x="411480" y="3511296"/>
+            <a:ext cx="1849374" cy="329184"/>
           </a:xfrm>
           <a:prstGeom prst="roundRect">
             <a:avLst>
@@ -9615,14 +10006,14 @@
       </p:sp>
       <p:sp>
         <p:nvSpPr>
-          <p:cNvPr id="17436" name="Rounded Rectangle 17435"/>
+          <p:cNvPr id="17437" name="Rounded Rectangle 17436"/>
           <p:cNvSpPr/>
           <p:nvPr/>
         </p:nvSpPr>
         <p:spPr>
           <a:xfrm>
-            <a:off x="2398014" y="3639312"/>
-            <a:ext cx="1849374" cy="347472"/>
+            <a:off x="2398014" y="3511296"/>
+            <a:ext cx="1849374" cy="329184"/>
           </a:xfrm>
           <a:prstGeom prst="roundRect">
             <a:avLst>
@@ -9670,14 +10061,14 @@
       </p:sp>
       <p:sp>
         <p:nvSpPr>
-          <p:cNvPr id="17437" name="Rounded Rectangle 17436"/>
+          <p:cNvPr id="17438" name="Rounded Rectangle 17437"/>
           <p:cNvSpPr/>
           <p:nvPr/>
         </p:nvSpPr>
         <p:spPr>
           <a:xfrm>
-            <a:off x="4384548" y="3639312"/>
-            <a:ext cx="1849374" cy="347472"/>
+            <a:off x="4384548" y="3511296"/>
+            <a:ext cx="1849374" cy="329184"/>
           </a:xfrm>
           <a:prstGeom prst="roundRect">
             <a:avLst>
@@ -9725,14 +10116,14 @@
       </p:sp>
       <p:sp>
         <p:nvSpPr>
-          <p:cNvPr id="17438" name="Rounded Rectangle 17437"/>
+          <p:cNvPr id="17439" name="Rounded Rectangle 17438"/>
           <p:cNvSpPr/>
           <p:nvPr/>
         </p:nvSpPr>
         <p:spPr>
           <a:xfrm>
-            <a:off x="6371082" y="3639312"/>
-            <a:ext cx="1849374" cy="347472"/>
+            <a:off x="6371082" y="3511296"/>
+            <a:ext cx="1849374" cy="329184"/>
           </a:xfrm>
           <a:prstGeom prst="roundRect">
             <a:avLst>
@@ -9780,14 +10171,14 @@
       </p:sp>
       <p:cxnSp>
         <p:nvCxnSpPr>
-          <p:cNvPr id="17439" name="Connector 17438"/>
+          <p:cNvPr id="17440" name="Connector 17439"/>
           <p:cNvCxnSpPr/>
           <p:nvPr/>
         </p:nvCxnSpPr>
         <p:spPr>
           <a:xfrm>
-            <a:off x="4315968" y="4005072"/>
-            <a:ext cx="0" cy="182880"/>
+            <a:off x="4315968" y="3858768"/>
+            <a:ext cx="0" cy="109728"/>
           </a:xfrm>
           <a:prstGeom prst="line">
             <a:avLst/>
@@ -9816,14 +10207,14 @@
       </p:cxnSp>
       <p:sp>
         <p:nvSpPr>
-          <p:cNvPr id="17440" name="Rounded Rectangle 17439"/>
+          <p:cNvPr id="17441" name="Rounded Rectangle 17440"/>
           <p:cNvSpPr/>
           <p:nvPr/>
         </p:nvSpPr>
         <p:spPr>
           <a:xfrm>
-            <a:off x="411480" y="4206240"/>
-            <a:ext cx="1325880" cy="347472"/>
+            <a:off x="411480" y="3986784"/>
+            <a:ext cx="1325880" cy="329184"/>
           </a:xfrm>
           <a:prstGeom prst="roundRect">
             <a:avLst>
@@ -9873,13 +10264,13 @@
       </p:sp>
       <p:cxnSp>
         <p:nvCxnSpPr>
-          <p:cNvPr id="17441" name="Connector 17440"/>
+          <p:cNvPr id="17442" name="Connector 17441"/>
           <p:cNvCxnSpPr/>
           <p:nvPr/>
         </p:nvCxnSpPr>
         <p:spPr>
           <a:xfrm>
-            <a:off x="1755648" y="4379976"/>
+            <a:off x="1755648" y="4160520"/>
             <a:ext cx="73152" cy="0"/>
           </a:xfrm>
           <a:prstGeom prst="line">
@@ -9909,14 +10300,14 @@
       </p:cxnSp>
       <p:sp>
         <p:nvSpPr>
-          <p:cNvPr id="17442" name="Rounded Rectangle 17441"/>
+          <p:cNvPr id="17443" name="Rounded Rectangle 17442"/>
           <p:cNvSpPr/>
           <p:nvPr/>
         </p:nvSpPr>
         <p:spPr>
           <a:xfrm>
-            <a:off x="1837944" y="4206240"/>
-            <a:ext cx="1463040" cy="347472"/>
+            <a:off x="1837944" y="3986784"/>
+            <a:ext cx="1463040" cy="329184"/>
           </a:xfrm>
           <a:prstGeom prst="roundRect">
             <a:avLst>
@@ -9966,13 +10357,13 @@
       </p:sp>
       <p:cxnSp>
         <p:nvCxnSpPr>
-          <p:cNvPr id="17443" name="Connector 17442"/>
+          <p:cNvPr id="17444" name="Connector 17443"/>
           <p:cNvCxnSpPr/>
           <p:nvPr/>
         </p:nvCxnSpPr>
         <p:spPr>
           <a:xfrm>
-            <a:off x="3319272" y="4379976"/>
+            <a:off x="3319272" y="4160520"/>
             <a:ext cx="73152" cy="0"/>
           </a:xfrm>
           <a:prstGeom prst="line">
@@ -10002,14 +10393,14 @@
       </p:cxnSp>
       <p:sp>
         <p:nvSpPr>
-          <p:cNvPr id="17444" name="Rounded Rectangle 17443"/>
+          <p:cNvPr id="17445" name="Rounded Rectangle 17444"/>
           <p:cNvSpPr/>
           <p:nvPr/>
         </p:nvSpPr>
         <p:spPr>
           <a:xfrm>
-            <a:off x="3401568" y="4206240"/>
-            <a:ext cx="1828800" cy="347472"/>
+            <a:off x="3401568" y="3986784"/>
+            <a:ext cx="1828800" cy="329184"/>
           </a:xfrm>
           <a:prstGeom prst="roundRect">
             <a:avLst>
@@ -10059,13 +10450,13 @@
       </p:sp>
       <p:cxnSp>
         <p:nvCxnSpPr>
-          <p:cNvPr id="17445" name="Connector 17444"/>
+          <p:cNvPr id="17446" name="Connector 17445"/>
           <p:cNvCxnSpPr/>
           <p:nvPr/>
         </p:nvCxnSpPr>
         <p:spPr>
           <a:xfrm>
-            <a:off x="5248656" y="4379976"/>
+            <a:off x="5248656" y="4160520"/>
             <a:ext cx="73152" cy="0"/>
           </a:xfrm>
           <a:prstGeom prst="line">
@@ -10095,14 +10486,14 @@
       </p:cxnSp>
       <p:sp>
         <p:nvSpPr>
-          <p:cNvPr id="17446" name="Rounded Rectangle 17445"/>
+          <p:cNvPr id="17447" name="Rounded Rectangle 17446"/>
           <p:cNvSpPr/>
           <p:nvPr/>
         </p:nvSpPr>
         <p:spPr>
           <a:xfrm>
-            <a:off x="5330952" y="4206240"/>
-            <a:ext cx="1417320" cy="347472"/>
+            <a:off x="5330952" y="3986784"/>
+            <a:ext cx="1417320" cy="329184"/>
           </a:xfrm>
           <a:prstGeom prst="roundRect">
             <a:avLst>
@@ -10152,13 +10543,13 @@
       </p:sp>
       <p:cxnSp>
         <p:nvCxnSpPr>
-          <p:cNvPr id="17447" name="Connector 17446"/>
+          <p:cNvPr id="17448" name="Connector 17447"/>
           <p:cNvCxnSpPr/>
           <p:nvPr/>
         </p:nvCxnSpPr>
         <p:spPr>
           <a:xfrm>
-            <a:off x="6766559" y="4379976"/>
+            <a:off x="6766559" y="4160520"/>
             <a:ext cx="73153" cy="0"/>
           </a:xfrm>
           <a:prstGeom prst="line">
@@ -10188,14 +10579,14 @@
       </p:cxnSp>
       <p:sp>
         <p:nvSpPr>
-          <p:cNvPr id="17448" name="Rounded Rectangle 17447"/>
+          <p:cNvPr id="17449" name="Rounded Rectangle 17448"/>
           <p:cNvSpPr/>
           <p:nvPr/>
         </p:nvSpPr>
         <p:spPr>
           <a:xfrm>
-            <a:off x="6848856" y="4206240"/>
-            <a:ext cx="1371600" cy="347472"/>
+            <a:off x="6848856" y="3986784"/>
+            <a:ext cx="1371600" cy="329184"/>
           </a:xfrm>
           <a:prstGeom prst="roundRect">
             <a:avLst>
@@ -10245,49 +10636,14 @@
       </p:sp>
       <p:cxnSp>
         <p:nvCxnSpPr>
-          <p:cNvPr id="17449" name="Connector 17448"/>
-          <p:cNvCxnSpPr/>
-          <p:nvPr/>
-        </p:nvCxnSpPr>
-        <p:spPr>
-          <a:xfrm>
-            <a:off x="8238744" y="4379976"/>
-            <a:ext cx="91439" cy="0"/>
-          </a:xfrm>
-          <a:prstGeom prst="line">
-            <a:avLst/>
-          </a:prstGeom>
-          <a:ln w="15875">
-            <a:solidFill>
-              <a:srgbClr val="2563EB"/>
-            </a:solidFill>
-          </a:ln>
-        </p:spPr>
-        <p:style>
-          <a:lnRef idx="2">
-            <a:schemeClr val="accent1"/>
-          </a:lnRef>
-          <a:fillRef idx="0">
-            <a:schemeClr val="accent1"/>
-          </a:fillRef>
-          <a:effectRef idx="1">
-            <a:schemeClr val="accent1"/>
-          </a:effectRef>
-          <a:fontRef idx="minor">
-            <a:schemeClr val="tx1"/>
-          </a:fontRef>
-        </p:style>
-      </p:cxnSp>
-      <p:cxnSp>
-        <p:nvCxnSpPr>
           <p:cNvPr id="17450" name="Connector 17449"/>
           <p:cNvCxnSpPr/>
           <p:nvPr/>
         </p:nvCxnSpPr>
         <p:spPr>
-          <a:xfrm flipV="1">
-            <a:off x="8330183" y="3154680"/>
-            <a:ext cx="0" cy="1225296"/>
+          <a:xfrm>
+            <a:off x="8238744" y="4151376"/>
+            <a:ext cx="91439" cy="0"/>
           </a:xfrm>
           <a:prstGeom prst="line">
             <a:avLst/>
@@ -10320,8 +10676,43 @@
           <p:nvPr/>
         </p:nvCxnSpPr>
         <p:spPr>
+          <a:xfrm flipV="1">
+            <a:off x="8330183" y="3108960"/>
+            <a:ext cx="0" cy="1042416"/>
+          </a:xfrm>
+          <a:prstGeom prst="line">
+            <a:avLst/>
+          </a:prstGeom>
+          <a:ln w="15875">
+            <a:solidFill>
+              <a:srgbClr val="2563EB"/>
+            </a:solidFill>
+          </a:ln>
+        </p:spPr>
+        <p:style>
+          <a:lnRef idx="2">
+            <a:schemeClr val="accent1"/>
+          </a:lnRef>
+          <a:fillRef idx="0">
+            <a:schemeClr val="accent1"/>
+          </a:fillRef>
+          <a:effectRef idx="1">
+            <a:schemeClr val="accent1"/>
+          </a:effectRef>
+          <a:fontRef idx="minor">
+            <a:schemeClr val="tx1"/>
+          </a:fontRef>
+        </p:style>
+      </p:cxnSp>
+      <p:cxnSp>
+        <p:nvCxnSpPr>
+          <p:cNvPr id="17452" name="Connector 17451"/>
+          <p:cNvCxnSpPr/>
+          <p:nvPr/>
+        </p:nvCxnSpPr>
+        <p:spPr>
           <a:xfrm flipH="1">
-            <a:off x="8238744" y="3154680"/>
+            <a:off x="8238744" y="3108960"/>
             <a:ext cx="91439" cy="0"/>
           </a:xfrm>
           <a:prstGeom prst="line">
@@ -10351,14 +10742,14 @@
       </p:cxnSp>
       <p:sp>
         <p:nvSpPr>
-          <p:cNvPr id="17452" name="TextBox 17451"/>
+          <p:cNvPr id="17453" name="TextBox 17452"/>
           <p:cNvSpPr txBox="1"/>
           <p:nvPr/>
         </p:nvSpPr>
         <p:spPr>
           <a:xfrm>
             <a:off x="411480" y="4626864"/>
-            <a:ext cx="7808976" cy="365760"/>
+            <a:ext cx="7808976" cy="329184"/>
           </a:xfrm>
           <a:prstGeom prst="rect">
             <a:avLst/>
@@ -10393,14 +10784,102 @@
       </p:sp>
       <p:sp>
         <p:nvSpPr>
-          <p:cNvPr id="17453" name="TextBox 17452"/>
+          <p:cNvPr id="17454" name="Rounded Rectangle 17453"/>
+          <p:cNvSpPr/>
+          <p:nvPr/>
+        </p:nvSpPr>
+        <p:spPr>
+          <a:xfrm>
+            <a:off x="347472" y="4992624"/>
+            <a:ext cx="8119872" cy="1261872"/>
+          </a:xfrm>
+          <a:prstGeom prst="roundRect">
+            <a:avLst>
+              <a:gd name="adj" fmla="val 7246"/>
+            </a:avLst>
+          </a:prstGeom>
+          <a:solidFill>
+            <a:srgbClr val="FFFFFF"/>
+          </a:solidFill>
+          <a:ln w="15875">
+            <a:solidFill>
+              <a:srgbClr val="2563EB"/>
+            </a:solidFill>
+          </a:ln>
+          <a:effectLst/>
+        </p:spPr>
+        <p:style>
+          <a:lnRef idx="1">
+            <a:schemeClr val="accent1"/>
+          </a:lnRef>
+          <a:fillRef idx="3">
+            <a:schemeClr val="accent1"/>
+          </a:fillRef>
+          <a:effectRef idx="2">
+            <a:schemeClr val="accent1"/>
+          </a:effectRef>
+          <a:fontRef idx="minor">
+            <a:schemeClr val="lt1"/>
+          </a:fontRef>
+        </p:style>
+        <p:txBody>
+          <a:bodyPr rtlCol="0" anchor="ctr"/>
+          <a:lstStyle/>
+          <a:p/>
+        </p:txBody>
+      </p:sp>
+      <p:sp>
+        <p:nvSpPr>
+          <p:cNvPr id="17455" name="TextBox 17454"/>
           <p:cNvSpPr txBox="1"/>
           <p:nvPr/>
         </p:nvSpPr>
         <p:spPr>
           <a:xfrm>
-            <a:off x="411480" y="5029200"/>
-            <a:ext cx="7808976" cy="1188720"/>
+            <a:off x="493776" y="5065776"/>
+            <a:ext cx="7827264" cy="274320"/>
+          </a:xfrm>
+          <a:prstGeom prst="rect">
+            <a:avLst/>
+          </a:prstGeom>
+          <a:noFill/>
+        </p:spPr>
+        <p:txBody>
+          <a:bodyPr wrap="square" anchor="t" lIns="18288" rIns="18288" tIns="18288" bIns="18288">
+            <a:spAutoFit/>
+          </a:bodyPr>
+          <a:lstStyle/>
+          <a:p>
+            <a:pPr algn="l">
+              <a:lnSpc>
+                <a:spcPct val="105000"/>
+              </a:lnSpc>
+              <a:spcAft>
+                <a:spcPts val="0"/>
+              </a:spcAft>
+            </a:pPr>
+            <a:r>
+              <a:rPr sz="1150" b="1">
+                <a:solidFill>
+                  <a:srgbClr val="2563EB"/>
+                </a:solidFill>
+                <a:latin typeface="Calibri"/>
+              </a:rPr>
+              <a:t>BUILT WITH</a:t>
+            </a:r>
+          </a:p>
+        </p:txBody>
+      </p:sp>
+      <p:sp>
+        <p:nvSpPr>
+          <p:cNvPr id="17456" name="TextBox 17455"/>
+          <p:cNvSpPr txBox="1"/>
+          <p:nvPr/>
+        </p:nvSpPr>
+        <p:spPr>
+          <a:xfrm>
+            <a:off x="493776" y="5376672"/>
+            <a:ext cx="7626096" cy="841248"/>
           </a:xfrm>
           <a:prstGeom prst="rect">
             <a:avLst/>
@@ -10500,25 +10979,27 @@
       </p:sp>
       <p:sp>
         <p:nvSpPr>
-          <p:cNvPr id="17454" name="Rounded Rectangle 17453"/>
+          <p:cNvPr id="17457" name="Rounded Rectangle 17456"/>
           <p:cNvSpPr/>
           <p:nvPr/>
         </p:nvSpPr>
         <p:spPr>
           <a:xfrm>
-            <a:off x="8549640" y="1078992"/>
-            <a:ext cx="3291840" cy="5138928"/>
+            <a:off x="8613648" y="1024128"/>
+            <a:ext cx="3163824" cy="5230368"/>
           </a:xfrm>
           <a:prstGeom prst="roundRect">
             <a:avLst>
-              <a:gd name="adj" fmla="val 12000"/>
+              <a:gd name="adj" fmla="val 2890"/>
             </a:avLst>
           </a:prstGeom>
           <a:solidFill>
-            <a:srgbClr val="F7F8FA"/>
+            <a:srgbClr val="FFFFFF"/>
           </a:solidFill>
-          <a:ln>
-            <a:noFill/>
+          <a:ln w="15875">
+            <a:solidFill>
+              <a:srgbClr val="2563EB"/>
+            </a:solidFill>
           </a:ln>
           <a:effectLst/>
         </p:spPr>
@@ -10544,14 +11025,14 @@
       </p:sp>
       <p:sp>
         <p:nvSpPr>
-          <p:cNvPr id="17455" name="TextBox 17454"/>
+          <p:cNvPr id="17458" name="TextBox 17457"/>
           <p:cNvSpPr txBox="1"/>
           <p:nvPr/>
         </p:nvSpPr>
         <p:spPr>
           <a:xfrm>
-            <a:off x="8686800" y="1170432"/>
-            <a:ext cx="3017520" cy="329184"/>
+            <a:off x="8759952" y="1097280"/>
+            <a:ext cx="2871216" cy="274320"/>
           </a:xfrm>
           <a:prstGeom prst="rect">
             <a:avLst/>
@@ -10573,27 +11054,36 @@
               </a:spcAft>
             </a:pPr>
             <a:r>
-              <a:rPr sz="1050" b="1">
+              <a:rPr sz="1100" b="1">
+                <a:solidFill>
+                  <a:srgbClr val="2563EB"/>
+                </a:solidFill>
+                <a:latin typeface="Calibri"/>
+              </a:rPr>
+              <a:t>WHO DECIDES</a:t>
+            </a:r>
+            <a:r>
+              <a:rPr sz="950" b="0">
                 <a:solidFill>
                   <a:srgbClr val="6B7280"/>
                 </a:solidFill>
                 <a:latin typeface="Calibri"/>
               </a:rPr>
-              <a:t>WHO DECIDES — AI IS SUPPORTING</a:t>
-            </a:r>
-          </a:p>
-        </p:txBody>
-      </p:sp>
-      <p:sp>
-        <p:nvSpPr>
-          <p:cNvPr id="17456" name="Rectangle 17455"/>
+              <a:t>   AI is supporting</a:t>
+            </a:r>
+          </a:p>
+        </p:txBody>
+      </p:sp>
+      <p:sp>
+        <p:nvSpPr>
+          <p:cNvPr id="17459" name="Rectangle 17458"/>
           <p:cNvSpPr/>
           <p:nvPr/>
         </p:nvSpPr>
         <p:spPr>
           <a:xfrm>
-            <a:off x="8686800" y="1508760"/>
-            <a:ext cx="64008" cy="658368"/>
+            <a:off x="8750808" y="1481328"/>
+            <a:ext cx="64008" cy="676656"/>
           </a:xfrm>
           <a:prstGeom prst="rect">
             <a:avLst/>
@@ -10628,14 +11118,14 @@
       </p:sp>
       <p:sp>
         <p:nvSpPr>
-          <p:cNvPr id="17457" name="TextBox 17456"/>
+          <p:cNvPr id="17460" name="TextBox 17459"/>
           <p:cNvSpPr txBox="1"/>
           <p:nvPr/>
         </p:nvSpPr>
         <p:spPr>
           <a:xfrm>
-            <a:off x="8842248" y="1490472"/>
-            <a:ext cx="2834640" cy="731520"/>
+            <a:off x="8887968" y="1463040"/>
+            <a:ext cx="2743200" cy="749808"/>
           </a:xfrm>
           <a:prstGeom prst="rect">
             <a:avLst/>
@@ -10689,14 +11179,14 @@
       </p:sp>
       <p:sp>
         <p:nvSpPr>
-          <p:cNvPr id="17458" name="Rectangle 17457"/>
+          <p:cNvPr id="17461" name="Rectangle 17460"/>
           <p:cNvSpPr/>
           <p:nvPr/>
         </p:nvSpPr>
         <p:spPr>
           <a:xfrm>
-            <a:off x="8686800" y="2350008"/>
-            <a:ext cx="64008" cy="658368"/>
+            <a:off x="8750808" y="2322576"/>
+            <a:ext cx="64008" cy="676656"/>
           </a:xfrm>
           <a:prstGeom prst="rect">
             <a:avLst/>
@@ -10731,14 +11221,14 @@
       </p:sp>
       <p:sp>
         <p:nvSpPr>
-          <p:cNvPr id="17459" name="TextBox 17458"/>
+          <p:cNvPr id="17462" name="TextBox 17461"/>
           <p:cNvSpPr txBox="1"/>
           <p:nvPr/>
         </p:nvSpPr>
         <p:spPr>
           <a:xfrm>
-            <a:off x="8842248" y="2331720"/>
-            <a:ext cx="2834640" cy="731520"/>
+            <a:off x="8887968" y="2304288"/>
+            <a:ext cx="2743200" cy="749808"/>
           </a:xfrm>
           <a:prstGeom prst="rect">
             <a:avLst/>
@@ -10792,14 +11282,14 @@
       </p:sp>
       <p:sp>
         <p:nvSpPr>
-          <p:cNvPr id="17460" name="Rectangle 17459"/>
+          <p:cNvPr id="17463" name="Rectangle 17462"/>
           <p:cNvSpPr/>
           <p:nvPr/>
         </p:nvSpPr>
         <p:spPr>
           <a:xfrm>
-            <a:off x="8686800" y="3191256"/>
-            <a:ext cx="64008" cy="658368"/>
+            <a:off x="8750808" y="3163824"/>
+            <a:ext cx="64008" cy="676656"/>
           </a:xfrm>
           <a:prstGeom prst="rect">
             <a:avLst/>
@@ -10834,14 +11324,14 @@
       </p:sp>
       <p:sp>
         <p:nvSpPr>
-          <p:cNvPr id="17461" name="TextBox 17460"/>
+          <p:cNvPr id="17464" name="TextBox 17463"/>
           <p:cNvSpPr txBox="1"/>
           <p:nvPr/>
         </p:nvSpPr>
         <p:spPr>
           <a:xfrm>
-            <a:off x="8842248" y="3172968"/>
-            <a:ext cx="2834640" cy="731520"/>
+            <a:off x="8887968" y="3145536"/>
+            <a:ext cx="2743200" cy="749808"/>
           </a:xfrm>
           <a:prstGeom prst="rect">
             <a:avLst/>
@@ -10895,14 +11385,14 @@
       </p:sp>
       <p:cxnSp>
         <p:nvCxnSpPr>
-          <p:cNvPr id="17462" name="Connector 17461"/>
+          <p:cNvPr id="17465" name="Connector 17464"/>
           <p:cNvCxnSpPr/>
           <p:nvPr/>
         </p:nvCxnSpPr>
         <p:spPr>
           <a:xfrm>
-            <a:off x="8686800" y="4023360"/>
-            <a:ext cx="3017520" cy="0"/>
+            <a:off x="8750808" y="4041648"/>
+            <a:ext cx="2889504" cy="0"/>
           </a:xfrm>
           <a:prstGeom prst="line">
             <a:avLst/>
@@ -10930,14 +11420,14 @@
       </p:cxnSp>
       <p:sp>
         <p:nvSpPr>
-          <p:cNvPr id="17463" name="TextBox 17462"/>
+          <p:cNvPr id="17466" name="TextBox 17465"/>
           <p:cNvSpPr txBox="1"/>
           <p:nvPr/>
         </p:nvSpPr>
         <p:spPr>
           <a:xfrm>
-            <a:off x="8686800" y="4096512"/>
-            <a:ext cx="3017520" cy="329184"/>
+            <a:off x="8750808" y="4114800"/>
+            <a:ext cx="2834640" cy="329184"/>
           </a:xfrm>
           <a:prstGeom prst="rect">
             <a:avLst/>
@@ -10972,14 +11462,14 @@
       </p:sp>
       <p:sp>
         <p:nvSpPr>
-          <p:cNvPr id="17464" name="Rounded Rectangle 17463"/>
+          <p:cNvPr id="17467" name="Rounded Rectangle 17466"/>
           <p:cNvSpPr/>
           <p:nvPr/>
         </p:nvSpPr>
         <p:spPr>
           <a:xfrm>
-            <a:off x="8686800" y="4389120"/>
-            <a:ext cx="3017520" cy="310896"/>
+            <a:off x="8750808" y="4425696"/>
+            <a:ext cx="2889504" cy="310896"/>
           </a:xfrm>
           <a:prstGeom prst="roundRect">
             <a:avLst>
@@ -11029,14 +11519,14 @@
       </p:sp>
       <p:cxnSp>
         <p:nvCxnSpPr>
-          <p:cNvPr id="17465" name="Connector 17464"/>
+          <p:cNvPr id="17468" name="Connector 17467"/>
           <p:cNvCxnSpPr/>
           <p:nvPr/>
         </p:nvCxnSpPr>
         <p:spPr>
           <a:xfrm>
-            <a:off x="10195560" y="4718304"/>
-            <a:ext cx="0" cy="128016"/>
+            <a:off x="10195560" y="4754880"/>
+            <a:ext cx="0" cy="91440"/>
           </a:xfrm>
           <a:prstGeom prst="line">
             <a:avLst/>
@@ -11065,14 +11555,14 @@
       </p:cxnSp>
       <p:sp>
         <p:nvSpPr>
-          <p:cNvPr id="17466" name="Rounded Rectangle 17465"/>
+          <p:cNvPr id="17469" name="Rounded Rectangle 17468"/>
           <p:cNvSpPr/>
           <p:nvPr/>
         </p:nvSpPr>
         <p:spPr>
           <a:xfrm>
-            <a:off x="8686800" y="4864608"/>
-            <a:ext cx="3017520" cy="310896"/>
+            <a:off x="8750808" y="4864608"/>
+            <a:ext cx="2889504" cy="310896"/>
           </a:xfrm>
           <a:prstGeom prst="roundRect">
             <a:avLst>
@@ -11122,14 +11612,14 @@
       </p:sp>
       <p:cxnSp>
         <p:nvCxnSpPr>
-          <p:cNvPr id="17467" name="Connector 17466"/>
+          <p:cNvPr id="17470" name="Connector 17469"/>
           <p:cNvCxnSpPr/>
           <p:nvPr/>
         </p:nvCxnSpPr>
         <p:spPr>
           <a:xfrm>
             <a:off x="10195560" y="5193792"/>
-            <a:ext cx="0" cy="128016"/>
+            <a:ext cx="0" cy="91440"/>
           </a:xfrm>
           <a:prstGeom prst="line">
             <a:avLst/>
@@ -11158,14 +11648,14 @@
       </p:cxnSp>
       <p:sp>
         <p:nvSpPr>
-          <p:cNvPr id="17468" name="Rounded Rectangle 17467"/>
+          <p:cNvPr id="17471" name="Rounded Rectangle 17470"/>
           <p:cNvSpPr/>
           <p:nvPr/>
         </p:nvSpPr>
         <p:spPr>
           <a:xfrm>
-            <a:off x="8686800" y="5340096"/>
-            <a:ext cx="3017520" cy="310896"/>
+            <a:off x="8750808" y="5303520"/>
+            <a:ext cx="2889504" cy="310896"/>
           </a:xfrm>
           <a:prstGeom prst="roundRect">
             <a:avLst>
@@ -11215,14 +11705,14 @@
       </p:sp>
       <p:cxnSp>
         <p:nvCxnSpPr>
-          <p:cNvPr id="17469" name="Connector 17468"/>
+          <p:cNvPr id="17472" name="Connector 17471"/>
           <p:cNvCxnSpPr/>
           <p:nvPr/>
         </p:nvCxnSpPr>
         <p:spPr>
           <a:xfrm>
-            <a:off x="10195560" y="5669280"/>
-            <a:ext cx="0" cy="128016"/>
+            <a:off x="10195560" y="5632704"/>
+            <a:ext cx="0" cy="91440"/>
           </a:xfrm>
           <a:prstGeom prst="line">
             <a:avLst/>
@@ -11251,14 +11741,14 @@
       </p:cxnSp>
       <p:sp>
         <p:nvSpPr>
-          <p:cNvPr id="17470" name="Rounded Rectangle 17469"/>
+          <p:cNvPr id="17473" name="Rounded Rectangle 17472"/>
           <p:cNvSpPr/>
           <p:nvPr/>
         </p:nvSpPr>
         <p:spPr>
           <a:xfrm>
-            <a:off x="8686800" y="5815583"/>
-            <a:ext cx="3017520" cy="310896"/>
+            <a:off x="8750808" y="5742432"/>
+            <a:ext cx="2889504" cy="310896"/>
           </a:xfrm>
           <a:prstGeom prst="roundRect">
             <a:avLst>
@@ -12520,8 +13010,96 @@
         </p:nvSpPr>
         <p:spPr>
           <a:xfrm>
-            <a:off x="429768" y="1984248"/>
-            <a:ext cx="2393442" cy="3456432"/>
+            <a:off x="365760" y="1938528"/>
+            <a:ext cx="5660136" cy="3931920"/>
+          </a:xfrm>
+          <a:prstGeom prst="roundRect">
+            <a:avLst>
+              <a:gd name="adj" fmla="val 2325"/>
+            </a:avLst>
+          </a:prstGeom>
+          <a:solidFill>
+            <a:srgbClr val="FFFFFF"/>
+          </a:solidFill>
+          <a:ln w="15875">
+            <a:solidFill>
+              <a:srgbClr val="2563EB"/>
+            </a:solidFill>
+          </a:ln>
+          <a:effectLst/>
+        </p:spPr>
+        <p:style>
+          <a:lnRef idx="1">
+            <a:schemeClr val="accent1"/>
+          </a:lnRef>
+          <a:fillRef idx="3">
+            <a:schemeClr val="accent1"/>
+          </a:fillRef>
+          <a:effectRef idx="2">
+            <a:schemeClr val="accent1"/>
+          </a:effectRef>
+          <a:fontRef idx="minor">
+            <a:schemeClr val="lt1"/>
+          </a:fontRef>
+        </p:style>
+        <p:txBody>
+          <a:bodyPr rtlCol="0" anchor="ctr"/>
+          <a:lstStyle/>
+          <a:p/>
+        </p:txBody>
+      </p:sp>
+      <p:sp>
+        <p:nvSpPr>
+          <p:cNvPr id="17429" name="TextBox 17428"/>
+          <p:cNvSpPr txBox="1"/>
+          <p:nvPr/>
+        </p:nvSpPr>
+        <p:spPr>
+          <a:xfrm>
+            <a:off x="512064" y="2011680"/>
+            <a:ext cx="5367528" cy="274320"/>
+          </a:xfrm>
+          <a:prstGeom prst="rect">
+            <a:avLst/>
+          </a:prstGeom>
+          <a:noFill/>
+        </p:spPr>
+        <p:txBody>
+          <a:bodyPr wrap="square" anchor="t" lIns="18288" rIns="18288" tIns="18288" bIns="18288">
+            <a:spAutoFit/>
+          </a:bodyPr>
+          <a:lstStyle/>
+          <a:p>
+            <a:pPr algn="l">
+              <a:lnSpc>
+                <a:spcPct val="105000"/>
+              </a:lnSpc>
+              <a:spcAft>
+                <a:spcPts val="0"/>
+              </a:spcAft>
+            </a:pPr>
+            <a:r>
+              <a:rPr sz="1100" b="1">
+                <a:solidFill>
+                  <a:srgbClr val="2563EB"/>
+                </a:solidFill>
+                <a:latin typeface="Calibri"/>
+              </a:rPr>
+              <a:t>REAL SCREENS FROM THE CERTIFIED RUN</a:t>
+            </a:r>
+          </a:p>
+        </p:txBody>
+      </p:sp>
+      <p:sp>
+        <p:nvSpPr>
+          <p:cNvPr id="17430" name="Rounded Rectangle 17429"/>
+          <p:cNvSpPr/>
+          <p:nvPr/>
+        </p:nvSpPr>
+        <p:spPr>
+          <a:xfrm>
+            <a:off x="484632" y="2331720"/>
+            <a:ext cx="2217420" cy="3200400"/>
           </a:xfrm>
           <a:prstGeom prst="roundRect">
             <a:avLst>
@@ -12560,7 +13138,7 @@
       </p:sp>
       <p:pic>
         <p:nvPicPr>
-          <p:cNvPr id="17429" name="Picture 17428" descr="mgr-route.png"/>
+          <p:cNvPr id="17431" name="Picture 17430" descr="mgr-route.png"/>
           <p:cNvPicPr>
             <a:picLocks noChangeAspect="1"/>
           </p:cNvPicPr>
@@ -12574,8 +13152,8 @@
         </p:blipFill>
         <p:spPr>
           <a:xfrm>
-            <a:off x="457200" y="2011680"/>
-            <a:ext cx="2338578" cy="3401568"/>
+            <a:off x="512064" y="2359152"/>
+            <a:ext cx="2162556" cy="3145536"/>
           </a:xfrm>
           <a:prstGeom prst="rect">
             <a:avLst/>
@@ -12584,14 +13162,14 @@
       </p:pic>
       <p:sp>
         <p:nvSpPr>
-          <p:cNvPr id="17430" name="Rounded Rectangle 17429"/>
+          <p:cNvPr id="17432" name="Rounded Rectangle 17431"/>
           <p:cNvSpPr/>
           <p:nvPr/>
         </p:nvSpPr>
         <p:spPr>
           <a:xfrm>
-            <a:off x="2969514" y="1984248"/>
-            <a:ext cx="1586498" cy="3456432"/>
+            <a:off x="2830068" y="2331720"/>
+            <a:ext cx="1471214" cy="3200400"/>
           </a:xfrm>
           <a:prstGeom prst="roundRect">
             <a:avLst>
@@ -12630,7 +13208,7 @@
       </p:sp>
       <p:pic>
         <p:nvPicPr>
-          <p:cNvPr id="17431" name="Picture 17430" descr="truck-check.png"/>
+          <p:cNvPr id="17433" name="Picture 17432" descr="truck-check.png"/>
           <p:cNvPicPr>
             <a:picLocks noChangeAspect="1"/>
           </p:cNvPicPr>
@@ -12644,8 +13222,8 @@
         </p:blipFill>
         <p:spPr>
           <a:xfrm>
-            <a:off x="2996946" y="2011680"/>
-            <a:ext cx="1531634" cy="3401568"/>
+            <a:off x="2857500" y="2359152"/>
+            <a:ext cx="1416350" cy="3145536"/>
           </a:xfrm>
           <a:prstGeom prst="rect">
             <a:avLst/>
@@ -12654,14 +13232,14 @@
       </p:pic>
       <p:sp>
         <p:nvSpPr>
-          <p:cNvPr id="17432" name="Rounded Rectangle 17431"/>
+          <p:cNvPr id="17434" name="Rounded Rectangle 17433"/>
           <p:cNvSpPr/>
           <p:nvPr/>
         </p:nvSpPr>
         <p:spPr>
           <a:xfrm>
-            <a:off x="4702316" y="1984248"/>
-            <a:ext cx="1586498" cy="3456432"/>
+            <a:off x="4429298" y="2331720"/>
+            <a:ext cx="1471214" cy="3200400"/>
           </a:xfrm>
           <a:prstGeom prst="roundRect">
             <a:avLst>
@@ -12700,7 +13278,7 @@
       </p:sp>
       <p:pic>
         <p:nvPicPr>
-          <p:cNvPr id="17433" name="Picture 17432" descr="07-navigation.png"/>
+          <p:cNvPr id="17435" name="Picture 17434" descr="07-navigation.png"/>
           <p:cNvPicPr>
             <a:picLocks noChangeAspect="1"/>
           </p:cNvPicPr>
@@ -12714,8 +13292,8 @@
         </p:blipFill>
         <p:spPr>
           <a:xfrm>
-            <a:off x="4729748" y="2011680"/>
-            <a:ext cx="1531634" cy="3401568"/>
+            <a:off x="4456730" y="2359152"/>
+            <a:ext cx="1416350" cy="3145536"/>
           </a:xfrm>
           <a:prstGeom prst="rect">
             <a:avLst/>
@@ -12724,14 +13302,14 @@
       </p:pic>
       <p:sp>
         <p:nvSpPr>
-          <p:cNvPr id="17434" name="Rounded Rectangle 17433"/>
+          <p:cNvPr id="17436" name="Rounded Rectangle 17435"/>
           <p:cNvSpPr/>
           <p:nvPr/>
         </p:nvSpPr>
         <p:spPr>
           <a:xfrm>
-            <a:off x="457200" y="5504688"/>
-            <a:ext cx="2338578" cy="256032"/>
+            <a:off x="512064" y="5577840"/>
+            <a:ext cx="2162556" cy="256032"/>
           </a:xfrm>
           <a:prstGeom prst="roundRect">
             <a:avLst>
@@ -12779,14 +13357,14 @@
       </p:sp>
       <p:sp>
         <p:nvSpPr>
-          <p:cNvPr id="17435" name="Rounded Rectangle 17434"/>
+          <p:cNvPr id="17437" name="Rounded Rectangle 17436"/>
           <p:cNvSpPr/>
           <p:nvPr/>
         </p:nvSpPr>
         <p:spPr>
           <a:xfrm>
-            <a:off x="2996946" y="5504688"/>
-            <a:ext cx="1531634" cy="256032"/>
+            <a:off x="2857500" y="5577840"/>
+            <a:ext cx="1416350" cy="256032"/>
           </a:xfrm>
           <a:prstGeom prst="roundRect">
             <a:avLst>
@@ -12834,14 +13412,14 @@
       </p:sp>
       <p:sp>
         <p:nvSpPr>
-          <p:cNvPr id="17436" name="Rounded Rectangle 17435"/>
+          <p:cNvPr id="17438" name="Rounded Rectangle 17437"/>
           <p:cNvSpPr/>
           <p:nvPr/>
         </p:nvSpPr>
         <p:spPr>
           <a:xfrm>
-            <a:off x="4729748" y="5504688"/>
-            <a:ext cx="1531634" cy="256032"/>
+            <a:off x="4456730" y="5577840"/>
+            <a:ext cx="1416350" cy="256032"/>
           </a:xfrm>
           <a:prstGeom prst="roundRect">
             <a:avLst>
@@ -12889,14 +13467,60 @@
       </p:sp>
       <p:sp>
         <p:nvSpPr>
-          <p:cNvPr id="17437" name="TextBox 17436"/>
+          <p:cNvPr id="17439" name="Rounded Rectangle 17438"/>
+          <p:cNvSpPr/>
+          <p:nvPr/>
+        </p:nvSpPr>
+        <p:spPr>
+          <a:xfrm>
+            <a:off x="6172200" y="1938528"/>
+            <a:ext cx="5605272" cy="3931920"/>
+          </a:xfrm>
+          <a:prstGeom prst="roundRect">
+            <a:avLst>
+              <a:gd name="adj" fmla="val 2325"/>
+            </a:avLst>
+          </a:prstGeom>
+          <a:solidFill>
+            <a:srgbClr val="FFFFFF"/>
+          </a:solidFill>
+          <a:ln w="15875">
+            <a:solidFill>
+              <a:srgbClr val="2563EB"/>
+            </a:solidFill>
+          </a:ln>
+          <a:effectLst/>
+        </p:spPr>
+        <p:style>
+          <a:lnRef idx="1">
+            <a:schemeClr val="accent1"/>
+          </a:lnRef>
+          <a:fillRef idx="3">
+            <a:schemeClr val="accent1"/>
+          </a:fillRef>
+          <a:effectRef idx="2">
+            <a:schemeClr val="accent1"/>
+          </a:effectRef>
+          <a:fontRef idx="minor">
+            <a:schemeClr val="lt1"/>
+          </a:fontRef>
+        </p:style>
+        <p:txBody>
+          <a:bodyPr rtlCol="0" anchor="ctr"/>
+          <a:lstStyle/>
+          <a:p/>
+        </p:txBody>
+      </p:sp>
+      <p:sp>
+        <p:nvSpPr>
+          <p:cNvPr id="17440" name="TextBox 17439"/>
           <p:cNvSpPr txBox="1"/>
           <p:nvPr/>
         </p:nvSpPr>
         <p:spPr>
           <a:xfrm>
-            <a:off x="6499127" y="1956816"/>
-            <a:ext cx="5250912" cy="329184"/>
+            <a:off x="6318504" y="2011680"/>
+            <a:ext cx="5312664" cy="274320"/>
           </a:xfrm>
           <a:prstGeom prst="rect">
             <a:avLst/>
@@ -12918,27 +13542,36 @@
               </a:spcAft>
             </a:pPr>
             <a:r>
-              <a:rPr sz="1050" b="1">
+              <a:rPr sz="1100" b="1">
+                <a:solidFill>
+                  <a:srgbClr val="2563EB"/>
+                </a:solidFill>
+                <a:latin typeface="Calibri"/>
+              </a:rPr>
+              <a:t>PROOF</a:t>
+            </a:r>
+            <a:r>
+              <a:rPr sz="950" b="0">
                 <a:solidFill>
                   <a:srgbClr val="6B7280"/>
                 </a:solidFill>
                 <a:latin typeface="Calibri"/>
               </a:rPr>
-              <a:t>PROOF</a:t>
-            </a:r>
-          </a:p>
-        </p:txBody>
-      </p:sp>
-      <p:sp>
-        <p:nvSpPr>
-          <p:cNvPr id="17438" name="TextBox 17437"/>
+              <a:t>   physical Android phone · hosted backend · real road</a:t>
+            </a:r>
+          </a:p>
+        </p:txBody>
+      </p:sp>
+      <p:sp>
+        <p:nvSpPr>
+          <p:cNvPr id="17441" name="TextBox 17440"/>
           <p:cNvSpPr txBox="1"/>
           <p:nvPr/>
         </p:nvSpPr>
         <p:spPr>
           <a:xfrm>
-            <a:off x="6499127" y="2212848"/>
-            <a:ext cx="5250912" cy="548640"/>
+            <a:off x="6318504" y="2395728"/>
+            <a:ext cx="5312664" cy="566928"/>
           </a:xfrm>
           <a:prstGeom prst="rect">
             <a:avLst/>
@@ -12966,20 +13599,20 @@
                 </a:solidFill>
                 <a:latin typeface="Calibri"/>
               </a:rPr>
-              <a:t>The whole lifecycle above was run on a physical Android phone against the hosted backend, on the real road.</a:t>
-            </a:r>
-          </a:p>
-        </p:txBody>
-      </p:sp>
-      <p:sp>
-        <p:nvSpPr>
-          <p:cNvPr id="17439" name="TextBox 17438"/>
+              <a:t>The whole lifecycle above was run end to end on a physical Android phone against the hosted backend, on the real Guwahati → Shillong road.</a:t>
+            </a:r>
+          </a:p>
+        </p:txBody>
+      </p:sp>
+      <p:sp>
+        <p:nvSpPr>
+          <p:cNvPr id="17442" name="TextBox 17441"/>
           <p:cNvSpPr txBox="1"/>
           <p:nvPr/>
         </p:nvSpPr>
         <p:spPr>
           <a:xfrm>
-            <a:off x="6499127" y="2798064"/>
+            <a:off x="6318504" y="3035808"/>
             <a:ext cx="868680" cy="310896"/>
           </a:xfrm>
           <a:prstGeom prst="rect">
@@ -13015,14 +13648,14 @@
       </p:sp>
       <p:sp>
         <p:nvSpPr>
-          <p:cNvPr id="17440" name="TextBox 17439"/>
+          <p:cNvPr id="17443" name="TextBox 17442"/>
           <p:cNvSpPr txBox="1"/>
           <p:nvPr/>
         </p:nvSpPr>
         <p:spPr>
           <a:xfrm>
-            <a:off x="7413527" y="2798064"/>
-            <a:ext cx="4336512" cy="310896"/>
+            <a:off x="7232904" y="3035808"/>
+            <a:ext cx="4398264" cy="310896"/>
           </a:xfrm>
           <a:prstGeom prst="rect">
             <a:avLst/>
@@ -13057,13 +13690,13 @@
       </p:sp>
       <p:sp>
         <p:nvSpPr>
-          <p:cNvPr id="17441" name="TextBox 17440"/>
+          <p:cNvPr id="17444" name="TextBox 17443"/>
           <p:cNvSpPr txBox="1"/>
           <p:nvPr/>
         </p:nvSpPr>
         <p:spPr>
           <a:xfrm>
-            <a:off x="6499127" y="3163824"/>
+            <a:off x="6318504" y="3401568"/>
             <a:ext cx="868680" cy="310896"/>
           </a:xfrm>
           <a:prstGeom prst="rect">
@@ -13099,14 +13732,14 @@
       </p:sp>
       <p:sp>
         <p:nvSpPr>
-          <p:cNvPr id="17442" name="TextBox 17441"/>
+          <p:cNvPr id="17445" name="TextBox 17444"/>
           <p:cNvSpPr txBox="1"/>
           <p:nvPr/>
         </p:nvSpPr>
         <p:spPr>
           <a:xfrm>
-            <a:off x="7413527" y="3163824"/>
-            <a:ext cx="4336512" cy="310896"/>
+            <a:off x="7232904" y="3401568"/>
+            <a:ext cx="4398264" cy="310896"/>
           </a:xfrm>
           <a:prstGeom prst="rect">
             <a:avLst/>
@@ -13141,14 +13774,14 @@
       </p:sp>
       <p:sp>
         <p:nvSpPr>
-          <p:cNvPr id="17443" name="TextBox 17442"/>
+          <p:cNvPr id="17446" name="TextBox 17445"/>
           <p:cNvSpPr txBox="1"/>
           <p:nvPr/>
         </p:nvSpPr>
         <p:spPr>
           <a:xfrm>
-            <a:off x="6499127" y="3547872"/>
-            <a:ext cx="5250912" cy="310896"/>
+            <a:off x="6318504" y="3785615"/>
+            <a:ext cx="5312664" cy="310896"/>
           </a:xfrm>
           <a:prstGeom prst="rect">
             <a:avLst/>
@@ -13228,14 +13861,14 @@
       </p:sp>
       <p:sp>
         <p:nvSpPr>
-          <p:cNvPr id="17444" name="Rounded Rectangle 17443"/>
+          <p:cNvPr id="17447" name="Rounded Rectangle 17446"/>
           <p:cNvSpPr/>
           <p:nvPr/>
         </p:nvSpPr>
         <p:spPr>
           <a:xfrm>
-            <a:off x="6499127" y="3986783"/>
-            <a:ext cx="5250912" cy="329184"/>
+            <a:off x="6318504" y="4242816"/>
+            <a:ext cx="5312664" cy="347472"/>
           </a:xfrm>
           <a:prstGeom prst="roundRect">
             <a:avLst>
@@ -13270,7 +13903,7 @@
           <a:p>
             <a:pPr algn="ctr"/>
             <a:r>
-              <a:rPr sz="1100" b="1">
+              <a:rPr sz="1150" b="1">
                 <a:solidFill>
                   <a:srgbClr val="FFFFFF"/>
                 </a:solidFill>
@@ -13283,14 +13916,14 @@
       </p:sp>
       <p:sp>
         <p:nvSpPr>
-          <p:cNvPr id="17445" name="TextBox 17444"/>
+          <p:cNvPr id="17448" name="TextBox 17447"/>
           <p:cNvSpPr txBox="1"/>
           <p:nvPr/>
         </p:nvSpPr>
         <p:spPr>
           <a:xfrm>
-            <a:off x="6499127" y="4389120"/>
-            <a:ext cx="5250912" cy="365760"/>
+            <a:off x="6318504" y="4681728"/>
+            <a:ext cx="5312664" cy="329184"/>
           </a:xfrm>
           <a:prstGeom prst="rect">
             <a:avLst/>
@@ -13334,14 +13967,14 @@
       </p:sp>
       <p:sp>
         <p:nvSpPr>
-          <p:cNvPr id="17446" name="TextBox 17445"/>
+          <p:cNvPr id="17449" name="TextBox 17448"/>
           <p:cNvSpPr txBox="1"/>
           <p:nvPr/>
         </p:nvSpPr>
         <p:spPr>
           <a:xfrm>
-            <a:off x="6499127" y="4754879"/>
-            <a:ext cx="5250912" cy="365760"/>
+            <a:off x="6318504" y="5029200"/>
+            <a:ext cx="5312664" cy="365760"/>
           </a:xfrm>
           <a:prstGeom prst="rect">
             <a:avLst/>
@@ -13376,13 +14009,13 @@
       </p:sp>
       <p:cxnSp>
         <p:nvCxnSpPr>
-          <p:cNvPr id="17447" name="Connector 17446"/>
+          <p:cNvPr id="17450" name="Connector 17449"/>
           <p:cNvCxnSpPr/>
           <p:nvPr/>
         </p:nvCxnSpPr>
         <p:spPr>
           <a:xfrm>
-            <a:off x="457200" y="5824728"/>
+            <a:off x="457200" y="5943600"/>
             <a:ext cx="11292840" cy="0"/>
           </a:xfrm>
           <a:prstGeom prst="line">
@@ -13411,13 +14044,13 @@
       </p:cxnSp>
       <p:sp>
         <p:nvSpPr>
-          <p:cNvPr id="17448" name="TextBox 17447"/>
+          <p:cNvPr id="17451" name="TextBox 17450"/>
           <p:cNvSpPr txBox="1"/>
           <p:nvPr/>
         </p:nvSpPr>
         <p:spPr>
           <a:xfrm>
-            <a:off x="457200" y="5870448"/>
+            <a:off x="457200" y="5989320"/>
             <a:ext cx="11292840" cy="502920"/>
           </a:xfrm>
           <a:prstGeom prst="rect">
@@ -13958,14 +14591,60 @@
       </p:sp>
       <p:sp>
         <p:nvSpPr>
-          <p:cNvPr id="17412" name="TextBox 17411"/>
+          <p:cNvPr id="17412" name="Rounded Rectangle 17411"/>
+          <p:cNvSpPr/>
+          <p:nvPr/>
+        </p:nvSpPr>
+        <p:spPr>
+          <a:xfrm>
+            <a:off x="384048" y="2157984"/>
+            <a:ext cx="8183879" cy="1499616"/>
+          </a:xfrm>
+          <a:prstGeom prst="roundRect">
+            <a:avLst>
+              <a:gd name="adj" fmla="val 6097"/>
+            </a:avLst>
+          </a:prstGeom>
+          <a:solidFill>
+            <a:srgbClr val="FFFFFF"/>
+          </a:solidFill>
+          <a:ln w="15875">
+            <a:solidFill>
+              <a:srgbClr val="2563EB"/>
+            </a:solidFill>
+          </a:ln>
+          <a:effectLst/>
+        </p:spPr>
+        <p:style>
+          <a:lnRef idx="1">
+            <a:schemeClr val="accent1"/>
+          </a:lnRef>
+          <a:fillRef idx="3">
+            <a:schemeClr val="accent1"/>
+          </a:fillRef>
+          <a:effectRef idx="2">
+            <a:schemeClr val="accent1"/>
+          </a:effectRef>
+          <a:fontRef idx="minor">
+            <a:schemeClr val="lt1"/>
+          </a:fontRef>
+        </p:style>
+        <p:txBody>
+          <a:bodyPr rtlCol="0" anchor="ctr"/>
+          <a:lstStyle/>
+          <a:p/>
+        </p:txBody>
+      </p:sp>
+      <p:sp>
+        <p:nvSpPr>
+          <p:cNvPr id="17413" name="TextBox 17412"/>
           <p:cNvSpPr txBox="1"/>
           <p:nvPr/>
         </p:nvSpPr>
         <p:spPr>
           <a:xfrm>
-            <a:off x="457200" y="2212848"/>
-            <a:ext cx="3657600" cy="329184"/>
+            <a:off x="530352" y="2231136"/>
+            <a:ext cx="7891271" cy="274320"/>
           </a:xfrm>
           <a:prstGeom prst="rect">
             <a:avLst/>
@@ -13987,9 +14666,9 @@
               </a:spcAft>
             </a:pPr>
             <a:r>
-              <a:rPr sz="1050" b="1">
-                <a:solidFill>
-                  <a:srgbClr val="6B7280"/>
+              <a:rPr sz="1100" b="1">
+                <a:solidFill>
+                  <a:srgbClr val="2563EB"/>
                 </a:solidFill>
                 <a:latin typeface="Calibri"/>
               </a:rPr>
@@ -14000,14 +14679,14 @@
       </p:sp>
       <p:cxnSp>
         <p:nvCxnSpPr>
-          <p:cNvPr id="17413" name="Connector 17412"/>
+          <p:cNvPr id="17414" name="Connector 17413"/>
           <p:cNvCxnSpPr/>
           <p:nvPr/>
         </p:nvCxnSpPr>
         <p:spPr>
           <a:xfrm>
-            <a:off x="457200" y="2487168"/>
-            <a:ext cx="1920240" cy="0"/>
+            <a:off x="530352" y="2615184"/>
+            <a:ext cx="1865376" cy="0"/>
           </a:xfrm>
           <a:prstGeom prst="line">
             <a:avLst/>
@@ -14035,14 +14714,14 @@
       </p:cxnSp>
       <p:sp>
         <p:nvSpPr>
-          <p:cNvPr id="17414" name="TextBox 17413"/>
+          <p:cNvPr id="17415" name="TextBox 17414"/>
           <p:cNvSpPr txBox="1"/>
           <p:nvPr/>
         </p:nvSpPr>
         <p:spPr>
           <a:xfrm>
-            <a:off x="457200" y="2542032"/>
-            <a:ext cx="1920240" cy="1097280"/>
+            <a:off x="530352" y="2670048"/>
+            <a:ext cx="1865376" cy="932688"/>
           </a:xfrm>
           <a:prstGeom prst="rect">
             <a:avLst/>
@@ -14096,14 +14775,14 @@
       </p:sp>
       <p:cxnSp>
         <p:nvCxnSpPr>
-          <p:cNvPr id="17415" name="Connector 17414"/>
+          <p:cNvPr id="17416" name="Connector 17415"/>
           <p:cNvCxnSpPr/>
           <p:nvPr/>
         </p:nvCxnSpPr>
         <p:spPr>
           <a:xfrm>
-            <a:off x="2496312" y="2487168"/>
-            <a:ext cx="1920240" cy="0"/>
+            <a:off x="2542032" y="2615184"/>
+            <a:ext cx="1865376" cy="0"/>
           </a:xfrm>
           <a:prstGeom prst="line">
             <a:avLst/>
@@ -14131,14 +14810,14 @@
       </p:cxnSp>
       <p:sp>
         <p:nvSpPr>
-          <p:cNvPr id="17416" name="TextBox 17415"/>
+          <p:cNvPr id="17417" name="TextBox 17416"/>
           <p:cNvSpPr txBox="1"/>
           <p:nvPr/>
         </p:nvSpPr>
         <p:spPr>
           <a:xfrm>
-            <a:off x="2496312" y="2542032"/>
-            <a:ext cx="1920240" cy="1097280"/>
+            <a:off x="2542032" y="2670048"/>
+            <a:ext cx="1865376" cy="932688"/>
           </a:xfrm>
           <a:prstGeom prst="rect">
             <a:avLst/>
@@ -14192,14 +14871,14 @@
       </p:sp>
       <p:cxnSp>
         <p:nvCxnSpPr>
-          <p:cNvPr id="17417" name="Connector 17416"/>
+          <p:cNvPr id="17418" name="Connector 17417"/>
           <p:cNvCxnSpPr/>
           <p:nvPr/>
         </p:nvCxnSpPr>
         <p:spPr>
           <a:xfrm>
-            <a:off x="4535424" y="2487168"/>
-            <a:ext cx="1920240" cy="0"/>
+            <a:off x="4553712" y="2615184"/>
+            <a:ext cx="1865376" cy="0"/>
           </a:xfrm>
           <a:prstGeom prst="line">
             <a:avLst/>
@@ -14227,14 +14906,14 @@
       </p:cxnSp>
       <p:sp>
         <p:nvSpPr>
-          <p:cNvPr id="17418" name="TextBox 17417"/>
+          <p:cNvPr id="17419" name="TextBox 17418"/>
           <p:cNvSpPr txBox="1"/>
           <p:nvPr/>
         </p:nvSpPr>
         <p:spPr>
           <a:xfrm>
-            <a:off x="4535424" y="2542032"/>
-            <a:ext cx="1920240" cy="1097280"/>
+            <a:off x="4553712" y="2670048"/>
+            <a:ext cx="1865376" cy="932688"/>
           </a:xfrm>
           <a:prstGeom prst="rect">
             <a:avLst/>
@@ -14288,14 +14967,14 @@
       </p:sp>
       <p:cxnSp>
         <p:nvCxnSpPr>
-          <p:cNvPr id="17419" name="Connector 17418"/>
+          <p:cNvPr id="17420" name="Connector 17419"/>
           <p:cNvCxnSpPr/>
           <p:nvPr/>
         </p:nvCxnSpPr>
         <p:spPr>
           <a:xfrm>
-            <a:off x="6574536" y="2487168"/>
-            <a:ext cx="1920240" cy="0"/>
+            <a:off x="6565392" y="2615184"/>
+            <a:ext cx="1865376" cy="0"/>
           </a:xfrm>
           <a:prstGeom prst="line">
             <a:avLst/>
@@ -14323,14 +15002,14 @@
       </p:cxnSp>
       <p:sp>
         <p:nvSpPr>
-          <p:cNvPr id="17420" name="TextBox 17419"/>
+          <p:cNvPr id="17421" name="TextBox 17420"/>
           <p:cNvSpPr txBox="1"/>
           <p:nvPr/>
         </p:nvSpPr>
         <p:spPr>
           <a:xfrm>
-            <a:off x="6574536" y="2542032"/>
-            <a:ext cx="1920240" cy="1097280"/>
+            <a:off x="6565392" y="2670048"/>
+            <a:ext cx="1865376" cy="932688"/>
           </a:xfrm>
           <a:prstGeom prst="rect">
             <a:avLst/>
@@ -14384,14 +15063,60 @@
       </p:sp>
       <p:sp>
         <p:nvSpPr>
-          <p:cNvPr id="17421" name="TextBox 17420"/>
+          <p:cNvPr id="17422" name="Rounded Rectangle 17421"/>
+          <p:cNvSpPr/>
+          <p:nvPr/>
+        </p:nvSpPr>
+        <p:spPr>
+          <a:xfrm>
+            <a:off x="384048" y="3730752"/>
+            <a:ext cx="8183879" cy="1554480"/>
+          </a:xfrm>
+          <a:prstGeom prst="roundRect">
+            <a:avLst>
+              <a:gd name="adj" fmla="val 5882"/>
+            </a:avLst>
+          </a:prstGeom>
+          <a:solidFill>
+            <a:srgbClr val="FFFFFF"/>
+          </a:solidFill>
+          <a:ln w="15875">
+            <a:solidFill>
+              <a:srgbClr val="2563EB"/>
+            </a:solidFill>
+          </a:ln>
+          <a:effectLst/>
+        </p:spPr>
+        <p:style>
+          <a:lnRef idx="1">
+            <a:schemeClr val="accent1"/>
+          </a:lnRef>
+          <a:fillRef idx="3">
+            <a:schemeClr val="accent1"/>
+          </a:fillRef>
+          <a:effectRef idx="2">
+            <a:schemeClr val="accent1"/>
+          </a:effectRef>
+          <a:fontRef idx="minor">
+            <a:schemeClr val="lt1"/>
+          </a:fontRef>
+        </p:style>
+        <p:txBody>
+          <a:bodyPr rtlCol="0" anchor="ctr"/>
+          <a:lstStyle/>
+          <a:p/>
+        </p:txBody>
+      </p:sp>
+      <p:sp>
+        <p:nvSpPr>
+          <p:cNvPr id="17423" name="TextBox 17422"/>
           <p:cNvSpPr txBox="1"/>
           <p:nvPr/>
         </p:nvSpPr>
         <p:spPr>
           <a:xfrm>
-            <a:off x="457200" y="3703320"/>
-            <a:ext cx="3657600" cy="329184"/>
+            <a:off x="530352" y="3803904"/>
+            <a:ext cx="7891271" cy="274320"/>
           </a:xfrm>
           <a:prstGeom prst="rect">
             <a:avLst/>
@@ -14413,9 +15138,9 @@
               </a:spcAft>
             </a:pPr>
             <a:r>
-              <a:rPr sz="1050" b="1">
-                <a:solidFill>
-                  <a:srgbClr val="6B7280"/>
+              <a:rPr sz="1100" b="1">
+                <a:solidFill>
+                  <a:srgbClr val="2563EB"/>
                 </a:solidFill>
                 <a:latin typeface="Calibri"/>
               </a:rPr>
@@ -14426,14 +15151,14 @@
       </p:sp>
       <p:sp>
         <p:nvSpPr>
-          <p:cNvPr id="17422" name="TextBox 17421"/>
+          <p:cNvPr id="17424" name="TextBox 17423"/>
           <p:cNvSpPr txBox="1"/>
           <p:nvPr/>
         </p:nvSpPr>
         <p:spPr>
           <a:xfrm>
-            <a:off x="457200" y="3977639"/>
-            <a:ext cx="914400" cy="420624"/>
+            <a:off x="566928" y="4133087"/>
+            <a:ext cx="914400" cy="365760"/>
           </a:xfrm>
           <a:prstGeom prst="rect">
             <a:avLst/>
@@ -14455,7 +15180,7 @@
               </a:spcAft>
             </a:pPr>
             <a:r>
-              <a:rPr sz="2000" b="1">
+              <a:rPr sz="1800" b="1">
                 <a:solidFill>
                   <a:srgbClr val="2563EB"/>
                 </a:solidFill>
@@ -14468,14 +15193,14 @@
       </p:sp>
       <p:sp>
         <p:nvSpPr>
-          <p:cNvPr id="17423" name="TextBox 17422"/>
+          <p:cNvPr id="17425" name="TextBox 17424"/>
           <p:cNvSpPr txBox="1"/>
           <p:nvPr/>
         </p:nvSpPr>
         <p:spPr>
           <a:xfrm>
-            <a:off x="1463040" y="3977639"/>
-            <a:ext cx="2926080" cy="420624"/>
+            <a:off x="1554480" y="4133087"/>
+            <a:ext cx="2889504" cy="365760"/>
           </a:xfrm>
           <a:prstGeom prst="rect">
             <a:avLst/>
@@ -14510,14 +15235,14 @@
       </p:sp>
       <p:sp>
         <p:nvSpPr>
-          <p:cNvPr id="17424" name="TextBox 17423"/>
+          <p:cNvPr id="17426" name="TextBox 17425"/>
           <p:cNvSpPr txBox="1"/>
           <p:nvPr/>
         </p:nvSpPr>
         <p:spPr>
           <a:xfrm>
-            <a:off x="457200" y="4434840"/>
-            <a:ext cx="914400" cy="420624"/>
+            <a:off x="566928" y="4517136"/>
+            <a:ext cx="914400" cy="365760"/>
           </a:xfrm>
           <a:prstGeom prst="rect">
             <a:avLst/>
@@ -14539,7 +15264,7 @@
               </a:spcAft>
             </a:pPr>
             <a:r>
-              <a:rPr sz="2000" b="1">
+              <a:rPr sz="1800" b="1">
                 <a:solidFill>
                   <a:srgbClr val="2563EB"/>
                 </a:solidFill>
@@ -14552,14 +15277,14 @@
       </p:sp>
       <p:sp>
         <p:nvSpPr>
-          <p:cNvPr id="17425" name="TextBox 17424"/>
+          <p:cNvPr id="17427" name="TextBox 17426"/>
           <p:cNvSpPr txBox="1"/>
           <p:nvPr/>
         </p:nvSpPr>
         <p:spPr>
           <a:xfrm>
-            <a:off x="1463040" y="4434840"/>
-            <a:ext cx="2926080" cy="420624"/>
+            <a:off x="1554480" y="4517136"/>
+            <a:ext cx="2889504" cy="365760"/>
           </a:xfrm>
           <a:prstGeom prst="rect">
             <a:avLst/>
@@ -14594,14 +15319,14 @@
       </p:sp>
       <p:sp>
         <p:nvSpPr>
-          <p:cNvPr id="17426" name="TextBox 17425"/>
+          <p:cNvPr id="17428" name="TextBox 17427"/>
           <p:cNvSpPr txBox="1"/>
           <p:nvPr/>
         </p:nvSpPr>
         <p:spPr>
           <a:xfrm>
-            <a:off x="457200" y="4892040"/>
-            <a:ext cx="914400" cy="420624"/>
+            <a:off x="566928" y="4901183"/>
+            <a:ext cx="914400" cy="365760"/>
           </a:xfrm>
           <a:prstGeom prst="rect">
             <a:avLst/>
@@ -14623,7 +15348,7 @@
               </a:spcAft>
             </a:pPr>
             <a:r>
-              <a:rPr sz="2000" b="1">
+              <a:rPr sz="1800" b="1">
                 <a:solidFill>
                   <a:srgbClr val="2563EB"/>
                 </a:solidFill>
@@ -14636,14 +15361,14 @@
       </p:sp>
       <p:sp>
         <p:nvSpPr>
-          <p:cNvPr id="17427" name="TextBox 17426"/>
+          <p:cNvPr id="17429" name="TextBox 17428"/>
           <p:cNvSpPr txBox="1"/>
           <p:nvPr/>
         </p:nvSpPr>
         <p:spPr>
           <a:xfrm>
-            <a:off x="1463040" y="4892040"/>
-            <a:ext cx="2926080" cy="420624"/>
+            <a:off x="1554480" y="4901183"/>
+            <a:ext cx="2889504" cy="365760"/>
           </a:xfrm>
           <a:prstGeom prst="rect">
             <a:avLst/>
@@ -14678,14 +15403,14 @@
       </p:sp>
       <p:sp>
         <p:nvSpPr>
-          <p:cNvPr id="17428" name="TextBox 17427"/>
+          <p:cNvPr id="17430" name="TextBox 17429"/>
           <p:cNvSpPr txBox="1"/>
           <p:nvPr/>
         </p:nvSpPr>
         <p:spPr>
           <a:xfrm>
-            <a:off x="4480560" y="3977639"/>
-            <a:ext cx="914400" cy="420624"/>
+            <a:off x="4544568" y="4133087"/>
+            <a:ext cx="914400" cy="365760"/>
           </a:xfrm>
           <a:prstGeom prst="rect">
             <a:avLst/>
@@ -14707,7 +15432,7 @@
               </a:spcAft>
             </a:pPr>
             <a:r>
-              <a:rPr sz="2000" b="1">
+              <a:rPr sz="1800" b="1">
                 <a:solidFill>
                   <a:srgbClr val="2563EB"/>
                 </a:solidFill>
@@ -14720,14 +15445,14 @@
       </p:sp>
       <p:sp>
         <p:nvSpPr>
-          <p:cNvPr id="17429" name="TextBox 17428"/>
+          <p:cNvPr id="17431" name="TextBox 17430"/>
           <p:cNvSpPr txBox="1"/>
           <p:nvPr/>
         </p:nvSpPr>
         <p:spPr>
           <a:xfrm>
-            <a:off x="5486400" y="3977639"/>
-            <a:ext cx="2926080" cy="420624"/>
+            <a:off x="5532120" y="4133087"/>
+            <a:ext cx="2889504" cy="365760"/>
           </a:xfrm>
           <a:prstGeom prst="rect">
             <a:avLst/>
@@ -14762,14 +15487,14 @@
       </p:sp>
       <p:sp>
         <p:nvSpPr>
-          <p:cNvPr id="17430" name="TextBox 17429"/>
+          <p:cNvPr id="17432" name="TextBox 17431"/>
           <p:cNvSpPr txBox="1"/>
           <p:nvPr/>
         </p:nvSpPr>
         <p:spPr>
           <a:xfrm>
-            <a:off x="4480560" y="4434840"/>
-            <a:ext cx="914400" cy="420624"/>
+            <a:off x="4544568" y="4517136"/>
+            <a:ext cx="914400" cy="365760"/>
           </a:xfrm>
           <a:prstGeom prst="rect">
             <a:avLst/>
@@ -14791,7 +15516,7 @@
               </a:spcAft>
             </a:pPr>
             <a:r>
-              <a:rPr sz="2000" b="1">
+              <a:rPr sz="1800" b="1">
                 <a:solidFill>
                   <a:srgbClr val="2563EB"/>
                 </a:solidFill>
@@ -14804,14 +15529,14 @@
       </p:sp>
       <p:sp>
         <p:nvSpPr>
-          <p:cNvPr id="17431" name="TextBox 17430"/>
+          <p:cNvPr id="17433" name="TextBox 17432"/>
           <p:cNvSpPr txBox="1"/>
           <p:nvPr/>
         </p:nvSpPr>
         <p:spPr>
           <a:xfrm>
-            <a:off x="5486400" y="4434840"/>
-            <a:ext cx="2926080" cy="420624"/>
+            <a:off x="5532120" y="4517136"/>
+            <a:ext cx="2889504" cy="365760"/>
           </a:xfrm>
           <a:prstGeom prst="rect">
             <a:avLst/>
@@ -14846,14 +15571,14 @@
       </p:sp>
       <p:sp>
         <p:nvSpPr>
-          <p:cNvPr id="17432" name="TextBox 17431"/>
+          <p:cNvPr id="17434" name="TextBox 17433"/>
           <p:cNvSpPr txBox="1"/>
           <p:nvPr/>
         </p:nvSpPr>
         <p:spPr>
           <a:xfrm>
-            <a:off x="4480560" y="4892040"/>
-            <a:ext cx="914400" cy="420624"/>
+            <a:off x="4544568" y="4901183"/>
+            <a:ext cx="914400" cy="365760"/>
           </a:xfrm>
           <a:prstGeom prst="rect">
             <a:avLst/>
@@ -14875,7 +15600,7 @@
               </a:spcAft>
             </a:pPr>
             <a:r>
-              <a:rPr sz="2000" b="1">
+              <a:rPr sz="1800" b="1">
                 <a:solidFill>
                   <a:srgbClr val="2563EB"/>
                 </a:solidFill>
@@ -14888,14 +15613,14 @@
       </p:sp>
       <p:sp>
         <p:nvSpPr>
-          <p:cNvPr id="17433" name="TextBox 17432"/>
+          <p:cNvPr id="17435" name="TextBox 17434"/>
           <p:cNvSpPr txBox="1"/>
           <p:nvPr/>
         </p:nvSpPr>
         <p:spPr>
           <a:xfrm>
-            <a:off x="5486400" y="4892040"/>
-            <a:ext cx="2926080" cy="420624"/>
+            <a:off x="5532120" y="4901183"/>
+            <a:ext cx="2889504" cy="365760"/>
           </a:xfrm>
           <a:prstGeom prst="rect">
             <a:avLst/>
@@ -14930,14 +15655,60 @@
       </p:sp>
       <p:sp>
         <p:nvSpPr>
-          <p:cNvPr id="17434" name="TextBox 17433"/>
+          <p:cNvPr id="17436" name="Rounded Rectangle 17435"/>
+          <p:cNvSpPr/>
+          <p:nvPr/>
+        </p:nvSpPr>
+        <p:spPr>
+          <a:xfrm>
+            <a:off x="384048" y="5358384"/>
+            <a:ext cx="8183879" cy="969264"/>
+          </a:xfrm>
+          <a:prstGeom prst="roundRect">
+            <a:avLst>
+              <a:gd name="adj" fmla="val 9433"/>
+            </a:avLst>
+          </a:prstGeom>
+          <a:solidFill>
+            <a:srgbClr val="FFFFFF"/>
+          </a:solidFill>
+          <a:ln w="15875">
+            <a:solidFill>
+              <a:srgbClr val="2563EB"/>
+            </a:solidFill>
+          </a:ln>
+          <a:effectLst/>
+        </p:spPr>
+        <p:style>
+          <a:lnRef idx="1">
+            <a:schemeClr val="accent1"/>
+          </a:lnRef>
+          <a:fillRef idx="3">
+            <a:schemeClr val="accent1"/>
+          </a:fillRef>
+          <a:effectRef idx="2">
+            <a:schemeClr val="accent1"/>
+          </a:effectRef>
+          <a:fontRef idx="minor">
+            <a:schemeClr val="lt1"/>
+          </a:fontRef>
+        </p:style>
+        <p:txBody>
+          <a:bodyPr rtlCol="0" anchor="ctr"/>
+          <a:lstStyle/>
+          <a:p/>
+        </p:txBody>
+      </p:sp>
+      <p:sp>
+        <p:nvSpPr>
+          <p:cNvPr id="17437" name="TextBox 17436"/>
           <p:cNvSpPr txBox="1"/>
           <p:nvPr/>
         </p:nvSpPr>
         <p:spPr>
           <a:xfrm>
-            <a:off x="457200" y="5440680"/>
-            <a:ext cx="4572000" cy="329184"/>
+            <a:off x="530352" y="5431536"/>
+            <a:ext cx="7891271" cy="274320"/>
           </a:xfrm>
           <a:prstGeom prst="rect">
             <a:avLst/>
@@ -14959,27 +15730,36 @@
               </a:spcAft>
             </a:pPr>
             <a:r>
-              <a:rPr sz="1050" b="1">
+              <a:rPr sz="1100" b="1">
+                <a:solidFill>
+                  <a:srgbClr val="2563EB"/>
+                </a:solidFill>
+                <a:latin typeface="Calibri"/>
+              </a:rPr>
+              <a:t>HUMAN GOVERNANCE</a:t>
+            </a:r>
+            <a:r>
+              <a:rPr sz="950" b="0">
                 <a:solidFill>
                   <a:srgbClr val="6B7280"/>
                 </a:solidFill>
                 <a:latin typeface="Calibri"/>
               </a:rPr>
-              <a:t>HUMAN GOVERNANCE — AI HAS NO UNCONTROLLED AUTHORITY</a:t>
-            </a:r>
-          </a:p>
-        </p:txBody>
-      </p:sp>
-      <p:sp>
-        <p:nvSpPr>
-          <p:cNvPr id="17435" name="Rounded Rectangle 17434"/>
+              <a:t>   AI has no uncontrolled authority · no invented percentages</a:t>
+            </a:r>
+          </a:p>
+        </p:txBody>
+      </p:sp>
+      <p:sp>
+        <p:nvSpPr>
+          <p:cNvPr id="17438" name="Rounded Rectangle 17437"/>
           <p:cNvSpPr/>
           <p:nvPr/>
         </p:nvSpPr>
         <p:spPr>
           <a:xfrm>
-            <a:off x="457200" y="5715000"/>
-            <a:ext cx="1828800" cy="347472"/>
+            <a:off x="548640" y="5797296"/>
+            <a:ext cx="1783080" cy="347472"/>
           </a:xfrm>
           <a:prstGeom prst="roundRect">
             <a:avLst>
@@ -15029,14 +15809,14 @@
       </p:sp>
       <p:cxnSp>
         <p:nvCxnSpPr>
-          <p:cNvPr id="17436" name="Connector 17435"/>
+          <p:cNvPr id="17439" name="Connector 17438"/>
           <p:cNvCxnSpPr/>
           <p:nvPr/>
         </p:nvCxnSpPr>
         <p:spPr>
           <a:xfrm>
-            <a:off x="2313432" y="5888736"/>
-            <a:ext cx="155448" cy="0"/>
+            <a:off x="2359151" y="5971032"/>
+            <a:ext cx="155449" cy="0"/>
           </a:xfrm>
           <a:prstGeom prst="line">
             <a:avLst/>
@@ -15065,14 +15845,14 @@
       </p:cxnSp>
       <p:sp>
         <p:nvSpPr>
-          <p:cNvPr id="17437" name="Rounded Rectangle 17436"/>
+          <p:cNvPr id="17440" name="Rounded Rectangle 17439"/>
           <p:cNvSpPr/>
           <p:nvPr/>
         </p:nvSpPr>
         <p:spPr>
           <a:xfrm>
-            <a:off x="2505456" y="5715000"/>
-            <a:ext cx="1828800" cy="347472"/>
+            <a:off x="2569464" y="5797296"/>
+            <a:ext cx="1783080" cy="347472"/>
           </a:xfrm>
           <a:prstGeom prst="roundRect">
             <a:avLst>
@@ -15122,13 +15902,13 @@
       </p:sp>
       <p:cxnSp>
         <p:nvCxnSpPr>
-          <p:cNvPr id="17438" name="Connector 17437"/>
+          <p:cNvPr id="17441" name="Connector 17440"/>
           <p:cNvCxnSpPr/>
           <p:nvPr/>
         </p:nvCxnSpPr>
         <p:spPr>
           <a:xfrm>
-            <a:off x="4361688" y="5888736"/>
+            <a:off x="4379976" y="5971032"/>
             <a:ext cx="155448" cy="0"/>
           </a:xfrm>
           <a:prstGeom prst="line">
@@ -15158,14 +15938,14 @@
       </p:cxnSp>
       <p:sp>
         <p:nvSpPr>
-          <p:cNvPr id="17439" name="Rounded Rectangle 17438"/>
+          <p:cNvPr id="17442" name="Rounded Rectangle 17441"/>
           <p:cNvSpPr/>
           <p:nvPr/>
         </p:nvSpPr>
         <p:spPr>
           <a:xfrm>
-            <a:off x="4553712" y="5715000"/>
-            <a:ext cx="1828800" cy="347472"/>
+            <a:off x="4590288" y="5797296"/>
+            <a:ext cx="1783080" cy="347472"/>
           </a:xfrm>
           <a:prstGeom prst="roundRect">
             <a:avLst>
@@ -15215,13 +15995,13 @@
       </p:sp>
       <p:cxnSp>
         <p:nvCxnSpPr>
-          <p:cNvPr id="17440" name="Connector 17439"/>
+          <p:cNvPr id="17443" name="Connector 17442"/>
           <p:cNvCxnSpPr/>
           <p:nvPr/>
         </p:nvCxnSpPr>
         <p:spPr>
           <a:xfrm>
-            <a:off x="6409944" y="5888736"/>
+            <a:off x="6400800" y="5971032"/>
             <a:ext cx="155448" cy="0"/>
           </a:xfrm>
           <a:prstGeom prst="line">
@@ -15251,14 +16031,14 @@
       </p:cxnSp>
       <p:sp>
         <p:nvSpPr>
-          <p:cNvPr id="17441" name="Rounded Rectangle 17440"/>
+          <p:cNvPr id="17444" name="Rounded Rectangle 17443"/>
           <p:cNvSpPr/>
           <p:nvPr/>
         </p:nvSpPr>
         <p:spPr>
           <a:xfrm>
-            <a:off x="6601968" y="5715000"/>
-            <a:ext cx="1828800" cy="347472"/>
+            <a:off x="6611112" y="5797296"/>
+            <a:ext cx="1783080" cy="347472"/>
           </a:xfrm>
           <a:prstGeom prst="roundRect">
             <a:avLst>
@@ -15308,14 +16088,60 @@
       </p:sp>
       <p:sp>
         <p:nvSpPr>
-          <p:cNvPr id="17442" name="TextBox 17441"/>
+          <p:cNvPr id="17445" name="Rounded Rectangle 17444"/>
+          <p:cNvSpPr/>
+          <p:nvPr/>
+        </p:nvSpPr>
+        <p:spPr>
+          <a:xfrm>
+            <a:off x="8641080" y="1097280"/>
+            <a:ext cx="3136392" cy="5230368"/>
+          </a:xfrm>
+          <a:prstGeom prst="roundRect">
+            <a:avLst>
+              <a:gd name="adj" fmla="val 2915"/>
+            </a:avLst>
+          </a:prstGeom>
+          <a:solidFill>
+            <a:srgbClr val="FFFFFF"/>
+          </a:solidFill>
+          <a:ln w="15875">
+            <a:solidFill>
+              <a:srgbClr val="2563EB"/>
+            </a:solidFill>
+          </a:ln>
+          <a:effectLst/>
+        </p:spPr>
+        <p:style>
+          <a:lnRef idx="1">
+            <a:schemeClr val="accent1"/>
+          </a:lnRef>
+          <a:fillRef idx="3">
+            <a:schemeClr val="accent1"/>
+          </a:fillRef>
+          <a:effectRef idx="2">
+            <a:schemeClr val="accent1"/>
+          </a:effectRef>
+          <a:fontRef idx="minor">
+            <a:schemeClr val="lt1"/>
+          </a:fontRef>
+        </p:style>
+        <p:txBody>
+          <a:bodyPr rtlCol="0" anchor="ctr"/>
+          <a:lstStyle/>
+          <a:p/>
+        </p:txBody>
+      </p:sp>
+      <p:sp>
+        <p:nvSpPr>
+          <p:cNvPr id="17446" name="TextBox 17445"/>
           <p:cNvSpPr txBox="1"/>
           <p:nvPr/>
         </p:nvSpPr>
         <p:spPr>
           <a:xfrm>
-            <a:off x="457200" y="6099048"/>
-            <a:ext cx="7955279" cy="228600"/>
+            <a:off x="8787384" y="1170432"/>
+            <a:ext cx="2843784" cy="274320"/>
           </a:xfrm>
           <a:prstGeom prst="rect">
             <a:avLst/>
@@ -15337,27 +16163,27 @@
               </a:spcAft>
             </a:pPr>
             <a:r>
-              <a:rPr sz="950" b="0">
-                <a:solidFill>
-                  <a:srgbClr val="6B7280"/>
-                </a:solidFill>
-                <a:latin typeface="Calibri"/>
-              </a:rPr>
-              <a:t>No invented percentages: impact is stated as who gains what, backed by the working system.</a:t>
-            </a:r>
-          </a:p>
-        </p:txBody>
-      </p:sp>
-      <p:sp>
-        <p:nvSpPr>
-          <p:cNvPr id="17443" name="Rounded Rectangle 17442"/>
+              <a:rPr sz="1050" b="1">
+                <a:solidFill>
+                  <a:srgbClr val="2563EB"/>
+                </a:solidFill>
+                <a:latin typeface="Calibri"/>
+              </a:rPr>
+              <a:t>REAL SCREENS · APK 1.0.18</a:t>
+            </a:r>
+          </a:p>
+        </p:txBody>
+      </p:sp>
+      <p:sp>
+        <p:nvSpPr>
+          <p:cNvPr id="17447" name="Rounded Rectangle 17446"/>
           <p:cNvSpPr/>
           <p:nvPr/>
         </p:nvSpPr>
         <p:spPr>
           <a:xfrm>
-            <a:off x="8567928" y="1069848"/>
-            <a:ext cx="1872978" cy="2615184"/>
+            <a:off x="8759952" y="1508760"/>
+            <a:ext cx="1678180" cy="2340864"/>
           </a:xfrm>
           <a:prstGeom prst="roundRect">
             <a:avLst>
@@ -15396,7 +16222,7 @@
       </p:sp>
       <p:pic>
         <p:nvPicPr>
-          <p:cNvPr id="17444" name="Picture 17443" descr="phone-lang.png"/>
+          <p:cNvPr id="17448" name="Picture 17447" descr="phone-lang.png"/>
           <p:cNvPicPr>
             <a:picLocks noChangeAspect="1"/>
           </p:cNvPicPr>
@@ -15410,8 +16236,8 @@
         </p:blipFill>
         <p:spPr>
           <a:xfrm>
-            <a:off x="8595360" y="1097280"/>
-            <a:ext cx="1818114" cy="2560320"/>
+            <a:off x="8787384" y="1536192"/>
+            <a:ext cx="1623316" cy="2286000"/>
           </a:xfrm>
           <a:prstGeom prst="rect">
             <a:avLst/>
@@ -15420,14 +16246,14 @@
       </p:pic>
       <p:sp>
         <p:nvSpPr>
-          <p:cNvPr id="17445" name="Rounded Rectangle 17444"/>
+          <p:cNvPr id="17449" name="Rounded Rectangle 17448"/>
           <p:cNvSpPr/>
           <p:nvPr/>
         </p:nvSpPr>
         <p:spPr>
           <a:xfrm>
-            <a:off x="8595360" y="3749039"/>
-            <a:ext cx="1818114" cy="256032"/>
+            <a:off x="8787384" y="3895344"/>
+            <a:ext cx="1623316" cy="256032"/>
           </a:xfrm>
           <a:prstGeom prst="roundRect">
             <a:avLst>
@@ -15475,14 +16301,14 @@
       </p:sp>
       <p:sp>
         <p:nvSpPr>
-          <p:cNvPr id="17446" name="Rounded Rectangle 17445"/>
+          <p:cNvPr id="17450" name="Rounded Rectangle 17449"/>
           <p:cNvSpPr/>
           <p:nvPr/>
         </p:nvSpPr>
         <p:spPr>
           <a:xfrm>
-            <a:off x="10523202" y="1069848"/>
-            <a:ext cx="1262417" cy="2615184"/>
+            <a:off x="10529572" y="1508760"/>
+            <a:ext cx="1133037" cy="2340864"/>
           </a:xfrm>
           <a:prstGeom prst="roundRect">
             <a:avLst>
@@ -15521,7 +16347,7 @@
       </p:sp>
       <p:pic>
         <p:nvPicPr>
-          <p:cNvPr id="17447" name="Picture 17446" descr="phone-manager.png"/>
+          <p:cNvPr id="17451" name="Picture 17450" descr="phone-manager.png"/>
           <p:cNvPicPr>
             <a:picLocks noChangeAspect="1"/>
           </p:cNvPicPr>
@@ -15535,8 +16361,8 @@
         </p:blipFill>
         <p:spPr>
           <a:xfrm>
-            <a:off x="10550634" y="1097280"/>
-            <a:ext cx="1207553" cy="2560320"/>
+            <a:off x="10557004" y="1536192"/>
+            <a:ext cx="1078173" cy="2286000"/>
           </a:xfrm>
           <a:prstGeom prst="rect">
             <a:avLst/>
@@ -15545,14 +16371,14 @@
       </p:pic>
       <p:sp>
         <p:nvSpPr>
-          <p:cNvPr id="17448" name="Rounded Rectangle 17447"/>
+          <p:cNvPr id="17452" name="Rounded Rectangle 17451"/>
           <p:cNvSpPr/>
           <p:nvPr/>
         </p:nvSpPr>
         <p:spPr>
           <a:xfrm>
-            <a:off x="10550634" y="3749039"/>
-            <a:ext cx="1207553" cy="256032"/>
+            <a:off x="10557004" y="3895344"/>
+            <a:ext cx="1078173" cy="256032"/>
           </a:xfrm>
           <a:prstGeom prst="roundRect">
             <a:avLst>
@@ -15600,14 +16426,14 @@
       </p:sp>
       <p:sp>
         <p:nvSpPr>
-          <p:cNvPr id="17449" name="TextBox 17448"/>
+          <p:cNvPr id="17453" name="TextBox 17452"/>
           <p:cNvSpPr txBox="1"/>
           <p:nvPr/>
         </p:nvSpPr>
         <p:spPr>
           <a:xfrm>
-            <a:off x="8595360" y="4114800"/>
-            <a:ext cx="3154679" cy="1645920"/>
+            <a:off x="8787384" y="4279392"/>
+            <a:ext cx="2843784" cy="2011680"/>
           </a:xfrm>
           <a:prstGeom prst="rect">
             <a:avLst/>
@@ -16018,14 +16844,60 @@
       </p:pic>
       <p:sp>
         <p:nvSpPr>
-          <p:cNvPr id="17410" name="TextBox 17409"/>
+          <p:cNvPr id="17410" name="Rounded Rectangle 17409"/>
+          <p:cNvSpPr/>
+          <p:nvPr/>
+        </p:nvSpPr>
+        <p:spPr>
+          <a:xfrm>
+            <a:off x="384048" y="1024128"/>
+            <a:ext cx="6766560" cy="4480560"/>
+          </a:xfrm>
+          <a:prstGeom prst="roundRect">
+            <a:avLst>
+              <a:gd name="adj" fmla="val 2040"/>
+            </a:avLst>
+          </a:prstGeom>
+          <a:solidFill>
+            <a:srgbClr val="FFFFFF"/>
+          </a:solidFill>
+          <a:ln w="15875">
+            <a:solidFill>
+              <a:srgbClr val="2563EB"/>
+            </a:solidFill>
+          </a:ln>
+          <a:effectLst/>
+        </p:spPr>
+        <p:style>
+          <a:lnRef idx="1">
+            <a:schemeClr val="accent1"/>
+          </a:lnRef>
+          <a:fillRef idx="3">
+            <a:schemeClr val="accent1"/>
+          </a:fillRef>
+          <a:effectRef idx="2">
+            <a:schemeClr val="accent1"/>
+          </a:effectRef>
+          <a:fontRef idx="minor">
+            <a:schemeClr val="lt1"/>
+          </a:fontRef>
+        </p:style>
+        <p:txBody>
+          <a:bodyPr rtlCol="0" anchor="ctr"/>
+          <a:lstStyle/>
+          <a:p/>
+        </p:txBody>
+      </p:sp>
+      <p:sp>
+        <p:nvSpPr>
+          <p:cNvPr id="17411" name="TextBox 17410"/>
           <p:cNvSpPr txBox="1"/>
           <p:nvPr/>
         </p:nvSpPr>
         <p:spPr>
           <a:xfrm>
-            <a:off x="457200" y="1078992"/>
-            <a:ext cx="6858000" cy="329184"/>
+            <a:off x="530352" y="1097280"/>
+            <a:ext cx="6473952" cy="274320"/>
           </a:xfrm>
           <a:prstGeom prst="rect">
             <a:avLst/>
@@ -16049,7 +16921,7 @@
             <a:r>
               <a:rPr sz="1050" b="1">
                 <a:solidFill>
-                  <a:srgbClr val="6B7280"/>
+                  <a:srgbClr val="2563EB"/>
                 </a:solidFill>
                 <a:latin typeface="Calibri"/>
               </a:rPr>
@@ -16060,14 +16932,14 @@
       </p:sp>
       <p:cxnSp>
         <p:nvCxnSpPr>
-          <p:cNvPr id="17411" name="Connector 17410"/>
+          <p:cNvPr id="17412" name="Connector 17411"/>
           <p:cNvCxnSpPr/>
           <p:nvPr/>
         </p:nvCxnSpPr>
         <p:spPr>
           <a:xfrm>
-            <a:off x="457200" y="1426464"/>
-            <a:ext cx="3291839" cy="0"/>
+            <a:off x="530352" y="1481328"/>
+            <a:ext cx="3108960" cy="0"/>
           </a:xfrm>
           <a:prstGeom prst="line">
             <a:avLst/>
@@ -16095,14 +16967,14 @@
       </p:cxnSp>
       <p:sp>
         <p:nvSpPr>
-          <p:cNvPr id="17412" name="TextBox 17411"/>
+          <p:cNvPr id="17413" name="TextBox 17412"/>
           <p:cNvSpPr txBox="1"/>
           <p:nvPr/>
         </p:nvSpPr>
         <p:spPr>
           <a:xfrm>
-            <a:off x="457200" y="1481328"/>
-            <a:ext cx="3291840" cy="1097280"/>
+            <a:off x="530352" y="1536192"/>
+            <a:ext cx="3108960" cy="1097280"/>
           </a:xfrm>
           <a:prstGeom prst="rect">
             <a:avLst/>
@@ -16175,14 +17047,14 @@
       </p:sp>
       <p:cxnSp>
         <p:nvCxnSpPr>
-          <p:cNvPr id="17413" name="Connector 17412"/>
+          <p:cNvPr id="17414" name="Connector 17413"/>
           <p:cNvCxnSpPr/>
           <p:nvPr/>
         </p:nvCxnSpPr>
         <p:spPr>
           <a:xfrm>
-            <a:off x="4023360" y="1426464"/>
-            <a:ext cx="3291840" cy="0"/>
+            <a:off x="3858768" y="1481328"/>
+            <a:ext cx="3108959" cy="0"/>
           </a:xfrm>
           <a:prstGeom prst="line">
             <a:avLst/>
@@ -16210,14 +17082,14 @@
       </p:cxnSp>
       <p:sp>
         <p:nvSpPr>
-          <p:cNvPr id="17414" name="TextBox 17413"/>
+          <p:cNvPr id="17415" name="TextBox 17414"/>
           <p:cNvSpPr txBox="1"/>
           <p:nvPr/>
         </p:nvSpPr>
         <p:spPr>
           <a:xfrm>
-            <a:off x="4023360" y="1481328"/>
-            <a:ext cx="3291840" cy="1097280"/>
+            <a:off x="3858768" y="1536192"/>
+            <a:ext cx="3108960" cy="1097280"/>
           </a:xfrm>
           <a:prstGeom prst="rect">
             <a:avLst/>
@@ -16290,14 +17162,14 @@
       </p:sp>
       <p:cxnSp>
         <p:nvCxnSpPr>
-          <p:cNvPr id="17415" name="Connector 17414"/>
+          <p:cNvPr id="17416" name="Connector 17415"/>
           <p:cNvCxnSpPr/>
           <p:nvPr/>
         </p:nvCxnSpPr>
         <p:spPr>
           <a:xfrm>
-            <a:off x="457200" y="2761488"/>
-            <a:ext cx="3291839" cy="0"/>
+            <a:off x="530352" y="2798064"/>
+            <a:ext cx="3108960" cy="0"/>
           </a:xfrm>
           <a:prstGeom prst="line">
             <a:avLst/>
@@ -16325,14 +17197,14 @@
       </p:cxnSp>
       <p:sp>
         <p:nvSpPr>
-          <p:cNvPr id="17416" name="TextBox 17415"/>
+          <p:cNvPr id="17417" name="TextBox 17416"/>
           <p:cNvSpPr txBox="1"/>
           <p:nvPr/>
         </p:nvSpPr>
         <p:spPr>
           <a:xfrm>
-            <a:off x="457200" y="2816352"/>
-            <a:ext cx="3291840" cy="1097280"/>
+            <a:off x="530352" y="2852928"/>
+            <a:ext cx="3108960" cy="1097280"/>
           </a:xfrm>
           <a:prstGeom prst="rect">
             <a:avLst/>
@@ -16405,14 +17277,14 @@
       </p:sp>
       <p:cxnSp>
         <p:nvCxnSpPr>
-          <p:cNvPr id="17417" name="Connector 17416"/>
+          <p:cNvPr id="17418" name="Connector 17417"/>
           <p:cNvCxnSpPr/>
           <p:nvPr/>
         </p:nvCxnSpPr>
         <p:spPr>
           <a:xfrm>
-            <a:off x="4023360" y="2761488"/>
-            <a:ext cx="3291840" cy="0"/>
+            <a:off x="3858768" y="2798064"/>
+            <a:ext cx="3108959" cy="0"/>
           </a:xfrm>
           <a:prstGeom prst="line">
             <a:avLst/>
@@ -16440,14 +17312,14 @@
       </p:cxnSp>
       <p:sp>
         <p:nvSpPr>
-          <p:cNvPr id="17418" name="TextBox 17417"/>
+          <p:cNvPr id="17419" name="TextBox 17418"/>
           <p:cNvSpPr txBox="1"/>
           <p:nvPr/>
         </p:nvSpPr>
         <p:spPr>
           <a:xfrm>
-            <a:off x="4023360" y="2816352"/>
-            <a:ext cx="3291840" cy="1097280"/>
+            <a:off x="3858768" y="2852928"/>
+            <a:ext cx="3108960" cy="1097280"/>
           </a:xfrm>
           <a:prstGeom prst="rect">
             <a:avLst/>
@@ -16520,14 +17392,14 @@
       </p:sp>
       <p:cxnSp>
         <p:nvCxnSpPr>
-          <p:cNvPr id="17419" name="Connector 17418"/>
+          <p:cNvPr id="17420" name="Connector 17419"/>
           <p:cNvCxnSpPr/>
           <p:nvPr/>
         </p:nvCxnSpPr>
         <p:spPr>
           <a:xfrm>
-            <a:off x="457200" y="4096512"/>
-            <a:ext cx="3291839" cy="0"/>
+            <a:off x="530352" y="4114800"/>
+            <a:ext cx="3108960" cy="0"/>
           </a:xfrm>
           <a:prstGeom prst="line">
             <a:avLst/>
@@ -16555,14 +17427,14 @@
       </p:cxnSp>
       <p:sp>
         <p:nvSpPr>
-          <p:cNvPr id="17420" name="TextBox 17419"/>
+          <p:cNvPr id="17421" name="TextBox 17420"/>
           <p:cNvSpPr txBox="1"/>
           <p:nvPr/>
         </p:nvSpPr>
         <p:spPr>
           <a:xfrm>
-            <a:off x="457200" y="4151376"/>
-            <a:ext cx="3291840" cy="1097280"/>
+            <a:off x="530352" y="4169663"/>
+            <a:ext cx="3108960" cy="1097280"/>
           </a:xfrm>
           <a:prstGeom prst="rect">
             <a:avLst/>
@@ -16635,14 +17507,14 @@
       </p:sp>
       <p:cxnSp>
         <p:nvCxnSpPr>
-          <p:cNvPr id="17421" name="Connector 17420"/>
+          <p:cNvPr id="17422" name="Connector 17421"/>
           <p:cNvCxnSpPr/>
           <p:nvPr/>
         </p:nvCxnSpPr>
         <p:spPr>
           <a:xfrm>
-            <a:off x="4023360" y="4096512"/>
-            <a:ext cx="3291840" cy="0"/>
+            <a:off x="3858768" y="4114800"/>
+            <a:ext cx="3108959" cy="0"/>
           </a:xfrm>
           <a:prstGeom prst="line">
             <a:avLst/>
@@ -16670,14 +17542,14 @@
       </p:cxnSp>
       <p:sp>
         <p:nvSpPr>
-          <p:cNvPr id="17422" name="TextBox 17421"/>
+          <p:cNvPr id="17423" name="TextBox 17422"/>
           <p:cNvSpPr txBox="1"/>
           <p:nvPr/>
         </p:nvSpPr>
         <p:spPr>
           <a:xfrm>
-            <a:off x="4023360" y="4151376"/>
-            <a:ext cx="3291840" cy="1097280"/>
+            <a:off x="3858768" y="4169663"/>
+            <a:ext cx="3108960" cy="1097280"/>
           </a:xfrm>
           <a:prstGeom prst="rect">
             <a:avLst/>
@@ -16750,25 +17622,27 @@
       </p:sp>
       <p:sp>
         <p:nvSpPr>
-          <p:cNvPr id="17423" name="Rounded Rectangle 17422"/>
+          <p:cNvPr id="17424" name="Rounded Rectangle 17423"/>
           <p:cNvSpPr/>
           <p:nvPr/>
         </p:nvSpPr>
         <p:spPr>
           <a:xfrm>
-            <a:off x="7379208" y="1042415"/>
-            <a:ext cx="4535424" cy="4425696"/>
+            <a:off x="7379208" y="1024128"/>
+            <a:ext cx="4535424" cy="4480560"/>
           </a:xfrm>
           <a:prstGeom prst="roundRect">
             <a:avLst>
-              <a:gd name="adj" fmla="val 12000"/>
+              <a:gd name="adj" fmla="val 2040"/>
             </a:avLst>
           </a:prstGeom>
           <a:solidFill>
             <a:srgbClr val="F7F8FA"/>
           </a:solidFill>
-          <a:ln>
-            <a:noFill/>
+          <a:ln w="15875">
+            <a:solidFill>
+              <a:srgbClr val="2563EB"/>
+            </a:solidFill>
           </a:ln>
           <a:effectLst/>
         </p:spPr>
@@ -16794,7 +17668,7 @@
       </p:sp>
       <p:sp>
         <p:nvSpPr>
-          <p:cNvPr id="17424" name="TextBox 17423"/>
+          <p:cNvPr id="17425" name="TextBox 17424"/>
           <p:cNvSpPr txBox="1"/>
           <p:nvPr/>
         </p:nvSpPr>
@@ -16836,7 +17710,7 @@
       </p:sp>
       <p:sp>
         <p:nvSpPr>
-          <p:cNvPr id="17425" name="TextBox 17424"/>
+          <p:cNvPr id="17426" name="TextBox 17425"/>
           <p:cNvSpPr txBox="1"/>
           <p:nvPr/>
         </p:nvSpPr>
@@ -16878,7 +17752,7 @@
       </p:sp>
       <p:sp>
         <p:nvSpPr>
-          <p:cNvPr id="17426" name="TextBox 17425"/>
+          <p:cNvPr id="17427" name="TextBox 17426"/>
           <p:cNvSpPr txBox="1"/>
           <p:nvPr/>
         </p:nvSpPr>
@@ -16939,7 +17813,7 @@
       </p:sp>
       <p:sp>
         <p:nvSpPr>
-          <p:cNvPr id="17427" name="Rounded Rectangle 17426"/>
+          <p:cNvPr id="17428" name="Rounded Rectangle 17427"/>
           <p:cNvSpPr/>
           <p:nvPr/>
         </p:nvSpPr>
@@ -16983,7 +17857,7 @@
       </p:sp>
       <p:sp>
         <p:nvSpPr>
-          <p:cNvPr id="17428" name="TextBox 17427"/>
+          <p:cNvPr id="17429" name="TextBox 17428"/>
           <p:cNvSpPr txBox="1"/>
           <p:nvPr/>
         </p:nvSpPr>
@@ -17044,7 +17918,7 @@
       </p:sp>
       <p:sp>
         <p:nvSpPr>
-          <p:cNvPr id="17429" name="TextBox 17428"/>
+          <p:cNvPr id="17430" name="TextBox 17429"/>
           <p:cNvSpPr txBox="1"/>
           <p:nvPr/>
         </p:nvSpPr>
@@ -17095,7 +17969,7 @@
       </p:sp>
       <p:sp>
         <p:nvSpPr>
-          <p:cNvPr id="17430" name="Rounded Rectangle 17429"/>
+          <p:cNvPr id="17431" name="Rounded Rectangle 17430"/>
           <p:cNvSpPr/>
           <p:nvPr/>
         </p:nvSpPr>
@@ -17152,7 +18026,7 @@
       </p:sp>
       <p:cxnSp>
         <p:nvCxnSpPr>
-          <p:cNvPr id="17431" name="Connector 17430"/>
+          <p:cNvPr id="17432" name="Connector 17431"/>
           <p:cNvCxnSpPr/>
           <p:nvPr/>
         </p:nvCxnSpPr>
@@ -17188,7 +18062,7 @@
       </p:cxnSp>
       <p:sp>
         <p:nvSpPr>
-          <p:cNvPr id="17432" name="Rounded Rectangle 17431"/>
+          <p:cNvPr id="17433" name="Rounded Rectangle 17432"/>
           <p:cNvSpPr/>
           <p:nvPr/>
         </p:nvSpPr>
@@ -17245,7 +18119,7 @@
       </p:sp>
       <p:cxnSp>
         <p:nvCxnSpPr>
-          <p:cNvPr id="17433" name="Connector 17432"/>
+          <p:cNvPr id="17434" name="Connector 17433"/>
           <p:cNvCxnSpPr/>
           <p:nvPr/>
         </p:nvCxnSpPr>
@@ -17281,7 +18155,7 @@
       </p:cxnSp>
       <p:sp>
         <p:nvSpPr>
-          <p:cNvPr id="17434" name="Rounded Rectangle 17433"/>
+          <p:cNvPr id="17435" name="Rounded Rectangle 17434"/>
           <p:cNvSpPr/>
           <p:nvPr/>
         </p:nvSpPr>
@@ -17338,7 +18212,7 @@
       </p:sp>
       <p:cxnSp>
         <p:nvCxnSpPr>
-          <p:cNvPr id="17435" name="Connector 17434"/>
+          <p:cNvPr id="17436" name="Connector 17435"/>
           <p:cNvCxnSpPr/>
           <p:nvPr/>
         </p:nvCxnSpPr>
@@ -17374,7 +18248,7 @@
       </p:cxnSp>
       <p:sp>
         <p:nvSpPr>
-          <p:cNvPr id="17436" name="Rounded Rectangle 17435"/>
+          <p:cNvPr id="17437" name="Rounded Rectangle 17436"/>
           <p:cNvSpPr/>
           <p:nvPr/>
         </p:nvSpPr>
@@ -17431,7 +18305,7 @@
       </p:sp>
       <p:cxnSp>
         <p:nvCxnSpPr>
-          <p:cNvPr id="17437" name="Connector 17436"/>
+          <p:cNvPr id="17438" name="Connector 17437"/>
           <p:cNvCxnSpPr/>
           <p:nvPr/>
         </p:nvCxnSpPr>
@@ -17467,7 +18341,7 @@
       </p:cxnSp>
       <p:sp>
         <p:nvSpPr>
-          <p:cNvPr id="17438" name="Rounded Rectangle 17437"/>
+          <p:cNvPr id="17439" name="Rounded Rectangle 17438"/>
           <p:cNvSpPr/>
           <p:nvPr/>
         </p:nvSpPr>
@@ -17524,7 +18398,7 @@
       </p:sp>
       <p:cxnSp>
         <p:nvCxnSpPr>
-          <p:cNvPr id="17439" name="Connector 17438"/>
+          <p:cNvPr id="17440" name="Connector 17439"/>
           <p:cNvCxnSpPr/>
           <p:nvPr/>
         </p:nvCxnSpPr>
@@ -17560,7 +18434,7 @@
       </p:cxnSp>
       <p:sp>
         <p:nvSpPr>
-          <p:cNvPr id="17440" name="Rounded Rectangle 17439"/>
+          <p:cNvPr id="17441" name="Rounded Rectangle 17440"/>
           <p:cNvSpPr/>
           <p:nvPr/>
         </p:nvSpPr>
@@ -17617,7 +18491,7 @@
       </p:sp>
       <p:sp>
         <p:nvSpPr>
-          <p:cNvPr id="17441" name="TextBox 17440"/>
+          <p:cNvPr id="17442" name="TextBox 17441"/>
           <p:cNvSpPr txBox="1"/>
           <p:nvPr/>
         </p:nvSpPr>
@@ -17668,7 +18542,7 @@
       </p:sp>
       <p:sp>
         <p:nvSpPr>
-          <p:cNvPr id="17442" name="TextBox 17441"/>
+          <p:cNvPr id="17443" name="TextBox 17442"/>
           <p:cNvSpPr txBox="1"/>
           <p:nvPr/>
         </p:nvSpPr>
@@ -17710,13 +18584,13 @@
       </p:sp>
       <p:cxnSp>
         <p:nvCxnSpPr>
-          <p:cNvPr id="17443" name="Connector 17442"/>
+          <p:cNvPr id="17444" name="Connector 17443"/>
           <p:cNvCxnSpPr/>
           <p:nvPr/>
         </p:nvCxnSpPr>
         <p:spPr>
           <a:xfrm>
-            <a:off x="457200" y="5596128"/>
+            <a:off x="457200" y="5632704"/>
             <a:ext cx="11292840" cy="0"/>
           </a:xfrm>
           <a:prstGeom prst="line">
@@ -17745,13 +18619,13 @@
       </p:cxnSp>
       <p:sp>
         <p:nvSpPr>
-          <p:cNvPr id="17444" name="TextBox 17443"/>
+          <p:cNvPr id="17445" name="TextBox 17444"/>
           <p:cNvSpPr txBox="1"/>
           <p:nvPr/>
         </p:nvSpPr>
         <p:spPr>
           <a:xfrm>
-            <a:off x="457200" y="5650992"/>
+            <a:off x="457200" y="5687568"/>
             <a:ext cx="2743200" cy="329184"/>
           </a:xfrm>
           <a:prstGeom prst="rect">
@@ -17787,7 +18661,7 @@
       </p:sp>
       <p:sp>
         <p:nvSpPr>
-          <p:cNvPr id="17445" name="TextBox 17444"/>
+          <p:cNvPr id="17446" name="TextBox 17445"/>
           <p:cNvSpPr txBox="1"/>
           <p:nvPr/>
         </p:nvSpPr>

--- a/docs/submission/RASTA_AI_SIH26002_TEAM17_FINAL.pptx
+++ b/docs/submission/RASTA_AI_SIH26002_TEAM17_FINAL.pptx
@@ -6644,7 +6644,7 @@
                 </a:solidFill>
                 <a:latin typeface="Calibri"/>
               </a:rPr>
-              <a:t>NER corridors: mountain terrain · monsoon · landslides · floods · weak signal · stale evidence. </a:t>
+              <a:t>Monsoon · landslides · floods · official warnings · single-lane hill roads · no signal.  </a:t>
             </a:r>
             <a:r>
               <a:rPr sz="1150" b="1">
@@ -8217,7 +8217,7 @@
                 </a:solidFill>
                 <a:latin typeface="Calibri"/>
               </a:rPr>
-              <a:t>missing or stale evidence is marked UNKNOWN, never counted as safe, and the route goes to an authorised reviewer.</a:t>
+              <a:t>missing or stale evidence is marked UNKNOWN — never safe — and goes to an authorised reviewer.</a:t>
             </a:r>
           </a:p>
         </p:txBody>
@@ -10777,7 +10777,7 @@
                 </a:solidFill>
                 <a:latin typeface="Calibri"/>
               </a:rPr>
-              <a:t>Decision loop: conditions are re-scored every 60 s along the road ahead; a material change goes back through the policy, and a reroute is proposed to the manager — never applied silently.</a:t>
+              <a:t>Re-scored every 60 s on the road ahead. A reroute is proposed to the manager, never applied silently.</a:t>
             </a:r>
           </a:p>
         </p:txBody>
@@ -10916,7 +10916,7 @@
                 </a:solidFill>
                 <a:latin typeface="Calibri"/>
               </a:rPr>
-              <a:t>Manager console — React + TypeScript, manager accounts only · Driver app — React Native / Expo, Android; one login, server-decided role, offline trip package</a:t>
+              <a:t>Manager console (React + TS) · Driver app (React Native / Expo, Android) · one login, server-decided role, offline package</a:t>
             </a:r>
           </a:p>
           <a:p>
@@ -13599,7 +13599,7 @@
                 </a:solidFill>
                 <a:latin typeface="Calibri"/>
               </a:rPr>
-              <a:t>The whole lifecycle above was run end to end on a physical Android phone against the hosted backend, on the real Guwahati → Shillong road.</a:t>
+              <a:t>Run end to end on a physical Android phone, hosted backend, real road.</a:t>
             </a:r>
           </a:p>
         </p:txBody>
@@ -14002,7 +14002,7 @@
                 </a:solidFill>
                 <a:latin typeface="Calibri"/>
               </a:rPr>
-              <a:t>Every reroute on that run was approved by a manager before the phone followed it.</a:t>
+              <a:t>Every reroute approved by a manager before the phone followed it.</a:t>
             </a:r>
           </a:p>
         </p:txBody>
@@ -14088,7 +14088,7 @@
                 </a:solidFill>
                 <a:latin typeface="Calibri"/>
               </a:rPr>
-              <a:t>Render cold start → warm /health before the demo  ·  provider rate limits → cached evidence + explicit UNKNOWN  ·  background push needs Firebase config → in-app alerts already work  ·  experimental ML → outside routing until the gate passes</a:t>
+              <a:t>Cold start → warm /health first  ·  rate limits → cached evidence + explicit UNKNOWN  ·  push needs Firebase → in-app alerts work  ·  experimental ML → outside routing</a:t>
             </a:r>
           </a:p>
         </p:txBody>
@@ -14768,7 +14768,7 @@
                 </a:solidFill>
                 <a:latin typeface="Calibri"/>
               </a:rPr>
-              <a:t>Route usability and uncertainty visible before dispatch; auditable decisions.</a:t>
+              <a:t>Usability and uncertainty visible before dispatch. Auditable.</a:t>
             </a:r>
           </a:p>
         </p:txBody>
@@ -14864,7 +14864,7 @@
                 </a:solidFill>
                 <a:latin typeface="Calibri"/>
               </a:rPr>
-              <a:t>Safer navigation, danger context, emergency support, 23 languages.</a:t>
+              <a:t>Danger context, emergency support, 23 languages.</a:t>
             </a:r>
           </a:p>
         </p:txBody>
@@ -14960,7 +14960,7 @@
                 </a:solidFill>
                 <a:latin typeface="Calibri"/>
               </a:rPr>
-              <a:t>More resilient access to food, medicine, fuel and relief supplies.</a:t>
+              <a:t>Resilient access to food, medicine, fuel, relief.</a:t>
             </a:r>
           </a:p>
         </p:txBody>
@@ -15037,7 +15037,7 @@
                 </a:solidFill>
                 <a:latin typeface="Calibri"/>
               </a:rPr>
-              <a:t>GOVERNMENT / OPERATIONS</a:t>
+              <a:t>GOVERNMENT / OPS</a:t>
             </a:r>
           </a:p>
           <a:p>
@@ -15056,7 +15056,7 @@
                 </a:solidFill>
                 <a:latin typeface="Calibri"/>
               </a:rPr>
-              <a:t>Auditable route evidence and disruption visibility per corridor.</a:t>
+              <a:t>Auditable evidence and disruption per corridor.</a:t>
             </a:r>
           </a:p>
         </p:txBody>
@@ -16461,7 +16461,7 @@
                 </a:solidFill>
                 <a:latin typeface="Calibri"/>
               </a:rPr>
-              <a:t>Real screens, APK 1.0.18. One login, server-decided role: a manager gets a mobile fleet view, a driver gets navigation. Each language shows its status — Verified, Draft or English fallback — so nobody is misled.</a:t>
+              <a:t>APK 1.0.18. One login, server-decided role. Every language shows its status — Verified, Draft or English fallback.</a:t>
             </a:r>
           </a:p>
         </p:txBody>
@@ -17040,7 +17040,7 @@
                 </a:solidFill>
                 <a:latin typeface="Calibri"/>
               </a:rPr>
-              <a:t>real road geometry, alternatives and turn steps; place search on the corridor</a:t>
+              <a:t>Road geometry, alternatives, turn steps.</a:t>
             </a:r>
           </a:p>
         </p:txBody>
@@ -17155,7 +17155,7 @@
                 </a:solidFill>
                 <a:latin typeface="Calibri"/>
               </a:rPr>
-              <a:t>forecast sampled along the road; climb, gradient and steep segments (GLO-90)</a:t>
+              <a:t>Forecast along the road; climb, gradient, steep segments.</a:t>
             </a:r>
           </a:p>
         </p:txBody>
@@ -17270,7 +17270,7 @@
                 </a:solidFill>
                 <a:latin typeface="Calibri"/>
               </a:rPr>
-              <a:t>official warnings polled with freshness; river discharge against its 30-day mean</a:t>
+              <a:t>Official warnings with freshness; discharge vs 30-day mean.</a:t>
             </a:r>
           </a:p>
         </p:txBody>
@@ -17385,7 +17385,7 @@
                 </a:solidFill>
                 <a:latin typeface="Calibri"/>
               </a:rPr>
-              <a:t>historical exposure; inventory 2007–2017, ≤5 km location-accuracy filter</a:t>
+              <a:t>Historical exposure, 2007–2017, ≤5 km accuracy.</a:t>
             </a:r>
           </a:p>
         </p:txBody>
@@ -17500,7 +17500,7 @@
                 </a:solidFill>
                 <a:latin typeface="Calibri"/>
               </a:rPr>
-              <a:t>explains the decision in the driver's language — never safety authority</a:t>
+              <a:t>Explains in the driver's language. Never safety authority.</a:t>
             </a:r>
           </a:p>
         </p:txBody>
@@ -17615,7 +17615,7 @@
                 </a:solidFill>
                 <a:latin typeface="Calibri"/>
               </a:rPr>
-              <a:t>AI-based smart logistics and accessibility intelligence for the NER</a:t>
+              <a:t>Smart logistics and accessibility intelligence for the NER.</a:t>
             </a:r>
           </a:p>
         </p:txBody>
@@ -17806,7 +17806,7 @@
                 </a:solidFill>
                 <a:latin typeface="Calibri"/>
               </a:rPr>
-              <a:t>on the NER geographic holdout — 154 catalogued events, no NER row used in training</a:t>
+              <a:t>NER geographic holdout · 154 events · no NER row in training</a:t>
             </a:r>
           </a:p>
         </p:txBody>
@@ -18535,7 +18535,7 @@
                 </a:solidFill>
                 <a:latin typeface="Calibri"/>
               </a:rPr>
-              <a:t>Strong recall was not enough. Held-out testing exposed the false-positive rate, so the gate keeps the model out of routing.</a:t>
+              <a:t>Recall was not enough. Held-out testing exposed the false-positive rate. The gate keeps it out of routing.</a:t>
             </a:r>
           </a:p>
         </p:txBody>
@@ -18577,7 +18577,7 @@
                 </a:solidFill>
                 <a:latin typeface="Calibri"/>
               </a:rPr>
-              <a:t>Precision 0.32 · F1 0.48 · PR-AUC 0.55 · ROC-AUC 0.83 · Brier 0.12 · calibrated logistic regression on NASA GLC + ERA5-Land rain + DEM slope · docs/HAZARD_ERROR_ANALYSIS.md</a:t>
+              <a:t>Precision 0.32 · F1 0.48 · PR-AUC 0.55 · ROC-AUC 0.83 · Brier 0.12  —  calibrated logistic regression, NASA GLC + ERA5-Land rain + DEM slope</a:t>
             </a:r>
           </a:p>
         </p:txBody>

--- a/docs/submission/RASTA_AI_SIH26002_TEAM17_FINAL.pptx
+++ b/docs/submission/RASTA_AI_SIH26002_TEAM17_FINAL.pptx
@@ -5,7 +5,7 @@
     <p:sldMasterId id="2147483648" r:id="rId1"/>
   </p:sldMasterIdLst>
   <p:notesMasterIdLst>
-    <p:notesMasterId r:id="rId9"/>
+    <p:notesMasterId r:id="rId8"/>
   </p:notesMasterIdLst>
   <p:sldIdLst>
     <p:sldId id="291" r:id="rId2"/>
@@ -261,7 +261,7 @@
             <a:fld id="{C4D5ADD5-2BBC-4A94-8F86-D9013941F742}" type="datetimeFigureOut">
               <a:rPr lang="en-US"/>
               <a:pPr/>
-              <a:t>6/2/2026</a:t>
+              <a:t>9/14/2026</a:t>
             </a:fld>
             <a:endParaRPr lang="en-US"/>
           </a:p>
@@ -1564,7 +1564,7 @@
           <a:p>
             <a:fld id="{E60792E3-D524-454C-8AFD-A91972900BCB}" type="datetime1">
               <a:rPr lang="en-US" smtClean="0"/>
-              <a:t>6/2/2026</a:t>
+              <a:t>9/14/2026</a:t>
             </a:fld>
             <a:endParaRPr lang="en-US"/>
           </a:p>
@@ -1746,7 +1746,7 @@
           <a:p>
             <a:fld id="{053C3A68-6922-42D3-8905-ECC2D82A3469}" type="datetime1">
               <a:rPr lang="en-US" smtClean="0"/>
-              <a:t>6/2/2026</a:t>
+              <a:t>9/14/2026</a:t>
             </a:fld>
             <a:endParaRPr lang="en-US"/>
           </a:p>
@@ -1938,7 +1938,7 @@
           <a:p>
             <a:fld id="{CB69E9F4-7604-4950-A8B2-8ACDEDB1506E}" type="datetime1">
               <a:rPr lang="en-US" smtClean="0"/>
-              <a:t>6/2/2026</a:t>
+              <a:t>9/14/2026</a:t>
             </a:fld>
             <a:endParaRPr lang="en-US"/>
           </a:p>
@@ -2120,7 +2120,7 @@
           <a:p>
             <a:fld id="{708B7524-32A2-4C20-A58C-BC3BAA1042FC}" type="datetime1">
               <a:rPr lang="en-US" smtClean="0"/>
-              <a:t>6/2/2026</a:t>
+              <a:t>9/14/2026</a:t>
             </a:fld>
             <a:endParaRPr lang="en-US"/>
           </a:p>
@@ -2379,7 +2379,7 @@
           <a:p>
             <a:fld id="{1E994447-D6B2-43BB-A877-57F1A267B999}" type="datetime1">
               <a:rPr lang="en-US" smtClean="0"/>
-              <a:t>6/2/2026</a:t>
+              <a:t>9/14/2026</a:t>
             </a:fld>
             <a:endParaRPr lang="en-US"/>
           </a:p>
@@ -2678,7 +2678,7 @@
           <a:p>
             <a:fld id="{68920E16-BD35-483C-AA6B-346FC7E46DEA}" type="datetime1">
               <a:rPr lang="en-US" smtClean="0"/>
-              <a:t>6/2/2026</a:t>
+              <a:t>9/14/2026</a:t>
             </a:fld>
             <a:endParaRPr lang="en-US"/>
           </a:p>
@@ -3111,7 +3111,7 @@
           <a:p>
             <a:fld id="{2FEAC6F8-5103-4FC0-A69E-5C6AE6469DA8}" type="datetime1">
               <a:rPr lang="en-US" smtClean="0"/>
-              <a:t>6/2/2026</a:t>
+              <a:t>9/14/2026</a:t>
             </a:fld>
             <a:endParaRPr lang="en-US"/>
           </a:p>
@@ -3242,7 +3242,7 @@
           <a:p>
             <a:fld id="{C60C6921-0627-4C8F-83D5-0CF936D2FFDD}" type="datetime1">
               <a:rPr lang="en-US" smtClean="0"/>
-              <a:t>6/2/2026</a:t>
+              <a:t>9/14/2026</a:t>
             </a:fld>
             <a:endParaRPr lang="en-US"/>
           </a:p>
@@ -3351,7 +3351,7 @@
           <a:p>
             <a:fld id="{2FF08AD7-8103-40F8-983C-E2BA6BB9CBE0}" type="datetime1">
               <a:rPr lang="en-US" smtClean="0"/>
-              <a:t>6/2/2026</a:t>
+              <a:t>9/14/2026</a:t>
             </a:fld>
             <a:endParaRPr lang="en-US"/>
           </a:p>
@@ -3640,7 +3640,7 @@
           <a:p>
             <a:fld id="{DF8C06B4-9380-4A4D-AF49-A3596E17DAF5}" type="datetime1">
               <a:rPr lang="en-US" smtClean="0"/>
-              <a:t>6/2/2026</a:t>
+              <a:t>9/14/2026</a:t>
             </a:fld>
             <a:endParaRPr lang="en-US"/>
           </a:p>
@@ -3909,7 +3909,7 @@
           <a:p>
             <a:fld id="{EF7FDEF1-C582-4E22-9E77-D68326471F28}" type="datetime1">
               <a:rPr lang="en-US" smtClean="0"/>
-              <a:t>6/2/2026</a:t>
+              <a:t>9/14/2026</a:t>
             </a:fld>
             <a:endParaRPr lang="en-US"/>
           </a:p>
@@ -4152,7 +4152,7 @@
           <a:p>
             <a:fld id="{780A9602-A9A9-453F-AEF1-37B5837E02CD}" type="datetime1">
               <a:rPr lang="en-US" smtClean="0"/>
-              <a:t>6/2/2026</a:t>
+              <a:t>9/14/2026</a:t>
             </a:fld>
             <a:endParaRPr lang="en-US"/>
           </a:p>
@@ -4703,7 +4703,7 @@
                 <a16:creationId xmlns:a16="http://schemas.microsoft.com/office/drawing/2014/main" id="{3E443FD7-A66B-4AA0-872D-B088B9BC5F17}"/>
               </a:ext>
               <a:ext uri="{C183D7F6-B498-43B3-948B-1728B52AA6E4}">
-                <adec:decorative xmlns:adec="http://schemas.microsoft.com/office/drawing/2017/decorative" xmlns="" val="1"/>
+                <adec:decorative xmlns:adec="http://schemas.microsoft.com/office/drawing/2017/decorative" val="1"/>
               </a:ext>
             </a:extLst>
           </p:cNvPr>
@@ -4782,16 +4782,7 @@
                 </a:solidFill>
                 <a:latin typeface="Garamond" panose="02020404030301010803" pitchFamily="18" charset="0"/>
               </a:rPr>
-              <a:t>SMART INDIA HACKATHON </a:t>
-            </a:r>
-            <a:r>
-              <a:rPr lang="en-US" sz="4000" b="1" dirty="0" smtClean="0">
-                <a:solidFill>
-                  <a:schemeClr val="tx2"/>
-                </a:solidFill>
-                <a:latin typeface="Garamond" panose="02020404030301010803" pitchFamily="18" charset="0"/>
-              </a:rPr>
-              <a:t>2026</a:t>
+              <a:t>SMART INDIA HACKATHON 2026</a:t>
             </a:r>
             <a:endParaRPr lang="en-IN" sz="4000" b="1" dirty="0">
               <a:solidFill>
@@ -4811,7 +4802,7 @@
           <p:nvPr/>
         </p:nvPicPr>
         <p:blipFill>
-          <a:blip r:embed="rId3">
+          <a:blip r:embed="rId2">
             <a:extLst>
               <a:ext uri="{28A0092B-C50C-407E-A947-70E740481C1C}">
                 <a14:useLocalDpi xmlns:a14="http://schemas.microsoft.com/office/drawing/2010/main" val="0"/>
@@ -4841,7 +4832,7 @@
           <p:nvPr/>
         </p:nvPicPr>
         <p:blipFill>
-          <a:blip r:embed="rId4"/>
+          <a:blip r:embed="rId3"/>
           <a:stretch>
             <a:fillRect/>
           </a:stretch>
@@ -4873,7 +4864,7 @@
           <a:noFill/>
         </p:spPr>
         <p:txBody>
-          <a:bodyPr wrap="square" anchor="ctr" lIns="18288" rIns="18288" tIns="18288" bIns="18288">
+          <a:bodyPr wrap="square" lIns="18288" tIns="18288" rIns="18288" bIns="18288" anchor="ctr">
             <a:spAutoFit/>
           </a:bodyPr>
           <a:lstStyle/>
@@ -4915,7 +4906,7 @@
           <a:noFill/>
         </p:spPr>
         <p:txBody>
-          <a:bodyPr wrap="square" anchor="t" lIns="18288" rIns="18288" tIns="18288" bIns="18288">
+          <a:bodyPr wrap="square" lIns="18288" tIns="18288" rIns="18288" bIns="18288" anchor="t">
             <a:spAutoFit/>
           </a:bodyPr>
           <a:lstStyle/>
@@ -4979,7 +4970,7 @@
           </a:fontRef>
         </p:style>
         <p:txBody>
-          <a:bodyPr rtlCol="0" anchor="ctr" lIns="54864" rIns="54864" tIns="0" bIns="0" wrap="square"/>
+          <a:bodyPr wrap="square" lIns="54864" tIns="0" rIns="54864" bIns="0" rtlCol="0" anchor="ctr"/>
           <a:lstStyle/>
           <a:p>
             <a:pPr algn="ctr"/>
@@ -5012,7 +5003,7 @@
           <a:noFill/>
         </p:spPr>
         <p:txBody>
-          <a:bodyPr wrap="square" anchor="ctr" lIns="18288" rIns="18288" tIns="18288" bIns="18288">
+          <a:bodyPr wrap="square" lIns="18288" tIns="18288" rIns="18288" bIns="18288" anchor="ctr">
             <a:spAutoFit/>
           </a:bodyPr>
           <a:lstStyle/>
@@ -5073,7 +5064,7 @@
           <a:noFill/>
         </p:spPr>
         <p:txBody>
-          <a:bodyPr wrap="square" anchor="t" lIns="18288" rIns="18288" tIns="18288" bIns="18288">
+          <a:bodyPr wrap="square" lIns="18288" tIns="18288" rIns="18288" bIns="18288" anchor="t">
             <a:spAutoFit/>
           </a:bodyPr>
           <a:lstStyle/>
@@ -5115,7 +5106,7 @@
           <a:noFill/>
         </p:spPr>
         <p:txBody>
-          <a:bodyPr wrap="square" anchor="t" lIns="18288" rIns="18288" tIns="18288" bIns="18288">
+          <a:bodyPr wrap="square" lIns="18288" tIns="18288" rIns="18288" bIns="18288" anchor="t">
             <a:spAutoFit/>
           </a:bodyPr>
           <a:lstStyle/>
@@ -5192,7 +5183,7 @@
           <a:noFill/>
         </p:spPr>
         <p:txBody>
-          <a:bodyPr wrap="square" anchor="t" lIns="18288" rIns="18288" tIns="18288" bIns="18288">
+          <a:bodyPr wrap="square" lIns="18288" tIns="18288" rIns="18288" bIns="18288" anchor="t">
             <a:spAutoFit/>
           </a:bodyPr>
           <a:lstStyle/>
@@ -5234,7 +5225,7 @@
           <a:noFill/>
         </p:spPr>
         <p:txBody>
-          <a:bodyPr wrap="square" anchor="t" lIns="18288" rIns="18288" tIns="18288" bIns="18288">
+          <a:bodyPr wrap="square" lIns="18288" tIns="18288" rIns="18288" bIns="18288" anchor="t">
             <a:spAutoFit/>
           </a:bodyPr>
           <a:lstStyle/>
@@ -5311,7 +5302,7 @@
           <a:noFill/>
         </p:spPr>
         <p:txBody>
-          <a:bodyPr wrap="square" anchor="t" lIns="18288" rIns="18288" tIns="18288" bIns="18288">
+          <a:bodyPr wrap="square" lIns="18288" tIns="18288" rIns="18288" bIns="18288" anchor="t">
             <a:spAutoFit/>
           </a:bodyPr>
           <a:lstStyle/>
@@ -5353,7 +5344,7 @@
           <a:noFill/>
         </p:spPr>
         <p:txBody>
-          <a:bodyPr wrap="square" anchor="t" lIns="18288" rIns="18288" tIns="18288" bIns="18288">
+          <a:bodyPr wrap="square" lIns="18288" tIns="18288" rIns="18288" bIns="18288" anchor="t">
             <a:spAutoFit/>
           </a:bodyPr>
           <a:lstStyle/>
@@ -5430,7 +5421,7 @@
           <a:noFill/>
         </p:spPr>
         <p:txBody>
-          <a:bodyPr wrap="square" anchor="t" lIns="18288" rIns="18288" tIns="18288" bIns="18288">
+          <a:bodyPr wrap="square" lIns="18288" tIns="18288" rIns="18288" bIns="18288" anchor="t">
             <a:spAutoFit/>
           </a:bodyPr>
           <a:lstStyle/>
@@ -5472,7 +5463,7 @@
           <a:noFill/>
         </p:spPr>
         <p:txBody>
-          <a:bodyPr wrap="square" anchor="t" lIns="18288" rIns="18288" tIns="18288" bIns="18288">
+          <a:bodyPr wrap="square" lIns="18288" tIns="18288" rIns="18288" bIns="18288" anchor="t">
             <a:spAutoFit/>
           </a:bodyPr>
           <a:lstStyle/>
@@ -5549,7 +5540,7 @@
           <a:noFill/>
         </p:spPr>
         <p:txBody>
-          <a:bodyPr wrap="square" anchor="t" lIns="18288" rIns="18288" tIns="18288" bIns="18288">
+          <a:bodyPr wrap="square" lIns="18288" tIns="18288" rIns="18288" bIns="18288" anchor="t">
             <a:spAutoFit/>
           </a:bodyPr>
           <a:lstStyle/>
@@ -5591,7 +5582,7 @@
           <a:noFill/>
         </p:spPr>
         <p:txBody>
-          <a:bodyPr wrap="square" anchor="t" lIns="18288" rIns="18288" tIns="18288" bIns="18288">
+          <a:bodyPr wrap="square" lIns="18288" tIns="18288" rIns="18288" bIns="18288" anchor="t">
             <a:spAutoFit/>
           </a:bodyPr>
           <a:lstStyle/>
@@ -5668,7 +5659,7 @@
           <a:noFill/>
         </p:spPr>
         <p:txBody>
-          <a:bodyPr wrap="square" anchor="t" lIns="18288" rIns="18288" tIns="18288" bIns="18288">
+          <a:bodyPr wrap="square" lIns="18288" tIns="18288" rIns="18288" bIns="18288" anchor="t">
             <a:spAutoFit/>
           </a:bodyPr>
           <a:lstStyle/>
@@ -5710,7 +5701,7 @@
           <a:noFill/>
         </p:spPr>
         <p:txBody>
-          <a:bodyPr wrap="square" anchor="t" lIns="18288" rIns="18288" tIns="18288" bIns="18288">
+          <a:bodyPr wrap="square" lIns="18288" tIns="18288" rIns="18288" bIns="18288" anchor="t">
             <a:spAutoFit/>
           </a:bodyPr>
           <a:lstStyle/>
@@ -5787,7 +5778,7 @@
           <a:noFill/>
         </p:spPr>
         <p:txBody>
-          <a:bodyPr wrap="square" anchor="t" lIns="18288" rIns="18288" tIns="18288" bIns="18288">
+          <a:bodyPr wrap="square" lIns="18288" tIns="18288" rIns="18288" bIns="18288" anchor="t">
             <a:spAutoFit/>
           </a:bodyPr>
           <a:lstStyle/>
@@ -5855,7 +5846,9 @@
         <p:txBody>
           <a:bodyPr rtlCol="0" anchor="ctr"/>
           <a:lstStyle/>
-          <a:p/>
+          <a:p>
+            <a:endParaRPr/>
+          </a:p>
         </p:txBody>
       </p:sp>
       <p:pic>
@@ -5867,15 +5860,15 @@
           <p:nvPr/>
         </p:nvPicPr>
         <p:blipFill>
-          <a:blip r:embed="rId5"/>
+          <a:blip r:embed="rId4"/>
           <a:stretch>
             <a:fillRect/>
           </a:stretch>
         </p:blipFill>
         <p:spPr>
           <a:xfrm>
-            <a:off x="6720840" y="2514600"/>
-            <a:ext cx="2326005" cy="3383280"/>
+            <a:off x="6775703" y="2514600"/>
+            <a:ext cx="2326005" cy="3547872"/>
           </a:xfrm>
           <a:prstGeom prst="rect">
             <a:avLst/>
@@ -5925,7 +5918,9 @@
         <p:txBody>
           <a:bodyPr rtlCol="0" anchor="ctr"/>
           <a:lstStyle/>
-          <a:p/>
+          <a:p>
+            <a:endParaRPr/>
+          </a:p>
         </p:txBody>
       </p:sp>
       <p:pic>
@@ -5937,7 +5932,7 @@
           <p:nvPr/>
         </p:nvPicPr>
         <p:blipFill>
-          <a:blip r:embed="rId6"/>
+          <a:blip r:embed="rId5"/>
           <a:stretch>
             <a:fillRect/>
           </a:stretch>
@@ -5960,7 +5955,7 @@
         </p:nvSpPr>
         <p:spPr>
           <a:xfrm>
-            <a:off x="6720840" y="6108192"/>
+            <a:off x="6720840" y="6254496"/>
             <a:ext cx="4937760" cy="256032"/>
           </a:xfrm>
           <a:prstGeom prst="roundRect">
@@ -5991,7 +5986,7 @@
           </a:fontRef>
         </p:style>
         <p:txBody>
-          <a:bodyPr rtlCol="0" anchor="ctr" lIns="54864" rIns="54864" tIns="0" bIns="0" wrap="square"/>
+          <a:bodyPr wrap="square" lIns="54864" tIns="0" rIns="54864" bIns="0" rtlCol="0" anchor="ctr"/>
           <a:lstStyle/>
           <a:p>
             <a:pPr algn="ctr"/>
@@ -6209,7 +6204,7 @@
                 <a16:creationId xmlns:a16="http://schemas.microsoft.com/office/drawing/2014/main" id="{5DBCE864-823D-4A13-9607-5DA1F0ED5FB8}"/>
               </a:ext>
               <a:ext uri="{C183D7F6-B498-43B3-948B-1728B52AA6E4}">
-                <adec:decorative xmlns:adec="http://schemas.microsoft.com/office/drawing/2017/decorative" xmlns="" val="0"/>
+                <adec:decorative xmlns:adec="http://schemas.microsoft.com/office/drawing/2017/decorative" val="0"/>
               </a:ext>
             </a:extLst>
           </p:cNvPr>
@@ -6240,7 +6235,7 @@
           </a:fontRef>
         </p:style>
         <p:txBody>
-          <a:bodyPr rtlCol="0" anchor="ctr" wrap="square" lIns="36576" rIns="36576"/>
+          <a:bodyPr wrap="square" lIns="36576" rIns="36576" rtlCol="0" anchor="ctr"/>
           <a:lstStyle/>
           <a:p>
             <a:pPr algn="ctr"/>
@@ -6304,7 +6299,7 @@
           <a:noFill/>
         </p:spPr>
         <p:txBody>
-          <a:bodyPr wrap="square" anchor="t" lIns="18288" rIns="18288" tIns="18288" bIns="18288">
+          <a:bodyPr wrap="square" lIns="18288" tIns="18288" rIns="18288" bIns="18288" anchor="t">
             <a:spAutoFit/>
           </a:bodyPr>
           <a:lstStyle/>
@@ -6346,7 +6341,7 @@
           <a:noFill/>
         </p:spPr>
         <p:txBody>
-          <a:bodyPr wrap="square" anchor="t" lIns="18288" rIns="18288" tIns="18288" bIns="18288">
+          <a:bodyPr wrap="square" lIns="18288" tIns="18288" rIns="18288" bIns="18288" anchor="t">
             <a:spAutoFit/>
           </a:bodyPr>
           <a:lstStyle/>
@@ -6397,7 +6392,7 @@
           <a:noFill/>
         </p:spPr>
         <p:txBody>
-          <a:bodyPr wrap="square" anchor="t" lIns="18288" rIns="18288" tIns="18288" bIns="18288">
+          <a:bodyPr wrap="square" lIns="18288" tIns="18288" rIns="18288" bIns="18288" anchor="t">
             <a:spAutoFit/>
           </a:bodyPr>
           <a:lstStyle/>
@@ -6448,7 +6443,7 @@
           <a:noFill/>
         </p:spPr>
         <p:txBody>
-          <a:bodyPr wrap="square" anchor="t" lIns="18288" rIns="18288" tIns="18288" bIns="18288">
+          <a:bodyPr wrap="square" lIns="18288" tIns="18288" rIns="18288" bIns="18288" anchor="t">
             <a:spAutoFit/>
           </a:bodyPr>
           <a:lstStyle/>
@@ -6514,7 +6509,7 @@
           </a:fontRef>
         </p:style>
         <p:txBody>
-          <a:bodyPr rtlCol="0" anchor="ctr" lIns="54864" rIns="54864" tIns="0" bIns="0" wrap="square"/>
+          <a:bodyPr wrap="square" lIns="54864" tIns="0" rIns="54864" bIns="0" rtlCol="0" anchor="ctr"/>
           <a:lstStyle/>
           <a:p>
             <a:pPr algn="ctr"/>
@@ -6607,7 +6602,7 @@
           </a:fontRef>
         </p:style>
         <p:txBody>
-          <a:bodyPr rtlCol="0" anchor="ctr" lIns="54864" rIns="54864" tIns="0" bIns="0" wrap="square"/>
+          <a:bodyPr wrap="square" lIns="54864" tIns="0" rIns="54864" bIns="0" rtlCol="0" anchor="ctr"/>
           <a:lstStyle/>
           <a:p>
             <a:pPr algn="ctr"/>
@@ -6700,7 +6695,7 @@
           </a:fontRef>
         </p:style>
         <p:txBody>
-          <a:bodyPr rtlCol="0" anchor="ctr" lIns="54864" rIns="54864" tIns="0" bIns="0" wrap="square"/>
+          <a:bodyPr wrap="square" lIns="54864" tIns="0" rIns="54864" bIns="0" rtlCol="0" anchor="ctr"/>
           <a:lstStyle/>
           <a:p>
             <a:pPr algn="ctr"/>
@@ -6733,7 +6728,7 @@
           <a:noFill/>
         </p:spPr>
         <p:txBody>
-          <a:bodyPr wrap="square" anchor="t" lIns="18288" rIns="18288" tIns="18288" bIns="18288">
+          <a:bodyPr wrap="square" lIns="18288" tIns="18288" rIns="18288" bIns="18288" anchor="t">
             <a:spAutoFit/>
           </a:bodyPr>
           <a:lstStyle/>
@@ -6794,7 +6789,7 @@
           <a:noFill/>
         </p:spPr>
         <p:txBody>
-          <a:bodyPr wrap="square" anchor="t" lIns="18288" rIns="18288" tIns="18288" bIns="18288">
+          <a:bodyPr wrap="square" lIns="18288" tIns="18288" rIns="18288" bIns="18288" anchor="t">
             <a:spAutoFit/>
           </a:bodyPr>
           <a:lstStyle/>
@@ -6860,7 +6855,7 @@
           </a:fontRef>
         </p:style>
         <p:txBody>
-          <a:bodyPr rtlCol="0" anchor="ctr" lIns="54864" rIns="54864" tIns="0" bIns="0" wrap="square"/>
+          <a:bodyPr wrap="square" lIns="54864" tIns="0" rIns="54864" bIns="0" rtlCol="0" anchor="ctr"/>
           <a:lstStyle/>
           <a:p>
             <a:pPr algn="ctr"/>
@@ -6953,7 +6948,7 @@
           </a:fontRef>
         </p:style>
         <p:txBody>
-          <a:bodyPr rtlCol="0" anchor="ctr" lIns="54864" rIns="54864" tIns="0" bIns="0" wrap="square"/>
+          <a:bodyPr wrap="square" lIns="54864" tIns="0" rIns="54864" bIns="0" rtlCol="0" anchor="ctr"/>
           <a:lstStyle/>
           <a:p>
             <a:pPr algn="ctr"/>
@@ -7012,7 +7007,9 @@
         <p:txBody>
           <a:bodyPr rtlCol="0" anchor="ctr"/>
           <a:lstStyle/>
-          <a:p/>
+          <a:p>
+            <a:endParaRPr/>
+          </a:p>
         </p:txBody>
       </p:sp>
       <p:sp>
@@ -7032,7 +7029,7 @@
           <a:noFill/>
         </p:spPr>
         <p:txBody>
-          <a:bodyPr wrap="square" anchor="t" lIns="18288" rIns="18288" tIns="18288" bIns="18288">
+          <a:bodyPr wrap="square" lIns="18288" tIns="18288" rIns="18288" bIns="18288" anchor="t">
             <a:spAutoFit/>
           </a:bodyPr>
           <a:lstStyle/>
@@ -7107,7 +7104,7 @@
           </a:fontRef>
         </p:style>
         <p:txBody>
-          <a:bodyPr rtlCol="0" anchor="ctr" lIns="54864" rIns="54864" tIns="0" bIns="0" wrap="square"/>
+          <a:bodyPr wrap="square" lIns="54864" tIns="0" rIns="54864" bIns="0" rtlCol="0" anchor="ctr"/>
           <a:lstStyle/>
           <a:p>
             <a:pPr algn="ctr"/>
@@ -7164,7 +7161,7 @@
           </a:fontRef>
         </p:style>
         <p:txBody>
-          <a:bodyPr rtlCol="0" anchor="ctr" lIns="54864" rIns="54864" tIns="0" bIns="0" wrap="square"/>
+          <a:bodyPr wrap="square" lIns="54864" tIns="0" rIns="54864" bIns="0" rtlCol="0" anchor="ctr"/>
           <a:lstStyle/>
           <a:p>
             <a:pPr algn="ctr"/>
@@ -7221,7 +7218,7 @@
           </a:fontRef>
         </p:style>
         <p:txBody>
-          <a:bodyPr rtlCol="0" anchor="ctr" lIns="54864" rIns="54864" tIns="0" bIns="0" wrap="square"/>
+          <a:bodyPr wrap="square" lIns="54864" tIns="0" rIns="54864" bIns="0" rtlCol="0" anchor="ctr"/>
           <a:lstStyle/>
           <a:p>
             <a:pPr algn="ctr"/>
@@ -7278,7 +7275,7 @@
           </a:fontRef>
         </p:style>
         <p:txBody>
-          <a:bodyPr rtlCol="0" anchor="ctr" lIns="54864" rIns="54864" tIns="0" bIns="0" wrap="square"/>
+          <a:bodyPr wrap="square" lIns="54864" tIns="0" rIns="54864" bIns="0" rtlCol="0" anchor="ctr"/>
           <a:lstStyle/>
           <a:p>
             <a:pPr algn="ctr"/>
@@ -7335,7 +7332,7 @@
           </a:fontRef>
         </p:style>
         <p:txBody>
-          <a:bodyPr rtlCol="0" anchor="ctr" lIns="54864" rIns="54864" tIns="0" bIns="0" wrap="square"/>
+          <a:bodyPr wrap="square" lIns="54864" tIns="0" rIns="54864" bIns="0" rtlCol="0" anchor="ctr"/>
           <a:lstStyle/>
           <a:p>
             <a:pPr algn="ctr"/>
@@ -7392,7 +7389,7 @@
           </a:fontRef>
         </p:style>
         <p:txBody>
-          <a:bodyPr rtlCol="0" anchor="ctr" lIns="54864" rIns="54864" tIns="0" bIns="0" wrap="square"/>
+          <a:bodyPr wrap="square" lIns="54864" tIns="0" rIns="54864" bIns="0" rtlCol="0" anchor="ctr"/>
           <a:lstStyle/>
           <a:p>
             <a:pPr algn="ctr"/>
@@ -7449,7 +7446,7 @@
           </a:fontRef>
         </p:style>
         <p:txBody>
-          <a:bodyPr rtlCol="0" anchor="ctr" lIns="54864" rIns="54864" tIns="0" bIns="0" wrap="square"/>
+          <a:bodyPr wrap="square" lIns="54864" tIns="0" rIns="54864" bIns="0" rtlCol="0" anchor="ctr"/>
           <a:lstStyle/>
           <a:p>
             <a:pPr algn="ctr"/>
@@ -7540,7 +7537,7 @@
           </a:fontRef>
         </p:style>
         <p:txBody>
-          <a:bodyPr rtlCol="0" anchor="ctr" lIns="54864" rIns="54864" tIns="0" bIns="0" wrap="square"/>
+          <a:bodyPr wrap="square" lIns="54864" tIns="0" rIns="54864" bIns="0" rtlCol="0" anchor="ctr"/>
           <a:lstStyle/>
           <a:p>
             <a:pPr algn="ctr"/>
@@ -7633,7 +7630,7 @@
           </a:fontRef>
         </p:style>
         <p:txBody>
-          <a:bodyPr rtlCol="0" anchor="ctr" lIns="54864" rIns="54864" tIns="0" bIns="0" wrap="square"/>
+          <a:bodyPr wrap="square" lIns="54864" tIns="0" rIns="54864" bIns="0" rtlCol="0" anchor="ctr"/>
           <a:lstStyle/>
           <a:p>
             <a:pPr algn="ctr"/>
@@ -7726,7 +7723,7 @@
           </a:fontRef>
         </p:style>
         <p:txBody>
-          <a:bodyPr rtlCol="0" anchor="ctr" lIns="54864" rIns="54864" tIns="0" bIns="0" wrap="square"/>
+          <a:bodyPr wrap="square" lIns="54864" tIns="0" rIns="54864" bIns="0" rtlCol="0" anchor="ctr"/>
           <a:lstStyle/>
           <a:p>
             <a:pPr algn="ctr"/>
@@ -7781,7 +7778,7 @@
           </a:fontRef>
         </p:style>
         <p:txBody>
-          <a:bodyPr rtlCol="0" anchor="ctr" lIns="54864" rIns="54864" tIns="0" bIns="0" wrap="square"/>
+          <a:bodyPr wrap="square" lIns="54864" tIns="0" rIns="54864" bIns="0" rtlCol="0" anchor="ctr"/>
           <a:lstStyle/>
           <a:p>
             <a:pPr algn="ctr"/>
@@ -7814,7 +7811,7 @@
           <a:noFill/>
         </p:spPr>
         <p:txBody>
-          <a:bodyPr wrap="square" anchor="t" lIns="18288" rIns="18288" tIns="18288" bIns="18288">
+          <a:bodyPr wrap="square" lIns="18288" tIns="18288" rIns="18288" bIns="18288" anchor="t">
             <a:spAutoFit/>
           </a:bodyPr>
           <a:lstStyle/>
@@ -7891,7 +7888,9 @@
         <p:txBody>
           <a:bodyPr rtlCol="0" anchor="ctr"/>
           <a:lstStyle/>
-          <a:p/>
+          <a:p>
+            <a:endParaRPr/>
+          </a:p>
         </p:txBody>
       </p:sp>
       <p:pic>
@@ -7957,7 +7956,7 @@
           </a:fontRef>
         </p:style>
         <p:txBody>
-          <a:bodyPr rtlCol="0" anchor="ctr" lIns="54864" rIns="54864" tIns="0" bIns="0" wrap="square"/>
+          <a:bodyPr wrap="square" lIns="54864" tIns="0" rIns="54864" bIns="0" rtlCol="0" anchor="ctr"/>
           <a:lstStyle/>
           <a:p>
             <a:pPr algn="ctr"/>
@@ -8168,7 +8167,7 @@
                 <a16:creationId xmlns:a16="http://schemas.microsoft.com/office/drawing/2014/main" id="{5DBCE864-823D-4A13-9607-5DA1F0ED5FB8}"/>
               </a:ext>
               <a:ext uri="{C183D7F6-B498-43B3-948B-1728B52AA6E4}">
-                <adec:decorative xmlns:adec="http://schemas.microsoft.com/office/drawing/2017/decorative" xmlns="" val="0"/>
+                <adec:decorative xmlns:adec="http://schemas.microsoft.com/office/drawing/2017/decorative" val="0"/>
               </a:ext>
             </a:extLst>
           </p:cNvPr>
@@ -8199,7 +8198,7 @@
           </a:fontRef>
         </p:style>
         <p:txBody>
-          <a:bodyPr rtlCol="0" anchor="ctr" wrap="square" lIns="36576" rIns="36576"/>
+          <a:bodyPr wrap="square" lIns="36576" rIns="36576" rtlCol="0" anchor="ctr"/>
           <a:lstStyle/>
           <a:p>
             <a:pPr algn="ctr"/>
@@ -8263,7 +8262,7 @@
           <a:noFill/>
         </p:spPr>
         <p:txBody>
-          <a:bodyPr wrap="square" anchor="t" lIns="18288" rIns="18288" tIns="18288" bIns="18288">
+          <a:bodyPr wrap="square" lIns="18288" tIns="18288" rIns="18288" bIns="18288" anchor="t">
             <a:spAutoFit/>
           </a:bodyPr>
           <a:lstStyle/>
@@ -8331,7 +8330,9 @@
         <p:txBody>
           <a:bodyPr rtlCol="0" anchor="ctr"/>
           <a:lstStyle/>
-          <a:p/>
+          <a:p>
+            <a:endParaRPr/>
+          </a:p>
         </p:txBody>
       </p:sp>
       <p:sp>
@@ -8351,7 +8352,7 @@
           <a:noFill/>
         </p:spPr>
         <p:txBody>
-          <a:bodyPr wrap="square" anchor="ctr" lIns="18288" rIns="18288" tIns="18288" bIns="18288">
+          <a:bodyPr wrap="square" lIns="18288" tIns="18288" rIns="18288" bIns="18288" anchor="ctr">
             <a:spAutoFit/>
           </a:bodyPr>
           <a:lstStyle/>
@@ -8474,7 +8475,9 @@
         <p:txBody>
           <a:bodyPr rtlCol="0" anchor="ctr"/>
           <a:lstStyle/>
-          <a:p/>
+          <a:p>
+            <a:endParaRPr/>
+          </a:p>
         </p:txBody>
       </p:sp>
       <p:sp>
@@ -8494,7 +8497,7 @@
           <a:noFill/>
         </p:spPr>
         <p:txBody>
-          <a:bodyPr wrap="square" anchor="ctr" lIns="18288" rIns="18288" tIns="18288" bIns="18288">
+          <a:bodyPr wrap="square" lIns="18288" tIns="18288" rIns="18288" bIns="18288" anchor="ctr">
             <a:spAutoFit/>
           </a:bodyPr>
           <a:lstStyle/>
@@ -8617,7 +8620,9 @@
         <p:txBody>
           <a:bodyPr rtlCol="0" anchor="ctr"/>
           <a:lstStyle/>
-          <a:p/>
+          <a:p>
+            <a:endParaRPr/>
+          </a:p>
         </p:txBody>
       </p:sp>
       <p:sp>
@@ -8637,7 +8642,7 @@
           <a:noFill/>
         </p:spPr>
         <p:txBody>
-          <a:bodyPr wrap="square" anchor="ctr" lIns="18288" rIns="18288" tIns="18288" bIns="18288">
+          <a:bodyPr wrap="square" lIns="18288" tIns="18288" rIns="18288" bIns="18288" anchor="ctr">
             <a:spAutoFit/>
           </a:bodyPr>
           <a:lstStyle/>
@@ -8760,7 +8765,9 @@
         <p:txBody>
           <a:bodyPr rtlCol="0" anchor="ctr"/>
           <a:lstStyle/>
-          <a:p/>
+          <a:p>
+            <a:endParaRPr/>
+          </a:p>
         </p:txBody>
       </p:sp>
       <p:sp>
@@ -8780,7 +8787,7 @@
           <a:noFill/>
         </p:spPr>
         <p:txBody>
-          <a:bodyPr wrap="square" anchor="ctr" lIns="18288" rIns="18288" tIns="18288" bIns="18288">
+          <a:bodyPr wrap="square" lIns="18288" tIns="18288" rIns="18288" bIns="18288" anchor="ctr">
             <a:spAutoFit/>
           </a:bodyPr>
           <a:lstStyle/>
@@ -8903,7 +8910,9 @@
         <p:txBody>
           <a:bodyPr rtlCol="0" anchor="ctr"/>
           <a:lstStyle/>
-          <a:p/>
+          <a:p>
+            <a:endParaRPr/>
+          </a:p>
         </p:txBody>
       </p:sp>
       <p:sp>
@@ -8923,7 +8932,7 @@
           <a:noFill/>
         </p:spPr>
         <p:txBody>
-          <a:bodyPr wrap="square" anchor="ctr" lIns="18288" rIns="18288" tIns="18288" bIns="18288">
+          <a:bodyPr wrap="square" lIns="18288" tIns="18288" rIns="18288" bIns="18288" anchor="ctr">
             <a:spAutoFit/>
           </a:bodyPr>
           <a:lstStyle/>
@@ -9046,7 +9055,9 @@
         <p:txBody>
           <a:bodyPr rtlCol="0" anchor="ctr"/>
           <a:lstStyle/>
-          <a:p/>
+          <a:p>
+            <a:endParaRPr/>
+          </a:p>
         </p:txBody>
       </p:sp>
       <p:sp>
@@ -9066,7 +9077,7 @@
           <a:noFill/>
         </p:spPr>
         <p:txBody>
-          <a:bodyPr wrap="square" anchor="ctr" lIns="18288" rIns="18288" tIns="18288" bIns="18288">
+          <a:bodyPr wrap="square" lIns="18288" tIns="18288" rIns="18288" bIns="18288" anchor="ctr">
             <a:spAutoFit/>
           </a:bodyPr>
           <a:lstStyle/>
@@ -9189,7 +9200,9 @@
         <p:txBody>
           <a:bodyPr rtlCol="0" anchor="ctr"/>
           <a:lstStyle/>
-          <a:p/>
+          <a:p>
+            <a:endParaRPr/>
+          </a:p>
         </p:txBody>
       </p:sp>
       <p:sp>
@@ -9209,7 +9222,7 @@
           <a:noFill/>
         </p:spPr>
         <p:txBody>
-          <a:bodyPr wrap="square" anchor="ctr" lIns="18288" rIns="18288" tIns="18288" bIns="18288">
+          <a:bodyPr wrap="square" lIns="18288" tIns="18288" rIns="18288" bIns="18288" anchor="ctr">
             <a:spAutoFit/>
           </a:bodyPr>
           <a:lstStyle/>
@@ -9332,7 +9345,9 @@
         <p:txBody>
           <a:bodyPr rtlCol="0" anchor="ctr"/>
           <a:lstStyle/>
-          <a:p/>
+          <a:p>
+            <a:endParaRPr/>
+          </a:p>
         </p:txBody>
       </p:sp>
       <p:sp>
@@ -9352,7 +9367,7 @@
           <a:noFill/>
         </p:spPr>
         <p:txBody>
-          <a:bodyPr wrap="square" anchor="ctr" lIns="18288" rIns="18288" tIns="18288" bIns="18288">
+          <a:bodyPr wrap="square" lIns="18288" tIns="18288" rIns="18288" bIns="18288" anchor="ctr">
             <a:spAutoFit/>
           </a:bodyPr>
           <a:lstStyle/>
@@ -9471,7 +9486,7 @@
           </a:fontRef>
         </p:style>
         <p:txBody>
-          <a:bodyPr rtlCol="0" anchor="ctr" lIns="54864" rIns="54864" tIns="0" bIns="0" wrap="square"/>
+          <a:bodyPr wrap="square" lIns="54864" tIns="0" rIns="54864" bIns="0" rtlCol="0" anchor="ctr"/>
           <a:lstStyle/>
           <a:p>
             <a:pPr algn="ctr"/>
@@ -9526,7 +9541,7 @@
           </a:fontRef>
         </p:style>
         <p:txBody>
-          <a:bodyPr rtlCol="0" anchor="ctr" lIns="54864" rIns="54864" tIns="0" bIns="0" wrap="square"/>
+          <a:bodyPr wrap="square" lIns="54864" tIns="0" rIns="54864" bIns="0" rtlCol="0" anchor="ctr"/>
           <a:lstStyle/>
           <a:p>
             <a:pPr algn="ctr"/>
@@ -9581,7 +9596,7 @@
           </a:fontRef>
         </p:style>
         <p:txBody>
-          <a:bodyPr rtlCol="0" anchor="ctr" lIns="54864" rIns="54864" tIns="0" bIns="0" wrap="square"/>
+          <a:bodyPr wrap="square" lIns="54864" tIns="0" rIns="54864" bIns="0" rtlCol="0" anchor="ctr"/>
           <a:lstStyle/>
           <a:p>
             <a:pPr algn="ctr"/>
@@ -9636,7 +9651,7 @@
           </a:fontRef>
         </p:style>
         <p:txBody>
-          <a:bodyPr rtlCol="0" anchor="ctr" lIns="54864" rIns="54864" tIns="0" bIns="0" wrap="square"/>
+          <a:bodyPr wrap="square" lIns="54864" tIns="0" rIns="54864" bIns="0" rtlCol="0" anchor="ctr"/>
           <a:lstStyle/>
           <a:p>
             <a:pPr algn="ctr"/>
@@ -9729,7 +9744,7 @@
           </a:fontRef>
         </p:style>
         <p:txBody>
-          <a:bodyPr rtlCol="0" anchor="ctr" lIns="54864" rIns="54864" tIns="0" bIns="0" wrap="square"/>
+          <a:bodyPr wrap="square" lIns="54864" tIns="0" rIns="54864" bIns="0" rtlCol="0" anchor="ctr"/>
           <a:lstStyle/>
           <a:p>
             <a:pPr algn="ctr"/>
@@ -9822,7 +9837,7 @@
           </a:fontRef>
         </p:style>
         <p:txBody>
-          <a:bodyPr rtlCol="0" anchor="ctr" lIns="54864" rIns="54864" tIns="0" bIns="0" wrap="square"/>
+          <a:bodyPr wrap="square" lIns="54864" tIns="0" rIns="54864" bIns="0" rtlCol="0" anchor="ctr"/>
           <a:lstStyle/>
           <a:p>
             <a:pPr algn="ctr"/>
@@ -9915,7 +9930,7 @@
           </a:fontRef>
         </p:style>
         <p:txBody>
-          <a:bodyPr rtlCol="0" anchor="ctr" lIns="54864" rIns="54864" tIns="0" bIns="0" wrap="square"/>
+          <a:bodyPr wrap="square" lIns="54864" tIns="0" rIns="54864" bIns="0" rtlCol="0" anchor="ctr"/>
           <a:lstStyle/>
           <a:p>
             <a:pPr algn="ctr"/>
@@ -10008,7 +10023,7 @@
           </a:fontRef>
         </p:style>
         <p:txBody>
-          <a:bodyPr rtlCol="0" anchor="ctr" lIns="54864" rIns="54864" tIns="0" bIns="0" wrap="square"/>
+          <a:bodyPr wrap="square" lIns="54864" tIns="0" rIns="54864" bIns="0" rtlCol="0" anchor="ctr"/>
           <a:lstStyle/>
           <a:p>
             <a:pPr algn="ctr"/>
@@ -10101,7 +10116,7 @@
           </a:fontRef>
         </p:style>
         <p:txBody>
-          <a:bodyPr rtlCol="0" anchor="ctr" lIns="54864" rIns="54864" tIns="0" bIns="0" wrap="square"/>
+          <a:bodyPr wrap="square" lIns="54864" tIns="0" rIns="54864" bIns="0" rtlCol="0" anchor="ctr"/>
           <a:lstStyle/>
           <a:p>
             <a:pPr algn="ctr"/>
@@ -10240,7 +10255,7 @@
           <a:noFill/>
         </p:spPr>
         <p:txBody>
-          <a:bodyPr wrap="square" anchor="t" lIns="18288" rIns="18288" tIns="18288" bIns="18288">
+          <a:bodyPr wrap="square" lIns="18288" tIns="18288" rIns="18288" bIns="18288" anchor="t">
             <a:spAutoFit/>
           </a:bodyPr>
           <a:lstStyle/>
@@ -10282,7 +10297,7 @@
           <a:noFill/>
         </p:spPr>
         <p:txBody>
-          <a:bodyPr wrap="square" anchor="t" lIns="18288" rIns="18288" tIns="18288" bIns="18288">
+          <a:bodyPr wrap="square" lIns="18288" tIns="18288" rIns="18288" bIns="18288" anchor="t">
             <a:spAutoFit/>
           </a:bodyPr>
           <a:lstStyle/>
@@ -10413,7 +10428,9 @@
         <p:txBody>
           <a:bodyPr rtlCol="0" anchor="ctr"/>
           <a:lstStyle/>
-          <a:p/>
+          <a:p>
+            <a:endParaRPr/>
+          </a:p>
         </p:txBody>
       </p:sp>
       <p:sp>
@@ -10433,7 +10450,7 @@
           <a:noFill/>
         </p:spPr>
         <p:txBody>
-          <a:bodyPr wrap="square" anchor="t" lIns="18288" rIns="18288" tIns="18288" bIns="18288">
+          <a:bodyPr wrap="square" lIns="18288" tIns="18288" rIns="18288" bIns="18288" anchor="t">
             <a:spAutoFit/>
           </a:bodyPr>
           <a:lstStyle/>
@@ -10497,7 +10514,9 @@
         <p:txBody>
           <a:bodyPr rtlCol="0" anchor="ctr"/>
           <a:lstStyle/>
-          <a:p/>
+          <a:p>
+            <a:endParaRPr/>
+          </a:p>
         </p:txBody>
       </p:sp>
       <p:sp>
@@ -10517,7 +10536,7 @@
           <a:noFill/>
         </p:spPr>
         <p:txBody>
-          <a:bodyPr wrap="square" anchor="t" lIns="18288" rIns="18288" tIns="18288" bIns="18288">
+          <a:bodyPr wrap="square" lIns="18288" tIns="18288" rIns="18288" bIns="18288" anchor="t">
             <a:spAutoFit/>
           </a:bodyPr>
           <a:lstStyle/>
@@ -10600,7 +10619,9 @@
         <p:txBody>
           <a:bodyPr rtlCol="0" anchor="ctr"/>
           <a:lstStyle/>
-          <a:p/>
+          <a:p>
+            <a:endParaRPr/>
+          </a:p>
         </p:txBody>
       </p:sp>
       <p:sp>
@@ -10620,7 +10641,7 @@
           <a:noFill/>
         </p:spPr>
         <p:txBody>
-          <a:bodyPr wrap="square" anchor="t" lIns="18288" rIns="18288" tIns="18288" bIns="18288">
+          <a:bodyPr wrap="square" lIns="18288" tIns="18288" rIns="18288" bIns="18288" anchor="t">
             <a:spAutoFit/>
           </a:bodyPr>
           <a:lstStyle/>
@@ -10703,7 +10724,9 @@
         <p:txBody>
           <a:bodyPr rtlCol="0" anchor="ctr"/>
           <a:lstStyle/>
-          <a:p/>
+          <a:p>
+            <a:endParaRPr/>
+          </a:p>
         </p:txBody>
       </p:sp>
       <p:sp>
@@ -10723,7 +10746,7 @@
           <a:noFill/>
         </p:spPr>
         <p:txBody>
-          <a:bodyPr wrap="square" anchor="t" lIns="18288" rIns="18288" tIns="18288" bIns="18288">
+          <a:bodyPr wrap="square" lIns="18288" tIns="18288" rIns="18288" bIns="18288" anchor="t">
             <a:spAutoFit/>
           </a:bodyPr>
           <a:lstStyle/>
@@ -10819,7 +10842,7 @@
           <a:noFill/>
         </p:spPr>
         <p:txBody>
-          <a:bodyPr wrap="square" anchor="t" lIns="18288" rIns="18288" tIns="18288" bIns="18288">
+          <a:bodyPr wrap="square" lIns="18288" tIns="18288" rIns="18288" bIns="18288" anchor="t">
             <a:spAutoFit/>
           </a:bodyPr>
           <a:lstStyle/>
@@ -10885,7 +10908,7 @@
           </a:fontRef>
         </p:style>
         <p:txBody>
-          <a:bodyPr rtlCol="0" anchor="ctr" lIns="54864" rIns="54864" tIns="0" bIns="0" wrap="square"/>
+          <a:bodyPr wrap="square" lIns="54864" tIns="0" rIns="54864" bIns="0" rtlCol="0" anchor="ctr"/>
           <a:lstStyle/>
           <a:p>
             <a:pPr algn="ctr"/>
@@ -10978,7 +11001,7 @@
           </a:fontRef>
         </p:style>
         <p:txBody>
-          <a:bodyPr rtlCol="0" anchor="ctr" lIns="54864" rIns="54864" tIns="0" bIns="0" wrap="square"/>
+          <a:bodyPr wrap="square" lIns="54864" tIns="0" rIns="54864" bIns="0" rtlCol="0" anchor="ctr"/>
           <a:lstStyle/>
           <a:p>
             <a:pPr algn="ctr"/>
@@ -11071,7 +11094,7 @@
           </a:fontRef>
         </p:style>
         <p:txBody>
-          <a:bodyPr rtlCol="0" anchor="ctr" lIns="54864" rIns="54864" tIns="0" bIns="0" wrap="square"/>
+          <a:bodyPr wrap="square" lIns="54864" tIns="0" rIns="54864" bIns="0" rtlCol="0" anchor="ctr"/>
           <a:lstStyle/>
           <a:p>
             <a:pPr algn="ctr"/>
@@ -11164,7 +11187,7 @@
           </a:fontRef>
         </p:style>
         <p:txBody>
-          <a:bodyPr rtlCol="0" anchor="ctr" lIns="54864" rIns="54864" tIns="0" bIns="0" wrap="square"/>
+          <a:bodyPr wrap="square" lIns="54864" tIns="0" rIns="54864" bIns="0" rtlCol="0" anchor="ctr"/>
           <a:lstStyle/>
           <a:p>
             <a:pPr algn="ctr"/>
@@ -11473,7 +11496,7 @@
                 <a16:creationId xmlns:a16="http://schemas.microsoft.com/office/drawing/2014/main" id="{5DBCE864-823D-4A13-9607-5DA1F0ED5FB8}"/>
               </a:ext>
               <a:ext uri="{C183D7F6-B498-43B3-948B-1728B52AA6E4}">
-                <adec:decorative xmlns:adec="http://schemas.microsoft.com/office/drawing/2017/decorative" xmlns="" val="0"/>
+                <adec:decorative xmlns:adec="http://schemas.microsoft.com/office/drawing/2017/decorative" val="0"/>
               </a:ext>
             </a:extLst>
           </p:cNvPr>
@@ -11504,7 +11527,7 @@
           </a:fontRef>
         </p:style>
         <p:txBody>
-          <a:bodyPr rtlCol="0" anchor="ctr" wrap="square" lIns="36576" rIns="36576"/>
+          <a:bodyPr wrap="square" lIns="36576" rIns="36576" rtlCol="0" anchor="ctr"/>
           <a:lstStyle/>
           <a:p>
             <a:pPr algn="ctr"/>
@@ -11568,7 +11591,7 @@
           <a:noFill/>
         </p:spPr>
         <p:txBody>
-          <a:bodyPr wrap="square" anchor="ctr" lIns="18288" rIns="18288" tIns="18288" bIns="18288">
+          <a:bodyPr wrap="square" lIns="18288" tIns="18288" rIns="18288" bIns="18288" anchor="ctr">
             <a:spAutoFit/>
           </a:bodyPr>
           <a:lstStyle/>
@@ -11632,7 +11655,7 @@
           </a:fontRef>
         </p:style>
         <p:txBody>
-          <a:bodyPr rtlCol="0" anchor="ctr" lIns="54864" rIns="54864" tIns="0" bIns="0" wrap="square"/>
+          <a:bodyPr wrap="square" lIns="54864" tIns="0" rIns="54864" bIns="0" rtlCol="0" anchor="ctr"/>
           <a:lstStyle/>
           <a:p>
             <a:pPr algn="ctr"/>
@@ -11725,7 +11748,7 @@
           </a:fontRef>
         </p:style>
         <p:txBody>
-          <a:bodyPr rtlCol="0" anchor="ctr" lIns="54864" rIns="54864" tIns="0" bIns="0" wrap="square"/>
+          <a:bodyPr wrap="square" lIns="54864" tIns="0" rIns="54864" bIns="0" rtlCol="0" anchor="ctr"/>
           <a:lstStyle/>
           <a:p>
             <a:pPr algn="ctr"/>
@@ -11818,7 +11841,7 @@
           </a:fontRef>
         </p:style>
         <p:txBody>
-          <a:bodyPr rtlCol="0" anchor="ctr" lIns="54864" rIns="54864" tIns="0" bIns="0" wrap="square"/>
+          <a:bodyPr wrap="square" lIns="54864" tIns="0" rIns="54864" bIns="0" rtlCol="0" anchor="ctr"/>
           <a:lstStyle/>
           <a:p>
             <a:pPr algn="ctr"/>
@@ -11911,7 +11934,7 @@
           </a:fontRef>
         </p:style>
         <p:txBody>
-          <a:bodyPr rtlCol="0" anchor="ctr" lIns="54864" rIns="54864" tIns="0" bIns="0" wrap="square"/>
+          <a:bodyPr wrap="square" lIns="54864" tIns="0" rIns="54864" bIns="0" rtlCol="0" anchor="ctr"/>
           <a:lstStyle/>
           <a:p>
             <a:pPr algn="ctr"/>
@@ -12004,7 +12027,7 @@
           </a:fontRef>
         </p:style>
         <p:txBody>
-          <a:bodyPr rtlCol="0" anchor="ctr" lIns="54864" rIns="54864" tIns="0" bIns="0" wrap="square"/>
+          <a:bodyPr wrap="square" lIns="54864" tIns="0" rIns="54864" bIns="0" rtlCol="0" anchor="ctr"/>
           <a:lstStyle/>
           <a:p>
             <a:pPr algn="ctr"/>
@@ -12097,7 +12120,7 @@
           </a:fontRef>
         </p:style>
         <p:txBody>
-          <a:bodyPr rtlCol="0" anchor="ctr" lIns="54864" rIns="54864" tIns="0" bIns="0" wrap="square"/>
+          <a:bodyPr wrap="square" lIns="54864" tIns="0" rIns="54864" bIns="0" rtlCol="0" anchor="ctr"/>
           <a:lstStyle/>
           <a:p>
             <a:pPr algn="ctr"/>
@@ -12188,7 +12211,7 @@
           </a:fontRef>
         </p:style>
         <p:txBody>
-          <a:bodyPr rtlCol="0" anchor="ctr" lIns="54864" rIns="54864" tIns="0" bIns="0" wrap="square"/>
+          <a:bodyPr wrap="square" lIns="54864" tIns="0" rIns="54864" bIns="0" rtlCol="0" anchor="ctr"/>
           <a:lstStyle/>
           <a:p>
             <a:pPr algn="ctr"/>
@@ -12279,7 +12302,7 @@
           </a:fontRef>
         </p:style>
         <p:txBody>
-          <a:bodyPr rtlCol="0" anchor="ctr" lIns="54864" rIns="54864" tIns="0" bIns="0" wrap="square"/>
+          <a:bodyPr wrap="square" lIns="54864" tIns="0" rIns="54864" bIns="0" rtlCol="0" anchor="ctr"/>
           <a:lstStyle/>
           <a:p>
             <a:pPr algn="ctr"/>
@@ -12338,7 +12361,9 @@
         <p:txBody>
           <a:bodyPr rtlCol="0" anchor="ctr"/>
           <a:lstStyle/>
-          <a:p/>
+          <a:p>
+            <a:endParaRPr/>
+          </a:p>
         </p:txBody>
       </p:sp>
       <p:pic>
@@ -12408,7 +12433,9 @@
         <p:txBody>
           <a:bodyPr rtlCol="0" anchor="ctr"/>
           <a:lstStyle/>
-          <a:p/>
+          <a:p>
+            <a:endParaRPr/>
+          </a:p>
         </p:txBody>
       </p:sp>
       <p:pic>
@@ -12478,7 +12505,9 @@
         <p:txBody>
           <a:bodyPr rtlCol="0" anchor="ctr"/>
           <a:lstStyle/>
-          <a:p/>
+          <a:p>
+            <a:endParaRPr/>
+          </a:p>
         </p:txBody>
       </p:sp>
       <p:pic>
@@ -12544,7 +12573,7 @@
           </a:fontRef>
         </p:style>
         <p:txBody>
-          <a:bodyPr rtlCol="0" anchor="ctr" lIns="54864" rIns="54864" tIns="0" bIns="0" wrap="square"/>
+          <a:bodyPr wrap="square" lIns="54864" tIns="0" rIns="54864" bIns="0" rtlCol="0" anchor="ctr"/>
           <a:lstStyle/>
           <a:p>
             <a:pPr algn="ctr"/>
@@ -12599,7 +12628,7 @@
           </a:fontRef>
         </p:style>
         <p:txBody>
-          <a:bodyPr rtlCol="0" anchor="ctr" lIns="54864" rIns="54864" tIns="0" bIns="0" wrap="square"/>
+          <a:bodyPr wrap="square" lIns="54864" tIns="0" rIns="54864" bIns="0" rtlCol="0" anchor="ctr"/>
           <a:lstStyle/>
           <a:p>
             <a:pPr algn="ctr"/>
@@ -12654,7 +12683,7 @@
           </a:fontRef>
         </p:style>
         <p:txBody>
-          <a:bodyPr rtlCol="0" anchor="ctr" lIns="54864" rIns="54864" tIns="0" bIns="0" wrap="square"/>
+          <a:bodyPr wrap="square" lIns="54864" tIns="0" rIns="54864" bIns="0" rtlCol="0" anchor="ctr"/>
           <a:lstStyle/>
           <a:p>
             <a:pPr algn="ctr"/>
@@ -12687,7 +12716,7 @@
           <a:noFill/>
         </p:spPr>
         <p:txBody>
-          <a:bodyPr wrap="square" anchor="t" lIns="18288" rIns="18288" tIns="18288" bIns="18288">
+          <a:bodyPr wrap="square" lIns="18288" tIns="18288" rIns="18288" bIns="18288" anchor="t">
             <a:spAutoFit/>
           </a:bodyPr>
           <a:lstStyle/>
@@ -12729,7 +12758,7 @@
           <a:noFill/>
         </p:spPr>
         <p:txBody>
-          <a:bodyPr wrap="square" anchor="t" lIns="18288" rIns="18288" tIns="18288" bIns="18288">
+          <a:bodyPr wrap="square" lIns="18288" tIns="18288" rIns="18288" bIns="18288" anchor="t">
             <a:spAutoFit/>
           </a:bodyPr>
           <a:lstStyle/>
@@ -12771,7 +12800,7 @@
           <a:noFill/>
         </p:spPr>
         <p:txBody>
-          <a:bodyPr wrap="square" anchor="ctr" lIns="18288" rIns="18288" tIns="18288" bIns="18288">
+          <a:bodyPr wrap="square" lIns="18288" tIns="18288" rIns="18288" bIns="18288" anchor="ctr">
             <a:spAutoFit/>
           </a:bodyPr>
           <a:lstStyle/>
@@ -12813,7 +12842,7 @@
           <a:noFill/>
         </p:spPr>
         <p:txBody>
-          <a:bodyPr wrap="square" anchor="ctr" lIns="18288" rIns="18288" tIns="18288" bIns="18288">
+          <a:bodyPr wrap="square" lIns="18288" tIns="18288" rIns="18288" bIns="18288" anchor="ctr">
             <a:spAutoFit/>
           </a:bodyPr>
           <a:lstStyle/>
@@ -12855,7 +12884,7 @@
           <a:noFill/>
         </p:spPr>
         <p:txBody>
-          <a:bodyPr wrap="square" anchor="ctr" lIns="18288" rIns="18288" tIns="18288" bIns="18288">
+          <a:bodyPr wrap="square" lIns="18288" tIns="18288" rIns="18288" bIns="18288" anchor="ctr">
             <a:spAutoFit/>
           </a:bodyPr>
           <a:lstStyle/>
@@ -12897,7 +12926,7 @@
           <a:noFill/>
         </p:spPr>
         <p:txBody>
-          <a:bodyPr wrap="square" anchor="ctr" lIns="18288" rIns="18288" tIns="18288" bIns="18288">
+          <a:bodyPr wrap="square" lIns="18288" tIns="18288" rIns="18288" bIns="18288" anchor="ctr">
             <a:spAutoFit/>
           </a:bodyPr>
           <a:lstStyle/>
@@ -12939,7 +12968,7 @@
           <a:noFill/>
         </p:spPr>
         <p:txBody>
-          <a:bodyPr wrap="square" anchor="ctr" lIns="18288" rIns="18288" tIns="18288" bIns="18288">
+          <a:bodyPr wrap="square" lIns="18288" tIns="18288" rIns="18288" bIns="18288" anchor="ctr">
             <a:spAutoFit/>
           </a:bodyPr>
           <a:lstStyle/>
@@ -12981,7 +13010,7 @@
           <a:noFill/>
         </p:spPr>
         <p:txBody>
-          <a:bodyPr wrap="square" anchor="ctr" lIns="18288" rIns="18288" tIns="18288" bIns="18288">
+          <a:bodyPr wrap="square" lIns="18288" tIns="18288" rIns="18288" bIns="18288" anchor="ctr">
             <a:spAutoFit/>
           </a:bodyPr>
           <a:lstStyle/>
@@ -13045,7 +13074,7 @@
           </a:fontRef>
         </p:style>
         <p:txBody>
-          <a:bodyPr rtlCol="0" anchor="ctr" lIns="54864" rIns="54864" tIns="0" bIns="0" wrap="square"/>
+          <a:bodyPr wrap="square" lIns="54864" tIns="0" rIns="54864" bIns="0" rtlCol="0" anchor="ctr"/>
           <a:lstStyle/>
           <a:p>
             <a:pPr algn="ctr"/>
@@ -13078,7 +13107,7 @@
           <a:noFill/>
         </p:spPr>
         <p:txBody>
-          <a:bodyPr wrap="square" anchor="t" lIns="18288" rIns="18288" tIns="18288" bIns="18288">
+          <a:bodyPr wrap="square" lIns="18288" tIns="18288" rIns="18288" bIns="18288" anchor="t">
             <a:spAutoFit/>
           </a:bodyPr>
           <a:lstStyle/>
@@ -13164,7 +13193,7 @@
           <a:noFill/>
         </p:spPr>
         <p:txBody>
-          <a:bodyPr wrap="square" anchor="t" lIns="18288" rIns="18288" tIns="18288" bIns="18288">
+          <a:bodyPr wrap="square" lIns="18288" tIns="18288" rIns="18288" bIns="18288" anchor="t">
             <a:spAutoFit/>
           </a:bodyPr>
           <a:lstStyle/>
@@ -13496,7 +13525,7 @@
                 <a16:creationId xmlns:a16="http://schemas.microsoft.com/office/drawing/2014/main" id="{5DBCE864-823D-4A13-9607-5DA1F0ED5FB8}"/>
               </a:ext>
               <a:ext uri="{C183D7F6-B498-43B3-948B-1728B52AA6E4}">
-                <adec:decorative xmlns:adec="http://schemas.microsoft.com/office/drawing/2017/decorative" xmlns="" val="0"/>
+                <adec:decorative xmlns:adec="http://schemas.microsoft.com/office/drawing/2017/decorative" val="0"/>
               </a:ext>
             </a:extLst>
           </p:cNvPr>
@@ -13527,7 +13556,7 @@
           </a:fontRef>
         </p:style>
         <p:txBody>
-          <a:bodyPr rtlCol="0" anchor="ctr" wrap="square" lIns="36576" rIns="36576"/>
+          <a:bodyPr wrap="square" lIns="36576" rIns="36576" rtlCol="0" anchor="ctr"/>
           <a:lstStyle/>
           <a:p>
             <a:pPr algn="ctr"/>
@@ -13591,7 +13620,7 @@
           <a:noFill/>
         </p:spPr>
         <p:txBody>
-          <a:bodyPr wrap="square" anchor="ctr" lIns="18288" rIns="18288" tIns="18288" bIns="18288">
+          <a:bodyPr wrap="square" lIns="18288" tIns="18288" rIns="18288" bIns="18288" anchor="ctr">
             <a:spAutoFit/>
           </a:bodyPr>
           <a:lstStyle/>
@@ -13660,7 +13689,7 @@
           <a:noFill/>
         </p:spPr>
         <p:txBody>
-          <a:bodyPr wrap="square" anchor="t" lIns="18288" rIns="18288" tIns="18288" bIns="18288">
+          <a:bodyPr wrap="square" lIns="18288" tIns="18288" rIns="18288" bIns="18288" anchor="t">
             <a:spAutoFit/>
           </a:bodyPr>
           <a:lstStyle/>
@@ -13711,7 +13740,7 @@
           <a:noFill/>
         </p:spPr>
         <p:txBody>
-          <a:bodyPr wrap="square" anchor="t" lIns="18288" rIns="18288" tIns="18288" bIns="18288">
+          <a:bodyPr wrap="square" lIns="18288" tIns="18288" rIns="18288" bIns="18288" anchor="t">
             <a:spAutoFit/>
           </a:bodyPr>
           <a:lstStyle/>
@@ -13788,7 +13817,7 @@
           <a:noFill/>
         </p:spPr>
         <p:txBody>
-          <a:bodyPr wrap="square" anchor="t" lIns="18288" rIns="18288" tIns="18288" bIns="18288">
+          <a:bodyPr wrap="square" lIns="18288" tIns="18288" rIns="18288" bIns="18288" anchor="t">
             <a:spAutoFit/>
           </a:bodyPr>
           <a:lstStyle/>
@@ -13884,7 +13913,7 @@
           <a:noFill/>
         </p:spPr>
         <p:txBody>
-          <a:bodyPr wrap="square" anchor="t" lIns="18288" rIns="18288" tIns="18288" bIns="18288">
+          <a:bodyPr wrap="square" lIns="18288" tIns="18288" rIns="18288" bIns="18288" anchor="t">
             <a:spAutoFit/>
           </a:bodyPr>
           <a:lstStyle/>
@@ -13980,7 +14009,7 @@
           <a:noFill/>
         </p:spPr>
         <p:txBody>
-          <a:bodyPr wrap="square" anchor="t" lIns="18288" rIns="18288" tIns="18288" bIns="18288">
+          <a:bodyPr wrap="square" lIns="18288" tIns="18288" rIns="18288" bIns="18288" anchor="t">
             <a:spAutoFit/>
           </a:bodyPr>
           <a:lstStyle/>
@@ -14076,7 +14105,7 @@
           <a:noFill/>
         </p:spPr>
         <p:txBody>
-          <a:bodyPr wrap="square" anchor="t" lIns="18288" rIns="18288" tIns="18288" bIns="18288">
+          <a:bodyPr wrap="square" lIns="18288" tIns="18288" rIns="18288" bIns="18288" anchor="t">
             <a:spAutoFit/>
           </a:bodyPr>
           <a:lstStyle/>
@@ -14137,7 +14166,7 @@
           <a:noFill/>
         </p:spPr>
         <p:txBody>
-          <a:bodyPr wrap="square" anchor="t" lIns="18288" rIns="18288" tIns="18288" bIns="18288">
+          <a:bodyPr wrap="square" lIns="18288" tIns="18288" rIns="18288" bIns="18288" anchor="t">
             <a:spAutoFit/>
           </a:bodyPr>
           <a:lstStyle/>
@@ -14179,7 +14208,7 @@
           <a:noFill/>
         </p:spPr>
         <p:txBody>
-          <a:bodyPr wrap="square" anchor="ctr" lIns="18288" rIns="18288" tIns="18288" bIns="18288">
+          <a:bodyPr wrap="square" lIns="18288" tIns="18288" rIns="18288" bIns="18288" anchor="ctr">
             <a:spAutoFit/>
           </a:bodyPr>
           <a:lstStyle/>
@@ -14221,7 +14250,7 @@
           <a:noFill/>
         </p:spPr>
         <p:txBody>
-          <a:bodyPr wrap="square" anchor="ctr" lIns="18288" rIns="18288" tIns="18288" bIns="18288">
+          <a:bodyPr wrap="square" lIns="18288" tIns="18288" rIns="18288" bIns="18288" anchor="ctr">
             <a:spAutoFit/>
           </a:bodyPr>
           <a:lstStyle/>
@@ -14263,7 +14292,7 @@
           <a:noFill/>
         </p:spPr>
         <p:txBody>
-          <a:bodyPr wrap="square" anchor="ctr" lIns="18288" rIns="18288" tIns="18288" bIns="18288">
+          <a:bodyPr wrap="square" lIns="18288" tIns="18288" rIns="18288" bIns="18288" anchor="ctr">
             <a:spAutoFit/>
           </a:bodyPr>
           <a:lstStyle/>
@@ -14305,7 +14334,7 @@
           <a:noFill/>
         </p:spPr>
         <p:txBody>
-          <a:bodyPr wrap="square" anchor="ctr" lIns="18288" rIns="18288" tIns="18288" bIns="18288">
+          <a:bodyPr wrap="square" lIns="18288" tIns="18288" rIns="18288" bIns="18288" anchor="ctr">
             <a:spAutoFit/>
           </a:bodyPr>
           <a:lstStyle/>
@@ -14347,7 +14376,7 @@
           <a:noFill/>
         </p:spPr>
         <p:txBody>
-          <a:bodyPr wrap="square" anchor="ctr" lIns="18288" rIns="18288" tIns="18288" bIns="18288">
+          <a:bodyPr wrap="square" lIns="18288" tIns="18288" rIns="18288" bIns="18288" anchor="ctr">
             <a:spAutoFit/>
           </a:bodyPr>
           <a:lstStyle/>
@@ -14389,7 +14418,7 @@
           <a:noFill/>
         </p:spPr>
         <p:txBody>
-          <a:bodyPr wrap="square" anchor="ctr" lIns="18288" rIns="18288" tIns="18288" bIns="18288">
+          <a:bodyPr wrap="square" lIns="18288" tIns="18288" rIns="18288" bIns="18288" anchor="ctr">
             <a:spAutoFit/>
           </a:bodyPr>
           <a:lstStyle/>
@@ -14431,7 +14460,7 @@
           <a:noFill/>
         </p:spPr>
         <p:txBody>
-          <a:bodyPr wrap="square" anchor="ctr" lIns="18288" rIns="18288" tIns="18288" bIns="18288">
+          <a:bodyPr wrap="square" lIns="18288" tIns="18288" rIns="18288" bIns="18288" anchor="ctr">
             <a:spAutoFit/>
           </a:bodyPr>
           <a:lstStyle/>
@@ -14473,7 +14502,7 @@
           <a:noFill/>
         </p:spPr>
         <p:txBody>
-          <a:bodyPr wrap="square" anchor="ctr" lIns="18288" rIns="18288" tIns="18288" bIns="18288">
+          <a:bodyPr wrap="square" lIns="18288" tIns="18288" rIns="18288" bIns="18288" anchor="ctr">
             <a:spAutoFit/>
           </a:bodyPr>
           <a:lstStyle/>
@@ -14515,7 +14544,7 @@
           <a:noFill/>
         </p:spPr>
         <p:txBody>
-          <a:bodyPr wrap="square" anchor="ctr" lIns="18288" rIns="18288" tIns="18288" bIns="18288">
+          <a:bodyPr wrap="square" lIns="18288" tIns="18288" rIns="18288" bIns="18288" anchor="ctr">
             <a:spAutoFit/>
           </a:bodyPr>
           <a:lstStyle/>
@@ -14557,7 +14586,7 @@
           <a:noFill/>
         </p:spPr>
         <p:txBody>
-          <a:bodyPr wrap="square" anchor="ctr" lIns="18288" rIns="18288" tIns="18288" bIns="18288">
+          <a:bodyPr wrap="square" lIns="18288" tIns="18288" rIns="18288" bIns="18288" anchor="ctr">
             <a:spAutoFit/>
           </a:bodyPr>
           <a:lstStyle/>
@@ -14599,7 +14628,7 @@
           <a:noFill/>
         </p:spPr>
         <p:txBody>
-          <a:bodyPr wrap="square" anchor="ctr" lIns="18288" rIns="18288" tIns="18288" bIns="18288">
+          <a:bodyPr wrap="square" lIns="18288" tIns="18288" rIns="18288" bIns="18288" anchor="ctr">
             <a:spAutoFit/>
           </a:bodyPr>
           <a:lstStyle/>
@@ -14641,7 +14670,7 @@
           <a:noFill/>
         </p:spPr>
         <p:txBody>
-          <a:bodyPr wrap="square" anchor="ctr" lIns="18288" rIns="18288" tIns="18288" bIns="18288">
+          <a:bodyPr wrap="square" lIns="18288" tIns="18288" rIns="18288" bIns="18288" anchor="ctr">
             <a:spAutoFit/>
           </a:bodyPr>
           <a:lstStyle/>
@@ -14683,7 +14712,7 @@
           <a:noFill/>
         </p:spPr>
         <p:txBody>
-          <a:bodyPr wrap="square" anchor="t" lIns="18288" rIns="18288" tIns="18288" bIns="18288">
+          <a:bodyPr wrap="square" lIns="18288" tIns="18288" rIns="18288" bIns="18288" anchor="t">
             <a:spAutoFit/>
           </a:bodyPr>
           <a:lstStyle/>
@@ -14749,7 +14778,7 @@
           </a:fontRef>
         </p:style>
         <p:txBody>
-          <a:bodyPr rtlCol="0" anchor="ctr" lIns="54864" rIns="54864" tIns="0" bIns="0" wrap="square"/>
+          <a:bodyPr wrap="square" lIns="54864" tIns="0" rIns="54864" bIns="0" rtlCol="0" anchor="ctr"/>
           <a:lstStyle/>
           <a:p>
             <a:pPr algn="ctr"/>
@@ -14842,7 +14871,7 @@
           </a:fontRef>
         </p:style>
         <p:txBody>
-          <a:bodyPr rtlCol="0" anchor="ctr" lIns="54864" rIns="54864" tIns="0" bIns="0" wrap="square"/>
+          <a:bodyPr wrap="square" lIns="54864" tIns="0" rIns="54864" bIns="0" rtlCol="0" anchor="ctr"/>
           <a:lstStyle/>
           <a:p>
             <a:pPr algn="ctr"/>
@@ -14935,7 +14964,7 @@
           </a:fontRef>
         </p:style>
         <p:txBody>
-          <a:bodyPr rtlCol="0" anchor="ctr" lIns="54864" rIns="54864" tIns="0" bIns="0" wrap="square"/>
+          <a:bodyPr wrap="square" lIns="54864" tIns="0" rIns="54864" bIns="0" rtlCol="0" anchor="ctr"/>
           <a:lstStyle/>
           <a:p>
             <a:pPr algn="ctr"/>
@@ -15028,7 +15057,7 @@
           </a:fontRef>
         </p:style>
         <p:txBody>
-          <a:bodyPr rtlCol="0" anchor="ctr" lIns="54864" rIns="54864" tIns="0" bIns="0" wrap="square"/>
+          <a:bodyPr wrap="square" lIns="54864" tIns="0" rIns="54864" bIns="0" rtlCol="0" anchor="ctr"/>
           <a:lstStyle/>
           <a:p>
             <a:pPr algn="ctr"/>
@@ -15061,7 +15090,7 @@
           <a:noFill/>
         </p:spPr>
         <p:txBody>
-          <a:bodyPr wrap="square" anchor="t" lIns="18288" rIns="18288" tIns="18288" bIns="18288">
+          <a:bodyPr wrap="square" lIns="18288" tIns="18288" rIns="18288" bIns="18288" anchor="t">
             <a:spAutoFit/>
           </a:bodyPr>
           <a:lstStyle/>
@@ -15129,7 +15158,9 @@
         <p:txBody>
           <a:bodyPr rtlCol="0" anchor="ctr"/>
           <a:lstStyle/>
-          <a:p/>
+          <a:p>
+            <a:endParaRPr/>
+          </a:p>
         </p:txBody>
       </p:sp>
       <p:pic>
@@ -15195,7 +15226,7 @@
           </a:fontRef>
         </p:style>
         <p:txBody>
-          <a:bodyPr rtlCol="0" anchor="ctr" lIns="54864" rIns="54864" tIns="0" bIns="0" wrap="square"/>
+          <a:bodyPr wrap="square" lIns="54864" tIns="0" rIns="54864" bIns="0" rtlCol="0" anchor="ctr"/>
           <a:lstStyle/>
           <a:p>
             <a:pPr algn="ctr"/>
@@ -15254,7 +15285,9 @@
         <p:txBody>
           <a:bodyPr rtlCol="0" anchor="ctr"/>
           <a:lstStyle/>
-          <a:p/>
+          <a:p>
+            <a:endParaRPr/>
+          </a:p>
         </p:txBody>
       </p:sp>
       <p:pic>
@@ -15320,7 +15353,7 @@
           </a:fontRef>
         </p:style>
         <p:txBody>
-          <a:bodyPr rtlCol="0" anchor="ctr" lIns="54864" rIns="54864" tIns="0" bIns="0" wrap="square"/>
+          <a:bodyPr wrap="square" lIns="54864" tIns="0" rIns="54864" bIns="0" rtlCol="0" anchor="ctr"/>
           <a:lstStyle/>
           <a:p>
             <a:pPr algn="ctr"/>
@@ -15353,7 +15386,7 @@
           <a:noFill/>
         </p:spPr>
         <p:txBody>
-          <a:bodyPr wrap="square" anchor="t" lIns="18288" rIns="18288" tIns="18288" bIns="18288">
+          <a:bodyPr wrap="square" lIns="18288" tIns="18288" rIns="18288" bIns="18288" anchor="t">
             <a:spAutoFit/>
           </a:bodyPr>
           <a:lstStyle/>
@@ -15676,7 +15709,7 @@
                 <a16:creationId xmlns:a16="http://schemas.microsoft.com/office/drawing/2014/main" id="{5DBCE864-823D-4A13-9607-5DA1F0ED5FB8}"/>
               </a:ext>
               <a:ext uri="{C183D7F6-B498-43B3-948B-1728B52AA6E4}">
-                <adec:decorative xmlns:adec="http://schemas.microsoft.com/office/drawing/2017/decorative" xmlns="" val="0"/>
+                <adec:decorative xmlns:adec="http://schemas.microsoft.com/office/drawing/2017/decorative" val="0"/>
               </a:ext>
             </a:extLst>
           </p:cNvPr>
@@ -15707,7 +15740,7 @@
           </a:fontRef>
         </p:style>
         <p:txBody>
-          <a:bodyPr rtlCol="0" anchor="ctr" wrap="square" lIns="36576" rIns="36576"/>
+          <a:bodyPr wrap="square" lIns="36576" rIns="36576" rtlCol="0" anchor="ctr"/>
           <a:lstStyle/>
           <a:p>
             <a:pPr algn="ctr"/>
@@ -15771,7 +15804,7 @@
           <a:noFill/>
         </p:spPr>
         <p:txBody>
-          <a:bodyPr wrap="square" anchor="t" lIns="18288" rIns="18288" tIns="18288" bIns="18288">
+          <a:bodyPr wrap="square" lIns="18288" tIns="18288" rIns="18288" bIns="18288" anchor="t">
             <a:spAutoFit/>
           </a:bodyPr>
           <a:lstStyle/>
@@ -15813,7 +15846,7 @@
           <a:noFill/>
         </p:spPr>
         <p:txBody>
-          <a:bodyPr wrap="square" anchor="t" lIns="18288" rIns="18288" tIns="18288" bIns="18288">
+          <a:bodyPr wrap="square" lIns="18288" tIns="18288" rIns="18288" bIns="18288" anchor="t">
             <a:spAutoFit/>
           </a:bodyPr>
           <a:lstStyle/>
@@ -15874,7 +15907,7 @@
           <a:noFill/>
         </p:spPr>
         <p:txBody>
-          <a:bodyPr wrap="square" anchor="t" lIns="18288" rIns="18288" tIns="18288" bIns="18288">
+          <a:bodyPr wrap="square" lIns="18288" tIns="18288" rIns="18288" bIns="18288" anchor="t">
             <a:spAutoFit/>
           </a:bodyPr>
           <a:lstStyle/>
@@ -15935,7 +15968,7 @@
           <a:noFill/>
         </p:spPr>
         <p:txBody>
-          <a:bodyPr wrap="square" anchor="t" lIns="18288" rIns="18288" tIns="18288" bIns="18288">
+          <a:bodyPr wrap="square" lIns="18288" tIns="18288" rIns="18288" bIns="18288" anchor="t">
             <a:spAutoFit/>
           </a:bodyPr>
           <a:lstStyle/>
@@ -15996,7 +16029,7 @@
           <a:noFill/>
         </p:spPr>
         <p:txBody>
-          <a:bodyPr wrap="square" anchor="t" lIns="18288" rIns="18288" tIns="18288" bIns="18288">
+          <a:bodyPr wrap="square" lIns="18288" tIns="18288" rIns="18288" bIns="18288" anchor="t">
             <a:spAutoFit/>
           </a:bodyPr>
           <a:lstStyle/>
@@ -16057,7 +16090,7 @@
           <a:noFill/>
         </p:spPr>
         <p:txBody>
-          <a:bodyPr wrap="square" anchor="t" lIns="18288" rIns="18288" tIns="18288" bIns="18288">
+          <a:bodyPr wrap="square" lIns="18288" tIns="18288" rIns="18288" bIns="18288" anchor="t">
             <a:spAutoFit/>
           </a:bodyPr>
           <a:lstStyle/>
@@ -16118,7 +16151,7 @@
           <a:noFill/>
         </p:spPr>
         <p:txBody>
-          <a:bodyPr wrap="square" anchor="t" lIns="18288" rIns="18288" tIns="18288" bIns="18288">
+          <a:bodyPr wrap="square" lIns="18288" tIns="18288" rIns="18288" bIns="18288" anchor="t">
             <a:spAutoFit/>
           </a:bodyPr>
           <a:lstStyle/>
@@ -16179,7 +16212,7 @@
           <a:noFill/>
         </p:spPr>
         <p:txBody>
-          <a:bodyPr wrap="square" anchor="t" lIns="18288" rIns="18288" tIns="18288" bIns="18288">
+          <a:bodyPr wrap="square" lIns="18288" tIns="18288" rIns="18288" bIns="18288" anchor="t">
             <a:spAutoFit/>
           </a:bodyPr>
           <a:lstStyle/>
@@ -16275,7 +16308,7 @@
           <a:noFill/>
         </p:spPr>
         <p:txBody>
-          <a:bodyPr wrap="square" anchor="t" lIns="18288" rIns="18288" tIns="18288" bIns="18288">
+          <a:bodyPr wrap="square" lIns="18288" tIns="18288" rIns="18288" bIns="18288" anchor="t">
             <a:spAutoFit/>
           </a:bodyPr>
           <a:lstStyle/>
@@ -16317,7 +16350,7 @@
           <a:noFill/>
         </p:spPr>
         <p:txBody>
-          <a:bodyPr wrap="square" anchor="ctr" lIns="18288" rIns="18288" tIns="18288" bIns="18288">
+          <a:bodyPr wrap="square" lIns="18288" tIns="18288" rIns="18288" bIns="18288" anchor="ctr">
             <a:spAutoFit/>
           </a:bodyPr>
           <a:lstStyle/>
@@ -16359,7 +16392,7 @@
           <a:noFill/>
         </p:spPr>
         <p:txBody>
-          <a:bodyPr wrap="square" anchor="ctr" lIns="18288" rIns="18288" tIns="18288" bIns="18288">
+          <a:bodyPr wrap="square" lIns="18288" tIns="18288" rIns="18288" bIns="18288" anchor="ctr">
             <a:spAutoFit/>
           </a:bodyPr>
           <a:lstStyle/>
@@ -16420,7 +16453,7 @@
           <a:noFill/>
         </p:spPr>
         <p:txBody>
-          <a:bodyPr wrap="square" anchor="ctr" lIns="18288" rIns="18288" tIns="18288" bIns="18288">
+          <a:bodyPr wrap="square" lIns="18288" tIns="18288" rIns="18288" bIns="18288" anchor="ctr">
             <a:spAutoFit/>
           </a:bodyPr>
           <a:lstStyle/>
@@ -16462,7 +16495,7 @@
           <a:noFill/>
         </p:spPr>
         <p:txBody>
-          <a:bodyPr wrap="square" anchor="ctr" lIns="18288" rIns="18288" tIns="18288" bIns="18288">
+          <a:bodyPr wrap="square" lIns="18288" tIns="18288" rIns="18288" bIns="18288" anchor="ctr">
             <a:spAutoFit/>
           </a:bodyPr>
           <a:lstStyle/>
@@ -16545,7 +16578,7 @@
           </a:fontRef>
         </p:style>
         <p:txBody>
-          <a:bodyPr rtlCol="0" anchor="ctr" lIns="54864" rIns="54864" tIns="0" bIns="0" wrap="square"/>
+          <a:bodyPr wrap="square" lIns="54864" tIns="0" rIns="54864" bIns="0" rtlCol="0" anchor="ctr"/>
           <a:lstStyle/>
           <a:p>
             <a:pPr algn="ctr"/>
@@ -16578,7 +16611,7 @@
           <a:noFill/>
         </p:spPr>
         <p:txBody>
-          <a:bodyPr wrap="square" anchor="ctr" lIns="18288" rIns="18288" tIns="18288" bIns="18288">
+          <a:bodyPr wrap="square" lIns="18288" tIns="18288" rIns="18288" bIns="18288" anchor="ctr">
             <a:spAutoFit/>
           </a:bodyPr>
           <a:lstStyle/>
@@ -16644,7 +16677,7 @@
           </a:fontRef>
         </p:style>
         <p:txBody>
-          <a:bodyPr rtlCol="0" anchor="ctr" lIns="54864" rIns="54864" tIns="0" bIns="0" wrap="square"/>
+          <a:bodyPr wrap="square" lIns="54864" tIns="0" rIns="54864" bIns="0" rtlCol="0" anchor="ctr"/>
           <a:lstStyle/>
           <a:p>
             <a:pPr algn="ctr"/>
@@ -16737,7 +16770,7 @@
           </a:fontRef>
         </p:style>
         <p:txBody>
-          <a:bodyPr rtlCol="0" anchor="ctr" lIns="54864" rIns="54864" tIns="0" bIns="0" wrap="square"/>
+          <a:bodyPr wrap="square" lIns="54864" tIns="0" rIns="54864" bIns="0" rtlCol="0" anchor="ctr"/>
           <a:lstStyle/>
           <a:p>
             <a:pPr algn="ctr"/>
@@ -16830,7 +16863,7 @@
           </a:fontRef>
         </p:style>
         <p:txBody>
-          <a:bodyPr rtlCol="0" anchor="ctr" lIns="54864" rIns="54864" tIns="0" bIns="0" wrap="square"/>
+          <a:bodyPr wrap="square" lIns="54864" tIns="0" rIns="54864" bIns="0" rtlCol="0" anchor="ctr"/>
           <a:lstStyle/>
           <a:p>
             <a:pPr algn="ctr"/>
@@ -16923,7 +16956,7 @@
           </a:fontRef>
         </p:style>
         <p:txBody>
-          <a:bodyPr rtlCol="0" anchor="ctr" lIns="54864" rIns="54864" tIns="0" bIns="0" wrap="square"/>
+          <a:bodyPr wrap="square" lIns="54864" tIns="0" rIns="54864" bIns="0" rtlCol="0" anchor="ctr"/>
           <a:lstStyle/>
           <a:p>
             <a:pPr algn="ctr"/>
@@ -17016,7 +17049,7 @@
           </a:fontRef>
         </p:style>
         <p:txBody>
-          <a:bodyPr rtlCol="0" anchor="ctr" lIns="54864" rIns="54864" tIns="0" bIns="0" wrap="square"/>
+          <a:bodyPr wrap="square" lIns="54864" tIns="0" rIns="54864" bIns="0" rtlCol="0" anchor="ctr"/>
           <a:lstStyle/>
           <a:p>
             <a:pPr algn="ctr"/>
@@ -17049,7 +17082,7 @@
           <a:noFill/>
         </p:spPr>
         <p:txBody>
-          <a:bodyPr wrap="square" anchor="t" lIns="18288" rIns="18288" tIns="18288" bIns="18288">
+          <a:bodyPr wrap="square" lIns="18288" tIns="18288" rIns="18288" bIns="18288" anchor="t">
             <a:spAutoFit/>
           </a:bodyPr>
           <a:lstStyle/>
@@ -17100,7 +17133,7 @@
           <a:noFill/>
         </p:spPr>
         <p:txBody>
-          <a:bodyPr wrap="square" anchor="t" lIns="18288" rIns="18288" tIns="18288" bIns="18288">
+          <a:bodyPr wrap="square" lIns="18288" tIns="18288" rIns="18288" bIns="18288" anchor="t">
             <a:spAutoFit/>
           </a:bodyPr>
           <a:lstStyle/>
@@ -17177,7 +17210,7 @@
           <a:noFill/>
         </p:spPr>
         <p:txBody>
-          <a:bodyPr wrap="square" anchor="t" lIns="18288" rIns="18288" tIns="18288" bIns="18288">
+          <a:bodyPr wrap="square" lIns="18288" tIns="18288" rIns="18288" bIns="18288" anchor="t">
             <a:spAutoFit/>
           </a:bodyPr>
           <a:lstStyle/>
@@ -17219,7 +17252,7 @@
           <a:noFill/>
         </p:spPr>
         <p:txBody>
-          <a:bodyPr wrap="square" anchor="t" lIns="18288" rIns="18288" tIns="18288" bIns="18288">
+          <a:bodyPr wrap="square" lIns="18288" tIns="18288" rIns="18288" bIns="18288" anchor="t">
             <a:spAutoFit/>
           </a:bodyPr>
           <a:lstStyle/>
